--- a/day2-deck/decks/Warranty Audits - Draft.pptx
+++ b/day2-deck/decks/Warranty Audits - Draft.pptx
@@ -7,9 +7,10 @@
   <p:sldIdLst>
     <p:sldId id="256" r:id="rId2"/>
     <p:sldId id="257" r:id="rId3"/>
+    <p:sldId id="258" r:id="rId4"/>
   </p:sldIdLst>
   <p:notesMasterIdLst>
-    <p:notesMasterId r:id="rId4"/>
+    <p:notesMasterId r:id="rId5"/>
   </p:notesMasterIdLst>
   <p:sldSz cx="12192000" cy="6858000"/>
   <p:notesSz cx="6858000" cy="12192000"/>
@@ -503,7 +504,8 @@
           <a:p>
             <a:r>
               <a:rPr lang="en-US" dirty="0"/>
-              <a:t>Source: Jan 2026 GM meeting (Day 1), slides 13-14: six warranty audits, primary causes and Warranty Compliance steps. Descriptions under each heading drafted for this deck; confirm against each OEM's warranty policy manual.DRAFT. Causes from Jan 2026 GM meeting slide 13. That slide named six stores and their debits; stores are left off here, as on Warranty Compliance. The store amounts on the Jan slide add to $414,000 (headline said $400,000), so the slide says 'over $400,000'.</a:t>
+              <a:t>Source: YTD RWR Financials 2026 (warranty rate submission vendor): YTD revenue secured from approved warranty labor and parts rate increases, as reported. 19 stores with approvals to date; stores not listed have none reported yet. Labor $1,661,368, parts $2,126,832. Vendor's Honda North total ($463,296) is $100 less than its labor + parts ($463,396), so the report's grand total ($3,788,100) is $100 less than labor + parts ($3,788,200). Slides use the vendor's totals as reported.Talk track: these approvals are new money on every warranty claim, and they are why warranty ELR is up. The factory notices a higher rate too: more money in means more scrutiny. Every claim debited in an audit gives part of it back.
+Vendor store names: Findlay Acura = ACURA; Findlay Audi Reno Tahoe = AUDI RENO; Findlay BGMC Prescott = GMC PRESCOTT; Findlay Chevrolet = CHEVY LV; Findlay Chrysler Post Falls = CDJR POST FALLS; Findlay Honda Flagstaff = HONDA FLAGSTAFF; Findlay Honda Henderson = HONDA HENDERSON; Findlay Honda North = HONDA NORTH; Findlay Honda Spokane = HONDA SPOKANE; Findlay Hyundai Prescott = HYUNDAI PRESCOTT; Findlay Kia St George = KIA ST GEORGE; Findlay Lexus Spokane = LEXUS; Findlay Lincoln = LINCOLN; Findlay Mazda = MAZDA; Findlay Nissan Henderson = NISSAN; Findlay Subaru Prescott = SUBARU PRESCOTT; Land Rover Henderson = LR HENDERSON; Land Rover Las Vegas = LR LV; Land Rover Reno = LR RENO.</a:t>
             </a:r>
             <a:endParaRPr lang="en-US" dirty="0"/>
           </a:p>
@@ -591,7 +593,7 @@
           <a:p>
             <a:r>
               <a:rPr lang="en-US" dirty="0"/>
-              <a:t>Source: Jan 2026 GM meeting (Day 1), slides 13-14: six warranty audits, primary causes and Warranty Compliance steps. Descriptions under each heading drafted for this deck; confirm against each OEM's warranty policy manual.DRAFT. Steps from Jan 2026 GM meeting slide 14 (Warranty Compliance); the GM responsibility line from slide 13.</a:t>
+              <a:t>Source: Jan 2026 GM meeting (Day 1), slides 13-14: six warranty audits, primary causes and Warranty Compliance steps. Descriptions under each heading drafted for this deck; confirm against each OEM's warranty policy manual.DRAFT. Causes from Jan 2026 GM meeting slide 13. That slide named six stores and their debits; stores are left off here, as on Warranty Compliance. The store amounts on the Jan slide add to $414,000 (headline said $400,000), so the slide says 'over $400,000'.</a:t>
             </a:r>
             <a:endParaRPr lang="en-US" dirty="0"/>
           </a:p>
@@ -615,6 +617,94 @@
             <a:fld id="{F7021451-1387-4CA6-816F-3879F97B5CBC}" type="slidenum">
               <a:rPr lang="en-US"/>
               <a:t>2</a:t>
+            </a:fld>
+            <a:endParaRPr lang="en-US"/>
+          </a:p>
+        </p:txBody>
+      </p:sp>
+    </p:spTree>
+    <p:extLst>
+      <p:ext uri="{BB962C8B-B14F-4D97-AF65-F5344CB8AC3E}">
+        <p14:creationId xmlns:p14="http://schemas.microsoft.com/office/powerpoint/2010/main" val="1024086991"/>
+      </p:ext>
+    </p:extLst>
+  </p:cSld>
+  <p:clrMapOvr>
+    <a:masterClrMapping/>
+  </p:clrMapOvr>
+</p:notes>
+</file>
+
+<file path=ppt/notesSlides/notesSlide3.xml><?xml version="1.0" encoding="utf-8"?>
+<p:notes xmlns:a="http://schemas.openxmlformats.org/drawingml/2006/main" xmlns:r="http://schemas.openxmlformats.org/officeDocument/2006/relationships" xmlns:p="http://schemas.openxmlformats.org/presentationml/2006/main">
+  <p:cSld>
+    <p:spTree>
+      <p:nvGrpSpPr>
+        <p:cNvPr id="1" name=""/>
+        <p:cNvGrpSpPr/>
+        <p:nvPr/>
+      </p:nvGrpSpPr>
+      <p:grpSpPr>
+        <a:xfrm>
+          <a:off x="0" y="0"/>
+          <a:ext cx="0" cy="0"/>
+          <a:chOff x="0" y="0"/>
+          <a:chExt cx="0" cy="0"/>
+        </a:xfrm>
+      </p:grpSpPr>
+      <p:sp>
+        <p:nvSpPr>
+          <p:cNvPr id="2" name="Slide Image Placeholder 1"/>
+          <p:cNvSpPr>
+            <a:spLocks noGrp="1" noRot="1" noChangeAspect="1"/>
+          </p:cNvSpPr>
+          <p:nvPr>
+            <p:ph type="sldImg"/>
+          </p:nvPr>
+        </p:nvSpPr>
+        <p:spPr/>
+      </p:sp>
+      <p:sp>
+        <p:nvSpPr>
+          <p:cNvPr id="3" name="Notes Placeholder 2"/>
+          <p:cNvSpPr>
+            <a:spLocks noGrp="1"/>
+          </p:cNvSpPr>
+          <p:nvPr>
+            <p:ph type="body" idx="1"/>
+          </p:nvPr>
+        </p:nvSpPr>
+        <p:spPr/>
+        <p:txBody>
+          <a:bodyPr/>
+          <a:lstStyle/>
+          <a:p>
+            <a:r>
+              <a:rPr lang="en-US" dirty="0"/>
+              <a:t>Source: Jan 2026 GM meeting (Day 1), slides 13-14: six warranty audits, primary causes and Warranty Compliance steps. Descriptions under each heading drafted for this deck; confirm against each OEM's warranty policy manual.DRAFT. Steps from Jan 2026 GM meeting slide 14 (Warranty Compliance); the GM responsibility line from slide 13.</a:t>
+            </a:r>
+            <a:endParaRPr lang="en-US" dirty="0"/>
+          </a:p>
+        </p:txBody>
+      </p:sp>
+      <p:sp>
+        <p:nvSpPr>
+          <p:cNvPr id="4" name="Slide Number Placeholder 3"/>
+          <p:cNvSpPr>
+            <a:spLocks noGrp="1"/>
+          </p:cNvSpPr>
+          <p:nvPr>
+            <p:ph type="sldNum" sz="quarter" idx="10"/>
+          </p:nvPr>
+        </p:nvSpPr>
+        <p:spPr/>
+        <p:txBody>
+          <a:bodyPr/>
+          <a:lstStyle/>
+          <a:p>
+            <a:fld id="{F7021451-1387-4CA6-816F-3879F97B5CBC}" type="slidenum">
+              <a:rPr lang="en-US"/>
+              <a:t>3</a:t>
             </a:fld>
             <a:endParaRPr lang="en-US"/>
           </a:p>
@@ -1056,7 +1146,7 @@
                 <a:ea typeface="Inter" pitchFamily="34" charset="-122"/>
                 <a:cs typeface="Inter" pitchFamily="34" charset="-120"/>
               </a:rPr>
-              <a:t>What Gets Claims Debited</a:t>
+              <a:t>Warranty Rate Increases</a:t>
             </a:r>
             <a:endParaRPr lang="en-US" sz="2800" dirty="0"/>
           </a:p>
@@ -1090,8 +1180,242 @@
         </p:nvSpPr>
         <p:spPr>
           <a:xfrm>
-            <a:off x="685800" y="1344168"/>
-            <a:ext cx="10817352" cy="292608"/>
+            <a:off x="3273552" y="1316736"/>
+            <a:ext cx="914400" cy="329184"/>
+          </a:xfrm>
+          <a:prstGeom prst="rect">
+            <a:avLst/>
+          </a:prstGeom>
+          <a:noFill/>
+          <a:ln/>
+        </p:spPr>
+        <p:txBody>
+          <a:bodyPr wrap="square" lIns="0" tIns="0" rIns="0" bIns="0" rtlCol="0" anchor="ctr"/>
+          <a:lstStyle/>
+          <a:p>
+            <a:pPr algn="r" indent="0" marL="0">
+              <a:buNone/>
+            </a:pPr>
+            <a:r>
+              <a:rPr lang="en-US" sz="1400" b="1" dirty="0">
+                <a:solidFill>
+                  <a:srgbClr val="595959"/>
+                </a:solidFill>
+                <a:latin typeface="Inter" pitchFamily="34" charset="0"/>
+                <a:ea typeface="Inter" pitchFamily="34" charset="-122"/>
+                <a:cs typeface="Inter" pitchFamily="34" charset="-120"/>
+              </a:rPr>
+              <a:t>Secured</a:t>
+            </a:r>
+            <a:endParaRPr lang="en-US" sz="1400" dirty="0"/>
+          </a:p>
+        </p:txBody>
+      </p:sp>
+      <p:sp>
+        <p:nvSpPr>
+          <p:cNvPr id="7" name="Text 5"/>
+          <p:cNvSpPr txBox="1"/>
+          <p:nvPr/>
+        </p:nvSpPr>
+        <p:spPr>
+          <a:xfrm>
+            <a:off x="4187952" y="1316736"/>
+            <a:ext cx="841248" cy="329184"/>
+          </a:xfrm>
+          <a:prstGeom prst="rect">
+            <a:avLst/>
+          </a:prstGeom>
+          <a:noFill/>
+          <a:ln/>
+        </p:spPr>
+        <p:txBody>
+          <a:bodyPr wrap="square" lIns="0" tIns="0" rIns="0" bIns="0" rtlCol="0" anchor="ctr"/>
+          <a:lstStyle/>
+          <a:p>
+            <a:pPr algn="r" indent="0" marL="0">
+              <a:buNone/>
+            </a:pPr>
+            <a:r>
+              <a:rPr lang="en-US" sz="1400" b="1" dirty="0">
+                <a:solidFill>
+                  <a:srgbClr val="595959"/>
+                </a:solidFill>
+                <a:latin typeface="Inter" pitchFamily="34" charset="0"/>
+                <a:ea typeface="Inter" pitchFamily="34" charset="-122"/>
+                <a:cs typeface="Inter" pitchFamily="34" charset="-120"/>
+              </a:rPr>
+              <a:t>Labor</a:t>
+            </a:r>
+            <a:endParaRPr lang="en-US" sz="1400" dirty="0"/>
+          </a:p>
+        </p:txBody>
+      </p:sp>
+      <p:sp>
+        <p:nvSpPr>
+          <p:cNvPr id="8" name="Text 6"/>
+          <p:cNvSpPr txBox="1"/>
+          <p:nvPr/>
+        </p:nvSpPr>
+        <p:spPr>
+          <a:xfrm>
+            <a:off x="5029200" y="1316736"/>
+            <a:ext cx="841248" cy="329184"/>
+          </a:xfrm>
+          <a:prstGeom prst="rect">
+            <a:avLst/>
+          </a:prstGeom>
+          <a:noFill/>
+          <a:ln/>
+        </p:spPr>
+        <p:txBody>
+          <a:bodyPr wrap="square" lIns="0" tIns="0" rIns="0" bIns="0" rtlCol="0" anchor="ctr"/>
+          <a:lstStyle/>
+          <a:p>
+            <a:pPr algn="r" indent="0" marL="0">
+              <a:buNone/>
+            </a:pPr>
+            <a:r>
+              <a:rPr lang="en-US" sz="1400" b="1" dirty="0">
+                <a:solidFill>
+                  <a:srgbClr val="595959"/>
+                </a:solidFill>
+                <a:latin typeface="Inter" pitchFamily="34" charset="0"/>
+                <a:ea typeface="Inter" pitchFamily="34" charset="-122"/>
+                <a:cs typeface="Inter" pitchFamily="34" charset="-120"/>
+              </a:rPr>
+              <a:t>Parts</a:t>
+            </a:r>
+            <a:endParaRPr lang="en-US" sz="1400" dirty="0"/>
+          </a:p>
+        </p:txBody>
+      </p:sp>
+      <p:sp>
+        <p:nvSpPr>
+          <p:cNvPr id="9" name="Text 7"/>
+          <p:cNvSpPr txBox="1"/>
+          <p:nvPr/>
+        </p:nvSpPr>
+        <p:spPr>
+          <a:xfrm>
+            <a:off x="8823960" y="1316736"/>
+            <a:ext cx="914400" cy="329184"/>
+          </a:xfrm>
+          <a:prstGeom prst="rect">
+            <a:avLst/>
+          </a:prstGeom>
+          <a:noFill/>
+          <a:ln/>
+        </p:spPr>
+        <p:txBody>
+          <a:bodyPr wrap="square" lIns="0" tIns="0" rIns="0" bIns="0" rtlCol="0" anchor="ctr"/>
+          <a:lstStyle/>
+          <a:p>
+            <a:pPr algn="r" indent="0" marL="0">
+              <a:buNone/>
+            </a:pPr>
+            <a:r>
+              <a:rPr lang="en-US" sz="1400" b="1" dirty="0">
+                <a:solidFill>
+                  <a:srgbClr val="595959"/>
+                </a:solidFill>
+                <a:latin typeface="Inter" pitchFamily="34" charset="0"/>
+                <a:ea typeface="Inter" pitchFamily="34" charset="-122"/>
+                <a:cs typeface="Inter" pitchFamily="34" charset="-120"/>
+              </a:rPr>
+              <a:t>Secured</a:t>
+            </a:r>
+            <a:endParaRPr lang="en-US" sz="1400" dirty="0"/>
+          </a:p>
+        </p:txBody>
+      </p:sp>
+      <p:sp>
+        <p:nvSpPr>
+          <p:cNvPr id="10" name="Text 8"/>
+          <p:cNvSpPr txBox="1"/>
+          <p:nvPr/>
+        </p:nvSpPr>
+        <p:spPr>
+          <a:xfrm>
+            <a:off x="9738360" y="1316736"/>
+            <a:ext cx="841248" cy="329184"/>
+          </a:xfrm>
+          <a:prstGeom prst="rect">
+            <a:avLst/>
+          </a:prstGeom>
+          <a:noFill/>
+          <a:ln/>
+        </p:spPr>
+        <p:txBody>
+          <a:bodyPr wrap="square" lIns="0" tIns="0" rIns="0" bIns="0" rtlCol="0" anchor="ctr"/>
+          <a:lstStyle/>
+          <a:p>
+            <a:pPr algn="r" indent="0" marL="0">
+              <a:buNone/>
+            </a:pPr>
+            <a:r>
+              <a:rPr lang="en-US" sz="1400" b="1" dirty="0">
+                <a:solidFill>
+                  <a:srgbClr val="595959"/>
+                </a:solidFill>
+                <a:latin typeface="Inter" pitchFamily="34" charset="0"/>
+                <a:ea typeface="Inter" pitchFamily="34" charset="-122"/>
+                <a:cs typeface="Inter" pitchFamily="34" charset="-120"/>
+              </a:rPr>
+              <a:t>Labor</a:t>
+            </a:r>
+            <a:endParaRPr lang="en-US" sz="1400" dirty="0"/>
+          </a:p>
+        </p:txBody>
+      </p:sp>
+      <p:sp>
+        <p:nvSpPr>
+          <p:cNvPr id="11" name="Text 9"/>
+          <p:cNvSpPr txBox="1"/>
+          <p:nvPr/>
+        </p:nvSpPr>
+        <p:spPr>
+          <a:xfrm>
+            <a:off x="10579608" y="1316736"/>
+            <a:ext cx="841248" cy="329184"/>
+          </a:xfrm>
+          <a:prstGeom prst="rect">
+            <a:avLst/>
+          </a:prstGeom>
+          <a:noFill/>
+          <a:ln/>
+        </p:spPr>
+        <p:txBody>
+          <a:bodyPr wrap="square" lIns="0" tIns="0" rIns="0" bIns="0" rtlCol="0" anchor="ctr"/>
+          <a:lstStyle/>
+          <a:p>
+            <a:pPr algn="r" indent="0" marL="0">
+              <a:buNone/>
+            </a:pPr>
+            <a:r>
+              <a:rPr lang="en-US" sz="1400" b="1" dirty="0">
+                <a:solidFill>
+                  <a:srgbClr val="595959"/>
+                </a:solidFill>
+                <a:latin typeface="Inter" pitchFamily="34" charset="0"/>
+                <a:ea typeface="Inter" pitchFamily="34" charset="-122"/>
+                <a:cs typeface="Inter" pitchFamily="34" charset="-120"/>
+              </a:rPr>
+              <a:t>Parts</a:t>
+            </a:r>
+            <a:endParaRPr lang="en-US" sz="1400" dirty="0"/>
+          </a:p>
+        </p:txBody>
+      </p:sp>
+      <p:sp>
+        <p:nvSpPr>
+          <p:cNvPr id="12" name="Text 10"/>
+          <p:cNvSpPr txBox="1"/>
+          <p:nvPr/>
+        </p:nvSpPr>
+        <p:spPr>
+          <a:xfrm>
+            <a:off x="658368" y="1700784"/>
+            <a:ext cx="1938528" cy="422453"/>
           </a:xfrm>
           <a:prstGeom prst="rect">
             <a:avLst/>
@@ -1107,7 +1431,7 @@
               <a:buNone/>
             </a:pPr>
             <a:r>
-              <a:rPr lang="en-US" sz="1500" dirty="0">
+              <a:rPr lang="en-US" sz="1300" dirty="0">
                 <a:solidFill>
                   <a:srgbClr val="1A1A1A"/>
                 </a:solidFill>
@@ -1115,169 +1439,11 @@
                 <a:ea typeface="Inter" pitchFamily="34" charset="-122"/>
                 <a:cs typeface="Inter" pitchFamily="34" charset="-120"/>
               </a:rPr>
-              <a:t>Primary causes in the six audits</a:t>
-            </a:r>
-            <a:endParaRPr lang="en-US" sz="1500" dirty="0"/>
-          </a:p>
-        </p:txBody>
-      </p:sp>
-      <p:sp>
-        <p:nvSpPr>
-          <p:cNvPr id="7" name="Shape 5"/>
-          <p:cNvSpPr/>
-          <p:nvPr/>
-        </p:nvSpPr>
-        <p:spPr>
-          <a:xfrm>
-            <a:off x="685800" y="1691640"/>
-            <a:ext cx="10817352" cy="10973"/>
-          </a:xfrm>
-          <a:prstGeom prst="rect">
-            <a:avLst/>
-          </a:prstGeom>
-          <a:solidFill>
-            <a:srgbClr val="1A1A1A"/>
-          </a:solidFill>
-          <a:ln/>
-        </p:spPr>
-      </p:sp>
-      <p:sp>
-        <p:nvSpPr>
-          <p:cNvPr id="8" name="Shape 6"/>
-          <p:cNvSpPr/>
-          <p:nvPr/>
-        </p:nvSpPr>
-        <p:spPr>
-          <a:xfrm>
-            <a:off x="685800" y="1865376"/>
-            <a:ext cx="3496056" cy="1888236"/>
-          </a:xfrm>
-          <a:prstGeom prst="rect">
-            <a:avLst/>
-          </a:prstGeom>
-          <a:solidFill>
-            <a:srgbClr val="F7F7F7"/>
-          </a:solidFill>
-          <a:ln/>
-        </p:spPr>
-      </p:sp>
-      <p:sp>
-        <p:nvSpPr>
-          <p:cNvPr id="9" name="Shape 7"/>
-          <p:cNvSpPr/>
-          <p:nvPr/>
-        </p:nvSpPr>
-        <p:spPr>
-          <a:xfrm>
-            <a:off x="685800" y="1865376"/>
-            <a:ext cx="54864" cy="1888236"/>
-          </a:xfrm>
-          <a:prstGeom prst="rect">
-            <a:avLst/>
-          </a:prstGeom>
-          <a:solidFill>
-            <a:srgbClr val="C2352F"/>
-          </a:solidFill>
-          <a:ln/>
-        </p:spPr>
-      </p:sp>
-      <p:sp>
-        <p:nvSpPr>
-          <p:cNvPr id="10" name="Text 8"/>
-          <p:cNvSpPr txBox="1"/>
-          <p:nvPr/>
-        </p:nvSpPr>
-        <p:spPr>
-          <a:xfrm>
-            <a:off x="886968" y="1993392"/>
-            <a:ext cx="3166872" cy="640080"/>
-          </a:xfrm>
-          <a:prstGeom prst="rect">
-            <a:avLst/>
-          </a:prstGeom>
-          <a:noFill/>
-          <a:ln/>
-        </p:spPr>
-        <p:txBody>
-          <a:bodyPr wrap="square" lIns="0" tIns="0" rIns="0" bIns="0" rtlCol="0" anchor="t"/>
-          <a:lstStyle/>
-          <a:p>
-            <a:pPr indent="0" marL="0">
-              <a:buNone/>
-            </a:pPr>
-            <a:r>
-              <a:rPr lang="en-US" sz="1800" b="1" dirty="0">
-                <a:solidFill>
-                  <a:srgbClr val="1A1A1A"/>
-                </a:solidFill>
-                <a:latin typeface="Inter" pitchFamily="34" charset="0"/>
-                <a:ea typeface="Inter" pitchFamily="34" charset="-122"/>
-                <a:cs typeface="Inter" pitchFamily="34" charset="-120"/>
-              </a:rPr>
-              <a:t>Written documentation</a:t>
-            </a:r>
-            <a:endParaRPr lang="en-US" sz="1800" dirty="0"/>
-          </a:p>
-        </p:txBody>
-      </p:sp>
-      <p:sp>
-        <p:nvSpPr>
-          <p:cNvPr id="11" name="Text 9"/>
-          <p:cNvSpPr txBox="1"/>
-          <p:nvPr/>
-        </p:nvSpPr>
-        <p:spPr>
-          <a:xfrm>
-            <a:off x="886968" y="2724912"/>
-            <a:ext cx="3166872" cy="918972"/>
-          </a:xfrm>
-          <a:prstGeom prst="rect">
-            <a:avLst/>
-          </a:prstGeom>
-          <a:noFill/>
-          <a:ln/>
-        </p:spPr>
-        <p:txBody>
-          <a:bodyPr wrap="square" lIns="0" tIns="0" rIns="0" bIns="0" rtlCol="0" anchor="t"/>
-          <a:lstStyle/>
-          <a:p>
-            <a:pPr indent="0" marL="0">
-              <a:buNone/>
-            </a:pPr>
-            <a:r>
-              <a:rPr lang="en-US" sz="1500" dirty="0">
-                <a:solidFill>
-                  <a:srgbClr val="595959"/>
-                </a:solidFill>
-                <a:latin typeface="Inter" pitchFamily="34" charset="0"/>
-                <a:ea typeface="Inter" pitchFamily="34" charset="-122"/>
-                <a:cs typeface="Inter" pitchFamily="34" charset="-120"/>
-              </a:rPr>
-              <a:t>Complaint, cause and correction written on the RO, and matching what was claimed</a:t>
-            </a:r>
-            <a:endParaRPr lang="en-US" sz="1500" dirty="0"/>
-          </a:p>
-        </p:txBody>
-      </p:sp>
-      <p:sp>
-        <p:nvSpPr>
-          <p:cNvPr id="12" name="Shape 10"/>
-          <p:cNvSpPr/>
-          <p:nvPr/>
-        </p:nvSpPr>
-        <p:spPr>
-          <a:xfrm>
-            <a:off x="4346448" y="1865376"/>
-            <a:ext cx="3496056" cy="1888236"/>
-          </a:xfrm>
-          <a:prstGeom prst="rect">
-            <a:avLst/>
-          </a:prstGeom>
-          <a:solidFill>
-            <a:srgbClr val="F7F7F7"/>
-          </a:solidFill>
-          <a:ln/>
-        </p:spPr>
+              <a:t>CHEVY LV</a:t>
+            </a:r>
+            <a:endParaRPr lang="en-US" sz="1300" dirty="0"/>
+          </a:p>
+        </p:txBody>
       </p:sp>
       <p:sp>
         <p:nvSpPr>
@@ -1287,14 +1453,14 @@
         </p:nvSpPr>
         <p:spPr>
           <a:xfrm>
-            <a:off x="4346448" y="1865376"/>
-            <a:ext cx="54864" cy="1888236"/>
-          </a:xfrm>
-          <a:prstGeom prst="rect">
-            <a:avLst/>
-          </a:prstGeom>
-          <a:solidFill>
-            <a:srgbClr val="C2352F"/>
+            <a:off x="2670048" y="1795836"/>
+            <a:ext cx="548640" cy="232349"/>
+          </a:xfrm>
+          <a:prstGeom prst="rect">
+            <a:avLst/>
+          </a:prstGeom>
+          <a:solidFill>
+            <a:srgbClr val="12A566"/>
           </a:solidFill>
           <a:ln/>
         </p:spPr>
@@ -1307,24 +1473,141 @@
         </p:nvSpPr>
         <p:spPr>
           <a:xfrm>
-            <a:off x="4547616" y="1993392"/>
-            <a:ext cx="3166872" cy="640080"/>
-          </a:xfrm>
-          <a:prstGeom prst="rect">
-            <a:avLst/>
-          </a:prstGeom>
-          <a:noFill/>
-          <a:ln/>
-        </p:spPr>
-        <p:txBody>
-          <a:bodyPr wrap="square" lIns="0" tIns="0" rIns="0" bIns="0" rtlCol="0" anchor="t"/>
+            <a:off x="3273552" y="1700784"/>
+            <a:ext cx="914400" cy="422453"/>
+          </a:xfrm>
+          <a:prstGeom prst="rect">
+            <a:avLst/>
+          </a:prstGeom>
+          <a:noFill/>
+          <a:ln/>
+        </p:spPr>
+        <p:txBody>
+          <a:bodyPr wrap="square" lIns="0" tIns="0" rIns="0" bIns="0" rtlCol="0" anchor="ctr"/>
+          <a:lstStyle/>
+          <a:p>
+            <a:pPr algn="r" indent="0" marL="0">
+              <a:buNone/>
+            </a:pPr>
+            <a:r>
+              <a:rPr lang="en-US" sz="1300" b="1" dirty="0">
+                <a:solidFill>
+                  <a:srgbClr val="0B7A4A"/>
+                </a:solidFill>
+                <a:latin typeface="Inter" pitchFamily="34" charset="0"/>
+                <a:ea typeface="Inter" pitchFamily="34" charset="-122"/>
+                <a:cs typeface="Inter" pitchFamily="34" charset="-120"/>
+              </a:rPr>
+              <a:t>$797,928</a:t>
+            </a:r>
+            <a:endParaRPr lang="en-US" sz="1300" dirty="0"/>
+          </a:p>
+        </p:txBody>
+      </p:sp>
+      <p:sp>
+        <p:nvSpPr>
+          <p:cNvPr id="15" name="Text 13"/>
+          <p:cNvSpPr txBox="1"/>
+          <p:nvPr/>
+        </p:nvSpPr>
+        <p:spPr>
+          <a:xfrm>
+            <a:off x="4187952" y="1700784"/>
+            <a:ext cx="841248" cy="422453"/>
+          </a:xfrm>
+          <a:prstGeom prst="rect">
+            <a:avLst/>
+          </a:prstGeom>
+          <a:noFill/>
+          <a:ln/>
+        </p:spPr>
+        <p:txBody>
+          <a:bodyPr wrap="square" lIns="0" tIns="0" rIns="0" bIns="0" rtlCol="0" anchor="ctr"/>
+          <a:lstStyle/>
+          <a:p>
+            <a:pPr algn="r" indent="0" marL="0">
+              <a:buNone/>
+            </a:pPr>
+            <a:r>
+              <a:rPr lang="en-US" sz="1300" dirty="0">
+                <a:solidFill>
+                  <a:srgbClr val="595959"/>
+                </a:solidFill>
+                <a:latin typeface="Inter" pitchFamily="34" charset="0"/>
+                <a:ea typeface="Inter" pitchFamily="34" charset="-122"/>
+                <a:cs typeface="Inter" pitchFamily="34" charset="-120"/>
+              </a:rPr>
+              <a:t>$419,904</a:t>
+            </a:r>
+            <a:endParaRPr lang="en-US" sz="1300" dirty="0"/>
+          </a:p>
+        </p:txBody>
+      </p:sp>
+      <p:sp>
+        <p:nvSpPr>
+          <p:cNvPr id="16" name="Text 14"/>
+          <p:cNvSpPr txBox="1"/>
+          <p:nvPr/>
+        </p:nvSpPr>
+        <p:spPr>
+          <a:xfrm>
+            <a:off x="5029200" y="1700784"/>
+            <a:ext cx="841248" cy="422453"/>
+          </a:xfrm>
+          <a:prstGeom prst="rect">
+            <a:avLst/>
+          </a:prstGeom>
+          <a:noFill/>
+          <a:ln/>
+        </p:spPr>
+        <p:txBody>
+          <a:bodyPr wrap="square" lIns="0" tIns="0" rIns="0" bIns="0" rtlCol="0" anchor="ctr"/>
+          <a:lstStyle/>
+          <a:p>
+            <a:pPr algn="r" indent="0" marL="0">
+              <a:buNone/>
+            </a:pPr>
+            <a:r>
+              <a:rPr lang="en-US" sz="1300" dirty="0">
+                <a:solidFill>
+                  <a:srgbClr val="595959"/>
+                </a:solidFill>
+                <a:latin typeface="Inter" pitchFamily="34" charset="0"/>
+                <a:ea typeface="Inter" pitchFamily="34" charset="-122"/>
+                <a:cs typeface="Inter" pitchFamily="34" charset="-120"/>
+              </a:rPr>
+              <a:t>$378,024</a:t>
+            </a:r>
+            <a:endParaRPr lang="en-US" sz="1300" dirty="0"/>
+          </a:p>
+        </p:txBody>
+      </p:sp>
+      <p:sp>
+        <p:nvSpPr>
+          <p:cNvPr id="17" name="Text 15"/>
+          <p:cNvSpPr txBox="1"/>
+          <p:nvPr/>
+        </p:nvSpPr>
+        <p:spPr>
+          <a:xfrm>
+            <a:off x="658368" y="2123237"/>
+            <a:ext cx="1938528" cy="422453"/>
+          </a:xfrm>
+          <a:prstGeom prst="rect">
+            <a:avLst/>
+          </a:prstGeom>
+          <a:noFill/>
+          <a:ln/>
+        </p:spPr>
+        <p:txBody>
+          <a:bodyPr wrap="square" lIns="0" tIns="0" rIns="0" bIns="0" rtlCol="0" anchor="ctr"/>
           <a:lstStyle/>
           <a:p>
             <a:pPr indent="0" marL="0">
               <a:buNone/>
             </a:pPr>
             <a:r>
-              <a:rPr lang="en-US" sz="1800" b="1" dirty="0">
+              <a:rPr lang="en-US" sz="1300" dirty="0">
                 <a:solidFill>
                   <a:srgbClr val="1A1A1A"/>
                 </a:solidFill>
@@ -1332,38 +1615,273 @@
                 <a:ea typeface="Inter" pitchFamily="34" charset="-122"/>
                 <a:cs typeface="Inter" pitchFamily="34" charset="-120"/>
               </a:rPr>
-              <a:t>Manager signature on add-ons</a:t>
-            </a:r>
-            <a:endParaRPr lang="en-US" sz="1800" dirty="0"/>
-          </a:p>
-        </p:txBody>
-      </p:sp>
-      <p:sp>
-        <p:nvSpPr>
-          <p:cNvPr id="15" name="Text 13"/>
-          <p:cNvSpPr txBox="1"/>
-          <p:nvPr/>
-        </p:nvSpPr>
-        <p:spPr>
-          <a:xfrm>
-            <a:off x="4547616" y="2724912"/>
-            <a:ext cx="3166872" cy="918972"/>
-          </a:xfrm>
-          <a:prstGeom prst="rect">
-            <a:avLst/>
-          </a:prstGeom>
-          <a:noFill/>
-          <a:ln/>
-        </p:spPr>
-        <p:txBody>
-          <a:bodyPr wrap="square" lIns="0" tIns="0" rIns="0" bIns="0" rtlCol="0" anchor="t"/>
+              <a:t>HONDA NORTH</a:t>
+            </a:r>
+            <a:endParaRPr lang="en-US" sz="1300" dirty="0"/>
+          </a:p>
+        </p:txBody>
+      </p:sp>
+      <p:sp>
+        <p:nvSpPr>
+          <p:cNvPr id="18" name="Shape 16"/>
+          <p:cNvSpPr/>
+          <p:nvPr/>
+        </p:nvSpPr>
+        <p:spPr>
+          <a:xfrm>
+            <a:off x="2670048" y="2218289"/>
+            <a:ext cx="318553" cy="232349"/>
+          </a:xfrm>
+          <a:prstGeom prst="rect">
+            <a:avLst/>
+          </a:prstGeom>
+          <a:solidFill>
+            <a:srgbClr val="12A566"/>
+          </a:solidFill>
+          <a:ln/>
+        </p:spPr>
+      </p:sp>
+      <p:sp>
+        <p:nvSpPr>
+          <p:cNvPr id="19" name="Text 17"/>
+          <p:cNvSpPr txBox="1"/>
+          <p:nvPr/>
+        </p:nvSpPr>
+        <p:spPr>
+          <a:xfrm>
+            <a:off x="3273552" y="2123237"/>
+            <a:ext cx="914400" cy="422453"/>
+          </a:xfrm>
+          <a:prstGeom prst="rect">
+            <a:avLst/>
+          </a:prstGeom>
+          <a:noFill/>
+          <a:ln/>
+        </p:spPr>
+        <p:txBody>
+          <a:bodyPr wrap="square" lIns="0" tIns="0" rIns="0" bIns="0" rtlCol="0" anchor="ctr"/>
+          <a:lstStyle/>
+          <a:p>
+            <a:pPr algn="r" indent="0" marL="0">
+              <a:buNone/>
+            </a:pPr>
+            <a:r>
+              <a:rPr lang="en-US" sz="1300" b="1" dirty="0">
+                <a:solidFill>
+                  <a:srgbClr val="0B7A4A"/>
+                </a:solidFill>
+                <a:latin typeface="Inter" pitchFamily="34" charset="0"/>
+                <a:ea typeface="Inter" pitchFamily="34" charset="-122"/>
+                <a:cs typeface="Inter" pitchFamily="34" charset="-120"/>
+              </a:rPr>
+              <a:t>$463,296</a:t>
+            </a:r>
+            <a:endParaRPr lang="en-US" sz="1300" dirty="0"/>
+          </a:p>
+        </p:txBody>
+      </p:sp>
+      <p:sp>
+        <p:nvSpPr>
+          <p:cNvPr id="20" name="Text 18"/>
+          <p:cNvSpPr txBox="1"/>
+          <p:nvPr/>
+        </p:nvSpPr>
+        <p:spPr>
+          <a:xfrm>
+            <a:off x="4187952" y="2123237"/>
+            <a:ext cx="841248" cy="422453"/>
+          </a:xfrm>
+          <a:prstGeom prst="rect">
+            <a:avLst/>
+          </a:prstGeom>
+          <a:noFill/>
+          <a:ln/>
+        </p:spPr>
+        <p:txBody>
+          <a:bodyPr wrap="square" lIns="0" tIns="0" rIns="0" bIns="0" rtlCol="0" anchor="ctr"/>
+          <a:lstStyle/>
+          <a:p>
+            <a:pPr algn="r" indent="0" marL="0">
+              <a:buNone/>
+            </a:pPr>
+            <a:r>
+              <a:rPr lang="en-US" sz="1300" dirty="0">
+                <a:solidFill>
+                  <a:srgbClr val="595959"/>
+                </a:solidFill>
+                <a:latin typeface="Inter" pitchFamily="34" charset="0"/>
+                <a:ea typeface="Inter" pitchFamily="34" charset="-122"/>
+                <a:cs typeface="Inter" pitchFamily="34" charset="-120"/>
+              </a:rPr>
+              <a:t>$142,960</a:t>
+            </a:r>
+            <a:endParaRPr lang="en-US" sz="1300" dirty="0"/>
+          </a:p>
+        </p:txBody>
+      </p:sp>
+      <p:sp>
+        <p:nvSpPr>
+          <p:cNvPr id="21" name="Text 19"/>
+          <p:cNvSpPr txBox="1"/>
+          <p:nvPr/>
+        </p:nvSpPr>
+        <p:spPr>
+          <a:xfrm>
+            <a:off x="5029200" y="2123237"/>
+            <a:ext cx="841248" cy="422453"/>
+          </a:xfrm>
+          <a:prstGeom prst="rect">
+            <a:avLst/>
+          </a:prstGeom>
+          <a:noFill/>
+          <a:ln/>
+        </p:spPr>
+        <p:txBody>
+          <a:bodyPr wrap="square" lIns="0" tIns="0" rIns="0" bIns="0" rtlCol="0" anchor="ctr"/>
+          <a:lstStyle/>
+          <a:p>
+            <a:pPr algn="r" indent="0" marL="0">
+              <a:buNone/>
+            </a:pPr>
+            <a:r>
+              <a:rPr lang="en-US" sz="1300" dirty="0">
+                <a:solidFill>
+                  <a:srgbClr val="595959"/>
+                </a:solidFill>
+                <a:latin typeface="Inter" pitchFamily="34" charset="0"/>
+                <a:ea typeface="Inter" pitchFamily="34" charset="-122"/>
+                <a:cs typeface="Inter" pitchFamily="34" charset="-120"/>
+              </a:rPr>
+              <a:t>$320,436</a:t>
+            </a:r>
+            <a:endParaRPr lang="en-US" sz="1300" dirty="0"/>
+          </a:p>
+        </p:txBody>
+      </p:sp>
+      <p:sp>
+        <p:nvSpPr>
+          <p:cNvPr id="22" name="Text 20"/>
+          <p:cNvSpPr txBox="1"/>
+          <p:nvPr/>
+        </p:nvSpPr>
+        <p:spPr>
+          <a:xfrm>
+            <a:off x="658368" y="2545690"/>
+            <a:ext cx="1938528" cy="422453"/>
+          </a:xfrm>
+          <a:prstGeom prst="rect">
+            <a:avLst/>
+          </a:prstGeom>
+          <a:noFill/>
+          <a:ln/>
+        </p:spPr>
+        <p:txBody>
+          <a:bodyPr wrap="square" lIns="0" tIns="0" rIns="0" bIns="0" rtlCol="0" anchor="ctr"/>
           <a:lstStyle/>
           <a:p>
             <a:pPr indent="0" marL="0">
               <a:buNone/>
             </a:pPr>
             <a:r>
-              <a:rPr lang="en-US" sz="1500" dirty="0">
+              <a:rPr lang="en-US" sz="1300" dirty="0">
+                <a:solidFill>
+                  <a:srgbClr val="1A1A1A"/>
+                </a:solidFill>
+                <a:latin typeface="Inter" pitchFamily="34" charset="0"/>
+                <a:ea typeface="Inter" pitchFamily="34" charset="-122"/>
+                <a:cs typeface="Inter" pitchFamily="34" charset="-120"/>
+              </a:rPr>
+              <a:t>LR LV</a:t>
+            </a:r>
+            <a:endParaRPr lang="en-US" sz="1300" dirty="0"/>
+          </a:p>
+        </p:txBody>
+      </p:sp>
+      <p:sp>
+        <p:nvSpPr>
+          <p:cNvPr id="23" name="Shape 21"/>
+          <p:cNvSpPr/>
+          <p:nvPr/>
+        </p:nvSpPr>
+        <p:spPr>
+          <a:xfrm>
+            <a:off x="2670048" y="2640741"/>
+            <a:ext cx="236506" cy="232349"/>
+          </a:xfrm>
+          <a:prstGeom prst="rect">
+            <a:avLst/>
+          </a:prstGeom>
+          <a:solidFill>
+            <a:srgbClr val="12A566"/>
+          </a:solidFill>
+          <a:ln/>
+        </p:spPr>
+      </p:sp>
+      <p:sp>
+        <p:nvSpPr>
+          <p:cNvPr id="24" name="Text 22"/>
+          <p:cNvSpPr txBox="1"/>
+          <p:nvPr/>
+        </p:nvSpPr>
+        <p:spPr>
+          <a:xfrm>
+            <a:off x="3273552" y="2545690"/>
+            <a:ext cx="914400" cy="422453"/>
+          </a:xfrm>
+          <a:prstGeom prst="rect">
+            <a:avLst/>
+          </a:prstGeom>
+          <a:noFill/>
+          <a:ln/>
+        </p:spPr>
+        <p:txBody>
+          <a:bodyPr wrap="square" lIns="0" tIns="0" rIns="0" bIns="0" rtlCol="0" anchor="ctr"/>
+          <a:lstStyle/>
+          <a:p>
+            <a:pPr algn="r" indent="0" marL="0">
+              <a:buNone/>
+            </a:pPr>
+            <a:r>
+              <a:rPr lang="en-US" sz="1300" b="1" dirty="0">
+                <a:solidFill>
+                  <a:srgbClr val="0B7A4A"/>
+                </a:solidFill>
+                <a:latin typeface="Inter" pitchFamily="34" charset="0"/>
+                <a:ea typeface="Inter" pitchFamily="34" charset="-122"/>
+                <a:cs typeface="Inter" pitchFamily="34" charset="-120"/>
+              </a:rPr>
+              <a:t>$343,968</a:t>
+            </a:r>
+            <a:endParaRPr lang="en-US" sz="1300" dirty="0"/>
+          </a:p>
+        </p:txBody>
+      </p:sp>
+      <p:sp>
+        <p:nvSpPr>
+          <p:cNvPr id="25" name="Text 23"/>
+          <p:cNvSpPr txBox="1"/>
+          <p:nvPr/>
+        </p:nvSpPr>
+        <p:spPr>
+          <a:xfrm>
+            <a:off x="4187952" y="2545690"/>
+            <a:ext cx="841248" cy="422453"/>
+          </a:xfrm>
+          <a:prstGeom prst="rect">
+            <a:avLst/>
+          </a:prstGeom>
+          <a:noFill/>
+          <a:ln/>
+        </p:spPr>
+        <p:txBody>
+          <a:bodyPr wrap="square" lIns="0" tIns="0" rIns="0" bIns="0" rtlCol="0" anchor="ctr"/>
+          <a:lstStyle/>
+          <a:p>
+            <a:pPr algn="r" indent="0" marL="0">
+              <a:buNone/>
+            </a:pPr>
+            <a:r>
+              <a:rPr lang="en-US" sz="1300" dirty="0">
                 <a:solidFill>
                   <a:srgbClr val="595959"/>
                 </a:solidFill>
@@ -1371,78 +1889,77 @@
                 <a:ea typeface="Inter" pitchFamily="34" charset="-122"/>
                 <a:cs typeface="Inter" pitchFamily="34" charset="-120"/>
               </a:rPr>
-              <a:t>Any added repair approved and signed by a manager before it is claimed</a:t>
-            </a:r>
-            <a:endParaRPr lang="en-US" sz="1500" dirty="0"/>
-          </a:p>
-        </p:txBody>
-      </p:sp>
-      <p:sp>
-        <p:nvSpPr>
-          <p:cNvPr id="16" name="Shape 14"/>
-          <p:cNvSpPr/>
-          <p:nvPr/>
-        </p:nvSpPr>
-        <p:spPr>
-          <a:xfrm>
-            <a:off x="8007096" y="1865376"/>
-            <a:ext cx="3496056" cy="1888236"/>
-          </a:xfrm>
-          <a:prstGeom prst="rect">
-            <a:avLst/>
-          </a:prstGeom>
-          <a:solidFill>
-            <a:srgbClr val="F7F7F7"/>
-          </a:solidFill>
-          <a:ln/>
-        </p:spPr>
-      </p:sp>
-      <p:sp>
-        <p:nvSpPr>
-          <p:cNvPr id="17" name="Shape 15"/>
-          <p:cNvSpPr/>
-          <p:nvPr/>
-        </p:nvSpPr>
-        <p:spPr>
-          <a:xfrm>
-            <a:off x="8007096" y="1865376"/>
-            <a:ext cx="54864" cy="1888236"/>
-          </a:xfrm>
-          <a:prstGeom prst="rect">
-            <a:avLst/>
-          </a:prstGeom>
-          <a:solidFill>
-            <a:srgbClr val="C2352F"/>
-          </a:solidFill>
-          <a:ln/>
-        </p:spPr>
-      </p:sp>
-      <p:sp>
-        <p:nvSpPr>
-          <p:cNvPr id="18" name="Text 16"/>
-          <p:cNvSpPr txBox="1"/>
-          <p:nvPr/>
-        </p:nvSpPr>
-        <p:spPr>
-          <a:xfrm>
-            <a:off x="8208264" y="1993392"/>
-            <a:ext cx="3166872" cy="640080"/>
-          </a:xfrm>
-          <a:prstGeom prst="rect">
-            <a:avLst/>
-          </a:prstGeom>
-          <a:noFill/>
-          <a:ln/>
-        </p:spPr>
-        <p:txBody>
-          <a:bodyPr wrap="square" lIns="0" tIns="0" rIns="0" bIns="0" rtlCol="0" anchor="t"/>
+              <a:t>$123,204</a:t>
+            </a:r>
+            <a:endParaRPr lang="en-US" sz="1300" dirty="0"/>
+          </a:p>
+        </p:txBody>
+      </p:sp>
+      <p:sp>
+        <p:nvSpPr>
+          <p:cNvPr id="26" name="Text 24"/>
+          <p:cNvSpPr txBox="1"/>
+          <p:nvPr/>
+        </p:nvSpPr>
+        <p:spPr>
+          <a:xfrm>
+            <a:off x="5029200" y="2545690"/>
+            <a:ext cx="841248" cy="422453"/>
+          </a:xfrm>
+          <a:prstGeom prst="rect">
+            <a:avLst/>
+          </a:prstGeom>
+          <a:noFill/>
+          <a:ln/>
+        </p:spPr>
+        <p:txBody>
+          <a:bodyPr wrap="square" lIns="0" tIns="0" rIns="0" bIns="0" rtlCol="0" anchor="ctr"/>
+          <a:lstStyle/>
+          <a:p>
+            <a:pPr algn="r" indent="0" marL="0">
+              <a:buNone/>
+            </a:pPr>
+            <a:r>
+              <a:rPr lang="en-US" sz="1300" dirty="0">
+                <a:solidFill>
+                  <a:srgbClr val="595959"/>
+                </a:solidFill>
+                <a:latin typeface="Inter" pitchFamily="34" charset="0"/>
+                <a:ea typeface="Inter" pitchFamily="34" charset="-122"/>
+                <a:cs typeface="Inter" pitchFamily="34" charset="-120"/>
+              </a:rPr>
+              <a:t>$220,764</a:t>
+            </a:r>
+            <a:endParaRPr lang="en-US" sz="1300" dirty="0"/>
+          </a:p>
+        </p:txBody>
+      </p:sp>
+      <p:sp>
+        <p:nvSpPr>
+          <p:cNvPr id="27" name="Text 25"/>
+          <p:cNvSpPr txBox="1"/>
+          <p:nvPr/>
+        </p:nvSpPr>
+        <p:spPr>
+          <a:xfrm>
+            <a:off x="658368" y="2968142"/>
+            <a:ext cx="1938528" cy="422453"/>
+          </a:xfrm>
+          <a:prstGeom prst="rect">
+            <a:avLst/>
+          </a:prstGeom>
+          <a:noFill/>
+          <a:ln/>
+        </p:spPr>
+        <p:txBody>
+          <a:bodyPr wrap="square" lIns="0" tIns="0" rIns="0" bIns="0" rtlCol="0" anchor="ctr"/>
           <a:lstStyle/>
           <a:p>
             <a:pPr indent="0" marL="0">
               <a:buNone/>
             </a:pPr>
             <a:r>
-              <a:rPr lang="en-US" sz="1800" b="1" dirty="0">
+              <a:rPr lang="en-US" sz="1300" dirty="0">
                 <a:solidFill>
                   <a:srgbClr val="1A1A1A"/>
                 </a:solidFill>
@@ -1450,284 +1967,9 @@
                 <a:ea typeface="Inter" pitchFamily="34" charset="-122"/>
                 <a:cs typeface="Inter" pitchFamily="34" charset="-120"/>
               </a:rPr>
-              <a:t>Signatures on in-stock units</a:t>
-            </a:r>
-            <a:endParaRPr lang="en-US" sz="1800" dirty="0"/>
-          </a:p>
-        </p:txBody>
-      </p:sp>
-      <p:sp>
-        <p:nvSpPr>
-          <p:cNvPr id="19" name="Text 17"/>
-          <p:cNvSpPr txBox="1"/>
-          <p:nvPr/>
-        </p:nvSpPr>
-        <p:spPr>
-          <a:xfrm>
-            <a:off x="8208264" y="2724912"/>
-            <a:ext cx="3166872" cy="918972"/>
-          </a:xfrm>
-          <a:prstGeom prst="rect">
-            <a:avLst/>
-          </a:prstGeom>
-          <a:noFill/>
-          <a:ln/>
-        </p:spPr>
-        <p:txBody>
-          <a:bodyPr wrap="square" lIns="0" tIns="0" rIns="0" bIns="0" rtlCol="0" anchor="t"/>
-          <a:lstStyle/>
-          <a:p>
-            <a:pPr indent="0" marL="0">
-              <a:buNone/>
-            </a:pPr>
-            <a:r>
-              <a:rPr lang="en-US" sz="1500" dirty="0">
-                <a:solidFill>
-                  <a:srgbClr val="595959"/>
-                </a:solidFill>
-                <a:latin typeface="Inter" pitchFamily="34" charset="0"/>
-                <a:ea typeface="Inter" pitchFamily="34" charset="-122"/>
-                <a:cs typeface="Inter" pitchFamily="34" charset="-120"/>
-              </a:rPr>
-              <a:t>Customer and manager signatures on repairs to units in stock</a:t>
-            </a:r>
-            <a:endParaRPr lang="en-US" sz="1500" dirty="0"/>
-          </a:p>
-        </p:txBody>
-      </p:sp>
-      <p:sp>
-        <p:nvSpPr>
-          <p:cNvPr id="20" name="Shape 18"/>
-          <p:cNvSpPr/>
-          <p:nvPr/>
-        </p:nvSpPr>
-        <p:spPr>
-          <a:xfrm>
-            <a:off x="685800" y="3918204"/>
-            <a:ext cx="3496056" cy="1888236"/>
-          </a:xfrm>
-          <a:prstGeom prst="rect">
-            <a:avLst/>
-          </a:prstGeom>
-          <a:solidFill>
-            <a:srgbClr val="F7F7F7"/>
-          </a:solidFill>
-          <a:ln/>
-        </p:spPr>
-      </p:sp>
-      <p:sp>
-        <p:nvSpPr>
-          <p:cNvPr id="21" name="Shape 19"/>
-          <p:cNvSpPr/>
-          <p:nvPr/>
-        </p:nvSpPr>
-        <p:spPr>
-          <a:xfrm>
-            <a:off x="685800" y="3918204"/>
-            <a:ext cx="54864" cy="1888236"/>
-          </a:xfrm>
-          <a:prstGeom prst="rect">
-            <a:avLst/>
-          </a:prstGeom>
-          <a:solidFill>
-            <a:srgbClr val="C2352F"/>
-          </a:solidFill>
-          <a:ln/>
-        </p:spPr>
-      </p:sp>
-      <p:sp>
-        <p:nvSpPr>
-          <p:cNvPr id="22" name="Text 20"/>
-          <p:cNvSpPr txBox="1"/>
-          <p:nvPr/>
-        </p:nvSpPr>
-        <p:spPr>
-          <a:xfrm>
-            <a:off x="886968" y="4046220"/>
-            <a:ext cx="3166872" cy="640080"/>
-          </a:xfrm>
-          <a:prstGeom prst="rect">
-            <a:avLst/>
-          </a:prstGeom>
-          <a:noFill/>
-          <a:ln/>
-        </p:spPr>
-        <p:txBody>
-          <a:bodyPr wrap="square" lIns="0" tIns="0" rIns="0" bIns="0" rtlCol="0" anchor="t"/>
-          <a:lstStyle/>
-          <a:p>
-            <a:pPr indent="0" marL="0">
-              <a:buNone/>
-            </a:pPr>
-            <a:r>
-              <a:rPr lang="en-US" sz="1800" b="1" dirty="0">
-                <a:solidFill>
-                  <a:srgbClr val="1A1A1A"/>
-                </a:solidFill>
-                <a:latin typeface="Inter" pitchFamily="34" charset="0"/>
-                <a:ea typeface="Inter" pitchFamily="34" charset="-122"/>
-                <a:cs typeface="Inter" pitchFamily="34" charset="-120"/>
-              </a:rPr>
-              <a:t>Out mileage</a:t>
-            </a:r>
-            <a:endParaRPr lang="en-US" sz="1800" dirty="0"/>
-          </a:p>
-        </p:txBody>
-      </p:sp>
-      <p:sp>
-        <p:nvSpPr>
-          <p:cNvPr id="23" name="Text 21"/>
-          <p:cNvSpPr txBox="1"/>
-          <p:nvPr/>
-        </p:nvSpPr>
-        <p:spPr>
-          <a:xfrm>
-            <a:off x="886968" y="4777740"/>
-            <a:ext cx="3166872" cy="918972"/>
-          </a:xfrm>
-          <a:prstGeom prst="rect">
-            <a:avLst/>
-          </a:prstGeom>
-          <a:noFill/>
-          <a:ln/>
-        </p:spPr>
-        <p:txBody>
-          <a:bodyPr wrap="square" lIns="0" tIns="0" rIns="0" bIns="0" rtlCol="0" anchor="t"/>
-          <a:lstStyle/>
-          <a:p>
-            <a:pPr indent="0" marL="0">
-              <a:buNone/>
-            </a:pPr>
-            <a:r>
-              <a:rPr lang="en-US" sz="1500" dirty="0">
-                <a:solidFill>
-                  <a:srgbClr val="595959"/>
-                </a:solidFill>
-                <a:latin typeface="Inter" pitchFamily="34" charset="0"/>
-                <a:ea typeface="Inter" pitchFamily="34" charset="-122"/>
-                <a:cs typeface="Inter" pitchFamily="34" charset="-120"/>
-              </a:rPr>
-              <a:t>Recorded on every RO and consistent with the mileage in</a:t>
-            </a:r>
-            <a:endParaRPr lang="en-US" sz="1500" dirty="0"/>
-          </a:p>
-        </p:txBody>
-      </p:sp>
-      <p:sp>
-        <p:nvSpPr>
-          <p:cNvPr id="24" name="Shape 22"/>
-          <p:cNvSpPr/>
-          <p:nvPr/>
-        </p:nvSpPr>
-        <p:spPr>
-          <a:xfrm>
-            <a:off x="4346448" y="3918204"/>
-            <a:ext cx="3496056" cy="1888236"/>
-          </a:xfrm>
-          <a:prstGeom prst="rect">
-            <a:avLst/>
-          </a:prstGeom>
-          <a:solidFill>
-            <a:srgbClr val="F7F7F7"/>
-          </a:solidFill>
-          <a:ln/>
-        </p:spPr>
-      </p:sp>
-      <p:sp>
-        <p:nvSpPr>
-          <p:cNvPr id="25" name="Shape 23"/>
-          <p:cNvSpPr/>
-          <p:nvPr/>
-        </p:nvSpPr>
-        <p:spPr>
-          <a:xfrm>
-            <a:off x="4346448" y="3918204"/>
-            <a:ext cx="54864" cy="1888236"/>
-          </a:xfrm>
-          <a:prstGeom prst="rect">
-            <a:avLst/>
-          </a:prstGeom>
-          <a:solidFill>
-            <a:srgbClr val="C2352F"/>
-          </a:solidFill>
-          <a:ln/>
-        </p:spPr>
-      </p:sp>
-      <p:sp>
-        <p:nvSpPr>
-          <p:cNvPr id="26" name="Text 24"/>
-          <p:cNvSpPr txBox="1"/>
-          <p:nvPr/>
-        </p:nvSpPr>
-        <p:spPr>
-          <a:xfrm>
-            <a:off x="4547616" y="4046220"/>
-            <a:ext cx="3166872" cy="640080"/>
-          </a:xfrm>
-          <a:prstGeom prst="rect">
-            <a:avLst/>
-          </a:prstGeom>
-          <a:noFill/>
-          <a:ln/>
-        </p:spPr>
-        <p:txBody>
-          <a:bodyPr wrap="square" lIns="0" tIns="0" rIns="0" bIns="0" rtlCol="0" anchor="t"/>
-          <a:lstStyle/>
-          <a:p>
-            <a:pPr indent="0" marL="0">
-              <a:buNone/>
-            </a:pPr>
-            <a:r>
-              <a:rPr lang="en-US" sz="1800" b="1" dirty="0">
-                <a:solidFill>
-                  <a:srgbClr val="1A1A1A"/>
-                </a:solidFill>
-                <a:latin typeface="Inter" pitchFamily="34" charset="0"/>
-                <a:ea typeface="Inter" pitchFamily="34" charset="-122"/>
-                <a:cs typeface="Inter" pitchFamily="34" charset="-120"/>
-              </a:rPr>
-              <a:t>Punch times</a:t>
-            </a:r>
-            <a:endParaRPr lang="en-US" sz="1800" dirty="0"/>
-          </a:p>
-        </p:txBody>
-      </p:sp>
-      <p:sp>
-        <p:nvSpPr>
-          <p:cNvPr id="27" name="Text 25"/>
-          <p:cNvSpPr txBox="1"/>
-          <p:nvPr/>
-        </p:nvSpPr>
-        <p:spPr>
-          <a:xfrm>
-            <a:off x="4547616" y="4777740"/>
-            <a:ext cx="3166872" cy="918972"/>
-          </a:xfrm>
-          <a:prstGeom prst="rect">
-            <a:avLst/>
-          </a:prstGeom>
-          <a:noFill/>
-          <a:ln/>
-        </p:spPr>
-        <p:txBody>
-          <a:bodyPr wrap="square" lIns="0" tIns="0" rIns="0" bIns="0" rtlCol="0" anchor="t"/>
-          <a:lstStyle/>
-          <a:p>
-            <a:pPr indent="0" marL="0">
-              <a:buNone/>
-            </a:pPr>
-            <a:r>
-              <a:rPr lang="en-US" sz="1500" dirty="0">
-                <a:solidFill>
-                  <a:srgbClr val="595959"/>
-                </a:solidFill>
-                <a:latin typeface="Inter" pitchFamily="34" charset="0"/>
-                <a:ea typeface="Inter" pitchFamily="34" charset="-122"/>
-                <a:cs typeface="Inter" pitchFamily="34" charset="-120"/>
-              </a:rPr>
-              <a:t>Technician clock times on the RO support the hours claimed</a:t>
-            </a:r>
-            <a:endParaRPr lang="en-US" sz="1500" dirty="0"/>
+              <a:t>NISSAN</a:t>
+            </a:r>
+            <a:endParaRPr lang="en-US" sz="1300" dirty="0"/>
           </a:p>
         </p:txBody>
       </p:sp>
@@ -1739,64 +1981,337 @@
         </p:nvSpPr>
         <p:spPr>
           <a:xfrm>
-            <a:off x="8007096" y="3918204"/>
-            <a:ext cx="3496056" cy="1888236"/>
-          </a:xfrm>
-          <a:prstGeom prst="rect">
-            <a:avLst/>
-          </a:prstGeom>
-          <a:solidFill>
-            <a:srgbClr val="F7F7F7"/>
-          </a:solidFill>
-          <a:ln/>
-        </p:spPr>
-      </p:sp>
-      <p:sp>
-        <p:nvSpPr>
-          <p:cNvPr id="29" name="Shape 27"/>
+            <a:off x="2670048" y="3063194"/>
+            <a:ext cx="223981" cy="232349"/>
+          </a:xfrm>
+          <a:prstGeom prst="rect">
+            <a:avLst/>
+          </a:prstGeom>
+          <a:solidFill>
+            <a:srgbClr val="12A566"/>
+          </a:solidFill>
+          <a:ln/>
+        </p:spPr>
+      </p:sp>
+      <p:sp>
+        <p:nvSpPr>
+          <p:cNvPr id="29" name="Text 27"/>
+          <p:cNvSpPr txBox="1"/>
+          <p:nvPr/>
+        </p:nvSpPr>
+        <p:spPr>
+          <a:xfrm>
+            <a:off x="3273552" y="2968142"/>
+            <a:ext cx="914400" cy="422453"/>
+          </a:xfrm>
+          <a:prstGeom prst="rect">
+            <a:avLst/>
+          </a:prstGeom>
+          <a:noFill/>
+          <a:ln/>
+        </p:spPr>
+        <p:txBody>
+          <a:bodyPr wrap="square" lIns="0" tIns="0" rIns="0" bIns="0" rtlCol="0" anchor="ctr"/>
+          <a:lstStyle/>
+          <a:p>
+            <a:pPr algn="r" indent="0" marL="0">
+              <a:buNone/>
+            </a:pPr>
+            <a:r>
+              <a:rPr lang="en-US" sz="1300" b="1" dirty="0">
+                <a:solidFill>
+                  <a:srgbClr val="0B7A4A"/>
+                </a:solidFill>
+                <a:latin typeface="Inter" pitchFamily="34" charset="0"/>
+                <a:ea typeface="Inter" pitchFamily="34" charset="-122"/>
+                <a:cs typeface="Inter" pitchFamily="34" charset="-120"/>
+              </a:rPr>
+              <a:t>$325,752</a:t>
+            </a:r>
+            <a:endParaRPr lang="en-US" sz="1300" dirty="0"/>
+          </a:p>
+        </p:txBody>
+      </p:sp>
+      <p:sp>
+        <p:nvSpPr>
+          <p:cNvPr id="30" name="Text 28"/>
+          <p:cNvSpPr txBox="1"/>
+          <p:nvPr/>
+        </p:nvSpPr>
+        <p:spPr>
+          <a:xfrm>
+            <a:off x="4187952" y="2968142"/>
+            <a:ext cx="841248" cy="422453"/>
+          </a:xfrm>
+          <a:prstGeom prst="rect">
+            <a:avLst/>
+          </a:prstGeom>
+          <a:noFill/>
+          <a:ln/>
+        </p:spPr>
+        <p:txBody>
+          <a:bodyPr wrap="square" lIns="0" tIns="0" rIns="0" bIns="0" rtlCol="0" anchor="ctr"/>
+          <a:lstStyle/>
+          <a:p>
+            <a:pPr algn="r" indent="0" marL="0">
+              <a:buNone/>
+            </a:pPr>
+            <a:r>
+              <a:rPr lang="en-US" sz="1300" dirty="0">
+                <a:solidFill>
+                  <a:srgbClr val="595959"/>
+                </a:solidFill>
+                <a:latin typeface="Inter" pitchFamily="34" charset="0"/>
+                <a:ea typeface="Inter" pitchFamily="34" charset="-122"/>
+                <a:cs typeface="Inter" pitchFamily="34" charset="-120"/>
+              </a:rPr>
+              <a:t>$206,340</a:t>
+            </a:r>
+            <a:endParaRPr lang="en-US" sz="1300" dirty="0"/>
+          </a:p>
+        </p:txBody>
+      </p:sp>
+      <p:sp>
+        <p:nvSpPr>
+          <p:cNvPr id="31" name="Text 29"/>
+          <p:cNvSpPr txBox="1"/>
+          <p:nvPr/>
+        </p:nvSpPr>
+        <p:spPr>
+          <a:xfrm>
+            <a:off x="5029200" y="2968142"/>
+            <a:ext cx="841248" cy="422453"/>
+          </a:xfrm>
+          <a:prstGeom prst="rect">
+            <a:avLst/>
+          </a:prstGeom>
+          <a:noFill/>
+          <a:ln/>
+        </p:spPr>
+        <p:txBody>
+          <a:bodyPr wrap="square" lIns="0" tIns="0" rIns="0" bIns="0" rtlCol="0" anchor="ctr"/>
+          <a:lstStyle/>
+          <a:p>
+            <a:pPr algn="r" indent="0" marL="0">
+              <a:buNone/>
+            </a:pPr>
+            <a:r>
+              <a:rPr lang="en-US" sz="1300" dirty="0">
+                <a:solidFill>
+                  <a:srgbClr val="595959"/>
+                </a:solidFill>
+                <a:latin typeface="Inter" pitchFamily="34" charset="0"/>
+                <a:ea typeface="Inter" pitchFamily="34" charset="-122"/>
+                <a:cs typeface="Inter" pitchFamily="34" charset="-120"/>
+              </a:rPr>
+              <a:t>$119,412</a:t>
+            </a:r>
+            <a:endParaRPr lang="en-US" sz="1300" dirty="0"/>
+          </a:p>
+        </p:txBody>
+      </p:sp>
+      <p:sp>
+        <p:nvSpPr>
+          <p:cNvPr id="32" name="Text 30"/>
+          <p:cNvSpPr txBox="1"/>
+          <p:nvPr/>
+        </p:nvSpPr>
+        <p:spPr>
+          <a:xfrm>
+            <a:off x="658368" y="3390595"/>
+            <a:ext cx="1938528" cy="422453"/>
+          </a:xfrm>
+          <a:prstGeom prst="rect">
+            <a:avLst/>
+          </a:prstGeom>
+          <a:noFill/>
+          <a:ln/>
+        </p:spPr>
+        <p:txBody>
+          <a:bodyPr wrap="square" lIns="0" tIns="0" rIns="0" bIns="0" rtlCol="0" anchor="ctr"/>
+          <a:lstStyle/>
+          <a:p>
+            <a:pPr indent="0" marL="0">
+              <a:buNone/>
+            </a:pPr>
+            <a:r>
+              <a:rPr lang="en-US" sz="1300" dirty="0">
+                <a:solidFill>
+                  <a:srgbClr val="1A1A1A"/>
+                </a:solidFill>
+                <a:latin typeface="Inter" pitchFamily="34" charset="0"/>
+                <a:ea typeface="Inter" pitchFamily="34" charset="-122"/>
+                <a:cs typeface="Inter" pitchFamily="34" charset="-120"/>
+              </a:rPr>
+              <a:t>LINCOLN</a:t>
+            </a:r>
+            <a:endParaRPr lang="en-US" sz="1300" dirty="0"/>
+          </a:p>
+        </p:txBody>
+      </p:sp>
+      <p:sp>
+        <p:nvSpPr>
+          <p:cNvPr id="33" name="Shape 31"/>
           <p:cNvSpPr/>
           <p:nvPr/>
         </p:nvSpPr>
         <p:spPr>
           <a:xfrm>
-            <a:off x="8007096" y="3918204"/>
-            <a:ext cx="54864" cy="1888236"/>
-          </a:xfrm>
-          <a:prstGeom prst="rect">
-            <a:avLst/>
-          </a:prstGeom>
-          <a:solidFill>
-            <a:srgbClr val="C2352F"/>
-          </a:solidFill>
-          <a:ln/>
-        </p:spPr>
-      </p:sp>
-      <p:sp>
-        <p:nvSpPr>
-          <p:cNvPr id="30" name="Text 28"/>
-          <p:cNvSpPr txBox="1"/>
-          <p:nvPr/>
-        </p:nvSpPr>
-        <p:spPr>
-          <a:xfrm>
-            <a:off x="8208264" y="4046220"/>
-            <a:ext cx="3166872" cy="640080"/>
-          </a:xfrm>
-          <a:prstGeom prst="rect">
-            <a:avLst/>
-          </a:prstGeom>
-          <a:noFill/>
-          <a:ln/>
-        </p:spPr>
-        <p:txBody>
-          <a:bodyPr wrap="square" lIns="0" tIns="0" rIns="0" bIns="0" rtlCol="0" anchor="t"/>
+            <a:off x="2670048" y="3485647"/>
+            <a:ext cx="200812" cy="232349"/>
+          </a:xfrm>
+          <a:prstGeom prst="rect">
+            <a:avLst/>
+          </a:prstGeom>
+          <a:solidFill>
+            <a:srgbClr val="12A566"/>
+          </a:solidFill>
+          <a:ln/>
+        </p:spPr>
+      </p:sp>
+      <p:sp>
+        <p:nvSpPr>
+          <p:cNvPr id="34" name="Text 32"/>
+          <p:cNvSpPr txBox="1"/>
+          <p:nvPr/>
+        </p:nvSpPr>
+        <p:spPr>
+          <a:xfrm>
+            <a:off x="3273552" y="3390595"/>
+            <a:ext cx="914400" cy="422453"/>
+          </a:xfrm>
+          <a:prstGeom prst="rect">
+            <a:avLst/>
+          </a:prstGeom>
+          <a:noFill/>
+          <a:ln/>
+        </p:spPr>
+        <p:txBody>
+          <a:bodyPr wrap="square" lIns="0" tIns="0" rIns="0" bIns="0" rtlCol="0" anchor="ctr"/>
+          <a:lstStyle/>
+          <a:p>
+            <a:pPr algn="r" indent="0" marL="0">
+              <a:buNone/>
+            </a:pPr>
+            <a:r>
+              <a:rPr lang="en-US" sz="1300" b="1" dirty="0">
+                <a:solidFill>
+                  <a:srgbClr val="0B7A4A"/>
+                </a:solidFill>
+                <a:latin typeface="Inter" pitchFamily="34" charset="0"/>
+                <a:ea typeface="Inter" pitchFamily="34" charset="-122"/>
+                <a:cs typeface="Inter" pitchFamily="34" charset="-120"/>
+              </a:rPr>
+              <a:t>$292,056</a:t>
+            </a:r>
+            <a:endParaRPr lang="en-US" sz="1300" dirty="0"/>
+          </a:p>
+        </p:txBody>
+      </p:sp>
+      <p:sp>
+        <p:nvSpPr>
+          <p:cNvPr id="35" name="Text 33"/>
+          <p:cNvSpPr txBox="1"/>
+          <p:nvPr/>
+        </p:nvSpPr>
+        <p:spPr>
+          <a:xfrm>
+            <a:off x="4187952" y="3390595"/>
+            <a:ext cx="841248" cy="422453"/>
+          </a:xfrm>
+          <a:prstGeom prst="rect">
+            <a:avLst/>
+          </a:prstGeom>
+          <a:noFill/>
+          <a:ln/>
+        </p:spPr>
+        <p:txBody>
+          <a:bodyPr wrap="square" lIns="0" tIns="0" rIns="0" bIns="0" rtlCol="0" anchor="ctr"/>
+          <a:lstStyle/>
+          <a:p>
+            <a:pPr algn="r" indent="0" marL="0">
+              <a:buNone/>
+            </a:pPr>
+            <a:r>
+              <a:rPr lang="en-US" sz="1300" dirty="0">
+                <a:solidFill>
+                  <a:srgbClr val="595959"/>
+                </a:solidFill>
+                <a:latin typeface="Inter" pitchFamily="34" charset="0"/>
+                <a:ea typeface="Inter" pitchFamily="34" charset="-122"/>
+                <a:cs typeface="Inter" pitchFamily="34" charset="-120"/>
+              </a:rPr>
+              <a:t>$165,000</a:t>
+            </a:r>
+            <a:endParaRPr lang="en-US" sz="1300" dirty="0"/>
+          </a:p>
+        </p:txBody>
+      </p:sp>
+      <p:sp>
+        <p:nvSpPr>
+          <p:cNvPr id="36" name="Text 34"/>
+          <p:cNvSpPr txBox="1"/>
+          <p:nvPr/>
+        </p:nvSpPr>
+        <p:spPr>
+          <a:xfrm>
+            <a:off x="5029200" y="3390595"/>
+            <a:ext cx="841248" cy="422453"/>
+          </a:xfrm>
+          <a:prstGeom prst="rect">
+            <a:avLst/>
+          </a:prstGeom>
+          <a:noFill/>
+          <a:ln/>
+        </p:spPr>
+        <p:txBody>
+          <a:bodyPr wrap="square" lIns="0" tIns="0" rIns="0" bIns="0" rtlCol="0" anchor="ctr"/>
+          <a:lstStyle/>
+          <a:p>
+            <a:pPr algn="r" indent="0" marL="0">
+              <a:buNone/>
+            </a:pPr>
+            <a:r>
+              <a:rPr lang="en-US" sz="1300" dirty="0">
+                <a:solidFill>
+                  <a:srgbClr val="595959"/>
+                </a:solidFill>
+                <a:latin typeface="Inter" pitchFamily="34" charset="0"/>
+                <a:ea typeface="Inter" pitchFamily="34" charset="-122"/>
+                <a:cs typeface="Inter" pitchFamily="34" charset="-120"/>
+              </a:rPr>
+              <a:t>$127,056</a:t>
+            </a:r>
+            <a:endParaRPr lang="en-US" sz="1300" dirty="0"/>
+          </a:p>
+        </p:txBody>
+      </p:sp>
+      <p:sp>
+        <p:nvSpPr>
+          <p:cNvPr id="37" name="Text 35"/>
+          <p:cNvSpPr txBox="1"/>
+          <p:nvPr/>
+        </p:nvSpPr>
+        <p:spPr>
+          <a:xfrm>
+            <a:off x="658368" y="3813048"/>
+            <a:ext cx="1938528" cy="422453"/>
+          </a:xfrm>
+          <a:prstGeom prst="rect">
+            <a:avLst/>
+          </a:prstGeom>
+          <a:noFill/>
+          <a:ln/>
+        </p:spPr>
+        <p:txBody>
+          <a:bodyPr wrap="square" lIns="0" tIns="0" rIns="0" bIns="0" rtlCol="0" anchor="ctr"/>
           <a:lstStyle/>
           <a:p>
             <a:pPr indent="0" marL="0">
               <a:buNone/>
             </a:pPr>
             <a:r>
-              <a:rPr lang="en-US" sz="1800" b="1" dirty="0">
+              <a:rPr lang="en-US" sz="1300" dirty="0">
                 <a:solidFill>
                   <a:srgbClr val="1A1A1A"/>
                 </a:solidFill>
@@ -1804,38 +2319,273 @@
                 <a:ea typeface="Inter" pitchFamily="34" charset="-122"/>
                 <a:cs typeface="Inter" pitchFamily="34" charset="-120"/>
               </a:rPr>
-              <a:t>Manufacturer authorization</a:t>
-            </a:r>
-            <a:endParaRPr lang="en-US" sz="1800" dirty="0"/>
-          </a:p>
-        </p:txBody>
-      </p:sp>
-      <p:sp>
-        <p:nvSpPr>
-          <p:cNvPr id="31" name="Text 29"/>
-          <p:cNvSpPr txBox="1"/>
-          <p:nvPr/>
-        </p:nvSpPr>
-        <p:spPr>
-          <a:xfrm>
-            <a:off x="8208264" y="4777740"/>
-            <a:ext cx="3166872" cy="918972"/>
-          </a:xfrm>
-          <a:prstGeom prst="rect">
-            <a:avLst/>
-          </a:prstGeom>
-          <a:noFill/>
-          <a:ln/>
-        </p:spPr>
-        <p:txBody>
-          <a:bodyPr wrap="square" lIns="0" tIns="0" rIns="0" bIns="0" rtlCol="0" anchor="t"/>
+              <a:t>AUDI RENO</a:t>
+            </a:r>
+            <a:endParaRPr lang="en-US" sz="1300" dirty="0"/>
+          </a:p>
+        </p:txBody>
+      </p:sp>
+      <p:sp>
+        <p:nvSpPr>
+          <p:cNvPr id="38" name="Shape 36"/>
+          <p:cNvSpPr/>
+          <p:nvPr/>
+        </p:nvSpPr>
+        <p:spPr>
+          <a:xfrm>
+            <a:off x="2670048" y="3908100"/>
+            <a:ext cx="194987" cy="232349"/>
+          </a:xfrm>
+          <a:prstGeom prst="rect">
+            <a:avLst/>
+          </a:prstGeom>
+          <a:solidFill>
+            <a:srgbClr val="12A566"/>
+          </a:solidFill>
+          <a:ln/>
+        </p:spPr>
+      </p:sp>
+      <p:sp>
+        <p:nvSpPr>
+          <p:cNvPr id="39" name="Text 37"/>
+          <p:cNvSpPr txBox="1"/>
+          <p:nvPr/>
+        </p:nvSpPr>
+        <p:spPr>
+          <a:xfrm>
+            <a:off x="3273552" y="3813048"/>
+            <a:ext cx="914400" cy="422453"/>
+          </a:xfrm>
+          <a:prstGeom prst="rect">
+            <a:avLst/>
+          </a:prstGeom>
+          <a:noFill/>
+          <a:ln/>
+        </p:spPr>
+        <p:txBody>
+          <a:bodyPr wrap="square" lIns="0" tIns="0" rIns="0" bIns="0" rtlCol="0" anchor="ctr"/>
+          <a:lstStyle/>
+          <a:p>
+            <a:pPr algn="r" indent="0" marL="0">
+              <a:buNone/>
+            </a:pPr>
+            <a:r>
+              <a:rPr lang="en-US" sz="1300" b="1" dirty="0">
+                <a:solidFill>
+                  <a:srgbClr val="0B7A4A"/>
+                </a:solidFill>
+                <a:latin typeface="Inter" pitchFamily="34" charset="0"/>
+                <a:ea typeface="Inter" pitchFamily="34" charset="-122"/>
+                <a:cs typeface="Inter" pitchFamily="34" charset="-120"/>
+              </a:rPr>
+              <a:t>$283,584</a:t>
+            </a:r>
+            <a:endParaRPr lang="en-US" sz="1300" dirty="0"/>
+          </a:p>
+        </p:txBody>
+      </p:sp>
+      <p:sp>
+        <p:nvSpPr>
+          <p:cNvPr id="40" name="Text 38"/>
+          <p:cNvSpPr txBox="1"/>
+          <p:nvPr/>
+        </p:nvSpPr>
+        <p:spPr>
+          <a:xfrm>
+            <a:off x="4187952" y="3813048"/>
+            <a:ext cx="841248" cy="422453"/>
+          </a:xfrm>
+          <a:prstGeom prst="rect">
+            <a:avLst/>
+          </a:prstGeom>
+          <a:noFill/>
+          <a:ln/>
+        </p:spPr>
+        <p:txBody>
+          <a:bodyPr wrap="square" lIns="0" tIns="0" rIns="0" bIns="0" rtlCol="0" anchor="ctr"/>
+          <a:lstStyle/>
+          <a:p>
+            <a:pPr algn="r" indent="0" marL="0">
+              <a:buNone/>
+            </a:pPr>
+            <a:r>
+              <a:rPr lang="en-US" sz="1300" dirty="0">
+                <a:solidFill>
+                  <a:srgbClr val="595959"/>
+                </a:solidFill>
+                <a:latin typeface="Inter" pitchFamily="34" charset="0"/>
+                <a:ea typeface="Inter" pitchFamily="34" charset="-122"/>
+                <a:cs typeface="Inter" pitchFamily="34" charset="-120"/>
+              </a:rPr>
+              <a:t>$136,824</a:t>
+            </a:r>
+            <a:endParaRPr lang="en-US" sz="1300" dirty="0"/>
+          </a:p>
+        </p:txBody>
+      </p:sp>
+      <p:sp>
+        <p:nvSpPr>
+          <p:cNvPr id="41" name="Text 39"/>
+          <p:cNvSpPr txBox="1"/>
+          <p:nvPr/>
+        </p:nvSpPr>
+        <p:spPr>
+          <a:xfrm>
+            <a:off x="5029200" y="3813048"/>
+            <a:ext cx="841248" cy="422453"/>
+          </a:xfrm>
+          <a:prstGeom prst="rect">
+            <a:avLst/>
+          </a:prstGeom>
+          <a:noFill/>
+          <a:ln/>
+        </p:spPr>
+        <p:txBody>
+          <a:bodyPr wrap="square" lIns="0" tIns="0" rIns="0" bIns="0" rtlCol="0" anchor="ctr"/>
+          <a:lstStyle/>
+          <a:p>
+            <a:pPr algn="r" indent="0" marL="0">
+              <a:buNone/>
+            </a:pPr>
+            <a:r>
+              <a:rPr lang="en-US" sz="1300" dirty="0">
+                <a:solidFill>
+                  <a:srgbClr val="595959"/>
+                </a:solidFill>
+                <a:latin typeface="Inter" pitchFamily="34" charset="0"/>
+                <a:ea typeface="Inter" pitchFamily="34" charset="-122"/>
+                <a:cs typeface="Inter" pitchFamily="34" charset="-120"/>
+              </a:rPr>
+              <a:t>$146,760</a:t>
+            </a:r>
+            <a:endParaRPr lang="en-US" sz="1300" dirty="0"/>
+          </a:p>
+        </p:txBody>
+      </p:sp>
+      <p:sp>
+        <p:nvSpPr>
+          <p:cNvPr id="42" name="Text 40"/>
+          <p:cNvSpPr txBox="1"/>
+          <p:nvPr/>
+        </p:nvSpPr>
+        <p:spPr>
+          <a:xfrm>
+            <a:off x="658368" y="4235501"/>
+            <a:ext cx="1938528" cy="422453"/>
+          </a:xfrm>
+          <a:prstGeom prst="rect">
+            <a:avLst/>
+          </a:prstGeom>
+          <a:noFill/>
+          <a:ln/>
+        </p:spPr>
+        <p:txBody>
+          <a:bodyPr wrap="square" lIns="0" tIns="0" rIns="0" bIns="0" rtlCol="0" anchor="ctr"/>
           <a:lstStyle/>
           <a:p>
             <a:pPr indent="0" marL="0">
               <a:buNone/>
             </a:pPr>
             <a:r>
-              <a:rPr lang="en-US" sz="1500" dirty="0">
+              <a:rPr lang="en-US" sz="1300" dirty="0">
+                <a:solidFill>
+                  <a:srgbClr val="1A1A1A"/>
+                </a:solidFill>
+                <a:latin typeface="Inter" pitchFamily="34" charset="0"/>
+                <a:ea typeface="Inter" pitchFamily="34" charset="-122"/>
+                <a:cs typeface="Inter" pitchFamily="34" charset="-120"/>
+              </a:rPr>
+              <a:t>LEXUS</a:t>
+            </a:r>
+            <a:endParaRPr lang="en-US" sz="1300" dirty="0"/>
+          </a:p>
+        </p:txBody>
+      </p:sp>
+      <p:sp>
+        <p:nvSpPr>
+          <p:cNvPr id="43" name="Shape 41"/>
+          <p:cNvSpPr/>
+          <p:nvPr/>
+        </p:nvSpPr>
+        <p:spPr>
+          <a:xfrm>
+            <a:off x="2670048" y="4330553"/>
+            <a:ext cx="154953" cy="232349"/>
+          </a:xfrm>
+          <a:prstGeom prst="rect">
+            <a:avLst/>
+          </a:prstGeom>
+          <a:solidFill>
+            <a:srgbClr val="12A566"/>
+          </a:solidFill>
+          <a:ln/>
+        </p:spPr>
+      </p:sp>
+      <p:sp>
+        <p:nvSpPr>
+          <p:cNvPr id="44" name="Text 42"/>
+          <p:cNvSpPr txBox="1"/>
+          <p:nvPr/>
+        </p:nvSpPr>
+        <p:spPr>
+          <a:xfrm>
+            <a:off x="3273552" y="4235501"/>
+            <a:ext cx="914400" cy="422453"/>
+          </a:xfrm>
+          <a:prstGeom prst="rect">
+            <a:avLst/>
+          </a:prstGeom>
+          <a:noFill/>
+          <a:ln/>
+        </p:spPr>
+        <p:txBody>
+          <a:bodyPr wrap="square" lIns="0" tIns="0" rIns="0" bIns="0" rtlCol="0" anchor="ctr"/>
+          <a:lstStyle/>
+          <a:p>
+            <a:pPr algn="r" indent="0" marL="0">
+              <a:buNone/>
+            </a:pPr>
+            <a:r>
+              <a:rPr lang="en-US" sz="1300" b="1" dirty="0">
+                <a:solidFill>
+                  <a:srgbClr val="0B7A4A"/>
+                </a:solidFill>
+                <a:latin typeface="Inter" pitchFamily="34" charset="0"/>
+                <a:ea typeface="Inter" pitchFamily="34" charset="-122"/>
+                <a:cs typeface="Inter" pitchFamily="34" charset="-120"/>
+              </a:rPr>
+              <a:t>$225,360</a:t>
+            </a:r>
+            <a:endParaRPr lang="en-US" sz="1300" dirty="0"/>
+          </a:p>
+        </p:txBody>
+      </p:sp>
+      <p:sp>
+        <p:nvSpPr>
+          <p:cNvPr id="45" name="Text 43"/>
+          <p:cNvSpPr txBox="1"/>
+          <p:nvPr/>
+        </p:nvSpPr>
+        <p:spPr>
+          <a:xfrm>
+            <a:off x="4187952" y="4235501"/>
+            <a:ext cx="841248" cy="422453"/>
+          </a:xfrm>
+          <a:prstGeom prst="rect">
+            <a:avLst/>
+          </a:prstGeom>
+          <a:noFill/>
+          <a:ln/>
+        </p:spPr>
+        <p:txBody>
+          <a:bodyPr wrap="square" lIns="0" tIns="0" rIns="0" bIns="0" rtlCol="0" anchor="ctr"/>
+          <a:lstStyle/>
+          <a:p>
+            <a:pPr algn="r" indent="0" marL="0">
+              <a:buNone/>
+            </a:pPr>
+            <a:r>
+              <a:rPr lang="en-US" sz="1300" dirty="0">
                 <a:solidFill>
                   <a:srgbClr val="595959"/>
                 </a:solidFill>
@@ -1843,42 +2593,2193 @@
                 <a:ea typeface="Inter" pitchFamily="34" charset="-122"/>
                 <a:cs typeface="Inter" pitchFamily="34" charset="-120"/>
               </a:rPr>
-              <a:t>Prior approval on file wherever the manufacturer requires it</a:t>
-            </a:r>
-            <a:endParaRPr lang="en-US" sz="1500" dirty="0"/>
-          </a:p>
-        </p:txBody>
-      </p:sp>
-      <p:sp>
-        <p:nvSpPr>
-          <p:cNvPr id="32" name="Shape 30"/>
+              <a:t>$127,560</a:t>
+            </a:r>
+            <a:endParaRPr lang="en-US" sz="1300" dirty="0"/>
+          </a:p>
+        </p:txBody>
+      </p:sp>
+      <p:sp>
+        <p:nvSpPr>
+          <p:cNvPr id="46" name="Text 44"/>
+          <p:cNvSpPr txBox="1"/>
+          <p:nvPr/>
+        </p:nvSpPr>
+        <p:spPr>
+          <a:xfrm>
+            <a:off x="5029200" y="4235501"/>
+            <a:ext cx="841248" cy="422453"/>
+          </a:xfrm>
+          <a:prstGeom prst="rect">
+            <a:avLst/>
+          </a:prstGeom>
+          <a:noFill/>
+          <a:ln/>
+        </p:spPr>
+        <p:txBody>
+          <a:bodyPr wrap="square" lIns="0" tIns="0" rIns="0" bIns="0" rtlCol="0" anchor="ctr"/>
+          <a:lstStyle/>
+          <a:p>
+            <a:pPr algn="r" indent="0" marL="0">
+              <a:buNone/>
+            </a:pPr>
+            <a:r>
+              <a:rPr lang="en-US" sz="1300" dirty="0">
+                <a:solidFill>
+                  <a:srgbClr val="595959"/>
+                </a:solidFill>
+                <a:latin typeface="Inter" pitchFamily="34" charset="0"/>
+                <a:ea typeface="Inter" pitchFamily="34" charset="-122"/>
+                <a:cs typeface="Inter" pitchFamily="34" charset="-120"/>
+              </a:rPr>
+              <a:t>$97,800</a:t>
+            </a:r>
+            <a:endParaRPr lang="en-US" sz="1300" dirty="0"/>
+          </a:p>
+        </p:txBody>
+      </p:sp>
+      <p:sp>
+        <p:nvSpPr>
+          <p:cNvPr id="47" name="Text 45"/>
+          <p:cNvSpPr txBox="1"/>
+          <p:nvPr/>
+        </p:nvSpPr>
+        <p:spPr>
+          <a:xfrm>
+            <a:off x="658368" y="4657954"/>
+            <a:ext cx="1938528" cy="422453"/>
+          </a:xfrm>
+          <a:prstGeom prst="rect">
+            <a:avLst/>
+          </a:prstGeom>
+          <a:noFill/>
+          <a:ln/>
+        </p:spPr>
+        <p:txBody>
+          <a:bodyPr wrap="square" lIns="0" tIns="0" rIns="0" bIns="0" rtlCol="0" anchor="ctr"/>
+          <a:lstStyle/>
+          <a:p>
+            <a:pPr indent="0" marL="0">
+              <a:buNone/>
+            </a:pPr>
+            <a:r>
+              <a:rPr lang="en-US" sz="1300" dirty="0">
+                <a:solidFill>
+                  <a:srgbClr val="1A1A1A"/>
+                </a:solidFill>
+                <a:latin typeface="Inter" pitchFamily="34" charset="0"/>
+                <a:ea typeface="Inter" pitchFamily="34" charset="-122"/>
+                <a:cs typeface="Inter" pitchFamily="34" charset="-120"/>
+              </a:rPr>
+              <a:t>KIA ST GEORGE</a:t>
+            </a:r>
+            <a:endParaRPr lang="en-US" sz="1300" dirty="0"/>
+          </a:p>
+        </p:txBody>
+      </p:sp>
+      <p:sp>
+        <p:nvSpPr>
+          <p:cNvPr id="48" name="Shape 46"/>
           <p:cNvSpPr/>
           <p:nvPr/>
         </p:nvSpPr>
         <p:spPr>
           <a:xfrm>
+            <a:off x="2670048" y="4753005"/>
+            <a:ext cx="143889" cy="232349"/>
+          </a:xfrm>
+          <a:prstGeom prst="rect">
+            <a:avLst/>
+          </a:prstGeom>
+          <a:solidFill>
+            <a:srgbClr val="12A566"/>
+          </a:solidFill>
+          <a:ln/>
+        </p:spPr>
+      </p:sp>
+      <p:sp>
+        <p:nvSpPr>
+          <p:cNvPr id="49" name="Text 47"/>
+          <p:cNvSpPr txBox="1"/>
+          <p:nvPr/>
+        </p:nvSpPr>
+        <p:spPr>
+          <a:xfrm>
+            <a:off x="3273552" y="4657954"/>
+            <a:ext cx="914400" cy="422453"/>
+          </a:xfrm>
+          <a:prstGeom prst="rect">
+            <a:avLst/>
+          </a:prstGeom>
+          <a:noFill/>
+          <a:ln/>
+        </p:spPr>
+        <p:txBody>
+          <a:bodyPr wrap="square" lIns="0" tIns="0" rIns="0" bIns="0" rtlCol="0" anchor="ctr"/>
+          <a:lstStyle/>
+          <a:p>
+            <a:pPr algn="r" indent="0" marL="0">
+              <a:buNone/>
+            </a:pPr>
+            <a:r>
+              <a:rPr lang="en-US" sz="1300" b="1" dirty="0">
+                <a:solidFill>
+                  <a:srgbClr val="0B7A4A"/>
+                </a:solidFill>
+                <a:latin typeface="Inter" pitchFamily="34" charset="0"/>
+                <a:ea typeface="Inter" pitchFamily="34" charset="-122"/>
+                <a:cs typeface="Inter" pitchFamily="34" charset="-120"/>
+              </a:rPr>
+              <a:t>$209,268</a:t>
+            </a:r>
+            <a:endParaRPr lang="en-US" sz="1300" dirty="0"/>
+          </a:p>
+        </p:txBody>
+      </p:sp>
+      <p:sp>
+        <p:nvSpPr>
+          <p:cNvPr id="50" name="Text 48"/>
+          <p:cNvSpPr txBox="1"/>
+          <p:nvPr/>
+        </p:nvSpPr>
+        <p:spPr>
+          <a:xfrm>
+            <a:off x="4187952" y="4657954"/>
+            <a:ext cx="841248" cy="422453"/>
+          </a:xfrm>
+          <a:prstGeom prst="rect">
+            <a:avLst/>
+          </a:prstGeom>
+          <a:noFill/>
+          <a:ln/>
+        </p:spPr>
+        <p:txBody>
+          <a:bodyPr wrap="square" lIns="0" tIns="0" rIns="0" bIns="0" rtlCol="0" anchor="ctr"/>
+          <a:lstStyle/>
+          <a:p>
+            <a:pPr algn="r" indent="0" marL="0">
+              <a:buNone/>
+            </a:pPr>
+            <a:r>
+              <a:rPr lang="en-US" sz="1300" dirty="0">
+                <a:solidFill>
+                  <a:srgbClr val="595959"/>
+                </a:solidFill>
+                <a:latin typeface="Inter" pitchFamily="34" charset="0"/>
+                <a:ea typeface="Inter" pitchFamily="34" charset="-122"/>
+                <a:cs typeface="Inter" pitchFamily="34" charset="-120"/>
+              </a:rPr>
+              <a:t>$46,440</a:t>
+            </a:r>
+            <a:endParaRPr lang="en-US" sz="1300" dirty="0"/>
+          </a:p>
+        </p:txBody>
+      </p:sp>
+      <p:sp>
+        <p:nvSpPr>
+          <p:cNvPr id="51" name="Text 49"/>
+          <p:cNvSpPr txBox="1"/>
+          <p:nvPr/>
+        </p:nvSpPr>
+        <p:spPr>
+          <a:xfrm>
+            <a:off x="5029200" y="4657954"/>
+            <a:ext cx="841248" cy="422453"/>
+          </a:xfrm>
+          <a:prstGeom prst="rect">
+            <a:avLst/>
+          </a:prstGeom>
+          <a:noFill/>
+          <a:ln/>
+        </p:spPr>
+        <p:txBody>
+          <a:bodyPr wrap="square" lIns="0" tIns="0" rIns="0" bIns="0" rtlCol="0" anchor="ctr"/>
+          <a:lstStyle/>
+          <a:p>
+            <a:pPr algn="r" indent="0" marL="0">
+              <a:buNone/>
+            </a:pPr>
+            <a:r>
+              <a:rPr lang="en-US" sz="1300" dirty="0">
+                <a:solidFill>
+                  <a:srgbClr val="595959"/>
+                </a:solidFill>
+                <a:latin typeface="Inter" pitchFamily="34" charset="0"/>
+                <a:ea typeface="Inter" pitchFamily="34" charset="-122"/>
+                <a:cs typeface="Inter" pitchFamily="34" charset="-120"/>
+              </a:rPr>
+              <a:t>$162,828</a:t>
+            </a:r>
+            <a:endParaRPr lang="en-US" sz="1300" dirty="0"/>
+          </a:p>
+        </p:txBody>
+      </p:sp>
+      <p:sp>
+        <p:nvSpPr>
+          <p:cNvPr id="52" name="Text 50"/>
+          <p:cNvSpPr txBox="1"/>
+          <p:nvPr/>
+        </p:nvSpPr>
+        <p:spPr>
+          <a:xfrm>
+            <a:off x="658368" y="5080406"/>
+            <a:ext cx="1938528" cy="422453"/>
+          </a:xfrm>
+          <a:prstGeom prst="rect">
+            <a:avLst/>
+          </a:prstGeom>
+          <a:noFill/>
+          <a:ln/>
+        </p:spPr>
+        <p:txBody>
+          <a:bodyPr wrap="square" lIns="0" tIns="0" rIns="0" bIns="0" rtlCol="0" anchor="ctr"/>
+          <a:lstStyle/>
+          <a:p>
+            <a:pPr indent="0" marL="0">
+              <a:buNone/>
+            </a:pPr>
+            <a:r>
+              <a:rPr lang="en-US" sz="1300" dirty="0">
+                <a:solidFill>
+                  <a:srgbClr val="1A1A1A"/>
+                </a:solidFill>
+                <a:latin typeface="Inter" pitchFamily="34" charset="0"/>
+                <a:ea typeface="Inter" pitchFamily="34" charset="-122"/>
+                <a:cs typeface="Inter" pitchFamily="34" charset="-120"/>
+              </a:rPr>
+              <a:t>LR HENDERSON</a:t>
+            </a:r>
+            <a:endParaRPr lang="en-US" sz="1300" dirty="0"/>
+          </a:p>
+        </p:txBody>
+      </p:sp>
+      <p:sp>
+        <p:nvSpPr>
+          <p:cNvPr id="53" name="Shape 51"/>
+          <p:cNvSpPr/>
+          <p:nvPr/>
+        </p:nvSpPr>
+        <p:spPr>
+          <a:xfrm>
+            <a:off x="2670048" y="5175458"/>
+            <a:ext cx="100447" cy="232349"/>
+          </a:xfrm>
+          <a:prstGeom prst="rect">
+            <a:avLst/>
+          </a:prstGeom>
+          <a:solidFill>
+            <a:srgbClr val="12A566"/>
+          </a:solidFill>
+          <a:ln/>
+        </p:spPr>
+      </p:sp>
+      <p:sp>
+        <p:nvSpPr>
+          <p:cNvPr id="54" name="Text 52"/>
+          <p:cNvSpPr txBox="1"/>
+          <p:nvPr/>
+        </p:nvSpPr>
+        <p:spPr>
+          <a:xfrm>
+            <a:off x="3273552" y="5080406"/>
+            <a:ext cx="914400" cy="422453"/>
+          </a:xfrm>
+          <a:prstGeom prst="rect">
+            <a:avLst/>
+          </a:prstGeom>
+          <a:noFill/>
+          <a:ln/>
+        </p:spPr>
+        <p:txBody>
+          <a:bodyPr wrap="square" lIns="0" tIns="0" rIns="0" bIns="0" rtlCol="0" anchor="ctr"/>
+          <a:lstStyle/>
+          <a:p>
+            <a:pPr algn="r" indent="0" marL="0">
+              <a:buNone/>
+            </a:pPr>
+            <a:r>
+              <a:rPr lang="en-US" sz="1300" b="1" dirty="0">
+                <a:solidFill>
+                  <a:srgbClr val="0B7A4A"/>
+                </a:solidFill>
+                <a:latin typeface="Inter" pitchFamily="34" charset="0"/>
+                <a:ea typeface="Inter" pitchFamily="34" charset="-122"/>
+                <a:cs typeface="Inter" pitchFamily="34" charset="-120"/>
+              </a:rPr>
+              <a:t>$146,088</a:t>
+            </a:r>
+            <a:endParaRPr lang="en-US" sz="1300" dirty="0"/>
+          </a:p>
+        </p:txBody>
+      </p:sp>
+      <p:sp>
+        <p:nvSpPr>
+          <p:cNvPr id="55" name="Text 53"/>
+          <p:cNvSpPr txBox="1"/>
+          <p:nvPr/>
+        </p:nvSpPr>
+        <p:spPr>
+          <a:xfrm>
+            <a:off x="4187952" y="5080406"/>
+            <a:ext cx="841248" cy="422453"/>
+          </a:xfrm>
+          <a:prstGeom prst="rect">
+            <a:avLst/>
+          </a:prstGeom>
+          <a:noFill/>
+          <a:ln/>
+        </p:spPr>
+        <p:txBody>
+          <a:bodyPr wrap="square" lIns="0" tIns="0" rIns="0" bIns="0" rtlCol="0" anchor="ctr"/>
+          <a:lstStyle/>
+          <a:p>
+            <a:pPr algn="r" indent="0" marL="0">
+              <a:buNone/>
+            </a:pPr>
+            <a:r>
+              <a:rPr lang="en-US" sz="1300" dirty="0">
+                <a:solidFill>
+                  <a:srgbClr val="595959"/>
+                </a:solidFill>
+                <a:latin typeface="Inter" pitchFamily="34" charset="0"/>
+                <a:ea typeface="Inter" pitchFamily="34" charset="-122"/>
+                <a:cs typeface="Inter" pitchFamily="34" charset="-120"/>
+              </a:rPr>
+              <a:t>$49,068</a:t>
+            </a:r>
+            <a:endParaRPr lang="en-US" sz="1300" dirty="0"/>
+          </a:p>
+        </p:txBody>
+      </p:sp>
+      <p:sp>
+        <p:nvSpPr>
+          <p:cNvPr id="56" name="Text 54"/>
+          <p:cNvSpPr txBox="1"/>
+          <p:nvPr/>
+        </p:nvSpPr>
+        <p:spPr>
+          <a:xfrm>
+            <a:off x="5029200" y="5080406"/>
+            <a:ext cx="841248" cy="422453"/>
+          </a:xfrm>
+          <a:prstGeom prst="rect">
+            <a:avLst/>
+          </a:prstGeom>
+          <a:noFill/>
+          <a:ln/>
+        </p:spPr>
+        <p:txBody>
+          <a:bodyPr wrap="square" lIns="0" tIns="0" rIns="0" bIns="0" rtlCol="0" anchor="ctr"/>
+          <a:lstStyle/>
+          <a:p>
+            <a:pPr algn="r" indent="0" marL="0">
+              <a:buNone/>
+            </a:pPr>
+            <a:r>
+              <a:rPr lang="en-US" sz="1300" dirty="0">
+                <a:solidFill>
+                  <a:srgbClr val="595959"/>
+                </a:solidFill>
+                <a:latin typeface="Inter" pitchFamily="34" charset="0"/>
+                <a:ea typeface="Inter" pitchFamily="34" charset="-122"/>
+                <a:cs typeface="Inter" pitchFamily="34" charset="-120"/>
+              </a:rPr>
+              <a:t>$97,020</a:t>
+            </a:r>
+            <a:endParaRPr lang="en-US" sz="1300" dirty="0"/>
+          </a:p>
+        </p:txBody>
+      </p:sp>
+      <p:sp>
+        <p:nvSpPr>
+          <p:cNvPr id="57" name="Text 55"/>
+          <p:cNvSpPr txBox="1"/>
+          <p:nvPr/>
+        </p:nvSpPr>
+        <p:spPr>
+          <a:xfrm>
+            <a:off x="658368" y="5502859"/>
+            <a:ext cx="1938528" cy="422453"/>
+          </a:xfrm>
+          <a:prstGeom prst="rect">
+            <a:avLst/>
+          </a:prstGeom>
+          <a:noFill/>
+          <a:ln/>
+        </p:spPr>
+        <p:txBody>
+          <a:bodyPr wrap="square" lIns="0" tIns="0" rIns="0" bIns="0" rtlCol="0" anchor="ctr"/>
+          <a:lstStyle/>
+          <a:p>
+            <a:pPr indent="0" marL="0">
+              <a:buNone/>
+            </a:pPr>
+            <a:r>
+              <a:rPr lang="en-US" sz="1300" dirty="0">
+                <a:solidFill>
+                  <a:srgbClr val="1A1A1A"/>
+                </a:solidFill>
+                <a:latin typeface="Inter" pitchFamily="34" charset="0"/>
+                <a:ea typeface="Inter" pitchFamily="34" charset="-122"/>
+                <a:cs typeface="Inter" pitchFamily="34" charset="-120"/>
+              </a:rPr>
+              <a:t>MAZDA</a:t>
+            </a:r>
+            <a:endParaRPr lang="en-US" sz="1300" dirty="0"/>
+          </a:p>
+        </p:txBody>
+      </p:sp>
+      <p:sp>
+        <p:nvSpPr>
+          <p:cNvPr id="58" name="Shape 56"/>
+          <p:cNvSpPr/>
+          <p:nvPr/>
+        </p:nvSpPr>
+        <p:spPr>
+          <a:xfrm>
+            <a:off x="2670048" y="5597911"/>
+            <a:ext cx="91924" cy="232349"/>
+          </a:xfrm>
+          <a:prstGeom prst="rect">
+            <a:avLst/>
+          </a:prstGeom>
+          <a:solidFill>
+            <a:srgbClr val="12A566"/>
+          </a:solidFill>
+          <a:ln/>
+        </p:spPr>
+      </p:sp>
+      <p:sp>
+        <p:nvSpPr>
+          <p:cNvPr id="59" name="Text 57"/>
+          <p:cNvSpPr txBox="1"/>
+          <p:nvPr/>
+        </p:nvSpPr>
+        <p:spPr>
+          <a:xfrm>
+            <a:off x="3273552" y="5502859"/>
+            <a:ext cx="914400" cy="422453"/>
+          </a:xfrm>
+          <a:prstGeom prst="rect">
+            <a:avLst/>
+          </a:prstGeom>
+          <a:noFill/>
+          <a:ln/>
+        </p:spPr>
+        <p:txBody>
+          <a:bodyPr wrap="square" lIns="0" tIns="0" rIns="0" bIns="0" rtlCol="0" anchor="ctr"/>
+          <a:lstStyle/>
+          <a:p>
+            <a:pPr algn="r" indent="0" marL="0">
+              <a:buNone/>
+            </a:pPr>
+            <a:r>
+              <a:rPr lang="en-US" sz="1300" b="1" dirty="0">
+                <a:solidFill>
+                  <a:srgbClr val="0B7A4A"/>
+                </a:solidFill>
+                <a:latin typeface="Inter" pitchFamily="34" charset="0"/>
+                <a:ea typeface="Inter" pitchFamily="34" charset="-122"/>
+                <a:cs typeface="Inter" pitchFamily="34" charset="-120"/>
+              </a:rPr>
+              <a:t>$133,692</a:t>
+            </a:r>
+            <a:endParaRPr lang="en-US" sz="1300" dirty="0"/>
+          </a:p>
+        </p:txBody>
+      </p:sp>
+      <p:sp>
+        <p:nvSpPr>
+          <p:cNvPr id="60" name="Text 58"/>
+          <p:cNvSpPr txBox="1"/>
+          <p:nvPr/>
+        </p:nvSpPr>
+        <p:spPr>
+          <a:xfrm>
+            <a:off x="4187952" y="5502859"/>
+            <a:ext cx="841248" cy="422453"/>
+          </a:xfrm>
+          <a:prstGeom prst="rect">
+            <a:avLst/>
+          </a:prstGeom>
+          <a:noFill/>
+          <a:ln/>
+        </p:spPr>
+        <p:txBody>
+          <a:bodyPr wrap="square" lIns="0" tIns="0" rIns="0" bIns="0" rtlCol="0" anchor="ctr"/>
+          <a:lstStyle/>
+          <a:p>
+            <a:pPr algn="r" indent="0" marL="0">
+              <a:buNone/>
+            </a:pPr>
+            <a:r>
+              <a:rPr lang="en-US" sz="1300" dirty="0">
+                <a:solidFill>
+                  <a:srgbClr val="595959"/>
+                </a:solidFill>
+                <a:latin typeface="Inter" pitchFamily="34" charset="0"/>
+                <a:ea typeface="Inter" pitchFamily="34" charset="-122"/>
+                <a:cs typeface="Inter" pitchFamily="34" charset="-120"/>
+              </a:rPr>
+              <a:t>–</a:t>
+            </a:r>
+            <a:endParaRPr lang="en-US" sz="1300" dirty="0"/>
+          </a:p>
+        </p:txBody>
+      </p:sp>
+      <p:sp>
+        <p:nvSpPr>
+          <p:cNvPr id="61" name="Text 59"/>
+          <p:cNvSpPr txBox="1"/>
+          <p:nvPr/>
+        </p:nvSpPr>
+        <p:spPr>
+          <a:xfrm>
+            <a:off x="5029200" y="5502859"/>
+            <a:ext cx="841248" cy="422453"/>
+          </a:xfrm>
+          <a:prstGeom prst="rect">
+            <a:avLst/>
+          </a:prstGeom>
+          <a:noFill/>
+          <a:ln/>
+        </p:spPr>
+        <p:txBody>
+          <a:bodyPr wrap="square" lIns="0" tIns="0" rIns="0" bIns="0" rtlCol="0" anchor="ctr"/>
+          <a:lstStyle/>
+          <a:p>
+            <a:pPr algn="r" indent="0" marL="0">
+              <a:buNone/>
+            </a:pPr>
+            <a:r>
+              <a:rPr lang="en-US" sz="1300" dirty="0">
+                <a:solidFill>
+                  <a:srgbClr val="595959"/>
+                </a:solidFill>
+                <a:latin typeface="Inter" pitchFamily="34" charset="0"/>
+                <a:ea typeface="Inter" pitchFamily="34" charset="-122"/>
+                <a:cs typeface="Inter" pitchFamily="34" charset="-120"/>
+              </a:rPr>
+              <a:t>$133,692</a:t>
+            </a:r>
+            <a:endParaRPr lang="en-US" sz="1300" dirty="0"/>
+          </a:p>
+        </p:txBody>
+      </p:sp>
+      <p:sp>
+        <p:nvSpPr>
+          <p:cNvPr id="62" name="Text 60"/>
+          <p:cNvSpPr txBox="1"/>
+          <p:nvPr/>
+        </p:nvSpPr>
+        <p:spPr>
+          <a:xfrm>
+            <a:off x="6208776" y="1700784"/>
+            <a:ext cx="1938528" cy="422453"/>
+          </a:xfrm>
+          <a:prstGeom prst="rect">
+            <a:avLst/>
+          </a:prstGeom>
+          <a:noFill/>
+          <a:ln/>
+        </p:spPr>
+        <p:txBody>
+          <a:bodyPr wrap="square" lIns="0" tIns="0" rIns="0" bIns="0" rtlCol="0" anchor="ctr"/>
+          <a:lstStyle/>
+          <a:p>
+            <a:pPr indent="0" marL="0">
+              <a:buNone/>
+            </a:pPr>
+            <a:r>
+              <a:rPr lang="en-US" sz="1300" dirty="0">
+                <a:solidFill>
+                  <a:srgbClr val="1A1A1A"/>
+                </a:solidFill>
+                <a:latin typeface="Inter" pitchFamily="34" charset="0"/>
+                <a:ea typeface="Inter" pitchFamily="34" charset="-122"/>
+                <a:cs typeface="Inter" pitchFamily="34" charset="-120"/>
+              </a:rPr>
+              <a:t>HONDA HENDERSON</a:t>
+            </a:r>
+            <a:endParaRPr lang="en-US" sz="1300" dirty="0"/>
+          </a:p>
+        </p:txBody>
+      </p:sp>
+      <p:sp>
+        <p:nvSpPr>
+          <p:cNvPr id="63" name="Shape 61"/>
+          <p:cNvSpPr/>
+          <p:nvPr/>
+        </p:nvSpPr>
+        <p:spPr>
+          <a:xfrm>
+            <a:off x="8220456" y="1795836"/>
+            <a:ext cx="66189" cy="232349"/>
+          </a:xfrm>
+          <a:prstGeom prst="rect">
+            <a:avLst/>
+          </a:prstGeom>
+          <a:solidFill>
+            <a:srgbClr val="12A566"/>
+          </a:solidFill>
+          <a:ln/>
+        </p:spPr>
+      </p:sp>
+      <p:sp>
+        <p:nvSpPr>
+          <p:cNvPr id="64" name="Text 62"/>
+          <p:cNvSpPr txBox="1"/>
+          <p:nvPr/>
+        </p:nvSpPr>
+        <p:spPr>
+          <a:xfrm>
+            <a:off x="8823960" y="1700784"/>
+            <a:ext cx="914400" cy="422453"/>
+          </a:xfrm>
+          <a:prstGeom prst="rect">
+            <a:avLst/>
+          </a:prstGeom>
+          <a:noFill/>
+          <a:ln/>
+        </p:spPr>
+        <p:txBody>
+          <a:bodyPr wrap="square" lIns="0" tIns="0" rIns="0" bIns="0" rtlCol="0" anchor="ctr"/>
+          <a:lstStyle/>
+          <a:p>
+            <a:pPr algn="r" indent="0" marL="0">
+              <a:buNone/>
+            </a:pPr>
+            <a:r>
+              <a:rPr lang="en-US" sz="1300" b="1" dirty="0">
+                <a:solidFill>
+                  <a:srgbClr val="0B7A4A"/>
+                </a:solidFill>
+                <a:latin typeface="Inter" pitchFamily="34" charset="0"/>
+                <a:ea typeface="Inter" pitchFamily="34" charset="-122"/>
+                <a:cs typeface="Inter" pitchFamily="34" charset="-120"/>
+              </a:rPr>
+              <a:t>$96,264</a:t>
+            </a:r>
+            <a:endParaRPr lang="en-US" sz="1300" dirty="0"/>
+          </a:p>
+        </p:txBody>
+      </p:sp>
+      <p:sp>
+        <p:nvSpPr>
+          <p:cNvPr id="65" name="Text 63"/>
+          <p:cNvSpPr txBox="1"/>
+          <p:nvPr/>
+        </p:nvSpPr>
+        <p:spPr>
+          <a:xfrm>
+            <a:off x="9738360" y="1700784"/>
+            <a:ext cx="841248" cy="422453"/>
+          </a:xfrm>
+          <a:prstGeom prst="rect">
+            <a:avLst/>
+          </a:prstGeom>
+          <a:noFill/>
+          <a:ln/>
+        </p:spPr>
+        <p:txBody>
+          <a:bodyPr wrap="square" lIns="0" tIns="0" rIns="0" bIns="0" rtlCol="0" anchor="ctr"/>
+          <a:lstStyle/>
+          <a:p>
+            <a:pPr algn="r" indent="0" marL="0">
+              <a:buNone/>
+            </a:pPr>
+            <a:r>
+              <a:rPr lang="en-US" sz="1300" dirty="0">
+                <a:solidFill>
+                  <a:srgbClr val="595959"/>
+                </a:solidFill>
+                <a:latin typeface="Inter" pitchFamily="34" charset="0"/>
+                <a:ea typeface="Inter" pitchFamily="34" charset="-122"/>
+                <a:cs typeface="Inter" pitchFamily="34" charset="-120"/>
+              </a:rPr>
+              <a:t>–</a:t>
+            </a:r>
+            <a:endParaRPr lang="en-US" sz="1300" dirty="0"/>
+          </a:p>
+        </p:txBody>
+      </p:sp>
+      <p:sp>
+        <p:nvSpPr>
+          <p:cNvPr id="66" name="Text 64"/>
+          <p:cNvSpPr txBox="1"/>
+          <p:nvPr/>
+        </p:nvSpPr>
+        <p:spPr>
+          <a:xfrm>
+            <a:off x="10579608" y="1700784"/>
+            <a:ext cx="841248" cy="422453"/>
+          </a:xfrm>
+          <a:prstGeom prst="rect">
+            <a:avLst/>
+          </a:prstGeom>
+          <a:noFill/>
+          <a:ln/>
+        </p:spPr>
+        <p:txBody>
+          <a:bodyPr wrap="square" lIns="0" tIns="0" rIns="0" bIns="0" rtlCol="0" anchor="ctr"/>
+          <a:lstStyle/>
+          <a:p>
+            <a:pPr algn="r" indent="0" marL="0">
+              <a:buNone/>
+            </a:pPr>
+            <a:r>
+              <a:rPr lang="en-US" sz="1300" dirty="0">
+                <a:solidFill>
+                  <a:srgbClr val="595959"/>
+                </a:solidFill>
+                <a:latin typeface="Inter" pitchFamily="34" charset="0"/>
+                <a:ea typeface="Inter" pitchFamily="34" charset="-122"/>
+                <a:cs typeface="Inter" pitchFamily="34" charset="-120"/>
+              </a:rPr>
+              <a:t>$96,264</a:t>
+            </a:r>
+            <a:endParaRPr lang="en-US" sz="1300" dirty="0"/>
+          </a:p>
+        </p:txBody>
+      </p:sp>
+      <p:sp>
+        <p:nvSpPr>
+          <p:cNvPr id="67" name="Text 65"/>
+          <p:cNvSpPr txBox="1"/>
+          <p:nvPr/>
+        </p:nvSpPr>
+        <p:spPr>
+          <a:xfrm>
+            <a:off x="6208776" y="2123237"/>
+            <a:ext cx="1938528" cy="422453"/>
+          </a:xfrm>
+          <a:prstGeom prst="rect">
+            <a:avLst/>
+          </a:prstGeom>
+          <a:noFill/>
+          <a:ln/>
+        </p:spPr>
+        <p:txBody>
+          <a:bodyPr wrap="square" lIns="0" tIns="0" rIns="0" bIns="0" rtlCol="0" anchor="ctr"/>
+          <a:lstStyle/>
+          <a:p>
+            <a:pPr indent="0" marL="0">
+              <a:buNone/>
+            </a:pPr>
+            <a:r>
+              <a:rPr lang="en-US" sz="1300" dirty="0">
+                <a:solidFill>
+                  <a:srgbClr val="1A1A1A"/>
+                </a:solidFill>
+                <a:latin typeface="Inter" pitchFamily="34" charset="0"/>
+                <a:ea typeface="Inter" pitchFamily="34" charset="-122"/>
+                <a:cs typeface="Inter" pitchFamily="34" charset="-120"/>
+              </a:rPr>
+              <a:t>HONDA SPOKANE</a:t>
+            </a:r>
+            <a:endParaRPr lang="en-US" sz="1300" dirty="0"/>
+          </a:p>
+        </p:txBody>
+      </p:sp>
+      <p:sp>
+        <p:nvSpPr>
+          <p:cNvPr id="68" name="Shape 66"/>
+          <p:cNvSpPr/>
+          <p:nvPr/>
+        </p:nvSpPr>
+        <p:spPr>
+          <a:xfrm>
+            <a:off x="8220456" y="2218289"/>
+            <a:ext cx="65059" cy="232349"/>
+          </a:xfrm>
+          <a:prstGeom prst="rect">
+            <a:avLst/>
+          </a:prstGeom>
+          <a:solidFill>
+            <a:srgbClr val="12A566"/>
+          </a:solidFill>
+          <a:ln/>
+        </p:spPr>
+      </p:sp>
+      <p:sp>
+        <p:nvSpPr>
+          <p:cNvPr id="69" name="Text 67"/>
+          <p:cNvSpPr txBox="1"/>
+          <p:nvPr/>
+        </p:nvSpPr>
+        <p:spPr>
+          <a:xfrm>
+            <a:off x="8823960" y="2123237"/>
+            <a:ext cx="914400" cy="422453"/>
+          </a:xfrm>
+          <a:prstGeom prst="rect">
+            <a:avLst/>
+          </a:prstGeom>
+          <a:noFill/>
+          <a:ln/>
+        </p:spPr>
+        <p:txBody>
+          <a:bodyPr wrap="square" lIns="0" tIns="0" rIns="0" bIns="0" rtlCol="0" anchor="ctr"/>
+          <a:lstStyle/>
+          <a:p>
+            <a:pPr algn="r" indent="0" marL="0">
+              <a:buNone/>
+            </a:pPr>
+            <a:r>
+              <a:rPr lang="en-US" sz="1300" b="1" dirty="0">
+                <a:solidFill>
+                  <a:srgbClr val="0B7A4A"/>
+                </a:solidFill>
+                <a:latin typeface="Inter" pitchFamily="34" charset="0"/>
+                <a:ea typeface="Inter" pitchFamily="34" charset="-122"/>
+                <a:cs typeface="Inter" pitchFamily="34" charset="-120"/>
+              </a:rPr>
+              <a:t>$94,620</a:t>
+            </a:r>
+            <a:endParaRPr lang="en-US" sz="1300" dirty="0"/>
+          </a:p>
+        </p:txBody>
+      </p:sp>
+      <p:sp>
+        <p:nvSpPr>
+          <p:cNvPr id="70" name="Text 68"/>
+          <p:cNvSpPr txBox="1"/>
+          <p:nvPr/>
+        </p:nvSpPr>
+        <p:spPr>
+          <a:xfrm>
+            <a:off x="9738360" y="2123237"/>
+            <a:ext cx="841248" cy="422453"/>
+          </a:xfrm>
+          <a:prstGeom prst="rect">
+            <a:avLst/>
+          </a:prstGeom>
+          <a:noFill/>
+          <a:ln/>
+        </p:spPr>
+        <p:txBody>
+          <a:bodyPr wrap="square" lIns="0" tIns="0" rIns="0" bIns="0" rtlCol="0" anchor="ctr"/>
+          <a:lstStyle/>
+          <a:p>
+            <a:pPr algn="r" indent="0" marL="0">
+              <a:buNone/>
+            </a:pPr>
+            <a:r>
+              <a:rPr lang="en-US" sz="1300" dirty="0">
+                <a:solidFill>
+                  <a:srgbClr val="595959"/>
+                </a:solidFill>
+                <a:latin typeface="Inter" pitchFamily="34" charset="0"/>
+                <a:ea typeface="Inter" pitchFamily="34" charset="-122"/>
+                <a:cs typeface="Inter" pitchFamily="34" charset="-120"/>
+              </a:rPr>
+              <a:t>$63,852</a:t>
+            </a:r>
+            <a:endParaRPr lang="en-US" sz="1300" dirty="0"/>
+          </a:p>
+        </p:txBody>
+      </p:sp>
+      <p:sp>
+        <p:nvSpPr>
+          <p:cNvPr id="71" name="Text 69"/>
+          <p:cNvSpPr txBox="1"/>
+          <p:nvPr/>
+        </p:nvSpPr>
+        <p:spPr>
+          <a:xfrm>
+            <a:off x="10579608" y="2123237"/>
+            <a:ext cx="841248" cy="422453"/>
+          </a:xfrm>
+          <a:prstGeom prst="rect">
+            <a:avLst/>
+          </a:prstGeom>
+          <a:noFill/>
+          <a:ln/>
+        </p:spPr>
+        <p:txBody>
+          <a:bodyPr wrap="square" lIns="0" tIns="0" rIns="0" bIns="0" rtlCol="0" anchor="ctr"/>
+          <a:lstStyle/>
+          <a:p>
+            <a:pPr algn="r" indent="0" marL="0">
+              <a:buNone/>
+            </a:pPr>
+            <a:r>
+              <a:rPr lang="en-US" sz="1300" dirty="0">
+                <a:solidFill>
+                  <a:srgbClr val="595959"/>
+                </a:solidFill>
+                <a:latin typeface="Inter" pitchFamily="34" charset="0"/>
+                <a:ea typeface="Inter" pitchFamily="34" charset="-122"/>
+                <a:cs typeface="Inter" pitchFamily="34" charset="-120"/>
+              </a:rPr>
+              <a:t>$30,768</a:t>
+            </a:r>
+            <a:endParaRPr lang="en-US" sz="1300" dirty="0"/>
+          </a:p>
+        </p:txBody>
+      </p:sp>
+      <p:sp>
+        <p:nvSpPr>
+          <p:cNvPr id="72" name="Text 70"/>
+          <p:cNvSpPr txBox="1"/>
+          <p:nvPr/>
+        </p:nvSpPr>
+        <p:spPr>
+          <a:xfrm>
+            <a:off x="6208776" y="2545690"/>
+            <a:ext cx="1938528" cy="422453"/>
+          </a:xfrm>
+          <a:prstGeom prst="rect">
+            <a:avLst/>
+          </a:prstGeom>
+          <a:noFill/>
+          <a:ln/>
+        </p:spPr>
+        <p:txBody>
+          <a:bodyPr wrap="square" lIns="0" tIns="0" rIns="0" bIns="0" rtlCol="0" anchor="ctr"/>
+          <a:lstStyle/>
+          <a:p>
+            <a:pPr indent="0" marL="0">
+              <a:buNone/>
+            </a:pPr>
+            <a:r>
+              <a:rPr lang="en-US" sz="1300" dirty="0">
+                <a:solidFill>
+                  <a:srgbClr val="1A1A1A"/>
+                </a:solidFill>
+                <a:latin typeface="Inter" pitchFamily="34" charset="0"/>
+                <a:ea typeface="Inter" pitchFamily="34" charset="-122"/>
+                <a:cs typeface="Inter" pitchFamily="34" charset="-120"/>
+              </a:rPr>
+              <a:t>LR RENO</a:t>
+            </a:r>
+            <a:endParaRPr lang="en-US" sz="1300" dirty="0"/>
+          </a:p>
+        </p:txBody>
+      </p:sp>
+      <p:sp>
+        <p:nvSpPr>
+          <p:cNvPr id="73" name="Shape 71"/>
+          <p:cNvSpPr/>
+          <p:nvPr/>
+        </p:nvSpPr>
+        <p:spPr>
+          <a:xfrm>
+            <a:off x="8220456" y="2640741"/>
+            <a:ext cx="64094" cy="232349"/>
+          </a:xfrm>
+          <a:prstGeom prst="rect">
+            <a:avLst/>
+          </a:prstGeom>
+          <a:solidFill>
+            <a:srgbClr val="12A566"/>
+          </a:solidFill>
+          <a:ln/>
+        </p:spPr>
+      </p:sp>
+      <p:sp>
+        <p:nvSpPr>
+          <p:cNvPr id="74" name="Text 72"/>
+          <p:cNvSpPr txBox="1"/>
+          <p:nvPr/>
+        </p:nvSpPr>
+        <p:spPr>
+          <a:xfrm>
+            <a:off x="8823960" y="2545690"/>
+            <a:ext cx="914400" cy="422453"/>
+          </a:xfrm>
+          <a:prstGeom prst="rect">
+            <a:avLst/>
+          </a:prstGeom>
+          <a:noFill/>
+          <a:ln/>
+        </p:spPr>
+        <p:txBody>
+          <a:bodyPr wrap="square" lIns="0" tIns="0" rIns="0" bIns="0" rtlCol="0" anchor="ctr"/>
+          <a:lstStyle/>
+          <a:p>
+            <a:pPr algn="r" indent="0" marL="0">
+              <a:buNone/>
+            </a:pPr>
+            <a:r>
+              <a:rPr lang="en-US" sz="1300" b="1" dirty="0">
+                <a:solidFill>
+                  <a:srgbClr val="0B7A4A"/>
+                </a:solidFill>
+                <a:latin typeface="Inter" pitchFamily="34" charset="0"/>
+                <a:ea typeface="Inter" pitchFamily="34" charset="-122"/>
+                <a:cs typeface="Inter" pitchFamily="34" charset="-120"/>
+              </a:rPr>
+              <a:t>$93,216</a:t>
+            </a:r>
+            <a:endParaRPr lang="en-US" sz="1300" dirty="0"/>
+          </a:p>
+        </p:txBody>
+      </p:sp>
+      <p:sp>
+        <p:nvSpPr>
+          <p:cNvPr id="75" name="Text 73"/>
+          <p:cNvSpPr txBox="1"/>
+          <p:nvPr/>
+        </p:nvSpPr>
+        <p:spPr>
+          <a:xfrm>
+            <a:off x="9738360" y="2545690"/>
+            <a:ext cx="841248" cy="422453"/>
+          </a:xfrm>
+          <a:prstGeom prst="rect">
+            <a:avLst/>
+          </a:prstGeom>
+          <a:noFill/>
+          <a:ln/>
+        </p:spPr>
+        <p:txBody>
+          <a:bodyPr wrap="square" lIns="0" tIns="0" rIns="0" bIns="0" rtlCol="0" anchor="ctr"/>
+          <a:lstStyle/>
+          <a:p>
+            <a:pPr algn="r" indent="0" marL="0">
+              <a:buNone/>
+            </a:pPr>
+            <a:r>
+              <a:rPr lang="en-US" sz="1300" dirty="0">
+                <a:solidFill>
+                  <a:srgbClr val="595959"/>
+                </a:solidFill>
+                <a:latin typeface="Inter" pitchFamily="34" charset="0"/>
+                <a:ea typeface="Inter" pitchFamily="34" charset="-122"/>
+                <a:cs typeface="Inter" pitchFamily="34" charset="-120"/>
+              </a:rPr>
+              <a:t>$32,748</a:t>
+            </a:r>
+            <a:endParaRPr lang="en-US" sz="1300" dirty="0"/>
+          </a:p>
+        </p:txBody>
+      </p:sp>
+      <p:sp>
+        <p:nvSpPr>
+          <p:cNvPr id="76" name="Text 74"/>
+          <p:cNvSpPr txBox="1"/>
+          <p:nvPr/>
+        </p:nvSpPr>
+        <p:spPr>
+          <a:xfrm>
+            <a:off x="10579608" y="2545690"/>
+            <a:ext cx="841248" cy="422453"/>
+          </a:xfrm>
+          <a:prstGeom prst="rect">
+            <a:avLst/>
+          </a:prstGeom>
+          <a:noFill/>
+          <a:ln/>
+        </p:spPr>
+        <p:txBody>
+          <a:bodyPr wrap="square" lIns="0" tIns="0" rIns="0" bIns="0" rtlCol="0" anchor="ctr"/>
+          <a:lstStyle/>
+          <a:p>
+            <a:pPr algn="r" indent="0" marL="0">
+              <a:buNone/>
+            </a:pPr>
+            <a:r>
+              <a:rPr lang="en-US" sz="1300" dirty="0">
+                <a:solidFill>
+                  <a:srgbClr val="595959"/>
+                </a:solidFill>
+                <a:latin typeface="Inter" pitchFamily="34" charset="0"/>
+                <a:ea typeface="Inter" pitchFamily="34" charset="-122"/>
+                <a:cs typeface="Inter" pitchFamily="34" charset="-120"/>
+              </a:rPr>
+              <a:t>$60,468</a:t>
+            </a:r>
+            <a:endParaRPr lang="en-US" sz="1300" dirty="0"/>
+          </a:p>
+        </p:txBody>
+      </p:sp>
+      <p:sp>
+        <p:nvSpPr>
+          <p:cNvPr id="77" name="Text 75"/>
+          <p:cNvSpPr txBox="1"/>
+          <p:nvPr/>
+        </p:nvSpPr>
+        <p:spPr>
+          <a:xfrm>
+            <a:off x="6208776" y="2968142"/>
+            <a:ext cx="1938528" cy="422453"/>
+          </a:xfrm>
+          <a:prstGeom prst="rect">
+            <a:avLst/>
+          </a:prstGeom>
+          <a:noFill/>
+          <a:ln/>
+        </p:spPr>
+        <p:txBody>
+          <a:bodyPr wrap="square" lIns="0" tIns="0" rIns="0" bIns="0" rtlCol="0" anchor="ctr"/>
+          <a:lstStyle/>
+          <a:p>
+            <a:pPr indent="0" marL="0">
+              <a:buNone/>
+            </a:pPr>
+            <a:r>
+              <a:rPr lang="en-US" sz="1300" dirty="0">
+                <a:solidFill>
+                  <a:srgbClr val="1A1A1A"/>
+                </a:solidFill>
+                <a:latin typeface="Inter" pitchFamily="34" charset="0"/>
+                <a:ea typeface="Inter" pitchFamily="34" charset="-122"/>
+                <a:cs typeface="Inter" pitchFamily="34" charset="-120"/>
+              </a:rPr>
+              <a:t>SUBARU PRESCOTT</a:t>
+            </a:r>
+            <a:endParaRPr lang="en-US" sz="1300" dirty="0"/>
+          </a:p>
+        </p:txBody>
+      </p:sp>
+      <p:sp>
+        <p:nvSpPr>
+          <p:cNvPr id="78" name="Shape 76"/>
+          <p:cNvSpPr/>
+          <p:nvPr/>
+        </p:nvSpPr>
+        <p:spPr>
+          <a:xfrm>
+            <a:off x="8220456" y="3063194"/>
+            <a:ext cx="62344" cy="232349"/>
+          </a:xfrm>
+          <a:prstGeom prst="rect">
+            <a:avLst/>
+          </a:prstGeom>
+          <a:solidFill>
+            <a:srgbClr val="12A566"/>
+          </a:solidFill>
+          <a:ln/>
+        </p:spPr>
+      </p:sp>
+      <p:sp>
+        <p:nvSpPr>
+          <p:cNvPr id="79" name="Text 77"/>
+          <p:cNvSpPr txBox="1"/>
+          <p:nvPr/>
+        </p:nvSpPr>
+        <p:spPr>
+          <a:xfrm>
+            <a:off x="8823960" y="2968142"/>
+            <a:ext cx="914400" cy="422453"/>
+          </a:xfrm>
+          <a:prstGeom prst="rect">
+            <a:avLst/>
+          </a:prstGeom>
+          <a:noFill/>
+          <a:ln/>
+        </p:spPr>
+        <p:txBody>
+          <a:bodyPr wrap="square" lIns="0" tIns="0" rIns="0" bIns="0" rtlCol="0" anchor="ctr"/>
+          <a:lstStyle/>
+          <a:p>
+            <a:pPr algn="r" indent="0" marL="0">
+              <a:buNone/>
+            </a:pPr>
+            <a:r>
+              <a:rPr lang="en-US" sz="1300" b="1" dirty="0">
+                <a:solidFill>
+                  <a:srgbClr val="0B7A4A"/>
+                </a:solidFill>
+                <a:latin typeface="Inter" pitchFamily="34" charset="0"/>
+                <a:ea typeface="Inter" pitchFamily="34" charset="-122"/>
+                <a:cs typeface="Inter" pitchFamily="34" charset="-120"/>
+              </a:rPr>
+              <a:t>$90,672</a:t>
+            </a:r>
+            <a:endParaRPr lang="en-US" sz="1300" dirty="0"/>
+          </a:p>
+        </p:txBody>
+      </p:sp>
+      <p:sp>
+        <p:nvSpPr>
+          <p:cNvPr id="80" name="Text 78"/>
+          <p:cNvSpPr txBox="1"/>
+          <p:nvPr/>
+        </p:nvSpPr>
+        <p:spPr>
+          <a:xfrm>
+            <a:off x="9738360" y="2968142"/>
+            <a:ext cx="841248" cy="422453"/>
+          </a:xfrm>
+          <a:prstGeom prst="rect">
+            <a:avLst/>
+          </a:prstGeom>
+          <a:noFill/>
+          <a:ln/>
+        </p:spPr>
+        <p:txBody>
+          <a:bodyPr wrap="square" lIns="0" tIns="0" rIns="0" bIns="0" rtlCol="0" anchor="ctr"/>
+          <a:lstStyle/>
+          <a:p>
+            <a:pPr algn="r" indent="0" marL="0">
+              <a:buNone/>
+            </a:pPr>
+            <a:r>
+              <a:rPr lang="en-US" sz="1300" dirty="0">
+                <a:solidFill>
+                  <a:srgbClr val="595959"/>
+                </a:solidFill>
+                <a:latin typeface="Inter" pitchFamily="34" charset="0"/>
+                <a:ea typeface="Inter" pitchFamily="34" charset="-122"/>
+                <a:cs typeface="Inter" pitchFamily="34" charset="-120"/>
+              </a:rPr>
+              <a:t>$37,212</a:t>
+            </a:r>
+            <a:endParaRPr lang="en-US" sz="1300" dirty="0"/>
+          </a:p>
+        </p:txBody>
+      </p:sp>
+      <p:sp>
+        <p:nvSpPr>
+          <p:cNvPr id="81" name="Text 79"/>
+          <p:cNvSpPr txBox="1"/>
+          <p:nvPr/>
+        </p:nvSpPr>
+        <p:spPr>
+          <a:xfrm>
+            <a:off x="10579608" y="2968142"/>
+            <a:ext cx="841248" cy="422453"/>
+          </a:xfrm>
+          <a:prstGeom prst="rect">
+            <a:avLst/>
+          </a:prstGeom>
+          <a:noFill/>
+          <a:ln/>
+        </p:spPr>
+        <p:txBody>
+          <a:bodyPr wrap="square" lIns="0" tIns="0" rIns="0" bIns="0" rtlCol="0" anchor="ctr"/>
+          <a:lstStyle/>
+          <a:p>
+            <a:pPr algn="r" indent="0" marL="0">
+              <a:buNone/>
+            </a:pPr>
+            <a:r>
+              <a:rPr lang="en-US" sz="1300" dirty="0">
+                <a:solidFill>
+                  <a:srgbClr val="595959"/>
+                </a:solidFill>
+                <a:latin typeface="Inter" pitchFamily="34" charset="0"/>
+                <a:ea typeface="Inter" pitchFamily="34" charset="-122"/>
+                <a:cs typeface="Inter" pitchFamily="34" charset="-120"/>
+              </a:rPr>
+              <a:t>$53,460</a:t>
+            </a:r>
+            <a:endParaRPr lang="en-US" sz="1300" dirty="0"/>
+          </a:p>
+        </p:txBody>
+      </p:sp>
+      <p:sp>
+        <p:nvSpPr>
+          <p:cNvPr id="82" name="Text 80"/>
+          <p:cNvSpPr txBox="1"/>
+          <p:nvPr/>
+        </p:nvSpPr>
+        <p:spPr>
+          <a:xfrm>
+            <a:off x="6208776" y="3390595"/>
+            <a:ext cx="1938528" cy="422453"/>
+          </a:xfrm>
+          <a:prstGeom prst="rect">
+            <a:avLst/>
+          </a:prstGeom>
+          <a:noFill/>
+          <a:ln/>
+        </p:spPr>
+        <p:txBody>
+          <a:bodyPr wrap="square" lIns="0" tIns="0" rIns="0" bIns="0" rtlCol="0" anchor="ctr"/>
+          <a:lstStyle/>
+          <a:p>
+            <a:pPr indent="0" marL="0">
+              <a:buNone/>
+            </a:pPr>
+            <a:r>
+              <a:rPr lang="en-US" sz="1300" dirty="0">
+                <a:solidFill>
+                  <a:srgbClr val="1A1A1A"/>
+                </a:solidFill>
+                <a:latin typeface="Inter" pitchFamily="34" charset="0"/>
+                <a:ea typeface="Inter" pitchFamily="34" charset="-122"/>
+                <a:cs typeface="Inter" pitchFamily="34" charset="-120"/>
+              </a:rPr>
+              <a:t>ACURA</a:t>
+            </a:r>
+            <a:endParaRPr lang="en-US" sz="1300" dirty="0"/>
+          </a:p>
+        </p:txBody>
+      </p:sp>
+      <p:sp>
+        <p:nvSpPr>
+          <p:cNvPr id="83" name="Shape 81"/>
+          <p:cNvSpPr/>
+          <p:nvPr/>
+        </p:nvSpPr>
+        <p:spPr>
+          <a:xfrm>
+            <a:off x="8220456" y="3485647"/>
+            <a:ext cx="51536" cy="232349"/>
+          </a:xfrm>
+          <a:prstGeom prst="rect">
+            <a:avLst/>
+          </a:prstGeom>
+          <a:solidFill>
+            <a:srgbClr val="12A566"/>
+          </a:solidFill>
+          <a:ln/>
+        </p:spPr>
+      </p:sp>
+      <p:sp>
+        <p:nvSpPr>
+          <p:cNvPr id="84" name="Text 82"/>
+          <p:cNvSpPr txBox="1"/>
+          <p:nvPr/>
+        </p:nvSpPr>
+        <p:spPr>
+          <a:xfrm>
+            <a:off x="8823960" y="3390595"/>
+            <a:ext cx="914400" cy="422453"/>
+          </a:xfrm>
+          <a:prstGeom prst="rect">
+            <a:avLst/>
+          </a:prstGeom>
+          <a:noFill/>
+          <a:ln/>
+        </p:spPr>
+        <p:txBody>
+          <a:bodyPr wrap="square" lIns="0" tIns="0" rIns="0" bIns="0" rtlCol="0" anchor="ctr"/>
+          <a:lstStyle/>
+          <a:p>
+            <a:pPr algn="r" indent="0" marL="0">
+              <a:buNone/>
+            </a:pPr>
+            <a:r>
+              <a:rPr lang="en-US" sz="1300" b="1" dirty="0">
+                <a:solidFill>
+                  <a:srgbClr val="0B7A4A"/>
+                </a:solidFill>
+                <a:latin typeface="Inter" pitchFamily="34" charset="0"/>
+                <a:ea typeface="Inter" pitchFamily="34" charset="-122"/>
+                <a:cs typeface="Inter" pitchFamily="34" charset="-120"/>
+              </a:rPr>
+              <a:t>$74,952</a:t>
+            </a:r>
+            <a:endParaRPr lang="en-US" sz="1300" dirty="0"/>
+          </a:p>
+        </p:txBody>
+      </p:sp>
+      <p:sp>
+        <p:nvSpPr>
+          <p:cNvPr id="85" name="Text 83"/>
+          <p:cNvSpPr txBox="1"/>
+          <p:nvPr/>
+        </p:nvSpPr>
+        <p:spPr>
+          <a:xfrm>
+            <a:off x="9738360" y="3390595"/>
+            <a:ext cx="841248" cy="422453"/>
+          </a:xfrm>
+          <a:prstGeom prst="rect">
+            <a:avLst/>
+          </a:prstGeom>
+          <a:noFill/>
+          <a:ln/>
+        </p:spPr>
+        <p:txBody>
+          <a:bodyPr wrap="square" lIns="0" tIns="0" rIns="0" bIns="0" rtlCol="0" anchor="ctr"/>
+          <a:lstStyle/>
+          <a:p>
+            <a:pPr algn="r" indent="0" marL="0">
+              <a:buNone/>
+            </a:pPr>
+            <a:r>
+              <a:rPr lang="en-US" sz="1300" dirty="0">
+                <a:solidFill>
+                  <a:srgbClr val="595959"/>
+                </a:solidFill>
+                <a:latin typeface="Inter" pitchFamily="34" charset="0"/>
+                <a:ea typeface="Inter" pitchFamily="34" charset="-122"/>
+                <a:cs typeface="Inter" pitchFamily="34" charset="-120"/>
+              </a:rPr>
+              <a:t>$74,952</a:t>
+            </a:r>
+            <a:endParaRPr lang="en-US" sz="1300" dirty="0"/>
+          </a:p>
+        </p:txBody>
+      </p:sp>
+      <p:sp>
+        <p:nvSpPr>
+          <p:cNvPr id="86" name="Text 84"/>
+          <p:cNvSpPr txBox="1"/>
+          <p:nvPr/>
+        </p:nvSpPr>
+        <p:spPr>
+          <a:xfrm>
+            <a:off x="10579608" y="3390595"/>
+            <a:ext cx="841248" cy="422453"/>
+          </a:xfrm>
+          <a:prstGeom prst="rect">
+            <a:avLst/>
+          </a:prstGeom>
+          <a:noFill/>
+          <a:ln/>
+        </p:spPr>
+        <p:txBody>
+          <a:bodyPr wrap="square" lIns="0" tIns="0" rIns="0" bIns="0" rtlCol="0" anchor="ctr"/>
+          <a:lstStyle/>
+          <a:p>
+            <a:pPr algn="r" indent="0" marL="0">
+              <a:buNone/>
+            </a:pPr>
+            <a:r>
+              <a:rPr lang="en-US" sz="1300" dirty="0">
+                <a:solidFill>
+                  <a:srgbClr val="595959"/>
+                </a:solidFill>
+                <a:latin typeface="Inter" pitchFamily="34" charset="0"/>
+                <a:ea typeface="Inter" pitchFamily="34" charset="-122"/>
+                <a:cs typeface="Inter" pitchFamily="34" charset="-120"/>
+              </a:rPr>
+              <a:t>–</a:t>
+            </a:r>
+            <a:endParaRPr lang="en-US" sz="1300" dirty="0"/>
+          </a:p>
+        </p:txBody>
+      </p:sp>
+      <p:sp>
+        <p:nvSpPr>
+          <p:cNvPr id="87" name="Text 85"/>
+          <p:cNvSpPr txBox="1"/>
+          <p:nvPr/>
+        </p:nvSpPr>
+        <p:spPr>
+          <a:xfrm>
+            <a:off x="6208776" y="3813048"/>
+            <a:ext cx="1938528" cy="422453"/>
+          </a:xfrm>
+          <a:prstGeom prst="rect">
+            <a:avLst/>
+          </a:prstGeom>
+          <a:noFill/>
+          <a:ln/>
+        </p:spPr>
+        <p:txBody>
+          <a:bodyPr wrap="square" lIns="0" tIns="0" rIns="0" bIns="0" rtlCol="0" anchor="ctr"/>
+          <a:lstStyle/>
+          <a:p>
+            <a:pPr indent="0" marL="0">
+              <a:buNone/>
+            </a:pPr>
+            <a:r>
+              <a:rPr lang="en-US" sz="1300" dirty="0">
+                <a:solidFill>
+                  <a:srgbClr val="1A1A1A"/>
+                </a:solidFill>
+                <a:latin typeface="Inter" pitchFamily="34" charset="0"/>
+                <a:ea typeface="Inter" pitchFamily="34" charset="-122"/>
+                <a:cs typeface="Inter" pitchFamily="34" charset="-120"/>
+              </a:rPr>
+              <a:t>CDJR POST FALLS</a:t>
+            </a:r>
+            <a:endParaRPr lang="en-US" sz="1300" dirty="0"/>
+          </a:p>
+        </p:txBody>
+      </p:sp>
+      <p:sp>
+        <p:nvSpPr>
+          <p:cNvPr id="88" name="Shape 86"/>
+          <p:cNvSpPr/>
+          <p:nvPr/>
+        </p:nvSpPr>
+        <p:spPr>
+          <a:xfrm>
+            <a:off x="8220456" y="3908100"/>
+            <a:ext cx="42311" cy="232349"/>
+          </a:xfrm>
+          <a:prstGeom prst="rect">
+            <a:avLst/>
+          </a:prstGeom>
+          <a:solidFill>
+            <a:srgbClr val="12A566"/>
+          </a:solidFill>
+          <a:ln/>
+        </p:spPr>
+      </p:sp>
+      <p:sp>
+        <p:nvSpPr>
+          <p:cNvPr id="89" name="Text 87"/>
+          <p:cNvSpPr txBox="1"/>
+          <p:nvPr/>
+        </p:nvSpPr>
+        <p:spPr>
+          <a:xfrm>
+            <a:off x="8823960" y="3813048"/>
+            <a:ext cx="914400" cy="422453"/>
+          </a:xfrm>
+          <a:prstGeom prst="rect">
+            <a:avLst/>
+          </a:prstGeom>
+          <a:noFill/>
+          <a:ln/>
+        </p:spPr>
+        <p:txBody>
+          <a:bodyPr wrap="square" lIns="0" tIns="0" rIns="0" bIns="0" rtlCol="0" anchor="ctr"/>
+          <a:lstStyle/>
+          <a:p>
+            <a:pPr algn="r" indent="0" marL="0">
+              <a:buNone/>
+            </a:pPr>
+            <a:r>
+              <a:rPr lang="en-US" sz="1300" b="1" dirty="0">
+                <a:solidFill>
+                  <a:srgbClr val="0B7A4A"/>
+                </a:solidFill>
+                <a:latin typeface="Inter" pitchFamily="34" charset="0"/>
+                <a:ea typeface="Inter" pitchFamily="34" charset="-122"/>
+                <a:cs typeface="Inter" pitchFamily="34" charset="-120"/>
+              </a:rPr>
+              <a:t>$61,536</a:t>
+            </a:r>
+            <a:endParaRPr lang="en-US" sz="1300" dirty="0"/>
+          </a:p>
+        </p:txBody>
+      </p:sp>
+      <p:sp>
+        <p:nvSpPr>
+          <p:cNvPr id="90" name="Text 88"/>
+          <p:cNvSpPr txBox="1"/>
+          <p:nvPr/>
+        </p:nvSpPr>
+        <p:spPr>
+          <a:xfrm>
+            <a:off x="9738360" y="3813048"/>
+            <a:ext cx="841248" cy="422453"/>
+          </a:xfrm>
+          <a:prstGeom prst="rect">
+            <a:avLst/>
+          </a:prstGeom>
+          <a:noFill/>
+          <a:ln/>
+        </p:spPr>
+        <p:txBody>
+          <a:bodyPr wrap="square" lIns="0" tIns="0" rIns="0" bIns="0" rtlCol="0" anchor="ctr"/>
+          <a:lstStyle/>
+          <a:p>
+            <a:pPr algn="r" indent="0" marL="0">
+              <a:buNone/>
+            </a:pPr>
+            <a:r>
+              <a:rPr lang="en-US" sz="1300" dirty="0">
+                <a:solidFill>
+                  <a:srgbClr val="595959"/>
+                </a:solidFill>
+                <a:latin typeface="Inter" pitchFamily="34" charset="0"/>
+                <a:ea typeface="Inter" pitchFamily="34" charset="-122"/>
+                <a:cs typeface="Inter" pitchFamily="34" charset="-120"/>
+              </a:rPr>
+              <a:t>–</a:t>
+            </a:r>
+            <a:endParaRPr lang="en-US" sz="1300" dirty="0"/>
+          </a:p>
+        </p:txBody>
+      </p:sp>
+      <p:sp>
+        <p:nvSpPr>
+          <p:cNvPr id="91" name="Text 89"/>
+          <p:cNvSpPr txBox="1"/>
+          <p:nvPr/>
+        </p:nvSpPr>
+        <p:spPr>
+          <a:xfrm>
+            <a:off x="10579608" y="3813048"/>
+            <a:ext cx="841248" cy="422453"/>
+          </a:xfrm>
+          <a:prstGeom prst="rect">
+            <a:avLst/>
+          </a:prstGeom>
+          <a:noFill/>
+          <a:ln/>
+        </p:spPr>
+        <p:txBody>
+          <a:bodyPr wrap="square" lIns="0" tIns="0" rIns="0" bIns="0" rtlCol="0" anchor="ctr"/>
+          <a:lstStyle/>
+          <a:p>
+            <a:pPr algn="r" indent="0" marL="0">
+              <a:buNone/>
+            </a:pPr>
+            <a:r>
+              <a:rPr lang="en-US" sz="1300" dirty="0">
+                <a:solidFill>
+                  <a:srgbClr val="595959"/>
+                </a:solidFill>
+                <a:latin typeface="Inter" pitchFamily="34" charset="0"/>
+                <a:ea typeface="Inter" pitchFamily="34" charset="-122"/>
+                <a:cs typeface="Inter" pitchFamily="34" charset="-120"/>
+              </a:rPr>
+              <a:t>$61,536</a:t>
+            </a:r>
+            <a:endParaRPr lang="en-US" sz="1300" dirty="0"/>
+          </a:p>
+        </p:txBody>
+      </p:sp>
+      <p:sp>
+        <p:nvSpPr>
+          <p:cNvPr id="92" name="Text 90"/>
+          <p:cNvSpPr txBox="1"/>
+          <p:nvPr/>
+        </p:nvSpPr>
+        <p:spPr>
+          <a:xfrm>
+            <a:off x="6208776" y="4235501"/>
+            <a:ext cx="1938528" cy="422453"/>
+          </a:xfrm>
+          <a:prstGeom prst="rect">
+            <a:avLst/>
+          </a:prstGeom>
+          <a:noFill/>
+          <a:ln/>
+        </p:spPr>
+        <p:txBody>
+          <a:bodyPr wrap="square" lIns="0" tIns="0" rIns="0" bIns="0" rtlCol="0" anchor="ctr"/>
+          <a:lstStyle/>
+          <a:p>
+            <a:pPr indent="0" marL="0">
+              <a:buNone/>
+            </a:pPr>
+            <a:r>
+              <a:rPr lang="en-US" sz="1300" dirty="0">
+                <a:solidFill>
+                  <a:srgbClr val="1A1A1A"/>
+                </a:solidFill>
+                <a:latin typeface="Inter" pitchFamily="34" charset="0"/>
+                <a:ea typeface="Inter" pitchFamily="34" charset="-122"/>
+                <a:cs typeface="Inter" pitchFamily="34" charset="-120"/>
+              </a:rPr>
+              <a:t>HYUNDAI PRESCOTT</a:t>
+            </a:r>
+            <a:endParaRPr lang="en-US" sz="1300" dirty="0"/>
+          </a:p>
+        </p:txBody>
+      </p:sp>
+      <p:sp>
+        <p:nvSpPr>
+          <p:cNvPr id="93" name="Shape 91"/>
+          <p:cNvSpPr/>
+          <p:nvPr/>
+        </p:nvSpPr>
+        <p:spPr>
+          <a:xfrm>
+            <a:off x="8220456" y="4330553"/>
+            <a:ext cx="24274" cy="232349"/>
+          </a:xfrm>
+          <a:prstGeom prst="rect">
+            <a:avLst/>
+          </a:prstGeom>
+          <a:solidFill>
+            <a:srgbClr val="12A566"/>
+          </a:solidFill>
+          <a:ln/>
+        </p:spPr>
+      </p:sp>
+      <p:sp>
+        <p:nvSpPr>
+          <p:cNvPr id="94" name="Text 92"/>
+          <p:cNvSpPr txBox="1"/>
+          <p:nvPr/>
+        </p:nvSpPr>
+        <p:spPr>
+          <a:xfrm>
+            <a:off x="8823960" y="4235501"/>
+            <a:ext cx="914400" cy="422453"/>
+          </a:xfrm>
+          <a:prstGeom prst="rect">
+            <a:avLst/>
+          </a:prstGeom>
+          <a:noFill/>
+          <a:ln/>
+        </p:spPr>
+        <p:txBody>
+          <a:bodyPr wrap="square" lIns="0" tIns="0" rIns="0" bIns="0" rtlCol="0" anchor="ctr"/>
+          <a:lstStyle/>
+          <a:p>
+            <a:pPr algn="r" indent="0" marL="0">
+              <a:buNone/>
+            </a:pPr>
+            <a:r>
+              <a:rPr lang="en-US" sz="1300" b="1" dirty="0">
+                <a:solidFill>
+                  <a:srgbClr val="0B7A4A"/>
+                </a:solidFill>
+                <a:latin typeface="Inter" pitchFamily="34" charset="0"/>
+                <a:ea typeface="Inter" pitchFamily="34" charset="-122"/>
+                <a:cs typeface="Inter" pitchFamily="34" charset="-120"/>
+              </a:rPr>
+              <a:t>$35,304</a:t>
+            </a:r>
+            <a:endParaRPr lang="en-US" sz="1300" dirty="0"/>
+          </a:p>
+        </p:txBody>
+      </p:sp>
+      <p:sp>
+        <p:nvSpPr>
+          <p:cNvPr id="95" name="Text 93"/>
+          <p:cNvSpPr txBox="1"/>
+          <p:nvPr/>
+        </p:nvSpPr>
+        <p:spPr>
+          <a:xfrm>
+            <a:off x="9738360" y="4235501"/>
+            <a:ext cx="841248" cy="422453"/>
+          </a:xfrm>
+          <a:prstGeom prst="rect">
+            <a:avLst/>
+          </a:prstGeom>
+          <a:noFill/>
+          <a:ln/>
+        </p:spPr>
+        <p:txBody>
+          <a:bodyPr wrap="square" lIns="0" tIns="0" rIns="0" bIns="0" rtlCol="0" anchor="ctr"/>
+          <a:lstStyle/>
+          <a:p>
+            <a:pPr algn="r" indent="0" marL="0">
+              <a:buNone/>
+            </a:pPr>
+            <a:r>
+              <a:rPr lang="en-US" sz="1300" dirty="0">
+                <a:solidFill>
+                  <a:srgbClr val="595959"/>
+                </a:solidFill>
+                <a:latin typeface="Inter" pitchFamily="34" charset="0"/>
+                <a:ea typeface="Inter" pitchFamily="34" charset="-122"/>
+                <a:cs typeface="Inter" pitchFamily="34" charset="-120"/>
+              </a:rPr>
+              <a:t>$35,304</a:t>
+            </a:r>
+            <a:endParaRPr lang="en-US" sz="1300" dirty="0"/>
+          </a:p>
+        </p:txBody>
+      </p:sp>
+      <p:sp>
+        <p:nvSpPr>
+          <p:cNvPr id="96" name="Text 94"/>
+          <p:cNvSpPr txBox="1"/>
+          <p:nvPr/>
+        </p:nvSpPr>
+        <p:spPr>
+          <a:xfrm>
+            <a:off x="10579608" y="4235501"/>
+            <a:ext cx="841248" cy="422453"/>
+          </a:xfrm>
+          <a:prstGeom prst="rect">
+            <a:avLst/>
+          </a:prstGeom>
+          <a:noFill/>
+          <a:ln/>
+        </p:spPr>
+        <p:txBody>
+          <a:bodyPr wrap="square" lIns="0" tIns="0" rIns="0" bIns="0" rtlCol="0" anchor="ctr"/>
+          <a:lstStyle/>
+          <a:p>
+            <a:pPr algn="r" indent="0" marL="0">
+              <a:buNone/>
+            </a:pPr>
+            <a:r>
+              <a:rPr lang="en-US" sz="1300" dirty="0">
+                <a:solidFill>
+                  <a:srgbClr val="595959"/>
+                </a:solidFill>
+                <a:latin typeface="Inter" pitchFamily="34" charset="0"/>
+                <a:ea typeface="Inter" pitchFamily="34" charset="-122"/>
+                <a:cs typeface="Inter" pitchFamily="34" charset="-120"/>
+              </a:rPr>
+              <a:t>–</a:t>
+            </a:r>
+            <a:endParaRPr lang="en-US" sz="1300" dirty="0"/>
+          </a:p>
+        </p:txBody>
+      </p:sp>
+      <p:sp>
+        <p:nvSpPr>
+          <p:cNvPr id="97" name="Text 95"/>
+          <p:cNvSpPr txBox="1"/>
+          <p:nvPr/>
+        </p:nvSpPr>
+        <p:spPr>
+          <a:xfrm>
+            <a:off x="6208776" y="4657954"/>
+            <a:ext cx="1938528" cy="422453"/>
+          </a:xfrm>
+          <a:prstGeom prst="rect">
+            <a:avLst/>
+          </a:prstGeom>
+          <a:noFill/>
+          <a:ln/>
+        </p:spPr>
+        <p:txBody>
+          <a:bodyPr wrap="square" lIns="0" tIns="0" rIns="0" bIns="0" rtlCol="0" anchor="ctr"/>
+          <a:lstStyle/>
+          <a:p>
+            <a:pPr indent="0" marL="0">
+              <a:buNone/>
+            </a:pPr>
+            <a:r>
+              <a:rPr lang="en-US" sz="1300" dirty="0">
+                <a:solidFill>
+                  <a:srgbClr val="1A1A1A"/>
+                </a:solidFill>
+                <a:latin typeface="Inter" pitchFamily="34" charset="0"/>
+                <a:ea typeface="Inter" pitchFamily="34" charset="-122"/>
+                <a:cs typeface="Inter" pitchFamily="34" charset="-120"/>
+              </a:rPr>
+              <a:t>GMC PRESCOTT</a:t>
+            </a:r>
+            <a:endParaRPr lang="en-US" sz="1300" dirty="0"/>
+          </a:p>
+        </p:txBody>
+      </p:sp>
+      <p:sp>
+        <p:nvSpPr>
+          <p:cNvPr id="98" name="Shape 96"/>
+          <p:cNvSpPr/>
+          <p:nvPr/>
+        </p:nvSpPr>
+        <p:spPr>
+          <a:xfrm>
+            <a:off x="8220456" y="4753005"/>
+            <a:ext cx="18288" cy="232349"/>
+          </a:xfrm>
+          <a:prstGeom prst="rect">
+            <a:avLst/>
+          </a:prstGeom>
+          <a:solidFill>
+            <a:srgbClr val="12A566"/>
+          </a:solidFill>
+          <a:ln/>
+        </p:spPr>
+      </p:sp>
+      <p:sp>
+        <p:nvSpPr>
+          <p:cNvPr id="99" name="Text 97"/>
+          <p:cNvSpPr txBox="1"/>
+          <p:nvPr/>
+        </p:nvSpPr>
+        <p:spPr>
+          <a:xfrm>
+            <a:off x="8823960" y="4657954"/>
+            <a:ext cx="914400" cy="422453"/>
+          </a:xfrm>
+          <a:prstGeom prst="rect">
+            <a:avLst/>
+          </a:prstGeom>
+          <a:noFill/>
+          <a:ln/>
+        </p:spPr>
+        <p:txBody>
+          <a:bodyPr wrap="square" lIns="0" tIns="0" rIns="0" bIns="0" rtlCol="0" anchor="ctr"/>
+          <a:lstStyle/>
+          <a:p>
+            <a:pPr algn="r" indent="0" marL="0">
+              <a:buNone/>
+            </a:pPr>
+            <a:r>
+              <a:rPr lang="en-US" sz="1300" b="1" dirty="0">
+                <a:solidFill>
+                  <a:srgbClr val="0B7A4A"/>
+                </a:solidFill>
+                <a:latin typeface="Inter" pitchFamily="34" charset="0"/>
+                <a:ea typeface="Inter" pitchFamily="34" charset="-122"/>
+                <a:cs typeface="Inter" pitchFamily="34" charset="-120"/>
+              </a:rPr>
+              <a:t>$15,204</a:t>
+            </a:r>
+            <a:endParaRPr lang="en-US" sz="1300" dirty="0"/>
+          </a:p>
+        </p:txBody>
+      </p:sp>
+      <p:sp>
+        <p:nvSpPr>
+          <p:cNvPr id="100" name="Text 98"/>
+          <p:cNvSpPr txBox="1"/>
+          <p:nvPr/>
+        </p:nvSpPr>
+        <p:spPr>
+          <a:xfrm>
+            <a:off x="9738360" y="4657954"/>
+            <a:ext cx="841248" cy="422453"/>
+          </a:xfrm>
+          <a:prstGeom prst="rect">
+            <a:avLst/>
+          </a:prstGeom>
+          <a:noFill/>
+          <a:ln/>
+        </p:spPr>
+        <p:txBody>
+          <a:bodyPr wrap="square" lIns="0" tIns="0" rIns="0" bIns="0" rtlCol="0" anchor="ctr"/>
+          <a:lstStyle/>
+          <a:p>
+            <a:pPr algn="r" indent="0" marL="0">
+              <a:buNone/>
+            </a:pPr>
+            <a:r>
+              <a:rPr lang="en-US" sz="1300" dirty="0">
+                <a:solidFill>
+                  <a:srgbClr val="595959"/>
+                </a:solidFill>
+                <a:latin typeface="Inter" pitchFamily="34" charset="0"/>
+                <a:ea typeface="Inter" pitchFamily="34" charset="-122"/>
+                <a:cs typeface="Inter" pitchFamily="34" charset="-120"/>
+              </a:rPr>
+              <a:t>–</a:t>
+            </a:r>
+            <a:endParaRPr lang="en-US" sz="1300" dirty="0"/>
+          </a:p>
+        </p:txBody>
+      </p:sp>
+      <p:sp>
+        <p:nvSpPr>
+          <p:cNvPr id="101" name="Text 99"/>
+          <p:cNvSpPr txBox="1"/>
+          <p:nvPr/>
+        </p:nvSpPr>
+        <p:spPr>
+          <a:xfrm>
+            <a:off x="10579608" y="4657954"/>
+            <a:ext cx="841248" cy="422453"/>
+          </a:xfrm>
+          <a:prstGeom prst="rect">
+            <a:avLst/>
+          </a:prstGeom>
+          <a:noFill/>
+          <a:ln/>
+        </p:spPr>
+        <p:txBody>
+          <a:bodyPr wrap="square" lIns="0" tIns="0" rIns="0" bIns="0" rtlCol="0" anchor="ctr"/>
+          <a:lstStyle/>
+          <a:p>
+            <a:pPr algn="r" indent="0" marL="0">
+              <a:buNone/>
+            </a:pPr>
+            <a:r>
+              <a:rPr lang="en-US" sz="1300" dirty="0">
+                <a:solidFill>
+                  <a:srgbClr val="595959"/>
+                </a:solidFill>
+                <a:latin typeface="Inter" pitchFamily="34" charset="0"/>
+                <a:ea typeface="Inter" pitchFamily="34" charset="-122"/>
+                <a:cs typeface="Inter" pitchFamily="34" charset="-120"/>
+              </a:rPr>
+              <a:t>$15,204</a:t>
+            </a:r>
+            <a:endParaRPr lang="en-US" sz="1300" dirty="0"/>
+          </a:p>
+        </p:txBody>
+      </p:sp>
+      <p:sp>
+        <p:nvSpPr>
+          <p:cNvPr id="102" name="Text 100"/>
+          <p:cNvSpPr txBox="1"/>
+          <p:nvPr/>
+        </p:nvSpPr>
+        <p:spPr>
+          <a:xfrm>
+            <a:off x="6208776" y="5080406"/>
+            <a:ext cx="1938528" cy="422453"/>
+          </a:xfrm>
+          <a:prstGeom prst="rect">
+            <a:avLst/>
+          </a:prstGeom>
+          <a:noFill/>
+          <a:ln/>
+        </p:spPr>
+        <p:txBody>
+          <a:bodyPr wrap="square" lIns="0" tIns="0" rIns="0" bIns="0" rtlCol="0" anchor="ctr"/>
+          <a:lstStyle/>
+          <a:p>
+            <a:pPr indent="0" marL="0">
+              <a:buNone/>
+            </a:pPr>
+            <a:r>
+              <a:rPr lang="en-US" sz="1300" dirty="0">
+                <a:solidFill>
+                  <a:srgbClr val="1A1A1A"/>
+                </a:solidFill>
+                <a:latin typeface="Inter" pitchFamily="34" charset="0"/>
+                <a:ea typeface="Inter" pitchFamily="34" charset="-122"/>
+                <a:cs typeface="Inter" pitchFamily="34" charset="-120"/>
+              </a:rPr>
+              <a:t>HONDA FLAGSTAFF</a:t>
+            </a:r>
+            <a:endParaRPr lang="en-US" sz="1300" dirty="0"/>
+          </a:p>
+        </p:txBody>
+      </p:sp>
+      <p:sp>
+        <p:nvSpPr>
+          <p:cNvPr id="103" name="Shape 101"/>
+          <p:cNvSpPr/>
+          <p:nvPr/>
+        </p:nvSpPr>
+        <p:spPr>
+          <a:xfrm>
+            <a:off x="8220456" y="5175458"/>
+            <a:ext cx="18288" cy="232349"/>
+          </a:xfrm>
+          <a:prstGeom prst="rect">
+            <a:avLst/>
+          </a:prstGeom>
+          <a:solidFill>
+            <a:srgbClr val="12A566"/>
+          </a:solidFill>
+          <a:ln/>
+        </p:spPr>
+      </p:sp>
+      <p:sp>
+        <p:nvSpPr>
+          <p:cNvPr id="104" name="Text 102"/>
+          <p:cNvSpPr txBox="1"/>
+          <p:nvPr/>
+        </p:nvSpPr>
+        <p:spPr>
+          <a:xfrm>
+            <a:off x="8823960" y="5080406"/>
+            <a:ext cx="914400" cy="422453"/>
+          </a:xfrm>
+          <a:prstGeom prst="rect">
+            <a:avLst/>
+          </a:prstGeom>
+          <a:noFill/>
+          <a:ln/>
+        </p:spPr>
+        <p:txBody>
+          <a:bodyPr wrap="square" lIns="0" tIns="0" rIns="0" bIns="0" rtlCol="0" anchor="ctr"/>
+          <a:lstStyle/>
+          <a:p>
+            <a:pPr algn="r" indent="0" marL="0">
+              <a:buNone/>
+            </a:pPr>
+            <a:r>
+              <a:rPr lang="en-US" sz="1300" b="1" dirty="0">
+                <a:solidFill>
+                  <a:srgbClr val="0B7A4A"/>
+                </a:solidFill>
+                <a:latin typeface="Inter" pitchFamily="34" charset="0"/>
+                <a:ea typeface="Inter" pitchFamily="34" charset="-122"/>
+                <a:cs typeface="Inter" pitchFamily="34" charset="-120"/>
+              </a:rPr>
+              <a:t>$5,340</a:t>
+            </a:r>
+            <a:endParaRPr lang="en-US" sz="1300" dirty="0"/>
+          </a:p>
+        </p:txBody>
+      </p:sp>
+      <p:sp>
+        <p:nvSpPr>
+          <p:cNvPr id="105" name="Text 103"/>
+          <p:cNvSpPr txBox="1"/>
+          <p:nvPr/>
+        </p:nvSpPr>
+        <p:spPr>
+          <a:xfrm>
+            <a:off x="9738360" y="5080406"/>
+            <a:ext cx="841248" cy="422453"/>
+          </a:xfrm>
+          <a:prstGeom prst="rect">
+            <a:avLst/>
+          </a:prstGeom>
+          <a:noFill/>
+          <a:ln/>
+        </p:spPr>
+        <p:txBody>
+          <a:bodyPr wrap="square" lIns="0" tIns="0" rIns="0" bIns="0" rtlCol="0" anchor="ctr"/>
+          <a:lstStyle/>
+          <a:p>
+            <a:pPr algn="r" indent="0" marL="0">
+              <a:buNone/>
+            </a:pPr>
+            <a:r>
+              <a:rPr lang="en-US" sz="1300" dirty="0">
+                <a:solidFill>
+                  <a:srgbClr val="595959"/>
+                </a:solidFill>
+                <a:latin typeface="Inter" pitchFamily="34" charset="0"/>
+                <a:ea typeface="Inter" pitchFamily="34" charset="-122"/>
+                <a:cs typeface="Inter" pitchFamily="34" charset="-120"/>
+              </a:rPr>
+              <a:t>–</a:t>
+            </a:r>
+            <a:endParaRPr lang="en-US" sz="1300" dirty="0"/>
+          </a:p>
+        </p:txBody>
+      </p:sp>
+      <p:sp>
+        <p:nvSpPr>
+          <p:cNvPr id="106" name="Text 104"/>
+          <p:cNvSpPr txBox="1"/>
+          <p:nvPr/>
+        </p:nvSpPr>
+        <p:spPr>
+          <a:xfrm>
+            <a:off x="10579608" y="5080406"/>
+            <a:ext cx="841248" cy="422453"/>
+          </a:xfrm>
+          <a:prstGeom prst="rect">
+            <a:avLst/>
+          </a:prstGeom>
+          <a:noFill/>
+          <a:ln/>
+        </p:spPr>
+        <p:txBody>
+          <a:bodyPr wrap="square" lIns="0" tIns="0" rIns="0" bIns="0" rtlCol="0" anchor="ctr"/>
+          <a:lstStyle/>
+          <a:p>
+            <a:pPr algn="r" indent="0" marL="0">
+              <a:buNone/>
+            </a:pPr>
+            <a:r>
+              <a:rPr lang="en-US" sz="1300" dirty="0">
+                <a:solidFill>
+                  <a:srgbClr val="595959"/>
+                </a:solidFill>
+                <a:latin typeface="Inter" pitchFamily="34" charset="0"/>
+                <a:ea typeface="Inter" pitchFamily="34" charset="-122"/>
+                <a:cs typeface="Inter" pitchFamily="34" charset="-120"/>
+              </a:rPr>
+              <a:t>$5,340</a:t>
+            </a:r>
+            <a:endParaRPr lang="en-US" sz="1300" dirty="0"/>
+          </a:p>
+        </p:txBody>
+      </p:sp>
+      <p:sp>
+        <p:nvSpPr>
+          <p:cNvPr id="107" name="Shape 105"/>
+          <p:cNvSpPr/>
+          <p:nvPr/>
+        </p:nvSpPr>
+        <p:spPr>
+          <a:xfrm>
             <a:off x="457200" y="6126480"/>
-            <a:ext cx="11274552" cy="371856"/>
-          </a:xfrm>
-          <a:prstGeom prst="rect">
-            <a:avLst/>
-          </a:prstGeom>
-          <a:solidFill>
-            <a:srgbClr val="FBEBEA"/>
-          </a:solidFill>
-          <a:ln/>
-        </p:spPr>
-      </p:sp>
-      <p:sp>
-        <p:nvSpPr>
-          <p:cNvPr id="33" name="Text 31"/>
+            <a:ext cx="11274552" cy="615696"/>
+          </a:xfrm>
+          <a:prstGeom prst="rect">
+            <a:avLst/>
+          </a:prstGeom>
+          <a:solidFill>
+            <a:srgbClr val="E6F6EE"/>
+          </a:solidFill>
+          <a:ln/>
+        </p:spPr>
+      </p:sp>
+      <p:sp>
+        <p:nvSpPr>
+          <p:cNvPr id="108" name="Text 106"/>
           <p:cNvSpPr txBox="1"/>
           <p:nvPr/>
         </p:nvSpPr>
         <p:spPr>
           <a:xfrm>
             <a:off x="658368" y="6144768"/>
-            <a:ext cx="10927080" cy="335280"/>
+            <a:ext cx="10927080" cy="579120"/>
           </a:xfrm>
           <a:prstGeom prst="rect">
             <a:avLst/>
@@ -1896,13 +4797,13 @@
             <a:r>
               <a:rPr lang="en-US" sz="1600" b="1" dirty="0">
                 <a:solidFill>
-                  <a:srgbClr val="A82B26"/>
-                </a:solidFill>
-                <a:latin typeface="Inter" pitchFamily="34" charset="0"/>
-                <a:ea typeface="Inter" pitchFamily="34" charset="-122"/>
-                <a:cs typeface="Inter" pitchFamily="34" charset="-120"/>
-              </a:rPr>
-              <a:t>Six audits cost over $400,000. Every cause on this list is documentation the store controls.</a:t>
+                  <a:srgbClr val="0B7A4A"/>
+                </a:solidFill>
+                <a:latin typeface="Inter" pitchFamily="34" charset="0"/>
+                <a:ea typeface="Inter" pitchFamily="34" charset="-122"/>
+                <a:cs typeface="Inter" pitchFamily="34" charset="-120"/>
+              </a:rPr>
+              <a:t>$3,788,100 secured so far this year from approved warranty rate increases at 19 stores. Higher rates bring more audits: the process is how we keep it.</a:t>
             </a:r>
             <a:endParaRPr lang="en-US" sz="1600" dirty="0"/>
           </a:p>
@@ -1919,6 +4820,982 @@
 <file path=ppt/slides/slide2.xml><?xml version="1.0" encoding="utf-8"?>
 <p:sld xmlns:a="http://schemas.openxmlformats.org/drawingml/2006/main" xmlns:r="http://schemas.openxmlformats.org/officeDocument/2006/relationships" xmlns:p="http://schemas.openxmlformats.org/presentationml/2006/main">
   <p:cSld name="Slide 2">
+    <p:bg>
+      <p:bgPr>
+        <a:solidFill>
+          <a:srgbClr val="EDEDED"/>
+        </a:solidFill>
+      </p:bgPr>
+    </p:bg>
+    <p:spTree>
+      <p:nvGrpSpPr>
+        <p:cNvPr id="1" name=""/>
+        <p:cNvGrpSpPr/>
+        <p:nvPr/>
+      </p:nvGrpSpPr>
+      <p:grpSpPr>
+        <a:xfrm>
+          <a:off x="0" y="0"/>
+          <a:ext cx="0" cy="0"/>
+          <a:chOff x="0" y="0"/>
+          <a:chExt cx="0" cy="0"/>
+        </a:xfrm>
+      </p:grpSpPr>
+      <p:sp>
+        <p:nvSpPr>
+          <p:cNvPr id="2" name="Shape 0"/>
+          <p:cNvSpPr/>
+          <p:nvPr/>
+        </p:nvSpPr>
+        <p:spPr>
+          <a:xfrm>
+            <a:off x="457200" y="402336"/>
+            <a:ext cx="50292" cy="192024"/>
+          </a:xfrm>
+          <a:prstGeom prst="rect">
+            <a:avLst/>
+          </a:prstGeom>
+          <a:solidFill>
+            <a:srgbClr val="2587C5"/>
+          </a:solidFill>
+          <a:ln/>
+        </p:spPr>
+      </p:sp>
+      <p:sp>
+        <p:nvSpPr>
+          <p:cNvPr id="3" name="Text 1"/>
+          <p:cNvSpPr txBox="1"/>
+          <p:nvPr/>
+        </p:nvSpPr>
+        <p:spPr>
+          <a:xfrm>
+            <a:off x="621792" y="338328"/>
+            <a:ext cx="8229600" cy="274320"/>
+          </a:xfrm>
+          <a:prstGeom prst="rect">
+            <a:avLst/>
+          </a:prstGeom>
+          <a:noFill/>
+          <a:ln/>
+        </p:spPr>
+        <p:txBody>
+          <a:bodyPr wrap="square" lIns="0" tIns="0" rIns="0" bIns="0" rtlCol="0" anchor="ctr"/>
+          <a:lstStyle/>
+          <a:p>
+            <a:pPr indent="0" marL="0">
+              <a:buNone/>
+            </a:pPr>
+            <a:r>
+              <a:rPr lang="en-US" sz="1400" b="1" spc="110" kern="0" dirty="0">
+                <a:solidFill>
+                  <a:srgbClr val="595959"/>
+                </a:solidFill>
+                <a:latin typeface="Inter" pitchFamily="34" charset="0"/>
+                <a:ea typeface="Inter" pitchFamily="34" charset="-122"/>
+                <a:cs typeface="Inter" pitchFamily="34" charset="-120"/>
+              </a:rPr>
+              <a:t>WARRANTY &amp; INTERNAL</a:t>
+            </a:r>
+            <a:endParaRPr lang="en-US" sz="1400" dirty="0"/>
+          </a:p>
+        </p:txBody>
+      </p:sp>
+      <p:sp>
+        <p:nvSpPr>
+          <p:cNvPr id="4" name="Text 2"/>
+          <p:cNvSpPr txBox="1"/>
+          <p:nvPr/>
+        </p:nvSpPr>
+        <p:spPr>
+          <a:xfrm>
+            <a:off x="457200" y="640080"/>
+            <a:ext cx="11338560" cy="502920"/>
+          </a:xfrm>
+          <a:prstGeom prst="rect">
+            <a:avLst/>
+          </a:prstGeom>
+          <a:noFill/>
+          <a:ln/>
+        </p:spPr>
+        <p:txBody>
+          <a:bodyPr wrap="square" lIns="0" tIns="0" rIns="0" bIns="0" rtlCol="0" anchor="ctr"/>
+          <a:lstStyle/>
+          <a:p>
+            <a:pPr indent="0" marL="0">
+              <a:buNone/>
+            </a:pPr>
+            <a:r>
+              <a:rPr lang="en-US" sz="2800" dirty="0">
+                <a:solidFill>
+                  <a:srgbClr val="1A1A1A"/>
+                </a:solidFill>
+                <a:latin typeface="Inter" pitchFamily="34" charset="0"/>
+                <a:ea typeface="Inter" pitchFamily="34" charset="-122"/>
+                <a:cs typeface="Inter" pitchFamily="34" charset="-120"/>
+              </a:rPr>
+              <a:t>What Gets Claims Debited</a:t>
+            </a:r>
+            <a:endParaRPr lang="en-US" sz="2800" dirty="0"/>
+          </a:p>
+        </p:txBody>
+      </p:sp>
+      <p:sp>
+        <p:nvSpPr>
+          <p:cNvPr id="5" name="Shape 3"/>
+          <p:cNvSpPr/>
+          <p:nvPr/>
+        </p:nvSpPr>
+        <p:spPr>
+          <a:xfrm>
+            <a:off x="457200" y="1207008"/>
+            <a:ext cx="11274552" cy="4782312"/>
+          </a:xfrm>
+          <a:prstGeom prst="rect">
+            <a:avLst/>
+          </a:prstGeom>
+          <a:solidFill>
+            <a:srgbClr val="FFFFFF"/>
+          </a:solidFill>
+          <a:ln/>
+        </p:spPr>
+      </p:sp>
+      <p:sp>
+        <p:nvSpPr>
+          <p:cNvPr id="6" name="Text 4"/>
+          <p:cNvSpPr txBox="1"/>
+          <p:nvPr/>
+        </p:nvSpPr>
+        <p:spPr>
+          <a:xfrm>
+            <a:off x="685800" y="1344168"/>
+            <a:ext cx="10817352" cy="292608"/>
+          </a:xfrm>
+          <a:prstGeom prst="rect">
+            <a:avLst/>
+          </a:prstGeom>
+          <a:noFill/>
+          <a:ln/>
+        </p:spPr>
+        <p:txBody>
+          <a:bodyPr wrap="square" lIns="0" tIns="0" rIns="0" bIns="0" rtlCol="0" anchor="ctr"/>
+          <a:lstStyle/>
+          <a:p>
+            <a:pPr indent="0" marL="0">
+              <a:buNone/>
+            </a:pPr>
+            <a:r>
+              <a:rPr lang="en-US" sz="1500" dirty="0">
+                <a:solidFill>
+                  <a:srgbClr val="1A1A1A"/>
+                </a:solidFill>
+                <a:latin typeface="Inter" pitchFamily="34" charset="0"/>
+                <a:ea typeface="Inter" pitchFamily="34" charset="-122"/>
+                <a:cs typeface="Inter" pitchFamily="34" charset="-120"/>
+              </a:rPr>
+              <a:t>Primary causes in the six audits</a:t>
+            </a:r>
+            <a:endParaRPr lang="en-US" sz="1500" dirty="0"/>
+          </a:p>
+        </p:txBody>
+      </p:sp>
+      <p:sp>
+        <p:nvSpPr>
+          <p:cNvPr id="7" name="Shape 5"/>
+          <p:cNvSpPr/>
+          <p:nvPr/>
+        </p:nvSpPr>
+        <p:spPr>
+          <a:xfrm>
+            <a:off x="685800" y="1691640"/>
+            <a:ext cx="10817352" cy="10973"/>
+          </a:xfrm>
+          <a:prstGeom prst="rect">
+            <a:avLst/>
+          </a:prstGeom>
+          <a:solidFill>
+            <a:srgbClr val="1A1A1A"/>
+          </a:solidFill>
+          <a:ln/>
+        </p:spPr>
+      </p:sp>
+      <p:sp>
+        <p:nvSpPr>
+          <p:cNvPr id="8" name="Shape 6"/>
+          <p:cNvSpPr/>
+          <p:nvPr/>
+        </p:nvSpPr>
+        <p:spPr>
+          <a:xfrm>
+            <a:off x="685800" y="1865376"/>
+            <a:ext cx="3496056" cy="1888236"/>
+          </a:xfrm>
+          <a:prstGeom prst="rect">
+            <a:avLst/>
+          </a:prstGeom>
+          <a:solidFill>
+            <a:srgbClr val="F7F7F7"/>
+          </a:solidFill>
+          <a:ln/>
+        </p:spPr>
+      </p:sp>
+      <p:sp>
+        <p:nvSpPr>
+          <p:cNvPr id="9" name="Shape 7"/>
+          <p:cNvSpPr/>
+          <p:nvPr/>
+        </p:nvSpPr>
+        <p:spPr>
+          <a:xfrm>
+            <a:off x="685800" y="1865376"/>
+            <a:ext cx="54864" cy="1888236"/>
+          </a:xfrm>
+          <a:prstGeom prst="rect">
+            <a:avLst/>
+          </a:prstGeom>
+          <a:solidFill>
+            <a:srgbClr val="C2352F"/>
+          </a:solidFill>
+          <a:ln/>
+        </p:spPr>
+      </p:sp>
+      <p:sp>
+        <p:nvSpPr>
+          <p:cNvPr id="10" name="Text 8"/>
+          <p:cNvSpPr txBox="1"/>
+          <p:nvPr/>
+        </p:nvSpPr>
+        <p:spPr>
+          <a:xfrm>
+            <a:off x="886968" y="1993392"/>
+            <a:ext cx="3166872" cy="640080"/>
+          </a:xfrm>
+          <a:prstGeom prst="rect">
+            <a:avLst/>
+          </a:prstGeom>
+          <a:noFill/>
+          <a:ln/>
+        </p:spPr>
+        <p:txBody>
+          <a:bodyPr wrap="square" lIns="0" tIns="0" rIns="0" bIns="0" rtlCol="0" anchor="t"/>
+          <a:lstStyle/>
+          <a:p>
+            <a:pPr indent="0" marL="0">
+              <a:buNone/>
+            </a:pPr>
+            <a:r>
+              <a:rPr lang="en-US" sz="1800" b="1" dirty="0">
+                <a:solidFill>
+                  <a:srgbClr val="1A1A1A"/>
+                </a:solidFill>
+                <a:latin typeface="Inter" pitchFamily="34" charset="0"/>
+                <a:ea typeface="Inter" pitchFamily="34" charset="-122"/>
+                <a:cs typeface="Inter" pitchFamily="34" charset="-120"/>
+              </a:rPr>
+              <a:t>Written documentation</a:t>
+            </a:r>
+            <a:endParaRPr lang="en-US" sz="1800" dirty="0"/>
+          </a:p>
+        </p:txBody>
+      </p:sp>
+      <p:sp>
+        <p:nvSpPr>
+          <p:cNvPr id="11" name="Text 9"/>
+          <p:cNvSpPr txBox="1"/>
+          <p:nvPr/>
+        </p:nvSpPr>
+        <p:spPr>
+          <a:xfrm>
+            <a:off x="886968" y="2724912"/>
+            <a:ext cx="3166872" cy="918972"/>
+          </a:xfrm>
+          <a:prstGeom prst="rect">
+            <a:avLst/>
+          </a:prstGeom>
+          <a:noFill/>
+          <a:ln/>
+        </p:spPr>
+        <p:txBody>
+          <a:bodyPr wrap="square" lIns="0" tIns="0" rIns="0" bIns="0" rtlCol="0" anchor="t"/>
+          <a:lstStyle/>
+          <a:p>
+            <a:pPr indent="0" marL="0">
+              <a:buNone/>
+            </a:pPr>
+            <a:r>
+              <a:rPr lang="en-US" sz="1500" dirty="0">
+                <a:solidFill>
+                  <a:srgbClr val="595959"/>
+                </a:solidFill>
+                <a:latin typeface="Inter" pitchFamily="34" charset="0"/>
+                <a:ea typeface="Inter" pitchFamily="34" charset="-122"/>
+                <a:cs typeface="Inter" pitchFamily="34" charset="-120"/>
+              </a:rPr>
+              <a:t>Complaint, cause and correction written on the RO, and matching what was claimed</a:t>
+            </a:r>
+            <a:endParaRPr lang="en-US" sz="1500" dirty="0"/>
+          </a:p>
+        </p:txBody>
+      </p:sp>
+      <p:sp>
+        <p:nvSpPr>
+          <p:cNvPr id="12" name="Shape 10"/>
+          <p:cNvSpPr/>
+          <p:nvPr/>
+        </p:nvSpPr>
+        <p:spPr>
+          <a:xfrm>
+            <a:off x="4346448" y="1865376"/>
+            <a:ext cx="3496056" cy="1888236"/>
+          </a:xfrm>
+          <a:prstGeom prst="rect">
+            <a:avLst/>
+          </a:prstGeom>
+          <a:solidFill>
+            <a:srgbClr val="F7F7F7"/>
+          </a:solidFill>
+          <a:ln/>
+        </p:spPr>
+      </p:sp>
+      <p:sp>
+        <p:nvSpPr>
+          <p:cNvPr id="13" name="Shape 11"/>
+          <p:cNvSpPr/>
+          <p:nvPr/>
+        </p:nvSpPr>
+        <p:spPr>
+          <a:xfrm>
+            <a:off x="4346448" y="1865376"/>
+            <a:ext cx="54864" cy="1888236"/>
+          </a:xfrm>
+          <a:prstGeom prst="rect">
+            <a:avLst/>
+          </a:prstGeom>
+          <a:solidFill>
+            <a:srgbClr val="C2352F"/>
+          </a:solidFill>
+          <a:ln/>
+        </p:spPr>
+      </p:sp>
+      <p:sp>
+        <p:nvSpPr>
+          <p:cNvPr id="14" name="Text 12"/>
+          <p:cNvSpPr txBox="1"/>
+          <p:nvPr/>
+        </p:nvSpPr>
+        <p:spPr>
+          <a:xfrm>
+            <a:off x="4547616" y="1993392"/>
+            <a:ext cx="3166872" cy="640080"/>
+          </a:xfrm>
+          <a:prstGeom prst="rect">
+            <a:avLst/>
+          </a:prstGeom>
+          <a:noFill/>
+          <a:ln/>
+        </p:spPr>
+        <p:txBody>
+          <a:bodyPr wrap="square" lIns="0" tIns="0" rIns="0" bIns="0" rtlCol="0" anchor="t"/>
+          <a:lstStyle/>
+          <a:p>
+            <a:pPr indent="0" marL="0">
+              <a:buNone/>
+            </a:pPr>
+            <a:r>
+              <a:rPr lang="en-US" sz="1800" b="1" dirty="0">
+                <a:solidFill>
+                  <a:srgbClr val="1A1A1A"/>
+                </a:solidFill>
+                <a:latin typeface="Inter" pitchFamily="34" charset="0"/>
+                <a:ea typeface="Inter" pitchFamily="34" charset="-122"/>
+                <a:cs typeface="Inter" pitchFamily="34" charset="-120"/>
+              </a:rPr>
+              <a:t>Manager signature on add-ons</a:t>
+            </a:r>
+            <a:endParaRPr lang="en-US" sz="1800" dirty="0"/>
+          </a:p>
+        </p:txBody>
+      </p:sp>
+      <p:sp>
+        <p:nvSpPr>
+          <p:cNvPr id="15" name="Text 13"/>
+          <p:cNvSpPr txBox="1"/>
+          <p:nvPr/>
+        </p:nvSpPr>
+        <p:spPr>
+          <a:xfrm>
+            <a:off x="4547616" y="2724912"/>
+            <a:ext cx="3166872" cy="918972"/>
+          </a:xfrm>
+          <a:prstGeom prst="rect">
+            <a:avLst/>
+          </a:prstGeom>
+          <a:noFill/>
+          <a:ln/>
+        </p:spPr>
+        <p:txBody>
+          <a:bodyPr wrap="square" lIns="0" tIns="0" rIns="0" bIns="0" rtlCol="0" anchor="t"/>
+          <a:lstStyle/>
+          <a:p>
+            <a:pPr indent="0" marL="0">
+              <a:buNone/>
+            </a:pPr>
+            <a:r>
+              <a:rPr lang="en-US" sz="1500" dirty="0">
+                <a:solidFill>
+                  <a:srgbClr val="595959"/>
+                </a:solidFill>
+                <a:latin typeface="Inter" pitchFamily="34" charset="0"/>
+                <a:ea typeface="Inter" pitchFamily="34" charset="-122"/>
+                <a:cs typeface="Inter" pitchFamily="34" charset="-120"/>
+              </a:rPr>
+              <a:t>Any added repair approved and signed by a manager before it is claimed</a:t>
+            </a:r>
+            <a:endParaRPr lang="en-US" sz="1500" dirty="0"/>
+          </a:p>
+        </p:txBody>
+      </p:sp>
+      <p:sp>
+        <p:nvSpPr>
+          <p:cNvPr id="16" name="Shape 14"/>
+          <p:cNvSpPr/>
+          <p:nvPr/>
+        </p:nvSpPr>
+        <p:spPr>
+          <a:xfrm>
+            <a:off x="8007096" y="1865376"/>
+            <a:ext cx="3496056" cy="1888236"/>
+          </a:xfrm>
+          <a:prstGeom prst="rect">
+            <a:avLst/>
+          </a:prstGeom>
+          <a:solidFill>
+            <a:srgbClr val="F7F7F7"/>
+          </a:solidFill>
+          <a:ln/>
+        </p:spPr>
+      </p:sp>
+      <p:sp>
+        <p:nvSpPr>
+          <p:cNvPr id="17" name="Shape 15"/>
+          <p:cNvSpPr/>
+          <p:nvPr/>
+        </p:nvSpPr>
+        <p:spPr>
+          <a:xfrm>
+            <a:off x="8007096" y="1865376"/>
+            <a:ext cx="54864" cy="1888236"/>
+          </a:xfrm>
+          <a:prstGeom prst="rect">
+            <a:avLst/>
+          </a:prstGeom>
+          <a:solidFill>
+            <a:srgbClr val="C2352F"/>
+          </a:solidFill>
+          <a:ln/>
+        </p:spPr>
+      </p:sp>
+      <p:sp>
+        <p:nvSpPr>
+          <p:cNvPr id="18" name="Text 16"/>
+          <p:cNvSpPr txBox="1"/>
+          <p:nvPr/>
+        </p:nvSpPr>
+        <p:spPr>
+          <a:xfrm>
+            <a:off x="8208264" y="1993392"/>
+            <a:ext cx="3166872" cy="640080"/>
+          </a:xfrm>
+          <a:prstGeom prst="rect">
+            <a:avLst/>
+          </a:prstGeom>
+          <a:noFill/>
+          <a:ln/>
+        </p:spPr>
+        <p:txBody>
+          <a:bodyPr wrap="square" lIns="0" tIns="0" rIns="0" bIns="0" rtlCol="0" anchor="t"/>
+          <a:lstStyle/>
+          <a:p>
+            <a:pPr indent="0" marL="0">
+              <a:buNone/>
+            </a:pPr>
+            <a:r>
+              <a:rPr lang="en-US" sz="1800" b="1" dirty="0">
+                <a:solidFill>
+                  <a:srgbClr val="1A1A1A"/>
+                </a:solidFill>
+                <a:latin typeface="Inter" pitchFamily="34" charset="0"/>
+                <a:ea typeface="Inter" pitchFamily="34" charset="-122"/>
+                <a:cs typeface="Inter" pitchFamily="34" charset="-120"/>
+              </a:rPr>
+              <a:t>Signatures on in-stock units</a:t>
+            </a:r>
+            <a:endParaRPr lang="en-US" sz="1800" dirty="0"/>
+          </a:p>
+        </p:txBody>
+      </p:sp>
+      <p:sp>
+        <p:nvSpPr>
+          <p:cNvPr id="19" name="Text 17"/>
+          <p:cNvSpPr txBox="1"/>
+          <p:nvPr/>
+        </p:nvSpPr>
+        <p:spPr>
+          <a:xfrm>
+            <a:off x="8208264" y="2724912"/>
+            <a:ext cx="3166872" cy="918972"/>
+          </a:xfrm>
+          <a:prstGeom prst="rect">
+            <a:avLst/>
+          </a:prstGeom>
+          <a:noFill/>
+          <a:ln/>
+        </p:spPr>
+        <p:txBody>
+          <a:bodyPr wrap="square" lIns="0" tIns="0" rIns="0" bIns="0" rtlCol="0" anchor="t"/>
+          <a:lstStyle/>
+          <a:p>
+            <a:pPr indent="0" marL="0">
+              <a:buNone/>
+            </a:pPr>
+            <a:r>
+              <a:rPr lang="en-US" sz="1500" dirty="0">
+                <a:solidFill>
+                  <a:srgbClr val="595959"/>
+                </a:solidFill>
+                <a:latin typeface="Inter" pitchFamily="34" charset="0"/>
+                <a:ea typeface="Inter" pitchFamily="34" charset="-122"/>
+                <a:cs typeface="Inter" pitchFamily="34" charset="-120"/>
+              </a:rPr>
+              <a:t>Customer and manager signatures on repairs to units in stock</a:t>
+            </a:r>
+            <a:endParaRPr lang="en-US" sz="1500" dirty="0"/>
+          </a:p>
+        </p:txBody>
+      </p:sp>
+      <p:sp>
+        <p:nvSpPr>
+          <p:cNvPr id="20" name="Shape 18"/>
+          <p:cNvSpPr/>
+          <p:nvPr/>
+        </p:nvSpPr>
+        <p:spPr>
+          <a:xfrm>
+            <a:off x="685800" y="3918204"/>
+            <a:ext cx="3496056" cy="1888236"/>
+          </a:xfrm>
+          <a:prstGeom prst="rect">
+            <a:avLst/>
+          </a:prstGeom>
+          <a:solidFill>
+            <a:srgbClr val="F7F7F7"/>
+          </a:solidFill>
+          <a:ln/>
+        </p:spPr>
+      </p:sp>
+      <p:sp>
+        <p:nvSpPr>
+          <p:cNvPr id="21" name="Shape 19"/>
+          <p:cNvSpPr/>
+          <p:nvPr/>
+        </p:nvSpPr>
+        <p:spPr>
+          <a:xfrm>
+            <a:off x="685800" y="3918204"/>
+            <a:ext cx="54864" cy="1888236"/>
+          </a:xfrm>
+          <a:prstGeom prst="rect">
+            <a:avLst/>
+          </a:prstGeom>
+          <a:solidFill>
+            <a:srgbClr val="C2352F"/>
+          </a:solidFill>
+          <a:ln/>
+        </p:spPr>
+      </p:sp>
+      <p:sp>
+        <p:nvSpPr>
+          <p:cNvPr id="22" name="Text 20"/>
+          <p:cNvSpPr txBox="1"/>
+          <p:nvPr/>
+        </p:nvSpPr>
+        <p:spPr>
+          <a:xfrm>
+            <a:off x="886968" y="4046220"/>
+            <a:ext cx="3166872" cy="640080"/>
+          </a:xfrm>
+          <a:prstGeom prst="rect">
+            <a:avLst/>
+          </a:prstGeom>
+          <a:noFill/>
+          <a:ln/>
+        </p:spPr>
+        <p:txBody>
+          <a:bodyPr wrap="square" lIns="0" tIns="0" rIns="0" bIns="0" rtlCol="0" anchor="t"/>
+          <a:lstStyle/>
+          <a:p>
+            <a:pPr indent="0" marL="0">
+              <a:buNone/>
+            </a:pPr>
+            <a:r>
+              <a:rPr lang="en-US" sz="1800" b="1" dirty="0">
+                <a:solidFill>
+                  <a:srgbClr val="1A1A1A"/>
+                </a:solidFill>
+                <a:latin typeface="Inter" pitchFamily="34" charset="0"/>
+                <a:ea typeface="Inter" pitchFamily="34" charset="-122"/>
+                <a:cs typeface="Inter" pitchFamily="34" charset="-120"/>
+              </a:rPr>
+              <a:t>Out mileage</a:t>
+            </a:r>
+            <a:endParaRPr lang="en-US" sz="1800" dirty="0"/>
+          </a:p>
+        </p:txBody>
+      </p:sp>
+      <p:sp>
+        <p:nvSpPr>
+          <p:cNvPr id="23" name="Text 21"/>
+          <p:cNvSpPr txBox="1"/>
+          <p:nvPr/>
+        </p:nvSpPr>
+        <p:spPr>
+          <a:xfrm>
+            <a:off x="886968" y="4777740"/>
+            <a:ext cx="3166872" cy="918972"/>
+          </a:xfrm>
+          <a:prstGeom prst="rect">
+            <a:avLst/>
+          </a:prstGeom>
+          <a:noFill/>
+          <a:ln/>
+        </p:spPr>
+        <p:txBody>
+          <a:bodyPr wrap="square" lIns="0" tIns="0" rIns="0" bIns="0" rtlCol="0" anchor="t"/>
+          <a:lstStyle/>
+          <a:p>
+            <a:pPr indent="0" marL="0">
+              <a:buNone/>
+            </a:pPr>
+            <a:r>
+              <a:rPr lang="en-US" sz="1500" dirty="0">
+                <a:solidFill>
+                  <a:srgbClr val="595959"/>
+                </a:solidFill>
+                <a:latin typeface="Inter" pitchFamily="34" charset="0"/>
+                <a:ea typeface="Inter" pitchFamily="34" charset="-122"/>
+                <a:cs typeface="Inter" pitchFamily="34" charset="-120"/>
+              </a:rPr>
+              <a:t>Recorded on every RO and consistent with the mileage in</a:t>
+            </a:r>
+            <a:endParaRPr lang="en-US" sz="1500" dirty="0"/>
+          </a:p>
+        </p:txBody>
+      </p:sp>
+      <p:sp>
+        <p:nvSpPr>
+          <p:cNvPr id="24" name="Shape 22"/>
+          <p:cNvSpPr/>
+          <p:nvPr/>
+        </p:nvSpPr>
+        <p:spPr>
+          <a:xfrm>
+            <a:off x="4346448" y="3918204"/>
+            <a:ext cx="3496056" cy="1888236"/>
+          </a:xfrm>
+          <a:prstGeom prst="rect">
+            <a:avLst/>
+          </a:prstGeom>
+          <a:solidFill>
+            <a:srgbClr val="F7F7F7"/>
+          </a:solidFill>
+          <a:ln/>
+        </p:spPr>
+      </p:sp>
+      <p:sp>
+        <p:nvSpPr>
+          <p:cNvPr id="25" name="Shape 23"/>
+          <p:cNvSpPr/>
+          <p:nvPr/>
+        </p:nvSpPr>
+        <p:spPr>
+          <a:xfrm>
+            <a:off x="4346448" y="3918204"/>
+            <a:ext cx="54864" cy="1888236"/>
+          </a:xfrm>
+          <a:prstGeom prst="rect">
+            <a:avLst/>
+          </a:prstGeom>
+          <a:solidFill>
+            <a:srgbClr val="C2352F"/>
+          </a:solidFill>
+          <a:ln/>
+        </p:spPr>
+      </p:sp>
+      <p:sp>
+        <p:nvSpPr>
+          <p:cNvPr id="26" name="Text 24"/>
+          <p:cNvSpPr txBox="1"/>
+          <p:nvPr/>
+        </p:nvSpPr>
+        <p:spPr>
+          <a:xfrm>
+            <a:off x="4547616" y="4046220"/>
+            <a:ext cx="3166872" cy="640080"/>
+          </a:xfrm>
+          <a:prstGeom prst="rect">
+            <a:avLst/>
+          </a:prstGeom>
+          <a:noFill/>
+          <a:ln/>
+        </p:spPr>
+        <p:txBody>
+          <a:bodyPr wrap="square" lIns="0" tIns="0" rIns="0" bIns="0" rtlCol="0" anchor="t"/>
+          <a:lstStyle/>
+          <a:p>
+            <a:pPr indent="0" marL="0">
+              <a:buNone/>
+            </a:pPr>
+            <a:r>
+              <a:rPr lang="en-US" sz="1800" b="1" dirty="0">
+                <a:solidFill>
+                  <a:srgbClr val="1A1A1A"/>
+                </a:solidFill>
+                <a:latin typeface="Inter" pitchFamily="34" charset="0"/>
+                <a:ea typeface="Inter" pitchFamily="34" charset="-122"/>
+                <a:cs typeface="Inter" pitchFamily="34" charset="-120"/>
+              </a:rPr>
+              <a:t>Punch times</a:t>
+            </a:r>
+            <a:endParaRPr lang="en-US" sz="1800" dirty="0"/>
+          </a:p>
+        </p:txBody>
+      </p:sp>
+      <p:sp>
+        <p:nvSpPr>
+          <p:cNvPr id="27" name="Text 25"/>
+          <p:cNvSpPr txBox="1"/>
+          <p:nvPr/>
+        </p:nvSpPr>
+        <p:spPr>
+          <a:xfrm>
+            <a:off x="4547616" y="4777740"/>
+            <a:ext cx="3166872" cy="918972"/>
+          </a:xfrm>
+          <a:prstGeom prst="rect">
+            <a:avLst/>
+          </a:prstGeom>
+          <a:noFill/>
+          <a:ln/>
+        </p:spPr>
+        <p:txBody>
+          <a:bodyPr wrap="square" lIns="0" tIns="0" rIns="0" bIns="0" rtlCol="0" anchor="t"/>
+          <a:lstStyle/>
+          <a:p>
+            <a:pPr indent="0" marL="0">
+              <a:buNone/>
+            </a:pPr>
+            <a:r>
+              <a:rPr lang="en-US" sz="1500" dirty="0">
+                <a:solidFill>
+                  <a:srgbClr val="595959"/>
+                </a:solidFill>
+                <a:latin typeface="Inter" pitchFamily="34" charset="0"/>
+                <a:ea typeface="Inter" pitchFamily="34" charset="-122"/>
+                <a:cs typeface="Inter" pitchFamily="34" charset="-120"/>
+              </a:rPr>
+              <a:t>Technician clock times on the RO support the hours claimed</a:t>
+            </a:r>
+            <a:endParaRPr lang="en-US" sz="1500" dirty="0"/>
+          </a:p>
+        </p:txBody>
+      </p:sp>
+      <p:sp>
+        <p:nvSpPr>
+          <p:cNvPr id="28" name="Shape 26"/>
+          <p:cNvSpPr/>
+          <p:nvPr/>
+        </p:nvSpPr>
+        <p:spPr>
+          <a:xfrm>
+            <a:off x="8007096" y="3918204"/>
+            <a:ext cx="3496056" cy="1888236"/>
+          </a:xfrm>
+          <a:prstGeom prst="rect">
+            <a:avLst/>
+          </a:prstGeom>
+          <a:solidFill>
+            <a:srgbClr val="F7F7F7"/>
+          </a:solidFill>
+          <a:ln/>
+        </p:spPr>
+      </p:sp>
+      <p:sp>
+        <p:nvSpPr>
+          <p:cNvPr id="29" name="Shape 27"/>
+          <p:cNvSpPr/>
+          <p:nvPr/>
+        </p:nvSpPr>
+        <p:spPr>
+          <a:xfrm>
+            <a:off x="8007096" y="3918204"/>
+            <a:ext cx="54864" cy="1888236"/>
+          </a:xfrm>
+          <a:prstGeom prst="rect">
+            <a:avLst/>
+          </a:prstGeom>
+          <a:solidFill>
+            <a:srgbClr val="C2352F"/>
+          </a:solidFill>
+          <a:ln/>
+        </p:spPr>
+      </p:sp>
+      <p:sp>
+        <p:nvSpPr>
+          <p:cNvPr id="30" name="Text 28"/>
+          <p:cNvSpPr txBox="1"/>
+          <p:nvPr/>
+        </p:nvSpPr>
+        <p:spPr>
+          <a:xfrm>
+            <a:off x="8208264" y="4046220"/>
+            <a:ext cx="3166872" cy="640080"/>
+          </a:xfrm>
+          <a:prstGeom prst="rect">
+            <a:avLst/>
+          </a:prstGeom>
+          <a:noFill/>
+          <a:ln/>
+        </p:spPr>
+        <p:txBody>
+          <a:bodyPr wrap="square" lIns="0" tIns="0" rIns="0" bIns="0" rtlCol="0" anchor="t"/>
+          <a:lstStyle/>
+          <a:p>
+            <a:pPr indent="0" marL="0">
+              <a:buNone/>
+            </a:pPr>
+            <a:r>
+              <a:rPr lang="en-US" sz="1800" b="1" dirty="0">
+                <a:solidFill>
+                  <a:srgbClr val="1A1A1A"/>
+                </a:solidFill>
+                <a:latin typeface="Inter" pitchFamily="34" charset="0"/>
+                <a:ea typeface="Inter" pitchFamily="34" charset="-122"/>
+                <a:cs typeface="Inter" pitchFamily="34" charset="-120"/>
+              </a:rPr>
+              <a:t>Manufacturer authorization</a:t>
+            </a:r>
+            <a:endParaRPr lang="en-US" sz="1800" dirty="0"/>
+          </a:p>
+        </p:txBody>
+      </p:sp>
+      <p:sp>
+        <p:nvSpPr>
+          <p:cNvPr id="31" name="Text 29"/>
+          <p:cNvSpPr txBox="1"/>
+          <p:nvPr/>
+        </p:nvSpPr>
+        <p:spPr>
+          <a:xfrm>
+            <a:off x="8208264" y="4777740"/>
+            <a:ext cx="3166872" cy="918972"/>
+          </a:xfrm>
+          <a:prstGeom prst="rect">
+            <a:avLst/>
+          </a:prstGeom>
+          <a:noFill/>
+          <a:ln/>
+        </p:spPr>
+        <p:txBody>
+          <a:bodyPr wrap="square" lIns="0" tIns="0" rIns="0" bIns="0" rtlCol="0" anchor="t"/>
+          <a:lstStyle/>
+          <a:p>
+            <a:pPr indent="0" marL="0">
+              <a:buNone/>
+            </a:pPr>
+            <a:r>
+              <a:rPr lang="en-US" sz="1500" dirty="0">
+                <a:solidFill>
+                  <a:srgbClr val="595959"/>
+                </a:solidFill>
+                <a:latin typeface="Inter" pitchFamily="34" charset="0"/>
+                <a:ea typeface="Inter" pitchFamily="34" charset="-122"/>
+                <a:cs typeface="Inter" pitchFamily="34" charset="-120"/>
+              </a:rPr>
+              <a:t>Prior approval on file wherever the manufacturer requires it</a:t>
+            </a:r>
+            <a:endParaRPr lang="en-US" sz="1500" dirty="0"/>
+          </a:p>
+        </p:txBody>
+      </p:sp>
+      <p:sp>
+        <p:nvSpPr>
+          <p:cNvPr id="32" name="Shape 30"/>
+          <p:cNvSpPr/>
+          <p:nvPr/>
+        </p:nvSpPr>
+        <p:spPr>
+          <a:xfrm>
+            <a:off x="457200" y="6126480"/>
+            <a:ext cx="11274552" cy="615696"/>
+          </a:xfrm>
+          <a:prstGeom prst="rect">
+            <a:avLst/>
+          </a:prstGeom>
+          <a:solidFill>
+            <a:srgbClr val="FBEBEA"/>
+          </a:solidFill>
+          <a:ln/>
+        </p:spPr>
+      </p:sp>
+      <p:sp>
+        <p:nvSpPr>
+          <p:cNvPr id="33" name="Text 31"/>
+          <p:cNvSpPr txBox="1"/>
+          <p:nvPr/>
+        </p:nvSpPr>
+        <p:spPr>
+          <a:xfrm>
+            <a:off x="658368" y="6144768"/>
+            <a:ext cx="10927080" cy="579120"/>
+          </a:xfrm>
+          <a:prstGeom prst="rect">
+            <a:avLst/>
+          </a:prstGeom>
+          <a:noFill/>
+          <a:ln/>
+        </p:spPr>
+        <p:txBody>
+          <a:bodyPr wrap="square" lIns="0" tIns="0" rIns="0" bIns="0" rtlCol="0" anchor="ctr"/>
+          <a:lstStyle/>
+          <a:p>
+            <a:pPr indent="0" marL="0">
+              <a:buNone/>
+            </a:pPr>
+            <a:r>
+              <a:rPr lang="en-US" sz="1600" b="1" dirty="0">
+                <a:solidFill>
+                  <a:srgbClr val="A82B26"/>
+                </a:solidFill>
+                <a:latin typeface="Inter" pitchFamily="34" charset="0"/>
+                <a:ea typeface="Inter" pitchFamily="34" charset="-122"/>
+                <a:cs typeface="Inter" pitchFamily="34" charset="-120"/>
+              </a:rPr>
+              <a:t>Six audits took back over $400,000, more than a tenth of what rate increases brought in this year. Every cause here is documentation the store controls.</a:t>
+            </a:r>
+            <a:endParaRPr lang="en-US" sz="1600" dirty="0"/>
+          </a:p>
+        </p:txBody>
+      </p:sp>
+    </p:spTree>
+  </p:cSld>
+  <p:clrMapOvr>
+    <a:masterClrMapping/>
+  </p:clrMapOvr>
+</p:sld>
+</file>
+
+<file path=ppt/slides/slide3.xml><?xml version="1.0" encoding="utf-8"?>
+<p:sld xmlns:a="http://schemas.openxmlformats.org/drawingml/2006/main" xmlns:r="http://schemas.openxmlformats.org/officeDocument/2006/relationships" xmlns:p="http://schemas.openxmlformats.org/presentationml/2006/main">
+  <p:cSld name="Slide 3">
     <p:bg>
       <p:bgPr>
         <a:solidFill>

--- a/day2-deck/decks/Warranty Audits - Draft.pptx
+++ b/day2-deck/decks/Warranty Audits - Draft.pptx
@@ -504,7 +504,7 @@
           <a:p>
             <a:r>
               <a:rPr lang="en-US" dirty="0"/>
-              <a:t>Source: YTD RWR Financials 2026 (warranty rate submission vendor): YTD revenue secured from approved warranty labor and parts rate increases, as reported. 19 stores with approvals to date; stores not listed have none reported yet. Labor $1,661,368, parts $2,126,832. Vendor's Honda North total ($463,296) is $100 less than its labor + parts ($463,396), so the report's grand total ($3,788,100) is $100 less than labor + parts ($3,788,200). Slides use the vendor's totals as reported.Talk track: these approvals are new money on every warranty claim, and they are why warranty ELR is up. The factory notices a higher rate too: more money in means more scrutiny. Every claim debited in an audit gives part of it back.
+              <a:t>Source: YTD RWR Financials 2026 (warranty rate submission vendor), "YTD revenue secured": the added gross profit from approved increases, as more dollars per warranty labor hour sold or more parts markup. 19 stores have an approval this year; the other 14 have not had one yet. Labor $1,661,368, parts $2,126,832. Honda North uses its labor + parts ($463,396), not the vendor's $463,296 total (Noah, Oct 22: take the higher), so the group is $3,788,200 vs the report's $3,788,100.Talk track: these approvals are new money on every warranty claim, and they are why warranty ELR is up. The factory notices a higher rate too: more money in means more scrutiny. Every claim debited in an audit gives part of it back.
 Vendor store names: Findlay Acura = ACURA; Findlay Audi Reno Tahoe = AUDI RENO; Findlay BGMC Prescott = GMC PRESCOTT; Findlay Chevrolet = CHEVY LV; Findlay Chrysler Post Falls = CDJR POST FALLS; Findlay Honda Flagstaff = HONDA FLAGSTAFF; Findlay Honda Henderson = HONDA HENDERSON; Findlay Honda North = HONDA NORTH; Findlay Honda Spokane = HONDA SPOKANE; Findlay Hyundai Prescott = HYUNDAI PRESCOTT; Findlay Kia St George = KIA ST GEORGE; Findlay Lexus Spokane = LEXUS; Findlay Lincoln = LINCOLN; Findlay Mazda = MAZDA; Findlay Nissan Henderson = NISSAN; Findlay Subaru Prescott = SUBARU PRESCOTT; Land Rover Henderson = LR HENDERSON; Land Rover Las Vegas = LR LV; Land Rover Reno = LR RENO.</a:t>
             </a:r>
             <a:endParaRPr lang="en-US" dirty="0"/>
@@ -1205,7 +1205,7 @@
                 <a:ea typeface="Inter" pitchFamily="34" charset="-122"/>
                 <a:cs typeface="Inter" pitchFamily="34" charset="-120"/>
               </a:rPr>
-              <a:t>Secured</a:t>
+              <a:t>GP added</a:t>
             </a:r>
             <a:endParaRPr lang="en-US" sz="1400" dirty="0"/>
           </a:p>
@@ -1322,7 +1322,7 @@
                 <a:ea typeface="Inter" pitchFamily="34" charset="-122"/>
                 <a:cs typeface="Inter" pitchFamily="34" charset="-120"/>
               </a:rPr>
-              <a:t>Secured</a:t>
+              <a:t>GP added</a:t>
             </a:r>
             <a:endParaRPr lang="en-US" sz="1400" dirty="0"/>
           </a:p>
@@ -1630,7 +1630,7 @@
         <p:spPr>
           <a:xfrm>
             <a:off x="2670048" y="2218289"/>
-            <a:ext cx="318553" cy="232349"/>
+            <a:ext cx="318622" cy="232349"/>
           </a:xfrm>
           <a:prstGeom prst="rect">
             <a:avLst/>
@@ -1674,7 +1674,7 @@
                 <a:ea typeface="Inter" pitchFamily="34" charset="-122"/>
                 <a:cs typeface="Inter" pitchFamily="34" charset="-120"/>
               </a:rPr>
-              <a:t>$463,296</a:t>
+              <a:t>$463,396</a:t>
             </a:r>
             <a:endParaRPr lang="en-US" sz="1300" dirty="0"/>
           </a:p>
@@ -4803,7 +4803,7 @@
                 <a:ea typeface="Inter" pitchFamily="34" charset="-122"/>
                 <a:cs typeface="Inter" pitchFamily="34" charset="-120"/>
               </a:rPr>
-              <a:t>$3,788,100 secured so far this year from approved warranty rate increases at 19 stores. Higher rates bring more audits: the process is how we keep it.</a:t>
+              <a:t>$3,788,200 in added gross profit from warranty rate increases approved this year at 19 stores. Higher rates bring more audits: the process is how we keep it.</a:t>
             </a:r>
             <a:endParaRPr lang="en-US" sz="1600" dirty="0"/>
           </a:p>

--- a/day2-deck/decks/Warranty Audits - Draft.pptx
+++ b/day2-deck/decks/Warranty Audits - Draft.pptx
@@ -8,9 +8,10 @@
     <p:sldId id="256" r:id="rId2"/>
     <p:sldId id="257" r:id="rId3"/>
     <p:sldId id="258" r:id="rId4"/>
+    <p:sldId id="259" r:id="rId5"/>
   </p:sldIdLst>
   <p:notesMasterIdLst>
-    <p:notesMasterId r:id="rId5"/>
+    <p:notesMasterId r:id="rId6"/>
   </p:notesMasterIdLst>
   <p:sldSz cx="12192000" cy="6858000"/>
   <p:notesSz cx="6858000" cy="12192000"/>
@@ -107,6 +108,1255 @@
     </a:lvl9pPr>
   </p:defaultTextStyle>
 </p:presentation>
+</file>
+
+<file path=ppt/charts/chart1.xml><?xml version="1.0" encoding="utf-8"?>
+<c:chartSpace xmlns:c="http://schemas.openxmlformats.org/drawingml/2006/chart" xmlns:a="http://schemas.openxmlformats.org/drawingml/2006/main" xmlns:r="http://schemas.openxmlformats.org/officeDocument/2006/relationships">
+  <c:date1904 val="0"/>
+  <c:roundedCorners val="1"/>
+  <c:chart>
+    <c:autoTitleDeleted val="1"/>
+    <c:plotArea>
+      <c:layout/>
+      <c:lineChart>
+        <c:varyColors val="0"/>
+        <c:ser>
+          <c:idx val="0"/>
+          <c:order val="0"/>
+          <c:tx>
+            <c:strRef>
+              <c:f>Sheet1!$B$1</c:f>
+              <c:strCache>
+                <c:ptCount val="1"/>
+                <c:pt idx="0">
+                  <c:v>2026</c:v>
+                </c:pt>
+              </c:strCache>
+            </c:strRef>
+          </c:tx>
+          <c:spPr>
+            <a:solidFill>
+              <a:srgbClr val="2587C5"/>
+            </a:solidFill>
+            <a:ln w="38100" cap="flat">
+              <a:solidFill>
+                <a:srgbClr val="2587C5"/>
+              </a:solidFill>
+              <a:prstDash val="solid"/>
+              <a:round/>
+            </a:ln>
+            <a:effectLst/>
+          </c:spPr>
+          <c:invertIfNegative val="0"/>
+          <c:dLbls>
+            <c:numFmt formatCode="0.0&quot;%&quot;" sourceLinked="0"/>
+            <c:txPr>
+              <a:bodyPr/>
+              <a:lstStyle/>
+              <a:p>
+                <a:pPr>
+                  <a:defRPr b="0" i="0" strike="noStrike" sz="1400" u="none">
+                    <a:solidFill>
+                      <a:srgbClr val="1A1A1A"/>
+                    </a:solidFill>
+                    <a:latin typeface="+mn-lt"/>
+                  </a:defRPr>
+                </a:pPr>
+              </a:p>
+            </c:txPr>
+            <c:showLegendKey val="0"/>
+            <c:showVal val="0"/>
+            <c:showCatName val="0"/>
+            <c:showSerName val="0"/>
+            <c:showPercent val="0"/>
+            <c:showBubbleSize val="0"/>
+            <c:showLeaderLines val="0"/>
+          </c:dLbls>
+          <c:marker>
+            <c:symbol val="circle"/>
+            <c:size val="8"/>
+            <c:spPr>
+              <a:solidFill>
+                <a:srgbClr val="2587C5"/>
+              </a:solidFill>
+              <a:ln w="9525" cap="flat">
+                <a:solidFill>
+                  <a:srgbClr val="2587C5"/>
+                </a:solidFill>
+                <a:prstDash val="solid"/>
+                <a:round/>
+              </a:ln>
+              <a:effectLst/>
+            </c:spPr>
+          </c:marker>
+          <c:cat>
+            <c:multiLvlStrRef>
+              <c:f>Sheet1!$A$2:$A$13</c:f>
+              <c:multiLvlStrCache>
+                <c:ptCount val="12"/>
+                <c:lvl>
+                  <c:pt idx="0">
+                    <c:v>Jan</c:v>
+                  </c:pt>
+                  <c:pt idx="1">
+                    <c:v>Feb</c:v>
+                  </c:pt>
+                  <c:pt idx="2">
+                    <c:v>Mar</c:v>
+                  </c:pt>
+                  <c:pt idx="3">
+                    <c:v>Apr</c:v>
+                  </c:pt>
+                  <c:pt idx="4">
+                    <c:v>May</c:v>
+                  </c:pt>
+                  <c:pt idx="5">
+                    <c:v>Jun</c:v>
+                  </c:pt>
+                  <c:pt idx="6">
+                    <c:v>Jul</c:v>
+                  </c:pt>
+                  <c:pt idx="7">
+                    <c:v>Aug</c:v>
+                  </c:pt>
+                  <c:pt idx="8">
+                    <c:v>Sep</c:v>
+                  </c:pt>
+                  <c:pt idx="9">
+                    <c:v>Oct</c:v>
+                  </c:pt>
+                  <c:pt idx="10">
+                    <c:v>Nov</c:v>
+                  </c:pt>
+                  <c:pt idx="11">
+                    <c:v>Dec</c:v>
+                  </c:pt>
+                </c:lvl>
+              </c:multiLvlStrCache>
+            </c:multiLvlStrRef>
+          </c:cat>
+          <c:val>
+            <c:numRef>
+              <c:f>Sheet1!$B$2:$B$13</c:f>
+              <c:numCache>
+                <c:formatCode>General</c:formatCode>
+                <c:ptCount val="12"/>
+                <c:pt idx="0">
+                  <c:v>43.5</c:v>
+                </c:pt>
+                <c:pt idx="1">
+                  <c:v>44.2</c:v>
+                </c:pt>
+                <c:pt idx="2">
+                  <c:v>44</c:v>
+                </c:pt>
+                <c:pt idx="3">
+                  <c:v>44.3</c:v>
+                </c:pt>
+                <c:pt idx="4">
+                  <c:v>44.5</c:v>
+                </c:pt>
+                <c:pt idx="5">
+                  <c:v>44.5</c:v>
+                </c:pt>
+                <c:pt idx="6">
+                  <c:v>46</c:v>
+                </c:pt>
+                <c:pt idx="7">
+                  <c:v>45.1</c:v>
+                </c:pt>
+                <c:pt idx="8">
+                  <c:v>45.6</c:v>
+                </c:pt>
+                <c:pt idx="9">
+                  <c:v/>
+                </c:pt>
+                <c:pt idx="10">
+                  <c:v/>
+                </c:pt>
+                <c:pt idx="11">
+                  <c:v/>
+                </c:pt>
+              </c:numCache>
+            </c:numRef>
+          </c:val>
+          <c:smooth val="0"/>
+        </c:ser>
+        <c:dLbls>
+          <c:numFmt formatCode="0.0&quot;%&quot;" sourceLinked="0"/>
+          <c:txPr>
+            <a:bodyPr/>
+            <a:lstStyle/>
+            <a:p>
+              <a:pPr>
+                <a:defRPr b="0" i="0" strike="noStrike" sz="1400" u="none">
+                  <a:solidFill>
+                    <a:srgbClr val="1A1A1A"/>
+                  </a:solidFill>
+                  <a:latin typeface="+mn-lt"/>
+                </a:defRPr>
+              </a:pPr>
+            </a:p>
+          </c:txPr>
+          <c:showLegendKey val="0"/>
+          <c:showVal val="0"/>
+          <c:showCatName val="0"/>
+          <c:showSerName val="0"/>
+          <c:showPercent val="0"/>
+          <c:showBubbleSize val="0"/>
+          <c:showLeaderLines val="0"/>
+        </c:dLbls>
+        <c:marker val="1"/>
+        <c:axId val="2094734554"/>
+        <c:axId val="2094734552"/>
+        <c:axId val="2094734556"/>
+      </c:lineChart>
+      <c:catAx>
+        <c:axId val="2094734554"/>
+        <c:scaling>
+          <c:orientation val="minMax"/>
+        </c:scaling>
+        <c:delete val="0"/>
+        <c:axPos val="b"/>
+        <c:numFmt formatCode="General" sourceLinked="1"/>
+        <c:majorTickMark val="out"/>
+        <c:minorTickMark val="none"/>
+        <c:tickLblPos val="low"/>
+        <c:spPr>
+          <a:ln w="12700" cap="flat">
+            <a:noFill/>
+            <a:prstDash val="solid"/>
+            <a:round/>
+          </a:ln>
+        </c:spPr>
+        <c:txPr>
+          <a:bodyPr/>
+          <a:lstStyle/>
+          <a:p>
+            <a:pPr>
+              <a:defRPr sz="1400" b="0" i="0" u="none" strike="noStrike">
+                <a:solidFill>
+                  <a:srgbClr val="FFFFFF"/>
+                </a:solidFill>
+                <a:latin typeface="+mn-lt"/>
+              </a:defRPr>
+            </a:pPr>
+            <a:endParaRPr lang="en-US"/>
+          </a:p>
+        </c:txPr>
+        <c:crossAx val="2094734552"/>
+        <c:crosses val="min"/>
+        <c:auto val="1"/>
+        <c:lblAlgn val="ctr"/>
+        <c:noMultiLvlLbl val="1"/>
+      </c:catAx>
+      <c:valAx>
+        <c:axId val="2094734552"/>
+        <c:scaling>
+          <c:orientation val="minMax"/>
+          <c:max val="48"/>
+          <c:min val="40"/>
+        </c:scaling>
+        <c:delete val="0"/>
+        <c:axPos val="l"/>
+        <c:numFmt formatCode="0&quot;%&quot;" sourceLinked="0"/>
+        <c:majorTickMark val="out"/>
+        <c:minorTickMark val="none"/>
+        <c:tickLblPos val="nextTo"/>
+        <c:spPr>
+          <a:ln w="12700" cap="flat">
+            <a:noFill/>
+            <a:prstDash val="solid"/>
+            <a:round/>
+          </a:ln>
+        </c:spPr>
+        <c:txPr>
+          <a:bodyPr/>
+          <a:lstStyle/>
+          <a:p>
+            <a:pPr>
+              <a:defRPr sz="1400" b="0" i="0" u="none" strike="noStrike">
+                <a:solidFill>
+                  <a:srgbClr val="FFFFFF"/>
+                </a:solidFill>
+                <a:latin typeface="+mn-lt"/>
+              </a:defRPr>
+            </a:pPr>
+            <a:endParaRPr lang="en-US"/>
+          </a:p>
+        </c:txPr>
+        <c:crossAx val="2094734554"/>
+        <c:crosses val="autoZero"/>
+        <c:crossBetween val="between"/>
+        <c:majorUnit val="2"/>
+      </c:valAx>
+      <c:spPr>
+        <a:noFill/>
+        <a:ln>
+          <a:noFill/>
+        </a:ln>
+        <a:effectLst/>
+      </c:spPr>
+    </c:plotArea>
+    <c:plotVisOnly val="1"/>
+    <c:dispBlanksAs val="span"/>
+  </c:chart>
+  <c:spPr>
+    <a:noFill/>
+    <a:ln>
+      <a:noFill/>
+    </a:ln>
+    <a:effectLst/>
+  </c:spPr>
+  <c:externalData r:id="rId1">
+    <c:autoUpdate val="0"/>
+  </c:externalData>
+</c:chartSpace>
+</file>
+
+<file path=ppt/charts/chart2.xml><?xml version="1.0" encoding="utf-8"?>
+<c:chartSpace xmlns:c="http://schemas.openxmlformats.org/drawingml/2006/chart" xmlns:a="http://schemas.openxmlformats.org/drawingml/2006/main" xmlns:r="http://schemas.openxmlformats.org/officeDocument/2006/relationships">
+  <c:date1904 val="0"/>
+  <c:roundedCorners val="1"/>
+  <c:chart>
+    <c:autoTitleDeleted val="1"/>
+    <c:plotArea>
+      <c:layout/>
+      <c:lineChart>
+        <c:varyColors val="0"/>
+        <c:ser>
+          <c:idx val="0"/>
+          <c:order val="0"/>
+          <c:tx>
+            <c:strRef>
+              <c:f>Sheet1!$B$1</c:f>
+              <c:strCache>
+                <c:ptCount val="1"/>
+                <c:pt idx="0">
+                  <c:v>2026</c:v>
+                </c:pt>
+              </c:strCache>
+            </c:strRef>
+          </c:tx>
+          <c:spPr>
+            <a:solidFill>
+              <a:srgbClr val="2587C5"/>
+            </a:solidFill>
+            <a:ln>
+              <a:noFill/>
+            </a:ln>
+            <a:effectLst/>
+          </c:spPr>
+          <c:invertIfNegative val="0"/>
+          <c:dLbls>
+            <c:numFmt formatCode="0.0&quot;%&quot;" sourceLinked="0"/>
+            <c:txPr>
+              <a:bodyPr/>
+              <a:lstStyle/>
+              <a:p>
+                <a:pPr>
+                  <a:defRPr b="0" i="0" strike="noStrike" sz="1400" u="none">
+                    <a:solidFill>
+                      <a:srgbClr val="1A1A1A"/>
+                    </a:solidFill>
+                    <a:latin typeface="+mn-lt"/>
+                  </a:defRPr>
+                </a:pPr>
+              </a:p>
+            </c:txPr>
+            <c:dLblPos val="t"/>
+            <c:showLegendKey val="0"/>
+            <c:showVal val="1"/>
+            <c:showCatName val="0"/>
+            <c:showSerName val="0"/>
+            <c:showPercent val="0"/>
+            <c:showBubbleSize val="0"/>
+            <c:showLeaderLines val="0"/>
+          </c:dLbls>
+          <c:marker>
+            <c:symbol val="none"/>
+            <c:size val="8"/>
+            <c:spPr>
+              <a:solidFill>
+                <a:srgbClr val="2587C5"/>
+              </a:solidFill>
+              <a:ln w="9525" cap="flat">
+                <a:solidFill>
+                  <a:srgbClr val="2587C5"/>
+                </a:solidFill>
+                <a:prstDash val="solid"/>
+                <a:round/>
+              </a:ln>
+              <a:effectLst/>
+            </c:spPr>
+          </c:marker>
+          <c:cat>
+            <c:multiLvlStrRef>
+              <c:f>Sheet1!$A$2:$A$13</c:f>
+              <c:multiLvlStrCache>
+                <c:ptCount val="12"/>
+                <c:lvl>
+                  <c:pt idx="0">
+                    <c:v>Jan</c:v>
+                  </c:pt>
+                  <c:pt idx="1">
+                    <c:v>Feb</c:v>
+                  </c:pt>
+                  <c:pt idx="2">
+                    <c:v>Mar</c:v>
+                  </c:pt>
+                  <c:pt idx="3">
+                    <c:v>Apr</c:v>
+                  </c:pt>
+                  <c:pt idx="4">
+                    <c:v>May</c:v>
+                  </c:pt>
+                  <c:pt idx="5">
+                    <c:v>Jun</c:v>
+                  </c:pt>
+                  <c:pt idx="6">
+                    <c:v>Jul</c:v>
+                  </c:pt>
+                  <c:pt idx="7">
+                    <c:v>Aug</c:v>
+                  </c:pt>
+                  <c:pt idx="8">
+                    <c:v>Sep</c:v>
+                  </c:pt>
+                  <c:pt idx="9">
+                    <c:v>Oct</c:v>
+                  </c:pt>
+                  <c:pt idx="10">
+                    <c:v>Nov</c:v>
+                  </c:pt>
+                  <c:pt idx="11">
+                    <c:v>Dec</c:v>
+                  </c:pt>
+                </c:lvl>
+              </c:multiLvlStrCache>
+            </c:multiLvlStrRef>
+          </c:cat>
+          <c:val>
+            <c:numRef>
+              <c:f>Sheet1!$B$2:$B$13</c:f>
+              <c:numCache>
+                <c:formatCode>General</c:formatCode>
+                <c:ptCount val="12"/>
+                <c:pt idx="0">
+                  <c:v>43.5</c:v>
+                </c:pt>
+                <c:pt idx="1">
+                  <c:v>44.2</c:v>
+                </c:pt>
+                <c:pt idx="2">
+                  <c:v>44</c:v>
+                </c:pt>
+                <c:pt idx="3">
+                  <c:v>44.3</c:v>
+                </c:pt>
+                <c:pt idx="4">
+                  <c:v>44.5</c:v>
+                </c:pt>
+                <c:pt idx="5">
+                  <c:v>44.5</c:v>
+                </c:pt>
+                <c:pt idx="6">
+                  <c:v>46</c:v>
+                </c:pt>
+                <c:pt idx="7">
+                  <c:v>45.1</c:v>
+                </c:pt>
+                <c:pt idx="8">
+                  <c:v>45.6</c:v>
+                </c:pt>
+                <c:pt idx="9">
+                  <c:v/>
+                </c:pt>
+                <c:pt idx="10">
+                  <c:v/>
+                </c:pt>
+                <c:pt idx="11">
+                  <c:v/>
+                </c:pt>
+              </c:numCache>
+            </c:numRef>
+          </c:val>
+          <c:smooth val="0"/>
+        </c:ser>
+        <c:dLbls>
+          <c:numFmt formatCode="0.0&quot;%&quot;" sourceLinked="0"/>
+          <c:txPr>
+            <a:bodyPr/>
+            <a:lstStyle/>
+            <a:p>
+              <a:pPr>
+                <a:defRPr b="0" i="0" strike="noStrike" sz="1400" u="none">
+                  <a:solidFill>
+                    <a:srgbClr val="1A1A1A"/>
+                  </a:solidFill>
+                  <a:latin typeface="+mn-lt"/>
+                </a:defRPr>
+              </a:pPr>
+            </a:p>
+          </c:txPr>
+          <c:dLblPos val="t"/>
+          <c:showLegendKey val="0"/>
+          <c:showVal val="1"/>
+          <c:showCatName val="0"/>
+          <c:showSerName val="0"/>
+          <c:showPercent val="0"/>
+          <c:showBubbleSize val="0"/>
+          <c:showLeaderLines val="0"/>
+        </c:dLbls>
+        <c:marker val="1"/>
+        <c:axId val="2094734554"/>
+        <c:axId val="2094734552"/>
+        <c:axId val="2094734556"/>
+      </c:lineChart>
+      <c:catAx>
+        <c:axId val="2094734554"/>
+        <c:scaling>
+          <c:orientation val="minMax"/>
+        </c:scaling>
+        <c:delete val="0"/>
+        <c:axPos val="b"/>
+        <c:numFmt formatCode="General" sourceLinked="1"/>
+        <c:majorTickMark val="out"/>
+        <c:minorTickMark val="none"/>
+        <c:tickLblPos val="low"/>
+        <c:spPr>
+          <a:ln w="12700" cap="flat">
+            <a:noFill/>
+            <a:prstDash val="solid"/>
+            <a:round/>
+          </a:ln>
+        </c:spPr>
+        <c:txPr>
+          <a:bodyPr/>
+          <a:lstStyle/>
+          <a:p>
+            <a:pPr>
+              <a:defRPr sz="1400" b="0" i="0" u="none" strike="noStrike">
+                <a:solidFill>
+                  <a:srgbClr val="FFFFFF"/>
+                </a:solidFill>
+                <a:latin typeface="+mn-lt"/>
+              </a:defRPr>
+            </a:pPr>
+            <a:endParaRPr lang="en-US"/>
+          </a:p>
+        </c:txPr>
+        <c:crossAx val="2094734552"/>
+        <c:crosses val="min"/>
+        <c:auto val="1"/>
+        <c:lblAlgn val="ctr"/>
+        <c:noMultiLvlLbl val="1"/>
+      </c:catAx>
+      <c:valAx>
+        <c:axId val="2094734552"/>
+        <c:scaling>
+          <c:orientation val="minMax"/>
+          <c:max val="48"/>
+          <c:min val="40"/>
+        </c:scaling>
+        <c:delete val="0"/>
+        <c:axPos val="l"/>
+        <c:numFmt formatCode="0&quot;%&quot;" sourceLinked="0"/>
+        <c:majorTickMark val="out"/>
+        <c:minorTickMark val="none"/>
+        <c:tickLblPos val="nextTo"/>
+        <c:spPr>
+          <a:ln w="12700" cap="flat">
+            <a:noFill/>
+            <a:prstDash val="solid"/>
+            <a:round/>
+          </a:ln>
+        </c:spPr>
+        <c:txPr>
+          <a:bodyPr/>
+          <a:lstStyle/>
+          <a:p>
+            <a:pPr>
+              <a:defRPr sz="1400" b="0" i="0" u="none" strike="noStrike">
+                <a:solidFill>
+                  <a:srgbClr val="FFFFFF"/>
+                </a:solidFill>
+                <a:latin typeface="+mn-lt"/>
+              </a:defRPr>
+            </a:pPr>
+            <a:endParaRPr lang="en-US"/>
+          </a:p>
+        </c:txPr>
+        <c:crossAx val="2094734554"/>
+        <c:crosses val="autoZero"/>
+        <c:crossBetween val="between"/>
+        <c:majorUnit val="2"/>
+      </c:valAx>
+      <c:spPr>
+        <a:solidFill>
+          <a:srgbClr val="FFFFFF">
+            <a:alpha val="0"/>
+          </a:srgbClr>
+        </a:solidFill>
+        <a:ln>
+          <a:noFill/>
+        </a:ln>
+        <a:effectLst/>
+      </c:spPr>
+    </c:plotArea>
+    <c:plotVisOnly val="1"/>
+    <c:dispBlanksAs val="span"/>
+  </c:chart>
+  <c:spPr>
+    <a:solidFill>
+      <a:srgbClr val="FFFFFF">
+        <a:alpha val="0"/>
+      </a:srgbClr>
+    </a:solidFill>
+    <a:ln>
+      <a:noFill/>
+    </a:ln>
+    <a:effectLst/>
+  </c:spPr>
+  <c:externalData r:id="rId1">
+    <c:autoUpdate val="0"/>
+  </c:externalData>
+</c:chartSpace>
+</file>
+
+<file path=ppt/charts/chart3.xml><?xml version="1.0" encoding="utf-8"?>
+<c:chartSpace xmlns:c="http://schemas.openxmlformats.org/drawingml/2006/chart" xmlns:a="http://schemas.openxmlformats.org/drawingml/2006/main" xmlns:r="http://schemas.openxmlformats.org/officeDocument/2006/relationships">
+  <c:date1904 val="0"/>
+  <c:roundedCorners val="1"/>
+  <c:chart>
+    <c:autoTitleDeleted val="1"/>
+    <c:plotArea>
+      <c:layout/>
+      <c:lineChart>
+        <c:varyColors val="0"/>
+        <c:ser>
+          <c:idx val="0"/>
+          <c:order val="0"/>
+          <c:tx>
+            <c:strRef>
+              <c:f>Sheet1!$B$1</c:f>
+              <c:strCache>
+                <c:ptCount val="1"/>
+                <c:pt idx="0">
+                  <c:v>2025</c:v>
+                </c:pt>
+              </c:strCache>
+            </c:strRef>
+          </c:tx>
+          <c:spPr>
+            <a:solidFill>
+              <a:srgbClr val="9AA3AD"/>
+            </a:solidFill>
+            <a:ln>
+              <a:noFill/>
+            </a:ln>
+            <a:effectLst/>
+          </c:spPr>
+          <c:invertIfNegative val="0"/>
+          <c:dLbls>
+            <c:numFmt formatCode="0.0&quot;%&quot;" sourceLinked="0"/>
+            <c:txPr>
+              <a:bodyPr/>
+              <a:lstStyle/>
+              <a:p>
+                <a:pPr>
+                  <a:defRPr b="0" i="0" strike="noStrike" sz="1400" u="none">
+                    <a:solidFill>
+                      <a:srgbClr val="1A1A1A"/>
+                    </a:solidFill>
+                    <a:latin typeface="+mn-lt"/>
+                  </a:defRPr>
+                </a:pPr>
+              </a:p>
+            </c:txPr>
+            <c:dLblPos val="b"/>
+            <c:showLegendKey val="0"/>
+            <c:showVal val="1"/>
+            <c:showCatName val="0"/>
+            <c:showSerName val="0"/>
+            <c:showPercent val="0"/>
+            <c:showBubbleSize val="0"/>
+            <c:showLeaderLines val="0"/>
+          </c:dLbls>
+          <c:marker>
+            <c:symbol val="none"/>
+            <c:size val="8"/>
+            <c:spPr>
+              <a:solidFill>
+                <a:srgbClr val="9AA3AD"/>
+              </a:solidFill>
+              <a:ln w="9525" cap="flat">
+                <a:solidFill>
+                  <a:srgbClr val="9AA3AD"/>
+                </a:solidFill>
+                <a:prstDash val="solid"/>
+                <a:round/>
+              </a:ln>
+              <a:effectLst/>
+            </c:spPr>
+          </c:marker>
+          <c:cat>
+            <c:multiLvlStrRef>
+              <c:f>Sheet1!$A$2:$A$13</c:f>
+              <c:multiLvlStrCache>
+                <c:ptCount val="12"/>
+                <c:lvl>
+                  <c:pt idx="0">
+                    <c:v>Jan</c:v>
+                  </c:pt>
+                  <c:pt idx="1">
+                    <c:v>Feb</c:v>
+                  </c:pt>
+                  <c:pt idx="2">
+                    <c:v>Mar</c:v>
+                  </c:pt>
+                  <c:pt idx="3">
+                    <c:v>Apr</c:v>
+                  </c:pt>
+                  <c:pt idx="4">
+                    <c:v>May</c:v>
+                  </c:pt>
+                  <c:pt idx="5">
+                    <c:v>Jun</c:v>
+                  </c:pt>
+                  <c:pt idx="6">
+                    <c:v>Jul</c:v>
+                  </c:pt>
+                  <c:pt idx="7">
+                    <c:v>Aug</c:v>
+                  </c:pt>
+                  <c:pt idx="8">
+                    <c:v>Sep</c:v>
+                  </c:pt>
+                  <c:pt idx="9">
+                    <c:v>Oct</c:v>
+                  </c:pt>
+                  <c:pt idx="10">
+                    <c:v>Nov</c:v>
+                  </c:pt>
+                  <c:pt idx="11">
+                    <c:v>Dec</c:v>
+                  </c:pt>
+                </c:lvl>
+              </c:multiLvlStrCache>
+            </c:multiLvlStrRef>
+          </c:cat>
+          <c:val>
+            <c:numRef>
+              <c:f>Sheet1!$B$2:$B$13</c:f>
+              <c:numCache>
+                <c:formatCode>General</c:formatCode>
+                <c:ptCount val="12"/>
+                <c:pt idx="0">
+                  <c:v>42.3</c:v>
+                </c:pt>
+                <c:pt idx="1">
+                  <c:v>42.4</c:v>
+                </c:pt>
+                <c:pt idx="2">
+                  <c:v>42.7</c:v>
+                </c:pt>
+                <c:pt idx="3">
+                  <c:v>42.7</c:v>
+                </c:pt>
+                <c:pt idx="4">
+                  <c:v>41.8</c:v>
+                </c:pt>
+                <c:pt idx="5">
+                  <c:v>41.7</c:v>
+                </c:pt>
+                <c:pt idx="6">
+                  <c:v>43.3</c:v>
+                </c:pt>
+                <c:pt idx="7">
+                  <c:v>43.1</c:v>
+                </c:pt>
+                <c:pt idx="8">
+                  <c:v>43.2</c:v>
+                </c:pt>
+                <c:pt idx="9">
+                  <c:v>42.5</c:v>
+                </c:pt>
+                <c:pt idx="10">
+                  <c:v>42.9</c:v>
+                </c:pt>
+                <c:pt idx="11">
+                  <c:v>43.1</c:v>
+                </c:pt>
+              </c:numCache>
+            </c:numRef>
+          </c:val>
+          <c:smooth val="0"/>
+        </c:ser>
+        <c:dLbls>
+          <c:numFmt formatCode="0.0&quot;%&quot;" sourceLinked="0"/>
+          <c:txPr>
+            <a:bodyPr/>
+            <a:lstStyle/>
+            <a:p>
+              <a:pPr>
+                <a:defRPr b="0" i="0" strike="noStrike" sz="1400" u="none">
+                  <a:solidFill>
+                    <a:srgbClr val="1A1A1A"/>
+                  </a:solidFill>
+                  <a:latin typeface="+mn-lt"/>
+                </a:defRPr>
+              </a:pPr>
+            </a:p>
+          </c:txPr>
+          <c:dLblPos val="b"/>
+          <c:showLegendKey val="0"/>
+          <c:showVal val="1"/>
+          <c:showCatName val="0"/>
+          <c:showSerName val="0"/>
+          <c:showPercent val="0"/>
+          <c:showBubbleSize val="0"/>
+          <c:showLeaderLines val="0"/>
+        </c:dLbls>
+        <c:marker val="1"/>
+        <c:axId val="2094734554"/>
+        <c:axId val="2094734552"/>
+        <c:axId val="2094734556"/>
+      </c:lineChart>
+      <c:catAx>
+        <c:axId val="2094734554"/>
+        <c:scaling>
+          <c:orientation val="minMax"/>
+        </c:scaling>
+        <c:delete val="0"/>
+        <c:axPos val="b"/>
+        <c:numFmt formatCode="General" sourceLinked="1"/>
+        <c:majorTickMark val="out"/>
+        <c:minorTickMark val="none"/>
+        <c:tickLblPos val="low"/>
+        <c:spPr>
+          <a:ln w="12700" cap="flat">
+            <a:noFill/>
+            <a:prstDash val="solid"/>
+            <a:round/>
+          </a:ln>
+        </c:spPr>
+        <c:txPr>
+          <a:bodyPr/>
+          <a:lstStyle/>
+          <a:p>
+            <a:pPr>
+              <a:defRPr sz="1400" b="0" i="0" u="none" strike="noStrike">
+                <a:solidFill>
+                  <a:srgbClr val="FFFFFF"/>
+                </a:solidFill>
+                <a:latin typeface="+mn-lt"/>
+              </a:defRPr>
+            </a:pPr>
+            <a:endParaRPr lang="en-US"/>
+          </a:p>
+        </c:txPr>
+        <c:crossAx val="2094734552"/>
+        <c:crosses val="min"/>
+        <c:auto val="1"/>
+        <c:lblAlgn val="ctr"/>
+        <c:noMultiLvlLbl val="1"/>
+      </c:catAx>
+      <c:valAx>
+        <c:axId val="2094734552"/>
+        <c:scaling>
+          <c:orientation val="minMax"/>
+          <c:max val="48"/>
+          <c:min val="40"/>
+        </c:scaling>
+        <c:delete val="0"/>
+        <c:axPos val="l"/>
+        <c:numFmt formatCode="0&quot;%&quot;" sourceLinked="0"/>
+        <c:majorTickMark val="out"/>
+        <c:minorTickMark val="none"/>
+        <c:tickLblPos val="nextTo"/>
+        <c:spPr>
+          <a:ln w="12700" cap="flat">
+            <a:noFill/>
+            <a:prstDash val="solid"/>
+            <a:round/>
+          </a:ln>
+        </c:spPr>
+        <c:txPr>
+          <a:bodyPr/>
+          <a:lstStyle/>
+          <a:p>
+            <a:pPr>
+              <a:defRPr sz="1400" b="0" i="0" u="none" strike="noStrike">
+                <a:solidFill>
+                  <a:srgbClr val="FFFFFF"/>
+                </a:solidFill>
+                <a:latin typeface="+mn-lt"/>
+              </a:defRPr>
+            </a:pPr>
+            <a:endParaRPr lang="en-US"/>
+          </a:p>
+        </c:txPr>
+        <c:crossAx val="2094734554"/>
+        <c:crosses val="autoZero"/>
+        <c:crossBetween val="between"/>
+        <c:majorUnit val="2"/>
+      </c:valAx>
+      <c:spPr>
+        <a:solidFill>
+          <a:srgbClr val="FFFFFF">
+            <a:alpha val="0"/>
+          </a:srgbClr>
+        </a:solidFill>
+        <a:ln>
+          <a:noFill/>
+        </a:ln>
+        <a:effectLst/>
+      </c:spPr>
+    </c:plotArea>
+    <c:plotVisOnly val="1"/>
+    <c:dispBlanksAs val="span"/>
+  </c:chart>
+  <c:spPr>
+    <a:solidFill>
+      <a:srgbClr val="FFFFFF">
+        <a:alpha val="0"/>
+      </a:srgbClr>
+    </a:solidFill>
+    <a:ln>
+      <a:noFill/>
+    </a:ln>
+    <a:effectLst/>
+  </c:spPr>
+  <c:externalData r:id="rId1">
+    <c:autoUpdate val="0"/>
+  </c:externalData>
+</c:chartSpace>
+</file>
+
+<file path=ppt/charts/chart4.xml><?xml version="1.0" encoding="utf-8"?>
+<c:chartSpace xmlns:c="http://schemas.openxmlformats.org/drawingml/2006/chart" xmlns:a="http://schemas.openxmlformats.org/drawingml/2006/main" xmlns:r="http://schemas.openxmlformats.org/officeDocument/2006/relationships">
+  <c:date1904 val="0"/>
+  <c:roundedCorners val="1"/>
+  <c:chart>
+    <c:autoTitleDeleted val="1"/>
+    <c:plotArea>
+      <c:layout/>
+      <c:lineChart>
+        <c:varyColors val="0"/>
+        <c:ser>
+          <c:idx val="0"/>
+          <c:order val="0"/>
+          <c:tx>
+            <c:strRef>
+              <c:f>Sheet1!$B$1</c:f>
+              <c:strCache>
+                <c:ptCount val="1"/>
+                <c:pt idx="0">
+                  <c:v>2025</c:v>
+                </c:pt>
+              </c:strCache>
+            </c:strRef>
+          </c:tx>
+          <c:spPr>
+            <a:solidFill>
+              <a:srgbClr val="9AA3AD"/>
+            </a:solidFill>
+            <a:ln w="38100" cap="flat">
+              <a:solidFill>
+                <a:srgbClr val="9AA3AD"/>
+              </a:solidFill>
+              <a:prstDash val="solid"/>
+              <a:round/>
+            </a:ln>
+            <a:effectLst/>
+          </c:spPr>
+          <c:invertIfNegative val="0"/>
+          <c:dLbls>
+            <c:numFmt formatCode="0.0&quot;%&quot;" sourceLinked="0"/>
+            <c:txPr>
+              <a:bodyPr/>
+              <a:lstStyle/>
+              <a:p>
+                <a:pPr>
+                  <a:defRPr b="0" i="0" strike="noStrike" sz="1400" u="none">
+                    <a:solidFill>
+                      <a:srgbClr val="1A1A1A"/>
+                    </a:solidFill>
+                    <a:latin typeface="+mn-lt"/>
+                  </a:defRPr>
+                </a:pPr>
+              </a:p>
+            </c:txPr>
+            <c:showLegendKey val="0"/>
+            <c:showVal val="0"/>
+            <c:showCatName val="0"/>
+            <c:showSerName val="0"/>
+            <c:showPercent val="0"/>
+            <c:showBubbleSize val="0"/>
+            <c:showLeaderLines val="0"/>
+          </c:dLbls>
+          <c:marker>
+            <c:symbol val="circle"/>
+            <c:size val="8"/>
+            <c:spPr>
+              <a:solidFill>
+                <a:srgbClr val="9AA3AD"/>
+              </a:solidFill>
+              <a:ln w="9525" cap="flat">
+                <a:solidFill>
+                  <a:srgbClr val="9AA3AD"/>
+                </a:solidFill>
+                <a:prstDash val="solid"/>
+                <a:round/>
+              </a:ln>
+              <a:effectLst/>
+            </c:spPr>
+          </c:marker>
+          <c:cat>
+            <c:multiLvlStrRef>
+              <c:f>Sheet1!$A$2:$A$13</c:f>
+              <c:multiLvlStrCache>
+                <c:ptCount val="12"/>
+                <c:lvl>
+                  <c:pt idx="0">
+                    <c:v>Jan</c:v>
+                  </c:pt>
+                  <c:pt idx="1">
+                    <c:v>Feb</c:v>
+                  </c:pt>
+                  <c:pt idx="2">
+                    <c:v>Mar</c:v>
+                  </c:pt>
+                  <c:pt idx="3">
+                    <c:v>Apr</c:v>
+                  </c:pt>
+                  <c:pt idx="4">
+                    <c:v>May</c:v>
+                  </c:pt>
+                  <c:pt idx="5">
+                    <c:v>Jun</c:v>
+                  </c:pt>
+                  <c:pt idx="6">
+                    <c:v>Jul</c:v>
+                  </c:pt>
+                  <c:pt idx="7">
+                    <c:v>Aug</c:v>
+                  </c:pt>
+                  <c:pt idx="8">
+                    <c:v>Sep</c:v>
+                  </c:pt>
+                  <c:pt idx="9">
+                    <c:v>Oct</c:v>
+                  </c:pt>
+                  <c:pt idx="10">
+                    <c:v>Nov</c:v>
+                  </c:pt>
+                  <c:pt idx="11">
+                    <c:v>Dec</c:v>
+                  </c:pt>
+                </c:lvl>
+              </c:multiLvlStrCache>
+            </c:multiLvlStrRef>
+          </c:cat>
+          <c:val>
+            <c:numRef>
+              <c:f>Sheet1!$B$2:$B$13</c:f>
+              <c:numCache>
+                <c:formatCode>General</c:formatCode>
+                <c:ptCount val="12"/>
+                <c:pt idx="0">
+                  <c:v>42.3</c:v>
+                </c:pt>
+                <c:pt idx="1">
+                  <c:v>42.4</c:v>
+                </c:pt>
+                <c:pt idx="2">
+                  <c:v>42.7</c:v>
+                </c:pt>
+                <c:pt idx="3">
+                  <c:v>42.7</c:v>
+                </c:pt>
+                <c:pt idx="4">
+                  <c:v>41.8</c:v>
+                </c:pt>
+                <c:pt idx="5">
+                  <c:v>41.7</c:v>
+                </c:pt>
+                <c:pt idx="6">
+                  <c:v>43.3</c:v>
+                </c:pt>
+                <c:pt idx="7">
+                  <c:v>43.1</c:v>
+                </c:pt>
+                <c:pt idx="8">
+                  <c:v>43.2</c:v>
+                </c:pt>
+                <c:pt idx="9">
+                  <c:v>42.5</c:v>
+                </c:pt>
+                <c:pt idx="10">
+                  <c:v>42.9</c:v>
+                </c:pt>
+                <c:pt idx="11">
+                  <c:v>43.1</c:v>
+                </c:pt>
+              </c:numCache>
+            </c:numRef>
+          </c:val>
+          <c:smooth val="0"/>
+        </c:ser>
+        <c:dLbls>
+          <c:numFmt formatCode="0.0&quot;%&quot;" sourceLinked="0"/>
+          <c:txPr>
+            <a:bodyPr/>
+            <a:lstStyle/>
+            <a:p>
+              <a:pPr>
+                <a:defRPr b="0" i="0" strike="noStrike" sz="1400" u="none">
+                  <a:solidFill>
+                    <a:srgbClr val="1A1A1A"/>
+                  </a:solidFill>
+                  <a:latin typeface="+mn-lt"/>
+                </a:defRPr>
+              </a:pPr>
+            </a:p>
+          </c:txPr>
+          <c:showLegendKey val="0"/>
+          <c:showVal val="0"/>
+          <c:showCatName val="0"/>
+          <c:showSerName val="0"/>
+          <c:showPercent val="0"/>
+          <c:showBubbleSize val="0"/>
+          <c:showLeaderLines val="0"/>
+        </c:dLbls>
+        <c:marker val="1"/>
+        <c:axId val="2094734554"/>
+        <c:axId val="2094734552"/>
+        <c:axId val="2094734556"/>
+      </c:lineChart>
+      <c:catAx>
+        <c:axId val="2094734554"/>
+        <c:scaling>
+          <c:orientation val="minMax"/>
+        </c:scaling>
+        <c:delete val="0"/>
+        <c:axPos val="b"/>
+        <c:numFmt formatCode="General" sourceLinked="1"/>
+        <c:majorTickMark val="out"/>
+        <c:minorTickMark val="none"/>
+        <c:tickLblPos val="low"/>
+        <c:spPr>
+          <a:ln w="12700" cap="flat">
+            <a:solidFill>
+              <a:srgbClr val="888888"/>
+            </a:solidFill>
+            <a:prstDash val="solid"/>
+            <a:round/>
+          </a:ln>
+        </c:spPr>
+        <c:txPr>
+          <a:bodyPr/>
+          <a:lstStyle/>
+          <a:p>
+            <a:pPr>
+              <a:defRPr sz="1400" b="0" i="0" u="none" strike="noStrike">
+                <a:solidFill>
+                  <a:srgbClr val="1A1A1A"/>
+                </a:solidFill>
+                <a:latin typeface="+mn-lt"/>
+              </a:defRPr>
+            </a:pPr>
+            <a:endParaRPr lang="en-US"/>
+          </a:p>
+        </c:txPr>
+        <c:crossAx val="2094734552"/>
+        <c:crosses val="min"/>
+        <c:auto val="1"/>
+        <c:lblAlgn val="ctr"/>
+        <c:noMultiLvlLbl val="1"/>
+      </c:catAx>
+      <c:valAx>
+        <c:axId val="2094734552"/>
+        <c:scaling>
+          <c:orientation val="minMax"/>
+          <c:max val="48"/>
+          <c:min val="40"/>
+        </c:scaling>
+        <c:delete val="0"/>
+        <c:axPos val="l"/>
+        <c:majorGridlines>
+          <c:spPr>
+            <a:ln w="9525" cap="flat">
+              <a:solidFill>
+                <a:srgbClr val="D9D9D9"/>
+              </a:solidFill>
+              <a:prstDash val="solid"/>
+              <a:round/>
+            </a:ln>
+          </c:spPr>
+        </c:majorGridlines>
+        <c:numFmt formatCode="0&quot;%&quot;" sourceLinked="0"/>
+        <c:majorTickMark val="out"/>
+        <c:minorTickMark val="none"/>
+        <c:tickLblPos val="nextTo"/>
+        <c:spPr>
+          <a:ln w="12700" cap="flat">
+            <a:noFill/>
+            <a:prstDash val="solid"/>
+            <a:round/>
+          </a:ln>
+        </c:spPr>
+        <c:txPr>
+          <a:bodyPr/>
+          <a:lstStyle/>
+          <a:p>
+            <a:pPr>
+              <a:defRPr sz="1400" b="0" i="0" u="none" strike="noStrike">
+                <a:solidFill>
+                  <a:srgbClr val="595959"/>
+                </a:solidFill>
+                <a:latin typeface="+mn-lt"/>
+              </a:defRPr>
+            </a:pPr>
+            <a:endParaRPr lang="en-US"/>
+          </a:p>
+        </c:txPr>
+        <c:crossAx val="2094734554"/>
+        <c:crosses val="autoZero"/>
+        <c:crossBetween val="between"/>
+        <c:majorUnit val="2"/>
+      </c:valAx>
+      <c:spPr>
+        <a:solidFill>
+          <a:srgbClr val="FFFFFF">
+            <a:alpha val="0"/>
+          </a:srgbClr>
+        </a:solidFill>
+        <a:ln>
+          <a:noFill/>
+        </a:ln>
+        <a:effectLst/>
+      </c:spPr>
+    </c:plotArea>
+    <c:plotVisOnly val="1"/>
+    <c:dispBlanksAs val="span"/>
+  </c:chart>
+  <c:spPr>
+    <a:solidFill>
+      <a:srgbClr val="FFFFFF">
+        <a:alpha val="0"/>
+      </a:srgbClr>
+    </a:solidFill>
+    <a:ln>
+      <a:noFill/>
+    </a:ln>
+    <a:effectLst/>
+  </c:spPr>
+  <c:externalData r:id="rId1">
+    <c:autoUpdate val="0"/>
+  </c:externalData>
+</c:chartSpace>
 </file>
 
 <file path=ppt/notesMasters/notesMaster1.xml><?xml version="1.0" encoding="utf-8"?>
@@ -593,7 +1843,7 @@
           <a:p>
             <a:r>
               <a:rPr lang="en-US" dirty="0"/>
-              <a:t>Source: Jan 2026 GM meeting (Day 1), slides 13-14: six warranty audits, primary causes and Warranty Compliance steps. Descriptions under each heading drafted for this deck; confirm against each OEM's warranty policy manual.DRAFT. Causes from Jan 2026 GM meeting slide 13. That slide named six stores and their debits; stores are left off here, as on Warranty Compliance. The store amounts on the Jan slide add to $414,000 (headline said $400,000), so the slide says 'over $400,000'.</a:t>
+              <a:t>Source: Qlik - Closed Repair Orders. Warranty pay type, parts gross / parts sale, by close month; 2025 January-December, 2026 January-September. Same-store, INEOS excluded (opened 2026). GMC Prescott body shop labor types excluded. Pulled Oct 22 2026.Example for the rate-increase story. The link to the approvals is the point we are making, not something the data proves on its own: 17 of the 19 stores with approvals got a parts markup increase (vendor YTD report), and warranty parts margin rose in every month. Mix of parts and campaigns also moves this line.</a:t>
             </a:r>
             <a:endParaRPr lang="en-US" dirty="0"/>
           </a:p>
@@ -681,7 +1931,7 @@
           <a:p>
             <a:r>
               <a:rPr lang="en-US" dirty="0"/>
-              <a:t>Source: Jan 2026 GM meeting (Day 1), slides 13-14: six warranty audits, primary causes and Warranty Compliance steps. Descriptions under each heading drafted for this deck; confirm against each OEM's warranty policy manual.DRAFT. Steps from Jan 2026 GM meeting slide 14 (Warranty Compliance); the GM responsibility line from slide 13.</a:t>
+              <a:t>Source: Jan 2026 GM meeting (Day 1), slides 13-14: six warranty audits, primary causes and Warranty Compliance steps. Descriptions under each heading drafted for this deck; confirm against each OEM's warranty policy manual.DRAFT. Causes from Jan 2026 GM meeting slide 13. That slide named six stores and their debits; stores are left off here, as on Warranty Compliance. The store amounts on the Jan slide add to $414,000 (headline said $400,000), so the slide says 'over $400,000'.</a:t>
             </a:r>
             <a:endParaRPr lang="en-US" dirty="0"/>
           </a:p>
@@ -705,6 +1955,94 @@
             <a:fld id="{F7021451-1387-4CA6-816F-3879F97B5CBC}" type="slidenum">
               <a:rPr lang="en-US"/>
               <a:t>3</a:t>
+            </a:fld>
+            <a:endParaRPr lang="en-US"/>
+          </a:p>
+        </p:txBody>
+      </p:sp>
+    </p:spTree>
+    <p:extLst>
+      <p:ext uri="{BB962C8B-B14F-4D97-AF65-F5344CB8AC3E}">
+        <p14:creationId xmlns:p14="http://schemas.microsoft.com/office/powerpoint/2010/main" val="1024086991"/>
+      </p:ext>
+    </p:extLst>
+  </p:cSld>
+  <p:clrMapOvr>
+    <a:masterClrMapping/>
+  </p:clrMapOvr>
+</p:notes>
+</file>
+
+<file path=ppt/notesSlides/notesSlide4.xml><?xml version="1.0" encoding="utf-8"?>
+<p:notes xmlns:a="http://schemas.openxmlformats.org/drawingml/2006/main" xmlns:r="http://schemas.openxmlformats.org/officeDocument/2006/relationships" xmlns:p="http://schemas.openxmlformats.org/presentationml/2006/main">
+  <p:cSld>
+    <p:spTree>
+      <p:nvGrpSpPr>
+        <p:cNvPr id="1" name=""/>
+        <p:cNvGrpSpPr/>
+        <p:nvPr/>
+      </p:nvGrpSpPr>
+      <p:grpSpPr>
+        <a:xfrm>
+          <a:off x="0" y="0"/>
+          <a:ext cx="0" cy="0"/>
+          <a:chOff x="0" y="0"/>
+          <a:chExt cx="0" cy="0"/>
+        </a:xfrm>
+      </p:grpSpPr>
+      <p:sp>
+        <p:nvSpPr>
+          <p:cNvPr id="2" name="Slide Image Placeholder 1"/>
+          <p:cNvSpPr>
+            <a:spLocks noGrp="1" noRot="1" noChangeAspect="1"/>
+          </p:cNvSpPr>
+          <p:nvPr>
+            <p:ph type="sldImg"/>
+          </p:nvPr>
+        </p:nvSpPr>
+        <p:spPr/>
+      </p:sp>
+      <p:sp>
+        <p:nvSpPr>
+          <p:cNvPr id="3" name="Notes Placeholder 2"/>
+          <p:cNvSpPr>
+            <a:spLocks noGrp="1"/>
+          </p:cNvSpPr>
+          <p:nvPr>
+            <p:ph type="body" idx="1"/>
+          </p:nvPr>
+        </p:nvSpPr>
+        <p:spPr/>
+        <p:txBody>
+          <a:bodyPr/>
+          <a:lstStyle/>
+          <a:p>
+            <a:r>
+              <a:rPr lang="en-US" dirty="0"/>
+              <a:t>Source: Jan 2026 GM meeting (Day 1), slides 13-14: six warranty audits, primary causes and Warranty Compliance steps. Descriptions under each heading drafted for this deck; confirm against each OEM's warranty policy manual.DRAFT. Steps from Jan 2026 GM meeting slide 14 (Warranty Compliance); the GM responsibility line from slide 13.</a:t>
+            </a:r>
+            <a:endParaRPr lang="en-US" dirty="0"/>
+          </a:p>
+        </p:txBody>
+      </p:sp>
+      <p:sp>
+        <p:nvSpPr>
+          <p:cNvPr id="4" name="Slide Number Placeholder 3"/>
+          <p:cNvSpPr>
+            <a:spLocks noGrp="1"/>
+          </p:cNvSpPr>
+          <p:nvPr>
+            <p:ph type="sldNum" sz="quarter" idx="10"/>
+          </p:nvPr>
+        </p:nvSpPr>
+        <p:spPr/>
+        <p:txBody>
+          <a:bodyPr/>
+          <a:lstStyle/>
+          <a:p>
+            <a:fld id="{F7021451-1387-4CA6-816F-3879F97B5CBC}" type="slidenum">
+              <a:rPr lang="en-US"/>
+              <a:t>4</a:t>
             </a:fld>
             <a:endParaRPr lang="en-US"/>
           </a:p>
@@ -4933,7 +6271,7 @@
                 <a:ea typeface="Inter" pitchFamily="34" charset="-122"/>
                 <a:cs typeface="Inter" pitchFamily="34" charset="-120"/>
               </a:rPr>
-              <a:t>What Gets Claims Debited</a:t>
+              <a:t>Warranty Parts Gross Profit %</a:t>
             </a:r>
             <a:endParaRPr lang="en-US" sz="2800" dirty="0"/>
           </a:p>
@@ -4948,7 +6286,7 @@
         <p:spPr>
           <a:xfrm>
             <a:off x="457200" y="1207008"/>
-            <a:ext cx="11274552" cy="4782312"/>
+            <a:ext cx="11274552" cy="1005840"/>
           </a:xfrm>
           <a:prstGeom prst="rect">
             <a:avLst/>
@@ -4967,7 +6305,339 @@
         </p:nvSpPr>
         <p:spPr>
           <a:xfrm>
-            <a:off x="685800" y="1344168"/>
+            <a:off x="685800" y="1335024"/>
+            <a:ext cx="2651760" cy="237744"/>
+          </a:xfrm>
+          <a:prstGeom prst="rect">
+            <a:avLst/>
+          </a:prstGeom>
+          <a:noFill/>
+          <a:ln/>
+        </p:spPr>
+        <p:txBody>
+          <a:bodyPr wrap="square" lIns="0" tIns="0" rIns="0" bIns="0" rtlCol="0" anchor="ctr"/>
+          <a:lstStyle/>
+          <a:p>
+            <a:pPr indent="0" marL="0">
+              <a:buNone/>
+            </a:pPr>
+            <a:r>
+              <a:rPr lang="en-US" sz="1400" spc="90" kern="0" dirty="0">
+                <a:solidFill>
+                  <a:srgbClr val="595959"/>
+                </a:solidFill>
+                <a:latin typeface="Inter" pitchFamily="34" charset="0"/>
+                <a:ea typeface="Inter" pitchFamily="34" charset="-122"/>
+                <a:cs typeface="Inter" pitchFamily="34" charset="-120"/>
+              </a:rPr>
+              <a:t>2025 YTD</a:t>
+            </a:r>
+            <a:endParaRPr lang="en-US" sz="1400" dirty="0"/>
+          </a:p>
+        </p:txBody>
+      </p:sp>
+      <p:sp>
+        <p:nvSpPr>
+          <p:cNvPr id="7" name="Text 5"/>
+          <p:cNvSpPr txBox="1"/>
+          <p:nvPr/>
+        </p:nvSpPr>
+        <p:spPr>
+          <a:xfrm>
+            <a:off x="685800" y="1554480"/>
+            <a:ext cx="2697480" cy="548640"/>
+          </a:xfrm>
+          <a:prstGeom prst="rect">
+            <a:avLst/>
+          </a:prstGeom>
+          <a:noFill/>
+          <a:ln/>
+        </p:spPr>
+        <p:txBody>
+          <a:bodyPr wrap="square" lIns="0" tIns="0" rIns="0" bIns="0" rtlCol="0" anchor="ctr"/>
+          <a:lstStyle/>
+          <a:p>
+            <a:pPr indent="0" marL="0">
+              <a:buNone/>
+            </a:pPr>
+            <a:r>
+              <a:rPr lang="en-US" sz="3000" b="1" dirty="0">
+                <a:solidFill>
+                  <a:srgbClr val="1A1A1A"/>
+                </a:solidFill>
+                <a:latin typeface="Inter" pitchFamily="34" charset="0"/>
+                <a:ea typeface="Inter" pitchFamily="34" charset="-122"/>
+                <a:cs typeface="Inter" pitchFamily="34" charset="-120"/>
+              </a:rPr>
+              <a:t>42.6%</a:t>
+            </a:r>
+            <a:endParaRPr lang="en-US" sz="3000" dirty="0"/>
+          </a:p>
+        </p:txBody>
+      </p:sp>
+      <p:sp>
+        <p:nvSpPr>
+          <p:cNvPr id="8" name="Text 6"/>
+          <p:cNvSpPr txBox="1"/>
+          <p:nvPr/>
+        </p:nvSpPr>
+        <p:spPr>
+          <a:xfrm>
+            <a:off x="3474720" y="1335024"/>
+            <a:ext cx="2651760" cy="237744"/>
+          </a:xfrm>
+          <a:prstGeom prst="rect">
+            <a:avLst/>
+          </a:prstGeom>
+          <a:noFill/>
+          <a:ln/>
+        </p:spPr>
+        <p:txBody>
+          <a:bodyPr wrap="square" lIns="0" tIns="0" rIns="0" bIns="0" rtlCol="0" anchor="ctr"/>
+          <a:lstStyle/>
+          <a:p>
+            <a:pPr indent="0" marL="0">
+              <a:buNone/>
+            </a:pPr>
+            <a:r>
+              <a:rPr lang="en-US" sz="1400" spc="90" kern="0" dirty="0">
+                <a:solidFill>
+                  <a:srgbClr val="595959"/>
+                </a:solidFill>
+                <a:latin typeface="Inter" pitchFamily="34" charset="0"/>
+                <a:ea typeface="Inter" pitchFamily="34" charset="-122"/>
+                <a:cs typeface="Inter" pitchFamily="34" charset="-120"/>
+              </a:rPr>
+              <a:t>2026 YTD</a:t>
+            </a:r>
+            <a:endParaRPr lang="en-US" sz="1400" dirty="0"/>
+          </a:p>
+        </p:txBody>
+      </p:sp>
+      <p:sp>
+        <p:nvSpPr>
+          <p:cNvPr id="9" name="Text 7"/>
+          <p:cNvSpPr txBox="1"/>
+          <p:nvPr/>
+        </p:nvSpPr>
+        <p:spPr>
+          <a:xfrm>
+            <a:off x="3474720" y="1554480"/>
+            <a:ext cx="2697480" cy="548640"/>
+          </a:xfrm>
+          <a:prstGeom prst="rect">
+            <a:avLst/>
+          </a:prstGeom>
+          <a:noFill/>
+          <a:ln/>
+        </p:spPr>
+        <p:txBody>
+          <a:bodyPr wrap="square" lIns="0" tIns="0" rIns="0" bIns="0" rtlCol="0" anchor="ctr"/>
+          <a:lstStyle/>
+          <a:p>
+            <a:pPr indent="0" marL="0">
+              <a:buNone/>
+            </a:pPr>
+            <a:r>
+              <a:rPr lang="en-US" sz="3000" b="1" dirty="0">
+                <a:solidFill>
+                  <a:srgbClr val="1A1A1A"/>
+                </a:solidFill>
+                <a:latin typeface="Inter" pitchFamily="34" charset="0"/>
+                <a:ea typeface="Inter" pitchFamily="34" charset="-122"/>
+                <a:cs typeface="Inter" pitchFamily="34" charset="-120"/>
+              </a:rPr>
+              <a:t>44.7%</a:t>
+            </a:r>
+            <a:endParaRPr lang="en-US" sz="3000" dirty="0"/>
+          </a:p>
+        </p:txBody>
+      </p:sp>
+      <p:sp>
+        <p:nvSpPr>
+          <p:cNvPr id="10" name="Text 8"/>
+          <p:cNvSpPr txBox="1"/>
+          <p:nvPr/>
+        </p:nvSpPr>
+        <p:spPr>
+          <a:xfrm>
+            <a:off x="6263640" y="1335024"/>
+            <a:ext cx="2651760" cy="237744"/>
+          </a:xfrm>
+          <a:prstGeom prst="rect">
+            <a:avLst/>
+          </a:prstGeom>
+          <a:noFill/>
+          <a:ln/>
+        </p:spPr>
+        <p:txBody>
+          <a:bodyPr wrap="square" lIns="0" tIns="0" rIns="0" bIns="0" rtlCol="0" anchor="ctr"/>
+          <a:lstStyle/>
+          <a:p>
+            <a:pPr indent="0" marL="0">
+              <a:buNone/>
+            </a:pPr>
+            <a:r>
+              <a:rPr lang="en-US" sz="1400" spc="90" kern="0" dirty="0">
+                <a:solidFill>
+                  <a:srgbClr val="595959"/>
+                </a:solidFill>
+                <a:latin typeface="Inter" pitchFamily="34" charset="0"/>
+                <a:ea typeface="Inter" pitchFamily="34" charset="-122"/>
+                <a:cs typeface="Inter" pitchFamily="34" charset="-120"/>
+              </a:rPr>
+              <a:t>VARIANCE</a:t>
+            </a:r>
+            <a:endParaRPr lang="en-US" sz="1400" dirty="0"/>
+          </a:p>
+        </p:txBody>
+      </p:sp>
+      <p:sp>
+        <p:nvSpPr>
+          <p:cNvPr id="11" name="Text 9"/>
+          <p:cNvSpPr txBox="1"/>
+          <p:nvPr/>
+        </p:nvSpPr>
+        <p:spPr>
+          <a:xfrm>
+            <a:off x="6263640" y="1554480"/>
+            <a:ext cx="2697480" cy="548640"/>
+          </a:xfrm>
+          <a:prstGeom prst="rect">
+            <a:avLst/>
+          </a:prstGeom>
+          <a:noFill/>
+          <a:ln/>
+        </p:spPr>
+        <p:txBody>
+          <a:bodyPr wrap="square" lIns="0" tIns="0" rIns="0" bIns="0" rtlCol="0" anchor="ctr"/>
+          <a:lstStyle/>
+          <a:p>
+            <a:pPr indent="0" marL="0">
+              <a:buNone/>
+            </a:pPr>
+            <a:r>
+              <a:rPr lang="en-US" sz="3000" b="1" dirty="0">
+                <a:solidFill>
+                  <a:srgbClr val="0B7A4A"/>
+                </a:solidFill>
+                <a:latin typeface="Inter" pitchFamily="34" charset="0"/>
+                <a:ea typeface="Inter" pitchFamily="34" charset="-122"/>
+                <a:cs typeface="Inter" pitchFamily="34" charset="-120"/>
+              </a:rPr>
+              <a:t>+2.1 pts</a:t>
+            </a:r>
+            <a:endParaRPr lang="en-US" sz="3000" dirty="0"/>
+          </a:p>
+        </p:txBody>
+      </p:sp>
+      <p:sp>
+        <p:nvSpPr>
+          <p:cNvPr id="12" name="Text 10"/>
+          <p:cNvSpPr txBox="1"/>
+          <p:nvPr/>
+        </p:nvSpPr>
+        <p:spPr>
+          <a:xfrm>
+            <a:off x="9052560" y="1335024"/>
+            <a:ext cx="2651760" cy="237744"/>
+          </a:xfrm>
+          <a:prstGeom prst="rect">
+            <a:avLst/>
+          </a:prstGeom>
+          <a:noFill/>
+          <a:ln/>
+        </p:spPr>
+        <p:txBody>
+          <a:bodyPr wrap="square" lIns="0" tIns="0" rIns="0" bIns="0" rtlCol="0" anchor="ctr"/>
+          <a:lstStyle/>
+          <a:p>
+            <a:pPr indent="0" marL="0">
+              <a:buNone/>
+            </a:pPr>
+            <a:r>
+              <a:rPr lang="en-US" sz="1400" spc="90" kern="0" dirty="0">
+                <a:solidFill>
+                  <a:srgbClr val="595959"/>
+                </a:solidFill>
+                <a:latin typeface="Inter" pitchFamily="34" charset="0"/>
+                <a:ea typeface="Inter" pitchFamily="34" charset="-122"/>
+                <a:cs typeface="Inter" pitchFamily="34" charset="-120"/>
+              </a:rPr>
+              <a:t>VAR %</a:t>
+            </a:r>
+            <a:endParaRPr lang="en-US" sz="1400" dirty="0"/>
+          </a:p>
+        </p:txBody>
+      </p:sp>
+      <p:sp>
+        <p:nvSpPr>
+          <p:cNvPr id="13" name="Text 11"/>
+          <p:cNvSpPr txBox="1"/>
+          <p:nvPr/>
+        </p:nvSpPr>
+        <p:spPr>
+          <a:xfrm>
+            <a:off x="9052560" y="1554480"/>
+            <a:ext cx="2697480" cy="548640"/>
+          </a:xfrm>
+          <a:prstGeom prst="rect">
+            <a:avLst/>
+          </a:prstGeom>
+          <a:noFill/>
+          <a:ln/>
+        </p:spPr>
+        <p:txBody>
+          <a:bodyPr wrap="square" lIns="0" tIns="0" rIns="0" bIns="0" rtlCol="0" anchor="ctr"/>
+          <a:lstStyle/>
+          <a:p>
+            <a:pPr indent="0" marL="0">
+              <a:buNone/>
+            </a:pPr>
+            <a:r>
+              <a:rPr lang="en-US" sz="3000" b="1" dirty="0">
+                <a:solidFill>
+                  <a:srgbClr val="0B7A4A"/>
+                </a:solidFill>
+                <a:latin typeface="Inter" pitchFamily="34" charset="0"/>
+                <a:ea typeface="Inter" pitchFamily="34" charset="-122"/>
+                <a:cs typeface="Inter" pitchFamily="34" charset="-120"/>
+              </a:rPr>
+              <a:t>+5.0%</a:t>
+            </a:r>
+            <a:endParaRPr lang="en-US" sz="3000" dirty="0"/>
+          </a:p>
+        </p:txBody>
+      </p:sp>
+      <p:sp>
+        <p:nvSpPr>
+          <p:cNvPr id="14" name="Shape 12"/>
+          <p:cNvSpPr/>
+          <p:nvPr/>
+        </p:nvSpPr>
+        <p:spPr>
+          <a:xfrm>
+            <a:off x="457200" y="2322576"/>
+            <a:ext cx="11274552" cy="3666744"/>
+          </a:xfrm>
+          <a:prstGeom prst="rect">
+            <a:avLst/>
+          </a:prstGeom>
+          <a:solidFill>
+            <a:srgbClr val="FFFFFF"/>
+          </a:solidFill>
+          <a:ln/>
+        </p:spPr>
+      </p:sp>
+      <p:sp>
+        <p:nvSpPr>
+          <p:cNvPr id="15" name="Text 13"/>
+          <p:cNvSpPr txBox="1"/>
+          <p:nvPr/>
+        </p:nvSpPr>
+        <p:spPr>
+          <a:xfrm>
+            <a:off x="685800" y="2459736"/>
             <a:ext cx="10817352" cy="292608"/>
           </a:xfrm>
           <a:prstGeom prst="rect">
@@ -4992,7 +6662,7 @@
                 <a:ea typeface="Inter" pitchFamily="34" charset="-122"/>
                 <a:cs typeface="Inter" pitchFamily="34" charset="-120"/>
               </a:rPr>
-              <a:t>Primary causes in the six audits</a:t>
+              <a:t>Warranty parts gross profit % by month, 2025 against 2026</a:t>
             </a:r>
             <a:endParaRPr lang="en-US" sz="1500" dirty="0"/>
           </a:p>
@@ -5000,13 +6670,13 @@
       </p:sp>
       <p:sp>
         <p:nvSpPr>
-          <p:cNvPr id="7" name="Shape 5"/>
+          <p:cNvPr id="16" name="Shape 14"/>
           <p:cNvSpPr/>
           <p:nvPr/>
         </p:nvSpPr>
         <p:spPr>
           <a:xfrm>
-            <a:off x="685800" y="1691640"/>
+            <a:off x="685800" y="2807208"/>
             <a:ext cx="10817352" cy="10973"/>
           </a:xfrm>
           <a:prstGeom prst="rect">
@@ -5018,72 +6688,136 @@
           <a:ln/>
         </p:spPr>
       </p:sp>
-      <p:sp>
-        <p:nvSpPr>
-          <p:cNvPr id="8" name="Shape 6"/>
+      <p:graphicFrame>
+        <p:nvGraphicFramePr>
+          <p:cNvPr id="17" name="Chart 0" descr=""/>
+          <p:cNvGraphicFramePr/>
+          <p:nvPr/>
+        </p:nvGraphicFramePr>
+        <p:xfrm>
+          <a:off x="621792" y="3218688"/>
+          <a:ext cx="10945368" cy="2679192"/>
+        </p:xfrm>
+        <a:graphic xmlns:a="http://schemas.openxmlformats.org/drawingml/2006/main">
+          <a:graphicData uri="http://schemas.openxmlformats.org/drawingml/2006/chart">
+            <c:chart xmlns:c="http://schemas.openxmlformats.org/drawingml/2006/chart" r:id="rId1"/>
+          </a:graphicData>
+        </a:graphic>
+      </p:graphicFrame>
+      <p:graphicFrame>
+        <p:nvGraphicFramePr>
+          <p:cNvPr id="18" name="Chart 1" descr=""/>
+          <p:cNvGraphicFramePr/>
+          <p:nvPr/>
+        </p:nvGraphicFramePr>
+        <p:xfrm>
+          <a:off x="621792" y="3218688"/>
+          <a:ext cx="10945368" cy="2679192"/>
+        </p:xfrm>
+        <a:graphic xmlns:a="http://schemas.openxmlformats.org/drawingml/2006/main">
+          <a:graphicData uri="http://schemas.openxmlformats.org/drawingml/2006/chart">
+            <c:chart xmlns:c="http://schemas.openxmlformats.org/drawingml/2006/chart" r:id="rId2"/>
+          </a:graphicData>
+        </a:graphic>
+      </p:graphicFrame>
+      <p:graphicFrame>
+        <p:nvGraphicFramePr>
+          <p:cNvPr id="19" name="Chart 2" descr=""/>
+          <p:cNvGraphicFramePr/>
+          <p:nvPr/>
+        </p:nvGraphicFramePr>
+        <p:xfrm>
+          <a:off x="621792" y="3218688"/>
+          <a:ext cx="10945368" cy="2679192"/>
+        </p:xfrm>
+        <a:graphic xmlns:a="http://schemas.openxmlformats.org/drawingml/2006/main">
+          <a:graphicData uri="http://schemas.openxmlformats.org/drawingml/2006/chart">
+            <c:chart xmlns:c="http://schemas.openxmlformats.org/drawingml/2006/chart" r:id="rId3"/>
+          </a:graphicData>
+        </a:graphic>
+      </p:graphicFrame>
+      <p:graphicFrame>
+        <p:nvGraphicFramePr>
+          <p:cNvPr id="20" name="Chart 3" descr=""/>
+          <p:cNvGraphicFramePr/>
+          <p:nvPr/>
+        </p:nvGraphicFramePr>
+        <p:xfrm>
+          <a:off x="621792" y="3218688"/>
+          <a:ext cx="10945368" cy="2679192"/>
+        </p:xfrm>
+        <a:graphic xmlns:a="http://schemas.openxmlformats.org/drawingml/2006/main">
+          <a:graphicData uri="http://schemas.openxmlformats.org/drawingml/2006/chart">
+            <c:chart xmlns:c="http://schemas.openxmlformats.org/drawingml/2006/chart" r:id="rId4"/>
+          </a:graphicData>
+        </a:graphic>
+      </p:graphicFrame>
+      <p:sp>
+        <p:nvSpPr>
+          <p:cNvPr id="21" name="Shape 15"/>
           <p:cNvSpPr/>
           <p:nvPr/>
         </p:nvSpPr>
         <p:spPr>
           <a:xfrm>
-            <a:off x="685800" y="1865376"/>
-            <a:ext cx="3496056" cy="1888236"/>
+            <a:off x="4951476" y="3049524"/>
+            <a:ext cx="310896" cy="45720"/>
           </a:xfrm>
           <a:prstGeom prst="rect">
             <a:avLst/>
           </a:prstGeom>
           <a:solidFill>
-            <a:srgbClr val="F7F7F7"/>
+            <a:srgbClr val="9AA3AD"/>
           </a:solidFill>
           <a:ln/>
         </p:spPr>
       </p:sp>
       <p:sp>
         <p:nvSpPr>
-          <p:cNvPr id="9" name="Shape 7"/>
+          <p:cNvPr id="22" name="Shape 16"/>
           <p:cNvSpPr/>
           <p:nvPr/>
         </p:nvSpPr>
         <p:spPr>
           <a:xfrm>
-            <a:off x="685800" y="1865376"/>
-            <a:ext cx="54864" cy="1888236"/>
-          </a:xfrm>
-          <a:prstGeom prst="rect">
+            <a:off x="5052060" y="3017520"/>
+            <a:ext cx="109728" cy="109728"/>
+          </a:xfrm>
+          <a:prstGeom prst="ellipse">
             <a:avLst/>
           </a:prstGeom>
           <a:solidFill>
-            <a:srgbClr val="C2352F"/>
+            <a:srgbClr val="9AA3AD"/>
           </a:solidFill>
           <a:ln/>
         </p:spPr>
       </p:sp>
       <p:sp>
         <p:nvSpPr>
-          <p:cNvPr id="10" name="Text 8"/>
-          <p:cNvSpPr txBox="1"/>
-          <p:nvPr/>
-        </p:nvSpPr>
-        <p:spPr>
-          <a:xfrm>
-            <a:off x="886968" y="1993392"/>
-            <a:ext cx="3166872" cy="640080"/>
-          </a:xfrm>
-          <a:prstGeom prst="rect">
-            <a:avLst/>
-          </a:prstGeom>
-          <a:noFill/>
-          <a:ln/>
-        </p:spPr>
-        <p:txBody>
-          <a:bodyPr wrap="square" lIns="0" tIns="0" rIns="0" bIns="0" rtlCol="0" anchor="t"/>
+          <p:cNvPr id="23" name="Text 17"/>
+          <p:cNvSpPr txBox="1"/>
+          <p:nvPr/>
+        </p:nvSpPr>
+        <p:spPr>
+          <a:xfrm>
+            <a:off x="5335524" y="2926080"/>
+            <a:ext cx="777240" cy="292608"/>
+          </a:xfrm>
+          <a:prstGeom prst="rect">
+            <a:avLst/>
+          </a:prstGeom>
+          <a:noFill/>
+          <a:ln/>
+        </p:spPr>
+        <p:txBody>
+          <a:bodyPr wrap="square" lIns="0" tIns="0" rIns="0" bIns="0" rtlCol="0" anchor="ctr"/>
           <a:lstStyle/>
           <a:p>
             <a:pPr indent="0" marL="0">
               <a:buNone/>
             </a:pPr>
             <a:r>
-              <a:rPr lang="en-US" sz="1800" b="1" dirty="0">
+              <a:rPr lang="en-US" sz="1400" dirty="0">
                 <a:solidFill>
                   <a:srgbClr val="1A1A1A"/>
                 </a:solidFill>
@@ -5091,697 +6825,147 @@
                 <a:ea typeface="Inter" pitchFamily="34" charset="-122"/>
                 <a:cs typeface="Inter" pitchFamily="34" charset="-120"/>
               </a:rPr>
-              <a:t>Written documentation</a:t>
-            </a:r>
-            <a:endParaRPr lang="en-US" sz="1800" dirty="0"/>
-          </a:p>
-        </p:txBody>
-      </p:sp>
-      <p:sp>
-        <p:nvSpPr>
-          <p:cNvPr id="11" name="Text 9"/>
-          <p:cNvSpPr txBox="1"/>
-          <p:nvPr/>
-        </p:nvSpPr>
-        <p:spPr>
-          <a:xfrm>
-            <a:off x="886968" y="2724912"/>
-            <a:ext cx="3166872" cy="918972"/>
-          </a:xfrm>
-          <a:prstGeom prst="rect">
-            <a:avLst/>
-          </a:prstGeom>
-          <a:noFill/>
-          <a:ln/>
-        </p:spPr>
-        <p:txBody>
-          <a:bodyPr wrap="square" lIns="0" tIns="0" rIns="0" bIns="0" rtlCol="0" anchor="t"/>
+              <a:t>2025</a:t>
+            </a:r>
+            <a:endParaRPr lang="en-US" sz="1400" dirty="0"/>
+          </a:p>
+        </p:txBody>
+      </p:sp>
+      <p:sp>
+        <p:nvSpPr>
+          <p:cNvPr id="24" name="Shape 18"/>
+          <p:cNvSpPr/>
+          <p:nvPr/>
+        </p:nvSpPr>
+        <p:spPr>
+          <a:xfrm>
+            <a:off x="6185916" y="3049524"/>
+            <a:ext cx="310896" cy="45720"/>
+          </a:xfrm>
+          <a:prstGeom prst="rect">
+            <a:avLst/>
+          </a:prstGeom>
+          <a:solidFill>
+            <a:srgbClr val="2587C5"/>
+          </a:solidFill>
+          <a:ln/>
+        </p:spPr>
+      </p:sp>
+      <p:sp>
+        <p:nvSpPr>
+          <p:cNvPr id="25" name="Shape 19"/>
+          <p:cNvSpPr/>
+          <p:nvPr/>
+        </p:nvSpPr>
+        <p:spPr>
+          <a:xfrm>
+            <a:off x="6286500" y="3017520"/>
+            <a:ext cx="109728" cy="109728"/>
+          </a:xfrm>
+          <a:prstGeom prst="ellipse">
+            <a:avLst/>
+          </a:prstGeom>
+          <a:solidFill>
+            <a:srgbClr val="2587C5"/>
+          </a:solidFill>
+          <a:ln/>
+        </p:spPr>
+      </p:sp>
+      <p:sp>
+        <p:nvSpPr>
+          <p:cNvPr id="26" name="Text 20"/>
+          <p:cNvSpPr txBox="1"/>
+          <p:nvPr/>
+        </p:nvSpPr>
+        <p:spPr>
+          <a:xfrm>
+            <a:off x="6569964" y="2926080"/>
+            <a:ext cx="777240" cy="292608"/>
+          </a:xfrm>
+          <a:prstGeom prst="rect">
+            <a:avLst/>
+          </a:prstGeom>
+          <a:noFill/>
+          <a:ln/>
+        </p:spPr>
+        <p:txBody>
+          <a:bodyPr wrap="square" lIns="0" tIns="0" rIns="0" bIns="0" rtlCol="0" anchor="ctr"/>
           <a:lstStyle/>
           <a:p>
             <a:pPr indent="0" marL="0">
               <a:buNone/>
             </a:pPr>
             <a:r>
-              <a:rPr lang="en-US" sz="1500" dirty="0">
-                <a:solidFill>
-                  <a:srgbClr val="595959"/>
-                </a:solidFill>
-                <a:latin typeface="Inter" pitchFamily="34" charset="0"/>
-                <a:ea typeface="Inter" pitchFamily="34" charset="-122"/>
-                <a:cs typeface="Inter" pitchFamily="34" charset="-120"/>
-              </a:rPr>
-              <a:t>Complaint, cause and correction written on the RO, and matching what was claimed</a:t>
+              <a:rPr lang="en-US" sz="1400" dirty="0">
+                <a:solidFill>
+                  <a:srgbClr val="1A1A1A"/>
+                </a:solidFill>
+                <a:latin typeface="Inter" pitchFamily="34" charset="0"/>
+                <a:ea typeface="Inter" pitchFamily="34" charset="-122"/>
+                <a:cs typeface="Inter" pitchFamily="34" charset="-120"/>
+              </a:rPr>
+              <a:t>2026</a:t>
+            </a:r>
+            <a:endParaRPr lang="en-US" sz="1400" dirty="0"/>
+          </a:p>
+        </p:txBody>
+      </p:sp>
+      <p:sp>
+        <p:nvSpPr>
+          <p:cNvPr id="27" name="Shape 21"/>
+          <p:cNvSpPr/>
+          <p:nvPr/>
+        </p:nvSpPr>
+        <p:spPr>
+          <a:xfrm>
+            <a:off x="457200" y="6126480"/>
+            <a:ext cx="11274552" cy="356616"/>
+          </a:xfrm>
+          <a:prstGeom prst="rect">
+            <a:avLst/>
+          </a:prstGeom>
+          <a:solidFill>
+            <a:srgbClr val="E6F6EE"/>
+          </a:solidFill>
+          <a:ln/>
+        </p:spPr>
+      </p:sp>
+      <p:sp>
+        <p:nvSpPr>
+          <p:cNvPr id="28" name="Text 22"/>
+          <p:cNvSpPr txBox="1"/>
+          <p:nvPr/>
+        </p:nvSpPr>
+        <p:spPr>
+          <a:xfrm>
+            <a:off x="658368" y="6144768"/>
+            <a:ext cx="10927080" cy="320040"/>
+          </a:xfrm>
+          <a:prstGeom prst="rect">
+            <a:avLst/>
+          </a:prstGeom>
+          <a:noFill/>
+          <a:ln/>
+        </p:spPr>
+        <p:txBody>
+          <a:bodyPr wrap="square" lIns="0" tIns="0" rIns="0" bIns="0" rtlCol="0" anchor="ctr"/>
+          <a:lstStyle/>
+          <a:p>
+            <a:pPr indent="0" marL="0">
+              <a:buNone/>
+            </a:pPr>
+            <a:r>
+              <a:rPr lang="en-US" sz="1500" b="1" dirty="0">
+                <a:solidFill>
+                  <a:srgbClr val="0B7A4A"/>
+                </a:solidFill>
+                <a:latin typeface="Inter" pitchFamily="34" charset="0"/>
+                <a:ea typeface="Inter" pitchFamily="34" charset="-122"/>
+                <a:cs typeface="Inter" pitchFamily="34" charset="-120"/>
+              </a:rPr>
+              <a:t>Up 2.1 pts to 44.7%, ahead of 2025 in all nine months: approved parts markup increases show up as margin.</a:t>
             </a:r>
             <a:endParaRPr lang="en-US" sz="1500" dirty="0"/>
-          </a:p>
-        </p:txBody>
-      </p:sp>
-      <p:sp>
-        <p:nvSpPr>
-          <p:cNvPr id="12" name="Shape 10"/>
-          <p:cNvSpPr/>
-          <p:nvPr/>
-        </p:nvSpPr>
-        <p:spPr>
-          <a:xfrm>
-            <a:off x="4346448" y="1865376"/>
-            <a:ext cx="3496056" cy="1888236"/>
-          </a:xfrm>
-          <a:prstGeom prst="rect">
-            <a:avLst/>
-          </a:prstGeom>
-          <a:solidFill>
-            <a:srgbClr val="F7F7F7"/>
-          </a:solidFill>
-          <a:ln/>
-        </p:spPr>
-      </p:sp>
-      <p:sp>
-        <p:nvSpPr>
-          <p:cNvPr id="13" name="Shape 11"/>
-          <p:cNvSpPr/>
-          <p:nvPr/>
-        </p:nvSpPr>
-        <p:spPr>
-          <a:xfrm>
-            <a:off x="4346448" y="1865376"/>
-            <a:ext cx="54864" cy="1888236"/>
-          </a:xfrm>
-          <a:prstGeom prst="rect">
-            <a:avLst/>
-          </a:prstGeom>
-          <a:solidFill>
-            <a:srgbClr val="C2352F"/>
-          </a:solidFill>
-          <a:ln/>
-        </p:spPr>
-      </p:sp>
-      <p:sp>
-        <p:nvSpPr>
-          <p:cNvPr id="14" name="Text 12"/>
-          <p:cNvSpPr txBox="1"/>
-          <p:nvPr/>
-        </p:nvSpPr>
-        <p:spPr>
-          <a:xfrm>
-            <a:off x="4547616" y="1993392"/>
-            <a:ext cx="3166872" cy="640080"/>
-          </a:xfrm>
-          <a:prstGeom prst="rect">
-            <a:avLst/>
-          </a:prstGeom>
-          <a:noFill/>
-          <a:ln/>
-        </p:spPr>
-        <p:txBody>
-          <a:bodyPr wrap="square" lIns="0" tIns="0" rIns="0" bIns="0" rtlCol="0" anchor="t"/>
-          <a:lstStyle/>
-          <a:p>
-            <a:pPr indent="0" marL="0">
-              <a:buNone/>
-            </a:pPr>
-            <a:r>
-              <a:rPr lang="en-US" sz="1800" b="1" dirty="0">
-                <a:solidFill>
-                  <a:srgbClr val="1A1A1A"/>
-                </a:solidFill>
-                <a:latin typeface="Inter" pitchFamily="34" charset="0"/>
-                <a:ea typeface="Inter" pitchFamily="34" charset="-122"/>
-                <a:cs typeface="Inter" pitchFamily="34" charset="-120"/>
-              </a:rPr>
-              <a:t>Manager signature on add-ons</a:t>
-            </a:r>
-            <a:endParaRPr lang="en-US" sz="1800" dirty="0"/>
-          </a:p>
-        </p:txBody>
-      </p:sp>
-      <p:sp>
-        <p:nvSpPr>
-          <p:cNvPr id="15" name="Text 13"/>
-          <p:cNvSpPr txBox="1"/>
-          <p:nvPr/>
-        </p:nvSpPr>
-        <p:spPr>
-          <a:xfrm>
-            <a:off x="4547616" y="2724912"/>
-            <a:ext cx="3166872" cy="918972"/>
-          </a:xfrm>
-          <a:prstGeom prst="rect">
-            <a:avLst/>
-          </a:prstGeom>
-          <a:noFill/>
-          <a:ln/>
-        </p:spPr>
-        <p:txBody>
-          <a:bodyPr wrap="square" lIns="0" tIns="0" rIns="0" bIns="0" rtlCol="0" anchor="t"/>
-          <a:lstStyle/>
-          <a:p>
-            <a:pPr indent="0" marL="0">
-              <a:buNone/>
-            </a:pPr>
-            <a:r>
-              <a:rPr lang="en-US" sz="1500" dirty="0">
-                <a:solidFill>
-                  <a:srgbClr val="595959"/>
-                </a:solidFill>
-                <a:latin typeface="Inter" pitchFamily="34" charset="0"/>
-                <a:ea typeface="Inter" pitchFamily="34" charset="-122"/>
-                <a:cs typeface="Inter" pitchFamily="34" charset="-120"/>
-              </a:rPr>
-              <a:t>Any added repair approved and signed by a manager before it is claimed</a:t>
-            </a:r>
-            <a:endParaRPr lang="en-US" sz="1500" dirty="0"/>
-          </a:p>
-        </p:txBody>
-      </p:sp>
-      <p:sp>
-        <p:nvSpPr>
-          <p:cNvPr id="16" name="Shape 14"/>
-          <p:cNvSpPr/>
-          <p:nvPr/>
-        </p:nvSpPr>
-        <p:spPr>
-          <a:xfrm>
-            <a:off x="8007096" y="1865376"/>
-            <a:ext cx="3496056" cy="1888236"/>
-          </a:xfrm>
-          <a:prstGeom prst="rect">
-            <a:avLst/>
-          </a:prstGeom>
-          <a:solidFill>
-            <a:srgbClr val="F7F7F7"/>
-          </a:solidFill>
-          <a:ln/>
-        </p:spPr>
-      </p:sp>
-      <p:sp>
-        <p:nvSpPr>
-          <p:cNvPr id="17" name="Shape 15"/>
-          <p:cNvSpPr/>
-          <p:nvPr/>
-        </p:nvSpPr>
-        <p:spPr>
-          <a:xfrm>
-            <a:off x="8007096" y="1865376"/>
-            <a:ext cx="54864" cy="1888236"/>
-          </a:xfrm>
-          <a:prstGeom prst="rect">
-            <a:avLst/>
-          </a:prstGeom>
-          <a:solidFill>
-            <a:srgbClr val="C2352F"/>
-          </a:solidFill>
-          <a:ln/>
-        </p:spPr>
-      </p:sp>
-      <p:sp>
-        <p:nvSpPr>
-          <p:cNvPr id="18" name="Text 16"/>
-          <p:cNvSpPr txBox="1"/>
-          <p:nvPr/>
-        </p:nvSpPr>
-        <p:spPr>
-          <a:xfrm>
-            <a:off x="8208264" y="1993392"/>
-            <a:ext cx="3166872" cy="640080"/>
-          </a:xfrm>
-          <a:prstGeom prst="rect">
-            <a:avLst/>
-          </a:prstGeom>
-          <a:noFill/>
-          <a:ln/>
-        </p:spPr>
-        <p:txBody>
-          <a:bodyPr wrap="square" lIns="0" tIns="0" rIns="0" bIns="0" rtlCol="0" anchor="t"/>
-          <a:lstStyle/>
-          <a:p>
-            <a:pPr indent="0" marL="0">
-              <a:buNone/>
-            </a:pPr>
-            <a:r>
-              <a:rPr lang="en-US" sz="1800" b="1" dirty="0">
-                <a:solidFill>
-                  <a:srgbClr val="1A1A1A"/>
-                </a:solidFill>
-                <a:latin typeface="Inter" pitchFamily="34" charset="0"/>
-                <a:ea typeface="Inter" pitchFamily="34" charset="-122"/>
-                <a:cs typeface="Inter" pitchFamily="34" charset="-120"/>
-              </a:rPr>
-              <a:t>Signatures on in-stock units</a:t>
-            </a:r>
-            <a:endParaRPr lang="en-US" sz="1800" dirty="0"/>
-          </a:p>
-        </p:txBody>
-      </p:sp>
-      <p:sp>
-        <p:nvSpPr>
-          <p:cNvPr id="19" name="Text 17"/>
-          <p:cNvSpPr txBox="1"/>
-          <p:nvPr/>
-        </p:nvSpPr>
-        <p:spPr>
-          <a:xfrm>
-            <a:off x="8208264" y="2724912"/>
-            <a:ext cx="3166872" cy="918972"/>
-          </a:xfrm>
-          <a:prstGeom prst="rect">
-            <a:avLst/>
-          </a:prstGeom>
-          <a:noFill/>
-          <a:ln/>
-        </p:spPr>
-        <p:txBody>
-          <a:bodyPr wrap="square" lIns="0" tIns="0" rIns="0" bIns="0" rtlCol="0" anchor="t"/>
-          <a:lstStyle/>
-          <a:p>
-            <a:pPr indent="0" marL="0">
-              <a:buNone/>
-            </a:pPr>
-            <a:r>
-              <a:rPr lang="en-US" sz="1500" dirty="0">
-                <a:solidFill>
-                  <a:srgbClr val="595959"/>
-                </a:solidFill>
-                <a:latin typeface="Inter" pitchFamily="34" charset="0"/>
-                <a:ea typeface="Inter" pitchFamily="34" charset="-122"/>
-                <a:cs typeface="Inter" pitchFamily="34" charset="-120"/>
-              </a:rPr>
-              <a:t>Customer and manager signatures on repairs to units in stock</a:t>
-            </a:r>
-            <a:endParaRPr lang="en-US" sz="1500" dirty="0"/>
-          </a:p>
-        </p:txBody>
-      </p:sp>
-      <p:sp>
-        <p:nvSpPr>
-          <p:cNvPr id="20" name="Shape 18"/>
-          <p:cNvSpPr/>
-          <p:nvPr/>
-        </p:nvSpPr>
-        <p:spPr>
-          <a:xfrm>
-            <a:off x="685800" y="3918204"/>
-            <a:ext cx="3496056" cy="1888236"/>
-          </a:xfrm>
-          <a:prstGeom prst="rect">
-            <a:avLst/>
-          </a:prstGeom>
-          <a:solidFill>
-            <a:srgbClr val="F7F7F7"/>
-          </a:solidFill>
-          <a:ln/>
-        </p:spPr>
-      </p:sp>
-      <p:sp>
-        <p:nvSpPr>
-          <p:cNvPr id="21" name="Shape 19"/>
-          <p:cNvSpPr/>
-          <p:nvPr/>
-        </p:nvSpPr>
-        <p:spPr>
-          <a:xfrm>
-            <a:off x="685800" y="3918204"/>
-            <a:ext cx="54864" cy="1888236"/>
-          </a:xfrm>
-          <a:prstGeom prst="rect">
-            <a:avLst/>
-          </a:prstGeom>
-          <a:solidFill>
-            <a:srgbClr val="C2352F"/>
-          </a:solidFill>
-          <a:ln/>
-        </p:spPr>
-      </p:sp>
-      <p:sp>
-        <p:nvSpPr>
-          <p:cNvPr id="22" name="Text 20"/>
-          <p:cNvSpPr txBox="1"/>
-          <p:nvPr/>
-        </p:nvSpPr>
-        <p:spPr>
-          <a:xfrm>
-            <a:off x="886968" y="4046220"/>
-            <a:ext cx="3166872" cy="640080"/>
-          </a:xfrm>
-          <a:prstGeom prst="rect">
-            <a:avLst/>
-          </a:prstGeom>
-          <a:noFill/>
-          <a:ln/>
-        </p:spPr>
-        <p:txBody>
-          <a:bodyPr wrap="square" lIns="0" tIns="0" rIns="0" bIns="0" rtlCol="0" anchor="t"/>
-          <a:lstStyle/>
-          <a:p>
-            <a:pPr indent="0" marL="0">
-              <a:buNone/>
-            </a:pPr>
-            <a:r>
-              <a:rPr lang="en-US" sz="1800" b="1" dirty="0">
-                <a:solidFill>
-                  <a:srgbClr val="1A1A1A"/>
-                </a:solidFill>
-                <a:latin typeface="Inter" pitchFamily="34" charset="0"/>
-                <a:ea typeface="Inter" pitchFamily="34" charset="-122"/>
-                <a:cs typeface="Inter" pitchFamily="34" charset="-120"/>
-              </a:rPr>
-              <a:t>Out mileage</a:t>
-            </a:r>
-            <a:endParaRPr lang="en-US" sz="1800" dirty="0"/>
-          </a:p>
-        </p:txBody>
-      </p:sp>
-      <p:sp>
-        <p:nvSpPr>
-          <p:cNvPr id="23" name="Text 21"/>
-          <p:cNvSpPr txBox="1"/>
-          <p:nvPr/>
-        </p:nvSpPr>
-        <p:spPr>
-          <a:xfrm>
-            <a:off x="886968" y="4777740"/>
-            <a:ext cx="3166872" cy="918972"/>
-          </a:xfrm>
-          <a:prstGeom prst="rect">
-            <a:avLst/>
-          </a:prstGeom>
-          <a:noFill/>
-          <a:ln/>
-        </p:spPr>
-        <p:txBody>
-          <a:bodyPr wrap="square" lIns="0" tIns="0" rIns="0" bIns="0" rtlCol="0" anchor="t"/>
-          <a:lstStyle/>
-          <a:p>
-            <a:pPr indent="0" marL="0">
-              <a:buNone/>
-            </a:pPr>
-            <a:r>
-              <a:rPr lang="en-US" sz="1500" dirty="0">
-                <a:solidFill>
-                  <a:srgbClr val="595959"/>
-                </a:solidFill>
-                <a:latin typeface="Inter" pitchFamily="34" charset="0"/>
-                <a:ea typeface="Inter" pitchFamily="34" charset="-122"/>
-                <a:cs typeface="Inter" pitchFamily="34" charset="-120"/>
-              </a:rPr>
-              <a:t>Recorded on every RO and consistent with the mileage in</a:t>
-            </a:r>
-            <a:endParaRPr lang="en-US" sz="1500" dirty="0"/>
-          </a:p>
-        </p:txBody>
-      </p:sp>
-      <p:sp>
-        <p:nvSpPr>
-          <p:cNvPr id="24" name="Shape 22"/>
-          <p:cNvSpPr/>
-          <p:nvPr/>
-        </p:nvSpPr>
-        <p:spPr>
-          <a:xfrm>
-            <a:off x="4346448" y="3918204"/>
-            <a:ext cx="3496056" cy="1888236"/>
-          </a:xfrm>
-          <a:prstGeom prst="rect">
-            <a:avLst/>
-          </a:prstGeom>
-          <a:solidFill>
-            <a:srgbClr val="F7F7F7"/>
-          </a:solidFill>
-          <a:ln/>
-        </p:spPr>
-      </p:sp>
-      <p:sp>
-        <p:nvSpPr>
-          <p:cNvPr id="25" name="Shape 23"/>
-          <p:cNvSpPr/>
-          <p:nvPr/>
-        </p:nvSpPr>
-        <p:spPr>
-          <a:xfrm>
-            <a:off x="4346448" y="3918204"/>
-            <a:ext cx="54864" cy="1888236"/>
-          </a:xfrm>
-          <a:prstGeom prst="rect">
-            <a:avLst/>
-          </a:prstGeom>
-          <a:solidFill>
-            <a:srgbClr val="C2352F"/>
-          </a:solidFill>
-          <a:ln/>
-        </p:spPr>
-      </p:sp>
-      <p:sp>
-        <p:nvSpPr>
-          <p:cNvPr id="26" name="Text 24"/>
-          <p:cNvSpPr txBox="1"/>
-          <p:nvPr/>
-        </p:nvSpPr>
-        <p:spPr>
-          <a:xfrm>
-            <a:off x="4547616" y="4046220"/>
-            <a:ext cx="3166872" cy="640080"/>
-          </a:xfrm>
-          <a:prstGeom prst="rect">
-            <a:avLst/>
-          </a:prstGeom>
-          <a:noFill/>
-          <a:ln/>
-        </p:spPr>
-        <p:txBody>
-          <a:bodyPr wrap="square" lIns="0" tIns="0" rIns="0" bIns="0" rtlCol="0" anchor="t"/>
-          <a:lstStyle/>
-          <a:p>
-            <a:pPr indent="0" marL="0">
-              <a:buNone/>
-            </a:pPr>
-            <a:r>
-              <a:rPr lang="en-US" sz="1800" b="1" dirty="0">
-                <a:solidFill>
-                  <a:srgbClr val="1A1A1A"/>
-                </a:solidFill>
-                <a:latin typeface="Inter" pitchFamily="34" charset="0"/>
-                <a:ea typeface="Inter" pitchFamily="34" charset="-122"/>
-                <a:cs typeface="Inter" pitchFamily="34" charset="-120"/>
-              </a:rPr>
-              <a:t>Punch times</a:t>
-            </a:r>
-            <a:endParaRPr lang="en-US" sz="1800" dirty="0"/>
-          </a:p>
-        </p:txBody>
-      </p:sp>
-      <p:sp>
-        <p:nvSpPr>
-          <p:cNvPr id="27" name="Text 25"/>
-          <p:cNvSpPr txBox="1"/>
-          <p:nvPr/>
-        </p:nvSpPr>
-        <p:spPr>
-          <a:xfrm>
-            <a:off x="4547616" y="4777740"/>
-            <a:ext cx="3166872" cy="918972"/>
-          </a:xfrm>
-          <a:prstGeom prst="rect">
-            <a:avLst/>
-          </a:prstGeom>
-          <a:noFill/>
-          <a:ln/>
-        </p:spPr>
-        <p:txBody>
-          <a:bodyPr wrap="square" lIns="0" tIns="0" rIns="0" bIns="0" rtlCol="0" anchor="t"/>
-          <a:lstStyle/>
-          <a:p>
-            <a:pPr indent="0" marL="0">
-              <a:buNone/>
-            </a:pPr>
-            <a:r>
-              <a:rPr lang="en-US" sz="1500" dirty="0">
-                <a:solidFill>
-                  <a:srgbClr val="595959"/>
-                </a:solidFill>
-                <a:latin typeface="Inter" pitchFamily="34" charset="0"/>
-                <a:ea typeface="Inter" pitchFamily="34" charset="-122"/>
-                <a:cs typeface="Inter" pitchFamily="34" charset="-120"/>
-              </a:rPr>
-              <a:t>Technician clock times on the RO support the hours claimed</a:t>
-            </a:r>
-            <a:endParaRPr lang="en-US" sz="1500" dirty="0"/>
-          </a:p>
-        </p:txBody>
-      </p:sp>
-      <p:sp>
-        <p:nvSpPr>
-          <p:cNvPr id="28" name="Shape 26"/>
-          <p:cNvSpPr/>
-          <p:nvPr/>
-        </p:nvSpPr>
-        <p:spPr>
-          <a:xfrm>
-            <a:off x="8007096" y="3918204"/>
-            <a:ext cx="3496056" cy="1888236"/>
-          </a:xfrm>
-          <a:prstGeom prst="rect">
-            <a:avLst/>
-          </a:prstGeom>
-          <a:solidFill>
-            <a:srgbClr val="F7F7F7"/>
-          </a:solidFill>
-          <a:ln/>
-        </p:spPr>
-      </p:sp>
-      <p:sp>
-        <p:nvSpPr>
-          <p:cNvPr id="29" name="Shape 27"/>
-          <p:cNvSpPr/>
-          <p:nvPr/>
-        </p:nvSpPr>
-        <p:spPr>
-          <a:xfrm>
-            <a:off x="8007096" y="3918204"/>
-            <a:ext cx="54864" cy="1888236"/>
-          </a:xfrm>
-          <a:prstGeom prst="rect">
-            <a:avLst/>
-          </a:prstGeom>
-          <a:solidFill>
-            <a:srgbClr val="C2352F"/>
-          </a:solidFill>
-          <a:ln/>
-        </p:spPr>
-      </p:sp>
-      <p:sp>
-        <p:nvSpPr>
-          <p:cNvPr id="30" name="Text 28"/>
-          <p:cNvSpPr txBox="1"/>
-          <p:nvPr/>
-        </p:nvSpPr>
-        <p:spPr>
-          <a:xfrm>
-            <a:off x="8208264" y="4046220"/>
-            <a:ext cx="3166872" cy="640080"/>
-          </a:xfrm>
-          <a:prstGeom prst="rect">
-            <a:avLst/>
-          </a:prstGeom>
-          <a:noFill/>
-          <a:ln/>
-        </p:spPr>
-        <p:txBody>
-          <a:bodyPr wrap="square" lIns="0" tIns="0" rIns="0" bIns="0" rtlCol="0" anchor="t"/>
-          <a:lstStyle/>
-          <a:p>
-            <a:pPr indent="0" marL="0">
-              <a:buNone/>
-            </a:pPr>
-            <a:r>
-              <a:rPr lang="en-US" sz="1800" b="1" dirty="0">
-                <a:solidFill>
-                  <a:srgbClr val="1A1A1A"/>
-                </a:solidFill>
-                <a:latin typeface="Inter" pitchFamily="34" charset="0"/>
-                <a:ea typeface="Inter" pitchFamily="34" charset="-122"/>
-                <a:cs typeface="Inter" pitchFamily="34" charset="-120"/>
-              </a:rPr>
-              <a:t>Manufacturer authorization</a:t>
-            </a:r>
-            <a:endParaRPr lang="en-US" sz="1800" dirty="0"/>
-          </a:p>
-        </p:txBody>
-      </p:sp>
-      <p:sp>
-        <p:nvSpPr>
-          <p:cNvPr id="31" name="Text 29"/>
-          <p:cNvSpPr txBox="1"/>
-          <p:nvPr/>
-        </p:nvSpPr>
-        <p:spPr>
-          <a:xfrm>
-            <a:off x="8208264" y="4777740"/>
-            <a:ext cx="3166872" cy="918972"/>
-          </a:xfrm>
-          <a:prstGeom prst="rect">
-            <a:avLst/>
-          </a:prstGeom>
-          <a:noFill/>
-          <a:ln/>
-        </p:spPr>
-        <p:txBody>
-          <a:bodyPr wrap="square" lIns="0" tIns="0" rIns="0" bIns="0" rtlCol="0" anchor="t"/>
-          <a:lstStyle/>
-          <a:p>
-            <a:pPr indent="0" marL="0">
-              <a:buNone/>
-            </a:pPr>
-            <a:r>
-              <a:rPr lang="en-US" sz="1500" dirty="0">
-                <a:solidFill>
-                  <a:srgbClr val="595959"/>
-                </a:solidFill>
-                <a:latin typeface="Inter" pitchFamily="34" charset="0"/>
-                <a:ea typeface="Inter" pitchFamily="34" charset="-122"/>
-                <a:cs typeface="Inter" pitchFamily="34" charset="-120"/>
-              </a:rPr>
-              <a:t>Prior approval on file wherever the manufacturer requires it</a:t>
-            </a:r>
-            <a:endParaRPr lang="en-US" sz="1500" dirty="0"/>
-          </a:p>
-        </p:txBody>
-      </p:sp>
-      <p:sp>
-        <p:nvSpPr>
-          <p:cNvPr id="32" name="Shape 30"/>
-          <p:cNvSpPr/>
-          <p:nvPr/>
-        </p:nvSpPr>
-        <p:spPr>
-          <a:xfrm>
-            <a:off x="457200" y="6126480"/>
-            <a:ext cx="11274552" cy="615696"/>
-          </a:xfrm>
-          <a:prstGeom prst="rect">
-            <a:avLst/>
-          </a:prstGeom>
-          <a:solidFill>
-            <a:srgbClr val="FBEBEA"/>
-          </a:solidFill>
-          <a:ln/>
-        </p:spPr>
-      </p:sp>
-      <p:sp>
-        <p:nvSpPr>
-          <p:cNvPr id="33" name="Text 31"/>
-          <p:cNvSpPr txBox="1"/>
-          <p:nvPr/>
-        </p:nvSpPr>
-        <p:spPr>
-          <a:xfrm>
-            <a:off x="658368" y="6144768"/>
-            <a:ext cx="10927080" cy="579120"/>
-          </a:xfrm>
-          <a:prstGeom prst="rect">
-            <a:avLst/>
-          </a:prstGeom>
-          <a:noFill/>
-          <a:ln/>
-        </p:spPr>
-        <p:txBody>
-          <a:bodyPr wrap="square" lIns="0" tIns="0" rIns="0" bIns="0" rtlCol="0" anchor="ctr"/>
-          <a:lstStyle/>
-          <a:p>
-            <a:pPr indent="0" marL="0">
-              <a:buNone/>
-            </a:pPr>
-            <a:r>
-              <a:rPr lang="en-US" sz="1600" b="1" dirty="0">
-                <a:solidFill>
-                  <a:srgbClr val="A82B26"/>
-                </a:solidFill>
-                <a:latin typeface="Inter" pitchFamily="34" charset="0"/>
-                <a:ea typeface="Inter" pitchFamily="34" charset="-122"/>
-                <a:cs typeface="Inter" pitchFamily="34" charset="-120"/>
-              </a:rPr>
-              <a:t>Six audits took back over $400,000, more than a tenth of what rate increases brought in this year. Every cause here is documentation the store controls.</a:t>
-            </a:r>
-            <a:endParaRPr lang="en-US" sz="1600" dirty="0"/>
           </a:p>
         </p:txBody>
       </p:sp>
@@ -5796,6 +6980,982 @@
 <file path=ppt/slides/slide3.xml><?xml version="1.0" encoding="utf-8"?>
 <p:sld xmlns:a="http://schemas.openxmlformats.org/drawingml/2006/main" xmlns:r="http://schemas.openxmlformats.org/officeDocument/2006/relationships" xmlns:p="http://schemas.openxmlformats.org/presentationml/2006/main">
   <p:cSld name="Slide 3">
+    <p:bg>
+      <p:bgPr>
+        <a:solidFill>
+          <a:srgbClr val="EDEDED"/>
+        </a:solidFill>
+      </p:bgPr>
+    </p:bg>
+    <p:spTree>
+      <p:nvGrpSpPr>
+        <p:cNvPr id="1" name=""/>
+        <p:cNvGrpSpPr/>
+        <p:nvPr/>
+      </p:nvGrpSpPr>
+      <p:grpSpPr>
+        <a:xfrm>
+          <a:off x="0" y="0"/>
+          <a:ext cx="0" cy="0"/>
+          <a:chOff x="0" y="0"/>
+          <a:chExt cx="0" cy="0"/>
+        </a:xfrm>
+      </p:grpSpPr>
+      <p:sp>
+        <p:nvSpPr>
+          <p:cNvPr id="2" name="Shape 0"/>
+          <p:cNvSpPr/>
+          <p:nvPr/>
+        </p:nvSpPr>
+        <p:spPr>
+          <a:xfrm>
+            <a:off x="457200" y="402336"/>
+            <a:ext cx="50292" cy="192024"/>
+          </a:xfrm>
+          <a:prstGeom prst="rect">
+            <a:avLst/>
+          </a:prstGeom>
+          <a:solidFill>
+            <a:srgbClr val="2587C5"/>
+          </a:solidFill>
+          <a:ln/>
+        </p:spPr>
+      </p:sp>
+      <p:sp>
+        <p:nvSpPr>
+          <p:cNvPr id="3" name="Text 1"/>
+          <p:cNvSpPr txBox="1"/>
+          <p:nvPr/>
+        </p:nvSpPr>
+        <p:spPr>
+          <a:xfrm>
+            <a:off x="621792" y="338328"/>
+            <a:ext cx="8229600" cy="274320"/>
+          </a:xfrm>
+          <a:prstGeom prst="rect">
+            <a:avLst/>
+          </a:prstGeom>
+          <a:noFill/>
+          <a:ln/>
+        </p:spPr>
+        <p:txBody>
+          <a:bodyPr wrap="square" lIns="0" tIns="0" rIns="0" bIns="0" rtlCol="0" anchor="ctr"/>
+          <a:lstStyle/>
+          <a:p>
+            <a:pPr indent="0" marL="0">
+              <a:buNone/>
+            </a:pPr>
+            <a:r>
+              <a:rPr lang="en-US" sz="1400" b="1" spc="110" kern="0" dirty="0">
+                <a:solidFill>
+                  <a:srgbClr val="595959"/>
+                </a:solidFill>
+                <a:latin typeface="Inter" pitchFamily="34" charset="0"/>
+                <a:ea typeface="Inter" pitchFamily="34" charset="-122"/>
+                <a:cs typeface="Inter" pitchFamily="34" charset="-120"/>
+              </a:rPr>
+              <a:t>WARRANTY &amp; INTERNAL</a:t>
+            </a:r>
+            <a:endParaRPr lang="en-US" sz="1400" dirty="0"/>
+          </a:p>
+        </p:txBody>
+      </p:sp>
+      <p:sp>
+        <p:nvSpPr>
+          <p:cNvPr id="4" name="Text 2"/>
+          <p:cNvSpPr txBox="1"/>
+          <p:nvPr/>
+        </p:nvSpPr>
+        <p:spPr>
+          <a:xfrm>
+            <a:off x="457200" y="640080"/>
+            <a:ext cx="11338560" cy="502920"/>
+          </a:xfrm>
+          <a:prstGeom prst="rect">
+            <a:avLst/>
+          </a:prstGeom>
+          <a:noFill/>
+          <a:ln/>
+        </p:spPr>
+        <p:txBody>
+          <a:bodyPr wrap="square" lIns="0" tIns="0" rIns="0" bIns="0" rtlCol="0" anchor="ctr"/>
+          <a:lstStyle/>
+          <a:p>
+            <a:pPr indent="0" marL="0">
+              <a:buNone/>
+            </a:pPr>
+            <a:r>
+              <a:rPr lang="en-US" sz="2800" dirty="0">
+                <a:solidFill>
+                  <a:srgbClr val="1A1A1A"/>
+                </a:solidFill>
+                <a:latin typeface="Inter" pitchFamily="34" charset="0"/>
+                <a:ea typeface="Inter" pitchFamily="34" charset="-122"/>
+                <a:cs typeface="Inter" pitchFamily="34" charset="-120"/>
+              </a:rPr>
+              <a:t>What Gets Claims Debited</a:t>
+            </a:r>
+            <a:endParaRPr lang="en-US" sz="2800" dirty="0"/>
+          </a:p>
+        </p:txBody>
+      </p:sp>
+      <p:sp>
+        <p:nvSpPr>
+          <p:cNvPr id="5" name="Shape 3"/>
+          <p:cNvSpPr/>
+          <p:nvPr/>
+        </p:nvSpPr>
+        <p:spPr>
+          <a:xfrm>
+            <a:off x="457200" y="1207008"/>
+            <a:ext cx="11274552" cy="4782312"/>
+          </a:xfrm>
+          <a:prstGeom prst="rect">
+            <a:avLst/>
+          </a:prstGeom>
+          <a:solidFill>
+            <a:srgbClr val="FFFFFF"/>
+          </a:solidFill>
+          <a:ln/>
+        </p:spPr>
+      </p:sp>
+      <p:sp>
+        <p:nvSpPr>
+          <p:cNvPr id="6" name="Text 4"/>
+          <p:cNvSpPr txBox="1"/>
+          <p:nvPr/>
+        </p:nvSpPr>
+        <p:spPr>
+          <a:xfrm>
+            <a:off x="685800" y="1344168"/>
+            <a:ext cx="10817352" cy="292608"/>
+          </a:xfrm>
+          <a:prstGeom prst="rect">
+            <a:avLst/>
+          </a:prstGeom>
+          <a:noFill/>
+          <a:ln/>
+        </p:spPr>
+        <p:txBody>
+          <a:bodyPr wrap="square" lIns="0" tIns="0" rIns="0" bIns="0" rtlCol="0" anchor="ctr"/>
+          <a:lstStyle/>
+          <a:p>
+            <a:pPr indent="0" marL="0">
+              <a:buNone/>
+            </a:pPr>
+            <a:r>
+              <a:rPr lang="en-US" sz="1500" dirty="0">
+                <a:solidFill>
+                  <a:srgbClr val="1A1A1A"/>
+                </a:solidFill>
+                <a:latin typeface="Inter" pitchFamily="34" charset="0"/>
+                <a:ea typeface="Inter" pitchFamily="34" charset="-122"/>
+                <a:cs typeface="Inter" pitchFamily="34" charset="-120"/>
+              </a:rPr>
+              <a:t>Primary causes in the six audits</a:t>
+            </a:r>
+            <a:endParaRPr lang="en-US" sz="1500" dirty="0"/>
+          </a:p>
+        </p:txBody>
+      </p:sp>
+      <p:sp>
+        <p:nvSpPr>
+          <p:cNvPr id="7" name="Shape 5"/>
+          <p:cNvSpPr/>
+          <p:nvPr/>
+        </p:nvSpPr>
+        <p:spPr>
+          <a:xfrm>
+            <a:off x="685800" y="1691640"/>
+            <a:ext cx="10817352" cy="10973"/>
+          </a:xfrm>
+          <a:prstGeom prst="rect">
+            <a:avLst/>
+          </a:prstGeom>
+          <a:solidFill>
+            <a:srgbClr val="1A1A1A"/>
+          </a:solidFill>
+          <a:ln/>
+        </p:spPr>
+      </p:sp>
+      <p:sp>
+        <p:nvSpPr>
+          <p:cNvPr id="8" name="Shape 6"/>
+          <p:cNvSpPr/>
+          <p:nvPr/>
+        </p:nvSpPr>
+        <p:spPr>
+          <a:xfrm>
+            <a:off x="685800" y="1865376"/>
+            <a:ext cx="3496056" cy="1888236"/>
+          </a:xfrm>
+          <a:prstGeom prst="rect">
+            <a:avLst/>
+          </a:prstGeom>
+          <a:solidFill>
+            <a:srgbClr val="F7F7F7"/>
+          </a:solidFill>
+          <a:ln/>
+        </p:spPr>
+      </p:sp>
+      <p:sp>
+        <p:nvSpPr>
+          <p:cNvPr id="9" name="Shape 7"/>
+          <p:cNvSpPr/>
+          <p:nvPr/>
+        </p:nvSpPr>
+        <p:spPr>
+          <a:xfrm>
+            <a:off x="685800" y="1865376"/>
+            <a:ext cx="54864" cy="1888236"/>
+          </a:xfrm>
+          <a:prstGeom prst="rect">
+            <a:avLst/>
+          </a:prstGeom>
+          <a:solidFill>
+            <a:srgbClr val="C2352F"/>
+          </a:solidFill>
+          <a:ln/>
+        </p:spPr>
+      </p:sp>
+      <p:sp>
+        <p:nvSpPr>
+          <p:cNvPr id="10" name="Text 8"/>
+          <p:cNvSpPr txBox="1"/>
+          <p:nvPr/>
+        </p:nvSpPr>
+        <p:spPr>
+          <a:xfrm>
+            <a:off x="886968" y="1993392"/>
+            <a:ext cx="3166872" cy="640080"/>
+          </a:xfrm>
+          <a:prstGeom prst="rect">
+            <a:avLst/>
+          </a:prstGeom>
+          <a:noFill/>
+          <a:ln/>
+        </p:spPr>
+        <p:txBody>
+          <a:bodyPr wrap="square" lIns="0" tIns="0" rIns="0" bIns="0" rtlCol="0" anchor="t"/>
+          <a:lstStyle/>
+          <a:p>
+            <a:pPr indent="0" marL="0">
+              <a:buNone/>
+            </a:pPr>
+            <a:r>
+              <a:rPr lang="en-US" sz="1800" b="1" dirty="0">
+                <a:solidFill>
+                  <a:srgbClr val="1A1A1A"/>
+                </a:solidFill>
+                <a:latin typeface="Inter" pitchFamily="34" charset="0"/>
+                <a:ea typeface="Inter" pitchFamily="34" charset="-122"/>
+                <a:cs typeface="Inter" pitchFamily="34" charset="-120"/>
+              </a:rPr>
+              <a:t>Written documentation</a:t>
+            </a:r>
+            <a:endParaRPr lang="en-US" sz="1800" dirty="0"/>
+          </a:p>
+        </p:txBody>
+      </p:sp>
+      <p:sp>
+        <p:nvSpPr>
+          <p:cNvPr id="11" name="Text 9"/>
+          <p:cNvSpPr txBox="1"/>
+          <p:nvPr/>
+        </p:nvSpPr>
+        <p:spPr>
+          <a:xfrm>
+            <a:off x="886968" y="2724912"/>
+            <a:ext cx="3166872" cy="918972"/>
+          </a:xfrm>
+          <a:prstGeom prst="rect">
+            <a:avLst/>
+          </a:prstGeom>
+          <a:noFill/>
+          <a:ln/>
+        </p:spPr>
+        <p:txBody>
+          <a:bodyPr wrap="square" lIns="0" tIns="0" rIns="0" bIns="0" rtlCol="0" anchor="t"/>
+          <a:lstStyle/>
+          <a:p>
+            <a:pPr indent="0" marL="0">
+              <a:buNone/>
+            </a:pPr>
+            <a:r>
+              <a:rPr lang="en-US" sz="1500" dirty="0">
+                <a:solidFill>
+                  <a:srgbClr val="595959"/>
+                </a:solidFill>
+                <a:latin typeface="Inter" pitchFamily="34" charset="0"/>
+                <a:ea typeface="Inter" pitchFamily="34" charset="-122"/>
+                <a:cs typeface="Inter" pitchFamily="34" charset="-120"/>
+              </a:rPr>
+              <a:t>Complaint, cause and correction written on the RO, and matching what was claimed</a:t>
+            </a:r>
+            <a:endParaRPr lang="en-US" sz="1500" dirty="0"/>
+          </a:p>
+        </p:txBody>
+      </p:sp>
+      <p:sp>
+        <p:nvSpPr>
+          <p:cNvPr id="12" name="Shape 10"/>
+          <p:cNvSpPr/>
+          <p:nvPr/>
+        </p:nvSpPr>
+        <p:spPr>
+          <a:xfrm>
+            <a:off x="4346448" y="1865376"/>
+            <a:ext cx="3496056" cy="1888236"/>
+          </a:xfrm>
+          <a:prstGeom prst="rect">
+            <a:avLst/>
+          </a:prstGeom>
+          <a:solidFill>
+            <a:srgbClr val="F7F7F7"/>
+          </a:solidFill>
+          <a:ln/>
+        </p:spPr>
+      </p:sp>
+      <p:sp>
+        <p:nvSpPr>
+          <p:cNvPr id="13" name="Shape 11"/>
+          <p:cNvSpPr/>
+          <p:nvPr/>
+        </p:nvSpPr>
+        <p:spPr>
+          <a:xfrm>
+            <a:off x="4346448" y="1865376"/>
+            <a:ext cx="54864" cy="1888236"/>
+          </a:xfrm>
+          <a:prstGeom prst="rect">
+            <a:avLst/>
+          </a:prstGeom>
+          <a:solidFill>
+            <a:srgbClr val="C2352F"/>
+          </a:solidFill>
+          <a:ln/>
+        </p:spPr>
+      </p:sp>
+      <p:sp>
+        <p:nvSpPr>
+          <p:cNvPr id="14" name="Text 12"/>
+          <p:cNvSpPr txBox="1"/>
+          <p:nvPr/>
+        </p:nvSpPr>
+        <p:spPr>
+          <a:xfrm>
+            <a:off x="4547616" y="1993392"/>
+            <a:ext cx="3166872" cy="640080"/>
+          </a:xfrm>
+          <a:prstGeom prst="rect">
+            <a:avLst/>
+          </a:prstGeom>
+          <a:noFill/>
+          <a:ln/>
+        </p:spPr>
+        <p:txBody>
+          <a:bodyPr wrap="square" lIns="0" tIns="0" rIns="0" bIns="0" rtlCol="0" anchor="t"/>
+          <a:lstStyle/>
+          <a:p>
+            <a:pPr indent="0" marL="0">
+              <a:buNone/>
+            </a:pPr>
+            <a:r>
+              <a:rPr lang="en-US" sz="1800" b="1" dirty="0">
+                <a:solidFill>
+                  <a:srgbClr val="1A1A1A"/>
+                </a:solidFill>
+                <a:latin typeface="Inter" pitchFamily="34" charset="0"/>
+                <a:ea typeface="Inter" pitchFamily="34" charset="-122"/>
+                <a:cs typeface="Inter" pitchFamily="34" charset="-120"/>
+              </a:rPr>
+              <a:t>Manager signature on add-ons</a:t>
+            </a:r>
+            <a:endParaRPr lang="en-US" sz="1800" dirty="0"/>
+          </a:p>
+        </p:txBody>
+      </p:sp>
+      <p:sp>
+        <p:nvSpPr>
+          <p:cNvPr id="15" name="Text 13"/>
+          <p:cNvSpPr txBox="1"/>
+          <p:nvPr/>
+        </p:nvSpPr>
+        <p:spPr>
+          <a:xfrm>
+            <a:off x="4547616" y="2724912"/>
+            <a:ext cx="3166872" cy="918972"/>
+          </a:xfrm>
+          <a:prstGeom prst="rect">
+            <a:avLst/>
+          </a:prstGeom>
+          <a:noFill/>
+          <a:ln/>
+        </p:spPr>
+        <p:txBody>
+          <a:bodyPr wrap="square" lIns="0" tIns="0" rIns="0" bIns="0" rtlCol="0" anchor="t"/>
+          <a:lstStyle/>
+          <a:p>
+            <a:pPr indent="0" marL="0">
+              <a:buNone/>
+            </a:pPr>
+            <a:r>
+              <a:rPr lang="en-US" sz="1500" dirty="0">
+                <a:solidFill>
+                  <a:srgbClr val="595959"/>
+                </a:solidFill>
+                <a:latin typeface="Inter" pitchFamily="34" charset="0"/>
+                <a:ea typeface="Inter" pitchFamily="34" charset="-122"/>
+                <a:cs typeface="Inter" pitchFamily="34" charset="-120"/>
+              </a:rPr>
+              <a:t>Any added repair approved and signed by a manager before it is claimed</a:t>
+            </a:r>
+            <a:endParaRPr lang="en-US" sz="1500" dirty="0"/>
+          </a:p>
+        </p:txBody>
+      </p:sp>
+      <p:sp>
+        <p:nvSpPr>
+          <p:cNvPr id="16" name="Shape 14"/>
+          <p:cNvSpPr/>
+          <p:nvPr/>
+        </p:nvSpPr>
+        <p:spPr>
+          <a:xfrm>
+            <a:off x="8007096" y="1865376"/>
+            <a:ext cx="3496056" cy="1888236"/>
+          </a:xfrm>
+          <a:prstGeom prst="rect">
+            <a:avLst/>
+          </a:prstGeom>
+          <a:solidFill>
+            <a:srgbClr val="F7F7F7"/>
+          </a:solidFill>
+          <a:ln/>
+        </p:spPr>
+      </p:sp>
+      <p:sp>
+        <p:nvSpPr>
+          <p:cNvPr id="17" name="Shape 15"/>
+          <p:cNvSpPr/>
+          <p:nvPr/>
+        </p:nvSpPr>
+        <p:spPr>
+          <a:xfrm>
+            <a:off x="8007096" y="1865376"/>
+            <a:ext cx="54864" cy="1888236"/>
+          </a:xfrm>
+          <a:prstGeom prst="rect">
+            <a:avLst/>
+          </a:prstGeom>
+          <a:solidFill>
+            <a:srgbClr val="C2352F"/>
+          </a:solidFill>
+          <a:ln/>
+        </p:spPr>
+      </p:sp>
+      <p:sp>
+        <p:nvSpPr>
+          <p:cNvPr id="18" name="Text 16"/>
+          <p:cNvSpPr txBox="1"/>
+          <p:nvPr/>
+        </p:nvSpPr>
+        <p:spPr>
+          <a:xfrm>
+            <a:off x="8208264" y="1993392"/>
+            <a:ext cx="3166872" cy="640080"/>
+          </a:xfrm>
+          <a:prstGeom prst="rect">
+            <a:avLst/>
+          </a:prstGeom>
+          <a:noFill/>
+          <a:ln/>
+        </p:spPr>
+        <p:txBody>
+          <a:bodyPr wrap="square" lIns="0" tIns="0" rIns="0" bIns="0" rtlCol="0" anchor="t"/>
+          <a:lstStyle/>
+          <a:p>
+            <a:pPr indent="0" marL="0">
+              <a:buNone/>
+            </a:pPr>
+            <a:r>
+              <a:rPr lang="en-US" sz="1800" b="1" dirty="0">
+                <a:solidFill>
+                  <a:srgbClr val="1A1A1A"/>
+                </a:solidFill>
+                <a:latin typeface="Inter" pitchFamily="34" charset="0"/>
+                <a:ea typeface="Inter" pitchFamily="34" charset="-122"/>
+                <a:cs typeface="Inter" pitchFamily="34" charset="-120"/>
+              </a:rPr>
+              <a:t>Signatures on in-stock units</a:t>
+            </a:r>
+            <a:endParaRPr lang="en-US" sz="1800" dirty="0"/>
+          </a:p>
+        </p:txBody>
+      </p:sp>
+      <p:sp>
+        <p:nvSpPr>
+          <p:cNvPr id="19" name="Text 17"/>
+          <p:cNvSpPr txBox="1"/>
+          <p:nvPr/>
+        </p:nvSpPr>
+        <p:spPr>
+          <a:xfrm>
+            <a:off x="8208264" y="2724912"/>
+            <a:ext cx="3166872" cy="918972"/>
+          </a:xfrm>
+          <a:prstGeom prst="rect">
+            <a:avLst/>
+          </a:prstGeom>
+          <a:noFill/>
+          <a:ln/>
+        </p:spPr>
+        <p:txBody>
+          <a:bodyPr wrap="square" lIns="0" tIns="0" rIns="0" bIns="0" rtlCol="0" anchor="t"/>
+          <a:lstStyle/>
+          <a:p>
+            <a:pPr indent="0" marL="0">
+              <a:buNone/>
+            </a:pPr>
+            <a:r>
+              <a:rPr lang="en-US" sz="1500" dirty="0">
+                <a:solidFill>
+                  <a:srgbClr val="595959"/>
+                </a:solidFill>
+                <a:latin typeface="Inter" pitchFamily="34" charset="0"/>
+                <a:ea typeface="Inter" pitchFamily="34" charset="-122"/>
+                <a:cs typeface="Inter" pitchFamily="34" charset="-120"/>
+              </a:rPr>
+              <a:t>Customer and manager signatures on repairs to units in stock</a:t>
+            </a:r>
+            <a:endParaRPr lang="en-US" sz="1500" dirty="0"/>
+          </a:p>
+        </p:txBody>
+      </p:sp>
+      <p:sp>
+        <p:nvSpPr>
+          <p:cNvPr id="20" name="Shape 18"/>
+          <p:cNvSpPr/>
+          <p:nvPr/>
+        </p:nvSpPr>
+        <p:spPr>
+          <a:xfrm>
+            <a:off x="685800" y="3918204"/>
+            <a:ext cx="3496056" cy="1888236"/>
+          </a:xfrm>
+          <a:prstGeom prst="rect">
+            <a:avLst/>
+          </a:prstGeom>
+          <a:solidFill>
+            <a:srgbClr val="F7F7F7"/>
+          </a:solidFill>
+          <a:ln/>
+        </p:spPr>
+      </p:sp>
+      <p:sp>
+        <p:nvSpPr>
+          <p:cNvPr id="21" name="Shape 19"/>
+          <p:cNvSpPr/>
+          <p:nvPr/>
+        </p:nvSpPr>
+        <p:spPr>
+          <a:xfrm>
+            <a:off x="685800" y="3918204"/>
+            <a:ext cx="54864" cy="1888236"/>
+          </a:xfrm>
+          <a:prstGeom prst="rect">
+            <a:avLst/>
+          </a:prstGeom>
+          <a:solidFill>
+            <a:srgbClr val="C2352F"/>
+          </a:solidFill>
+          <a:ln/>
+        </p:spPr>
+      </p:sp>
+      <p:sp>
+        <p:nvSpPr>
+          <p:cNvPr id="22" name="Text 20"/>
+          <p:cNvSpPr txBox="1"/>
+          <p:nvPr/>
+        </p:nvSpPr>
+        <p:spPr>
+          <a:xfrm>
+            <a:off x="886968" y="4046220"/>
+            <a:ext cx="3166872" cy="640080"/>
+          </a:xfrm>
+          <a:prstGeom prst="rect">
+            <a:avLst/>
+          </a:prstGeom>
+          <a:noFill/>
+          <a:ln/>
+        </p:spPr>
+        <p:txBody>
+          <a:bodyPr wrap="square" lIns="0" tIns="0" rIns="0" bIns="0" rtlCol="0" anchor="t"/>
+          <a:lstStyle/>
+          <a:p>
+            <a:pPr indent="0" marL="0">
+              <a:buNone/>
+            </a:pPr>
+            <a:r>
+              <a:rPr lang="en-US" sz="1800" b="1" dirty="0">
+                <a:solidFill>
+                  <a:srgbClr val="1A1A1A"/>
+                </a:solidFill>
+                <a:latin typeface="Inter" pitchFamily="34" charset="0"/>
+                <a:ea typeface="Inter" pitchFamily="34" charset="-122"/>
+                <a:cs typeface="Inter" pitchFamily="34" charset="-120"/>
+              </a:rPr>
+              <a:t>Out mileage</a:t>
+            </a:r>
+            <a:endParaRPr lang="en-US" sz="1800" dirty="0"/>
+          </a:p>
+        </p:txBody>
+      </p:sp>
+      <p:sp>
+        <p:nvSpPr>
+          <p:cNvPr id="23" name="Text 21"/>
+          <p:cNvSpPr txBox="1"/>
+          <p:nvPr/>
+        </p:nvSpPr>
+        <p:spPr>
+          <a:xfrm>
+            <a:off x="886968" y="4777740"/>
+            <a:ext cx="3166872" cy="918972"/>
+          </a:xfrm>
+          <a:prstGeom prst="rect">
+            <a:avLst/>
+          </a:prstGeom>
+          <a:noFill/>
+          <a:ln/>
+        </p:spPr>
+        <p:txBody>
+          <a:bodyPr wrap="square" lIns="0" tIns="0" rIns="0" bIns="0" rtlCol="0" anchor="t"/>
+          <a:lstStyle/>
+          <a:p>
+            <a:pPr indent="0" marL="0">
+              <a:buNone/>
+            </a:pPr>
+            <a:r>
+              <a:rPr lang="en-US" sz="1500" dirty="0">
+                <a:solidFill>
+                  <a:srgbClr val="595959"/>
+                </a:solidFill>
+                <a:latin typeface="Inter" pitchFamily="34" charset="0"/>
+                <a:ea typeface="Inter" pitchFamily="34" charset="-122"/>
+                <a:cs typeface="Inter" pitchFamily="34" charset="-120"/>
+              </a:rPr>
+              <a:t>Recorded on every RO and consistent with the mileage in</a:t>
+            </a:r>
+            <a:endParaRPr lang="en-US" sz="1500" dirty="0"/>
+          </a:p>
+        </p:txBody>
+      </p:sp>
+      <p:sp>
+        <p:nvSpPr>
+          <p:cNvPr id="24" name="Shape 22"/>
+          <p:cNvSpPr/>
+          <p:nvPr/>
+        </p:nvSpPr>
+        <p:spPr>
+          <a:xfrm>
+            <a:off x="4346448" y="3918204"/>
+            <a:ext cx="3496056" cy="1888236"/>
+          </a:xfrm>
+          <a:prstGeom prst="rect">
+            <a:avLst/>
+          </a:prstGeom>
+          <a:solidFill>
+            <a:srgbClr val="F7F7F7"/>
+          </a:solidFill>
+          <a:ln/>
+        </p:spPr>
+      </p:sp>
+      <p:sp>
+        <p:nvSpPr>
+          <p:cNvPr id="25" name="Shape 23"/>
+          <p:cNvSpPr/>
+          <p:nvPr/>
+        </p:nvSpPr>
+        <p:spPr>
+          <a:xfrm>
+            <a:off x="4346448" y="3918204"/>
+            <a:ext cx="54864" cy="1888236"/>
+          </a:xfrm>
+          <a:prstGeom prst="rect">
+            <a:avLst/>
+          </a:prstGeom>
+          <a:solidFill>
+            <a:srgbClr val="C2352F"/>
+          </a:solidFill>
+          <a:ln/>
+        </p:spPr>
+      </p:sp>
+      <p:sp>
+        <p:nvSpPr>
+          <p:cNvPr id="26" name="Text 24"/>
+          <p:cNvSpPr txBox="1"/>
+          <p:nvPr/>
+        </p:nvSpPr>
+        <p:spPr>
+          <a:xfrm>
+            <a:off x="4547616" y="4046220"/>
+            <a:ext cx="3166872" cy="640080"/>
+          </a:xfrm>
+          <a:prstGeom prst="rect">
+            <a:avLst/>
+          </a:prstGeom>
+          <a:noFill/>
+          <a:ln/>
+        </p:spPr>
+        <p:txBody>
+          <a:bodyPr wrap="square" lIns="0" tIns="0" rIns="0" bIns="0" rtlCol="0" anchor="t"/>
+          <a:lstStyle/>
+          <a:p>
+            <a:pPr indent="0" marL="0">
+              <a:buNone/>
+            </a:pPr>
+            <a:r>
+              <a:rPr lang="en-US" sz="1800" b="1" dirty="0">
+                <a:solidFill>
+                  <a:srgbClr val="1A1A1A"/>
+                </a:solidFill>
+                <a:latin typeface="Inter" pitchFamily="34" charset="0"/>
+                <a:ea typeface="Inter" pitchFamily="34" charset="-122"/>
+                <a:cs typeface="Inter" pitchFamily="34" charset="-120"/>
+              </a:rPr>
+              <a:t>Punch times</a:t>
+            </a:r>
+            <a:endParaRPr lang="en-US" sz="1800" dirty="0"/>
+          </a:p>
+        </p:txBody>
+      </p:sp>
+      <p:sp>
+        <p:nvSpPr>
+          <p:cNvPr id="27" name="Text 25"/>
+          <p:cNvSpPr txBox="1"/>
+          <p:nvPr/>
+        </p:nvSpPr>
+        <p:spPr>
+          <a:xfrm>
+            <a:off x="4547616" y="4777740"/>
+            <a:ext cx="3166872" cy="918972"/>
+          </a:xfrm>
+          <a:prstGeom prst="rect">
+            <a:avLst/>
+          </a:prstGeom>
+          <a:noFill/>
+          <a:ln/>
+        </p:spPr>
+        <p:txBody>
+          <a:bodyPr wrap="square" lIns="0" tIns="0" rIns="0" bIns="0" rtlCol="0" anchor="t"/>
+          <a:lstStyle/>
+          <a:p>
+            <a:pPr indent="0" marL="0">
+              <a:buNone/>
+            </a:pPr>
+            <a:r>
+              <a:rPr lang="en-US" sz="1500" dirty="0">
+                <a:solidFill>
+                  <a:srgbClr val="595959"/>
+                </a:solidFill>
+                <a:latin typeface="Inter" pitchFamily="34" charset="0"/>
+                <a:ea typeface="Inter" pitchFamily="34" charset="-122"/>
+                <a:cs typeface="Inter" pitchFamily="34" charset="-120"/>
+              </a:rPr>
+              <a:t>Technician clock times on the RO support the hours claimed</a:t>
+            </a:r>
+            <a:endParaRPr lang="en-US" sz="1500" dirty="0"/>
+          </a:p>
+        </p:txBody>
+      </p:sp>
+      <p:sp>
+        <p:nvSpPr>
+          <p:cNvPr id="28" name="Shape 26"/>
+          <p:cNvSpPr/>
+          <p:nvPr/>
+        </p:nvSpPr>
+        <p:spPr>
+          <a:xfrm>
+            <a:off x="8007096" y="3918204"/>
+            <a:ext cx="3496056" cy="1888236"/>
+          </a:xfrm>
+          <a:prstGeom prst="rect">
+            <a:avLst/>
+          </a:prstGeom>
+          <a:solidFill>
+            <a:srgbClr val="F7F7F7"/>
+          </a:solidFill>
+          <a:ln/>
+        </p:spPr>
+      </p:sp>
+      <p:sp>
+        <p:nvSpPr>
+          <p:cNvPr id="29" name="Shape 27"/>
+          <p:cNvSpPr/>
+          <p:nvPr/>
+        </p:nvSpPr>
+        <p:spPr>
+          <a:xfrm>
+            <a:off x="8007096" y="3918204"/>
+            <a:ext cx="54864" cy="1888236"/>
+          </a:xfrm>
+          <a:prstGeom prst="rect">
+            <a:avLst/>
+          </a:prstGeom>
+          <a:solidFill>
+            <a:srgbClr val="C2352F"/>
+          </a:solidFill>
+          <a:ln/>
+        </p:spPr>
+      </p:sp>
+      <p:sp>
+        <p:nvSpPr>
+          <p:cNvPr id="30" name="Text 28"/>
+          <p:cNvSpPr txBox="1"/>
+          <p:nvPr/>
+        </p:nvSpPr>
+        <p:spPr>
+          <a:xfrm>
+            <a:off x="8208264" y="4046220"/>
+            <a:ext cx="3166872" cy="640080"/>
+          </a:xfrm>
+          <a:prstGeom prst="rect">
+            <a:avLst/>
+          </a:prstGeom>
+          <a:noFill/>
+          <a:ln/>
+        </p:spPr>
+        <p:txBody>
+          <a:bodyPr wrap="square" lIns="0" tIns="0" rIns="0" bIns="0" rtlCol="0" anchor="t"/>
+          <a:lstStyle/>
+          <a:p>
+            <a:pPr indent="0" marL="0">
+              <a:buNone/>
+            </a:pPr>
+            <a:r>
+              <a:rPr lang="en-US" sz="1800" b="1" dirty="0">
+                <a:solidFill>
+                  <a:srgbClr val="1A1A1A"/>
+                </a:solidFill>
+                <a:latin typeface="Inter" pitchFamily="34" charset="0"/>
+                <a:ea typeface="Inter" pitchFamily="34" charset="-122"/>
+                <a:cs typeface="Inter" pitchFamily="34" charset="-120"/>
+              </a:rPr>
+              <a:t>Manufacturer authorization</a:t>
+            </a:r>
+            <a:endParaRPr lang="en-US" sz="1800" dirty="0"/>
+          </a:p>
+        </p:txBody>
+      </p:sp>
+      <p:sp>
+        <p:nvSpPr>
+          <p:cNvPr id="31" name="Text 29"/>
+          <p:cNvSpPr txBox="1"/>
+          <p:nvPr/>
+        </p:nvSpPr>
+        <p:spPr>
+          <a:xfrm>
+            <a:off x="8208264" y="4777740"/>
+            <a:ext cx="3166872" cy="918972"/>
+          </a:xfrm>
+          <a:prstGeom prst="rect">
+            <a:avLst/>
+          </a:prstGeom>
+          <a:noFill/>
+          <a:ln/>
+        </p:spPr>
+        <p:txBody>
+          <a:bodyPr wrap="square" lIns="0" tIns="0" rIns="0" bIns="0" rtlCol="0" anchor="t"/>
+          <a:lstStyle/>
+          <a:p>
+            <a:pPr indent="0" marL="0">
+              <a:buNone/>
+            </a:pPr>
+            <a:r>
+              <a:rPr lang="en-US" sz="1500" dirty="0">
+                <a:solidFill>
+                  <a:srgbClr val="595959"/>
+                </a:solidFill>
+                <a:latin typeface="Inter" pitchFamily="34" charset="0"/>
+                <a:ea typeface="Inter" pitchFamily="34" charset="-122"/>
+                <a:cs typeface="Inter" pitchFamily="34" charset="-120"/>
+              </a:rPr>
+              <a:t>Prior approval on file wherever the manufacturer requires it</a:t>
+            </a:r>
+            <a:endParaRPr lang="en-US" sz="1500" dirty="0"/>
+          </a:p>
+        </p:txBody>
+      </p:sp>
+      <p:sp>
+        <p:nvSpPr>
+          <p:cNvPr id="32" name="Shape 30"/>
+          <p:cNvSpPr/>
+          <p:nvPr/>
+        </p:nvSpPr>
+        <p:spPr>
+          <a:xfrm>
+            <a:off x="457200" y="6126480"/>
+            <a:ext cx="11274552" cy="615696"/>
+          </a:xfrm>
+          <a:prstGeom prst="rect">
+            <a:avLst/>
+          </a:prstGeom>
+          <a:solidFill>
+            <a:srgbClr val="FBEBEA"/>
+          </a:solidFill>
+          <a:ln/>
+        </p:spPr>
+      </p:sp>
+      <p:sp>
+        <p:nvSpPr>
+          <p:cNvPr id="33" name="Text 31"/>
+          <p:cNvSpPr txBox="1"/>
+          <p:nvPr/>
+        </p:nvSpPr>
+        <p:spPr>
+          <a:xfrm>
+            <a:off x="658368" y="6144768"/>
+            <a:ext cx="10927080" cy="579120"/>
+          </a:xfrm>
+          <a:prstGeom prst="rect">
+            <a:avLst/>
+          </a:prstGeom>
+          <a:noFill/>
+          <a:ln/>
+        </p:spPr>
+        <p:txBody>
+          <a:bodyPr wrap="square" lIns="0" tIns="0" rIns="0" bIns="0" rtlCol="0" anchor="ctr"/>
+          <a:lstStyle/>
+          <a:p>
+            <a:pPr indent="0" marL="0">
+              <a:buNone/>
+            </a:pPr>
+            <a:r>
+              <a:rPr lang="en-US" sz="1600" b="1" dirty="0">
+                <a:solidFill>
+                  <a:srgbClr val="A82B26"/>
+                </a:solidFill>
+                <a:latin typeface="Inter" pitchFamily="34" charset="0"/>
+                <a:ea typeface="Inter" pitchFamily="34" charset="-122"/>
+                <a:cs typeface="Inter" pitchFamily="34" charset="-120"/>
+              </a:rPr>
+              <a:t>Six audits took back over $400,000, more than a tenth of what rate increases brought in this year. Every cause here is documentation the store controls.</a:t>
+            </a:r>
+            <a:endParaRPr lang="en-US" sz="1600" dirty="0"/>
+          </a:p>
+        </p:txBody>
+      </p:sp>
+    </p:spTree>
+  </p:cSld>
+  <p:clrMapOvr>
+    <a:masterClrMapping/>
+  </p:clrMapOvr>
+</p:sld>
+</file>
+
+<file path=ppt/slides/slide4.xml><?xml version="1.0" encoding="utf-8"?>
+<p:sld xmlns:a="http://schemas.openxmlformats.org/drawingml/2006/main" xmlns:r="http://schemas.openxmlformats.org/officeDocument/2006/relationships" xmlns:p="http://schemas.openxmlformats.org/presentationml/2006/main">
+  <p:cSld name="Slide 4">
     <p:bg>
       <p:bgPr>
         <a:solidFill>

--- a/day2-deck/decks/Warranty Audits - Draft.pptx
+++ b/day2-deck/decks/Warranty Audits - Draft.pptx
@@ -2445,7 +2445,7 @@
                 <a:ea typeface="Inter" pitchFamily="34" charset="-122"/>
                 <a:cs typeface="Inter" pitchFamily="34" charset="-120"/>
               </a:rPr>
-              <a:t>WARRANTY &amp; INTERNAL</a:t>
+              <a:t>WARRANTY</a:t>
             </a:r>
             <a:endParaRPr lang="en-US" sz="1400" dirty="0"/>
           </a:p>
@@ -6232,7 +6232,7 @@
                 <a:ea typeface="Inter" pitchFamily="34" charset="-122"/>
                 <a:cs typeface="Inter" pitchFamily="34" charset="-120"/>
               </a:rPr>
-              <a:t>WARRANTY &amp; INTERNAL</a:t>
+              <a:t>WARRANTY</a:t>
             </a:r>
             <a:endParaRPr lang="en-US" sz="1400" dirty="0"/>
           </a:p>
@@ -7054,7 +7054,7 @@
                 <a:ea typeface="Inter" pitchFamily="34" charset="-122"/>
                 <a:cs typeface="Inter" pitchFamily="34" charset="-120"/>
               </a:rPr>
-              <a:t>WARRANTY &amp; INTERNAL</a:t>
+              <a:t>WARRANTY</a:t>
             </a:r>
             <a:endParaRPr lang="en-US" sz="1400" dirty="0"/>
           </a:p>
@@ -8030,7 +8030,7 @@
                 <a:ea typeface="Inter" pitchFamily="34" charset="-122"/>
                 <a:cs typeface="Inter" pitchFamily="34" charset="-120"/>
               </a:rPr>
-              <a:t>WARRANTY &amp; INTERNAL</a:t>
+              <a:t>WARRANTY</a:t>
             </a:r>
             <a:endParaRPr lang="en-US" sz="1400" dirty="0"/>
           </a:p>

--- a/day2-deck/decks/Warranty Audits - Draft.pptx
+++ b/day2-deck/decks/Warranty Audits - Draft.pptx
@@ -2836,7 +2836,7 @@
                 <a:ea typeface="Inter" pitchFamily="34" charset="-122"/>
                 <a:cs typeface="Inter" pitchFamily="34" charset="-120"/>
               </a:rPr>
-              <a:t>$797,928</a:t>
+              <a:t>$798K</a:t>
             </a:r>
             <a:endParaRPr lang="en-US" sz="1300" dirty="0"/>
           </a:p>
@@ -2875,7 +2875,7 @@
                 <a:ea typeface="Inter" pitchFamily="34" charset="-122"/>
                 <a:cs typeface="Inter" pitchFamily="34" charset="-120"/>
               </a:rPr>
-              <a:t>$419,904</a:t>
+              <a:t>$420K</a:t>
             </a:r>
             <a:endParaRPr lang="en-US" sz="1300" dirty="0"/>
           </a:p>
@@ -2914,7 +2914,7 @@
                 <a:ea typeface="Inter" pitchFamily="34" charset="-122"/>
                 <a:cs typeface="Inter" pitchFamily="34" charset="-120"/>
               </a:rPr>
-              <a:t>$378,024</a:t>
+              <a:t>$378K</a:t>
             </a:r>
             <a:endParaRPr lang="en-US" sz="1300" dirty="0"/>
           </a:p>
@@ -3012,7 +3012,7 @@
                 <a:ea typeface="Inter" pitchFamily="34" charset="-122"/>
                 <a:cs typeface="Inter" pitchFamily="34" charset="-120"/>
               </a:rPr>
-              <a:t>$463,396</a:t>
+              <a:t>$463K</a:t>
             </a:r>
             <a:endParaRPr lang="en-US" sz="1300" dirty="0"/>
           </a:p>
@@ -3051,7 +3051,7 @@
                 <a:ea typeface="Inter" pitchFamily="34" charset="-122"/>
                 <a:cs typeface="Inter" pitchFamily="34" charset="-120"/>
               </a:rPr>
-              <a:t>$142,960</a:t>
+              <a:t>$143K</a:t>
             </a:r>
             <a:endParaRPr lang="en-US" sz="1300" dirty="0"/>
           </a:p>
@@ -3090,7 +3090,7 @@
                 <a:ea typeface="Inter" pitchFamily="34" charset="-122"/>
                 <a:cs typeface="Inter" pitchFamily="34" charset="-120"/>
               </a:rPr>
-              <a:t>$320,436</a:t>
+              <a:t>$320K</a:t>
             </a:r>
             <a:endParaRPr lang="en-US" sz="1300" dirty="0"/>
           </a:p>
@@ -3188,7 +3188,7 @@
                 <a:ea typeface="Inter" pitchFamily="34" charset="-122"/>
                 <a:cs typeface="Inter" pitchFamily="34" charset="-120"/>
               </a:rPr>
-              <a:t>$343,968</a:t>
+              <a:t>$344K</a:t>
             </a:r>
             <a:endParaRPr lang="en-US" sz="1300" dirty="0"/>
           </a:p>
@@ -3227,7 +3227,7 @@
                 <a:ea typeface="Inter" pitchFamily="34" charset="-122"/>
                 <a:cs typeface="Inter" pitchFamily="34" charset="-120"/>
               </a:rPr>
-              <a:t>$123,204</a:t>
+              <a:t>$123K</a:t>
             </a:r>
             <a:endParaRPr lang="en-US" sz="1300" dirty="0"/>
           </a:p>
@@ -3266,7 +3266,7 @@
                 <a:ea typeface="Inter" pitchFamily="34" charset="-122"/>
                 <a:cs typeface="Inter" pitchFamily="34" charset="-120"/>
               </a:rPr>
-              <a:t>$220,764</a:t>
+              <a:t>$221K</a:t>
             </a:r>
             <a:endParaRPr lang="en-US" sz="1300" dirty="0"/>
           </a:p>
@@ -3364,7 +3364,7 @@
                 <a:ea typeface="Inter" pitchFamily="34" charset="-122"/>
                 <a:cs typeface="Inter" pitchFamily="34" charset="-120"/>
               </a:rPr>
-              <a:t>$325,752</a:t>
+              <a:t>$326K</a:t>
             </a:r>
             <a:endParaRPr lang="en-US" sz="1300" dirty="0"/>
           </a:p>
@@ -3403,7 +3403,7 @@
                 <a:ea typeface="Inter" pitchFamily="34" charset="-122"/>
                 <a:cs typeface="Inter" pitchFamily="34" charset="-120"/>
               </a:rPr>
-              <a:t>$206,340</a:t>
+              <a:t>$206K</a:t>
             </a:r>
             <a:endParaRPr lang="en-US" sz="1300" dirty="0"/>
           </a:p>
@@ -3442,7 +3442,7 @@
                 <a:ea typeface="Inter" pitchFamily="34" charset="-122"/>
                 <a:cs typeface="Inter" pitchFamily="34" charset="-120"/>
               </a:rPr>
-              <a:t>$119,412</a:t>
+              <a:t>$119K</a:t>
             </a:r>
             <a:endParaRPr lang="en-US" sz="1300" dirty="0"/>
           </a:p>
@@ -3540,7 +3540,7 @@
                 <a:ea typeface="Inter" pitchFamily="34" charset="-122"/>
                 <a:cs typeface="Inter" pitchFamily="34" charset="-120"/>
               </a:rPr>
-              <a:t>$292,056</a:t>
+              <a:t>$292K</a:t>
             </a:r>
             <a:endParaRPr lang="en-US" sz="1300" dirty="0"/>
           </a:p>
@@ -3579,7 +3579,7 @@
                 <a:ea typeface="Inter" pitchFamily="34" charset="-122"/>
                 <a:cs typeface="Inter" pitchFamily="34" charset="-120"/>
               </a:rPr>
-              <a:t>$165,000</a:t>
+              <a:t>$165K</a:t>
             </a:r>
             <a:endParaRPr lang="en-US" sz="1300" dirty="0"/>
           </a:p>
@@ -3618,7 +3618,7 @@
                 <a:ea typeface="Inter" pitchFamily="34" charset="-122"/>
                 <a:cs typeface="Inter" pitchFamily="34" charset="-120"/>
               </a:rPr>
-              <a:t>$127,056</a:t>
+              <a:t>$127K</a:t>
             </a:r>
             <a:endParaRPr lang="en-US" sz="1300" dirty="0"/>
           </a:p>
@@ -3716,7 +3716,7 @@
                 <a:ea typeface="Inter" pitchFamily="34" charset="-122"/>
                 <a:cs typeface="Inter" pitchFamily="34" charset="-120"/>
               </a:rPr>
-              <a:t>$283,584</a:t>
+              <a:t>$284K</a:t>
             </a:r>
             <a:endParaRPr lang="en-US" sz="1300" dirty="0"/>
           </a:p>
@@ -3755,7 +3755,7 @@
                 <a:ea typeface="Inter" pitchFamily="34" charset="-122"/>
                 <a:cs typeface="Inter" pitchFamily="34" charset="-120"/>
               </a:rPr>
-              <a:t>$136,824</a:t>
+              <a:t>$137K</a:t>
             </a:r>
             <a:endParaRPr lang="en-US" sz="1300" dirty="0"/>
           </a:p>
@@ -3794,7 +3794,7 @@
                 <a:ea typeface="Inter" pitchFamily="34" charset="-122"/>
                 <a:cs typeface="Inter" pitchFamily="34" charset="-120"/>
               </a:rPr>
-              <a:t>$146,760</a:t>
+              <a:t>$147K</a:t>
             </a:r>
             <a:endParaRPr lang="en-US" sz="1300" dirty="0"/>
           </a:p>
@@ -3892,7 +3892,7 @@
                 <a:ea typeface="Inter" pitchFamily="34" charset="-122"/>
                 <a:cs typeface="Inter" pitchFamily="34" charset="-120"/>
               </a:rPr>
-              <a:t>$225,360</a:t>
+              <a:t>$225K</a:t>
             </a:r>
             <a:endParaRPr lang="en-US" sz="1300" dirty="0"/>
           </a:p>
@@ -3931,7 +3931,7 @@
                 <a:ea typeface="Inter" pitchFamily="34" charset="-122"/>
                 <a:cs typeface="Inter" pitchFamily="34" charset="-120"/>
               </a:rPr>
-              <a:t>$127,560</a:t>
+              <a:t>$128K</a:t>
             </a:r>
             <a:endParaRPr lang="en-US" sz="1300" dirty="0"/>
           </a:p>
@@ -3970,7 +3970,7 @@
                 <a:ea typeface="Inter" pitchFamily="34" charset="-122"/>
                 <a:cs typeface="Inter" pitchFamily="34" charset="-120"/>
               </a:rPr>
-              <a:t>$97,800</a:t>
+              <a:t>$98K</a:t>
             </a:r>
             <a:endParaRPr lang="en-US" sz="1300" dirty="0"/>
           </a:p>
@@ -4068,7 +4068,7 @@
                 <a:ea typeface="Inter" pitchFamily="34" charset="-122"/>
                 <a:cs typeface="Inter" pitchFamily="34" charset="-120"/>
               </a:rPr>
-              <a:t>$209,268</a:t>
+              <a:t>$209K</a:t>
             </a:r>
             <a:endParaRPr lang="en-US" sz="1300" dirty="0"/>
           </a:p>
@@ -4107,7 +4107,7 @@
                 <a:ea typeface="Inter" pitchFamily="34" charset="-122"/>
                 <a:cs typeface="Inter" pitchFamily="34" charset="-120"/>
               </a:rPr>
-              <a:t>$46,440</a:t>
+              <a:t>$46K</a:t>
             </a:r>
             <a:endParaRPr lang="en-US" sz="1300" dirty="0"/>
           </a:p>
@@ -4146,7 +4146,7 @@
                 <a:ea typeface="Inter" pitchFamily="34" charset="-122"/>
                 <a:cs typeface="Inter" pitchFamily="34" charset="-120"/>
               </a:rPr>
-              <a:t>$162,828</a:t>
+              <a:t>$163K</a:t>
             </a:r>
             <a:endParaRPr lang="en-US" sz="1300" dirty="0"/>
           </a:p>
@@ -4244,7 +4244,7 @@
                 <a:ea typeface="Inter" pitchFamily="34" charset="-122"/>
                 <a:cs typeface="Inter" pitchFamily="34" charset="-120"/>
               </a:rPr>
-              <a:t>$146,088</a:t>
+              <a:t>$146K</a:t>
             </a:r>
             <a:endParaRPr lang="en-US" sz="1300" dirty="0"/>
           </a:p>
@@ -4283,7 +4283,7 @@
                 <a:ea typeface="Inter" pitchFamily="34" charset="-122"/>
                 <a:cs typeface="Inter" pitchFamily="34" charset="-120"/>
               </a:rPr>
-              <a:t>$49,068</a:t>
+              <a:t>$49K</a:t>
             </a:r>
             <a:endParaRPr lang="en-US" sz="1300" dirty="0"/>
           </a:p>
@@ -4322,7 +4322,7 @@
                 <a:ea typeface="Inter" pitchFamily="34" charset="-122"/>
                 <a:cs typeface="Inter" pitchFamily="34" charset="-120"/>
               </a:rPr>
-              <a:t>$97,020</a:t>
+              <a:t>$97K</a:t>
             </a:r>
             <a:endParaRPr lang="en-US" sz="1300" dirty="0"/>
           </a:p>
@@ -4420,7 +4420,7 @@
                 <a:ea typeface="Inter" pitchFamily="34" charset="-122"/>
                 <a:cs typeface="Inter" pitchFamily="34" charset="-120"/>
               </a:rPr>
-              <a:t>$133,692</a:t>
+              <a:t>$134K</a:t>
             </a:r>
             <a:endParaRPr lang="en-US" sz="1300" dirty="0"/>
           </a:p>
@@ -4498,7 +4498,7 @@
                 <a:ea typeface="Inter" pitchFamily="34" charset="-122"/>
                 <a:cs typeface="Inter" pitchFamily="34" charset="-120"/>
               </a:rPr>
-              <a:t>$133,692</a:t>
+              <a:t>$134K</a:t>
             </a:r>
             <a:endParaRPr lang="en-US" sz="1300" dirty="0"/>
           </a:p>
@@ -4596,7 +4596,7 @@
                 <a:ea typeface="Inter" pitchFamily="34" charset="-122"/>
                 <a:cs typeface="Inter" pitchFamily="34" charset="-120"/>
               </a:rPr>
-              <a:t>$96,264</a:t>
+              <a:t>$96K</a:t>
             </a:r>
             <a:endParaRPr lang="en-US" sz="1300" dirty="0"/>
           </a:p>
@@ -4674,7 +4674,7 @@
                 <a:ea typeface="Inter" pitchFamily="34" charset="-122"/>
                 <a:cs typeface="Inter" pitchFamily="34" charset="-120"/>
               </a:rPr>
-              <a:t>$96,264</a:t>
+              <a:t>$96K</a:t>
             </a:r>
             <a:endParaRPr lang="en-US" sz="1300" dirty="0"/>
           </a:p>
@@ -4772,7 +4772,7 @@
                 <a:ea typeface="Inter" pitchFamily="34" charset="-122"/>
                 <a:cs typeface="Inter" pitchFamily="34" charset="-120"/>
               </a:rPr>
-              <a:t>$94,620</a:t>
+              <a:t>$95K</a:t>
             </a:r>
             <a:endParaRPr lang="en-US" sz="1300" dirty="0"/>
           </a:p>
@@ -4811,7 +4811,7 @@
                 <a:ea typeface="Inter" pitchFamily="34" charset="-122"/>
                 <a:cs typeface="Inter" pitchFamily="34" charset="-120"/>
               </a:rPr>
-              <a:t>$63,852</a:t>
+              <a:t>$64K</a:t>
             </a:r>
             <a:endParaRPr lang="en-US" sz="1300" dirty="0"/>
           </a:p>
@@ -4850,7 +4850,7 @@
                 <a:ea typeface="Inter" pitchFamily="34" charset="-122"/>
                 <a:cs typeface="Inter" pitchFamily="34" charset="-120"/>
               </a:rPr>
-              <a:t>$30,768</a:t>
+              <a:t>$31K</a:t>
             </a:r>
             <a:endParaRPr lang="en-US" sz="1300" dirty="0"/>
           </a:p>
@@ -4948,7 +4948,7 @@
                 <a:ea typeface="Inter" pitchFamily="34" charset="-122"/>
                 <a:cs typeface="Inter" pitchFamily="34" charset="-120"/>
               </a:rPr>
-              <a:t>$93,216</a:t>
+              <a:t>$93K</a:t>
             </a:r>
             <a:endParaRPr lang="en-US" sz="1300" dirty="0"/>
           </a:p>
@@ -4987,7 +4987,7 @@
                 <a:ea typeface="Inter" pitchFamily="34" charset="-122"/>
                 <a:cs typeface="Inter" pitchFamily="34" charset="-120"/>
               </a:rPr>
-              <a:t>$32,748</a:t>
+              <a:t>$33K</a:t>
             </a:r>
             <a:endParaRPr lang="en-US" sz="1300" dirty="0"/>
           </a:p>
@@ -5026,7 +5026,7 @@
                 <a:ea typeface="Inter" pitchFamily="34" charset="-122"/>
                 <a:cs typeface="Inter" pitchFamily="34" charset="-120"/>
               </a:rPr>
-              <a:t>$60,468</a:t>
+              <a:t>$60K</a:t>
             </a:r>
             <a:endParaRPr lang="en-US" sz="1300" dirty="0"/>
           </a:p>
@@ -5124,7 +5124,7 @@
                 <a:ea typeface="Inter" pitchFamily="34" charset="-122"/>
                 <a:cs typeface="Inter" pitchFamily="34" charset="-120"/>
               </a:rPr>
-              <a:t>$90,672</a:t>
+              <a:t>$91K</a:t>
             </a:r>
             <a:endParaRPr lang="en-US" sz="1300" dirty="0"/>
           </a:p>
@@ -5163,7 +5163,7 @@
                 <a:ea typeface="Inter" pitchFamily="34" charset="-122"/>
                 <a:cs typeface="Inter" pitchFamily="34" charset="-120"/>
               </a:rPr>
-              <a:t>$37,212</a:t>
+              <a:t>$37K</a:t>
             </a:r>
             <a:endParaRPr lang="en-US" sz="1300" dirty="0"/>
           </a:p>
@@ -5202,7 +5202,7 @@
                 <a:ea typeface="Inter" pitchFamily="34" charset="-122"/>
                 <a:cs typeface="Inter" pitchFamily="34" charset="-120"/>
               </a:rPr>
-              <a:t>$53,460</a:t>
+              <a:t>$53K</a:t>
             </a:r>
             <a:endParaRPr lang="en-US" sz="1300" dirty="0"/>
           </a:p>
@@ -5300,7 +5300,7 @@
                 <a:ea typeface="Inter" pitchFamily="34" charset="-122"/>
                 <a:cs typeface="Inter" pitchFamily="34" charset="-120"/>
               </a:rPr>
-              <a:t>$74,952</a:t>
+              <a:t>$75K</a:t>
             </a:r>
             <a:endParaRPr lang="en-US" sz="1300" dirty="0"/>
           </a:p>
@@ -5339,7 +5339,7 @@
                 <a:ea typeface="Inter" pitchFamily="34" charset="-122"/>
                 <a:cs typeface="Inter" pitchFamily="34" charset="-120"/>
               </a:rPr>
-              <a:t>$74,952</a:t>
+              <a:t>$75K</a:t>
             </a:r>
             <a:endParaRPr lang="en-US" sz="1300" dirty="0"/>
           </a:p>
@@ -5476,7 +5476,7 @@
                 <a:ea typeface="Inter" pitchFamily="34" charset="-122"/>
                 <a:cs typeface="Inter" pitchFamily="34" charset="-120"/>
               </a:rPr>
-              <a:t>$61,536</a:t>
+              <a:t>$62K</a:t>
             </a:r>
             <a:endParaRPr lang="en-US" sz="1300" dirty="0"/>
           </a:p>
@@ -5554,7 +5554,7 @@
                 <a:ea typeface="Inter" pitchFamily="34" charset="-122"/>
                 <a:cs typeface="Inter" pitchFamily="34" charset="-120"/>
               </a:rPr>
-              <a:t>$61,536</a:t>
+              <a:t>$62K</a:t>
             </a:r>
             <a:endParaRPr lang="en-US" sz="1300" dirty="0"/>
           </a:p>
@@ -5652,7 +5652,7 @@
                 <a:ea typeface="Inter" pitchFamily="34" charset="-122"/>
                 <a:cs typeface="Inter" pitchFamily="34" charset="-120"/>
               </a:rPr>
-              <a:t>$35,304</a:t>
+              <a:t>$35K</a:t>
             </a:r>
             <a:endParaRPr lang="en-US" sz="1300" dirty="0"/>
           </a:p>
@@ -5691,7 +5691,7 @@
                 <a:ea typeface="Inter" pitchFamily="34" charset="-122"/>
                 <a:cs typeface="Inter" pitchFamily="34" charset="-120"/>
               </a:rPr>
-              <a:t>$35,304</a:t>
+              <a:t>$35K</a:t>
             </a:r>
             <a:endParaRPr lang="en-US" sz="1300" dirty="0"/>
           </a:p>
@@ -5828,7 +5828,7 @@
                 <a:ea typeface="Inter" pitchFamily="34" charset="-122"/>
                 <a:cs typeface="Inter" pitchFamily="34" charset="-120"/>
               </a:rPr>
-              <a:t>$15,204</a:t>
+              <a:t>$15K</a:t>
             </a:r>
             <a:endParaRPr lang="en-US" sz="1300" dirty="0"/>
           </a:p>
@@ -5906,7 +5906,7 @@
                 <a:ea typeface="Inter" pitchFamily="34" charset="-122"/>
                 <a:cs typeface="Inter" pitchFamily="34" charset="-120"/>
               </a:rPr>
-              <a:t>$15,204</a:t>
+              <a:t>$15K</a:t>
             </a:r>
             <a:endParaRPr lang="en-US" sz="1300" dirty="0"/>
           </a:p>
@@ -6004,7 +6004,7 @@
                 <a:ea typeface="Inter" pitchFamily="34" charset="-122"/>
                 <a:cs typeface="Inter" pitchFamily="34" charset="-120"/>
               </a:rPr>
-              <a:t>$5,340</a:t>
+              <a:t>$5K</a:t>
             </a:r>
             <a:endParaRPr lang="en-US" sz="1300" dirty="0"/>
           </a:p>
@@ -6082,7 +6082,7 @@
                 <a:ea typeface="Inter" pitchFamily="34" charset="-122"/>
                 <a:cs typeface="Inter" pitchFamily="34" charset="-120"/>
               </a:rPr>
-              <a:t>$5,340</a:t>
+              <a:t>$5K</a:t>
             </a:r>
             <a:endParaRPr lang="en-US" sz="1300" dirty="0"/>
           </a:p>

--- a/day2-deck/decks/Warranty Audits - Draft.pptx
+++ b/day2-deck/decks/Warranty Audits - Draft.pptx
@@ -1931,7 +1931,7 @@
           <a:p>
             <a:r>
               <a:rPr lang="en-US" dirty="0"/>
-              <a:t>Source: Jan 2026 GM meeting (Day 1), slides 13-14: six warranty audits, primary causes and Warranty Compliance steps. Descriptions under each heading drafted for this deck; confirm against each OEM's warranty policy manual.DRAFT. Causes from Jan 2026 GM meeting slide 13. That slide named six stores and their debits; stores are left off here, as on Warranty Compliance. The store amounts on the Jan slide add to $414,000 (headline said $400,000), so the slide says 'over $400,000'.</a:t>
+              <a:t>Source: Jan 2026 GM meeting (Day 1), slides 13-14: six warranty audits, primary causes and Warranty Compliance steps. Descriptions under each heading drafted for this deck; confirm against each OEM's warranty policy manual.DRAFT. Causes from Jan 2026 GM meeting slide 13; the two signature causes combined and Supporting evidence added (Noah, Oct 22: some manufacturers require photos of the failed component or proof a procedure was followed). That slide named six stores and their debits; stores are left off here, as on Warranty Compliance. The store amounts on the Jan slide add to $414,000 (headline said $400,000), so the slide says 'over $400,000'.</a:t>
             </a:r>
             <a:endParaRPr lang="en-US" dirty="0"/>
           </a:p>
@@ -7152,7 +7152,7 @@
                 <a:ea typeface="Inter" pitchFamily="34" charset="-122"/>
                 <a:cs typeface="Inter" pitchFamily="34" charset="-120"/>
               </a:rPr>
-              <a:t>Primary causes in the six audits</a:t>
+              <a:t>What auditors check: the causes in the six audits, plus supporting evidence</a:t>
             </a:r>
             <a:endParaRPr lang="en-US" sz="1500" dirty="0"/>
           </a:p>
@@ -7369,7 +7369,7 @@
                 <a:ea typeface="Inter" pitchFamily="34" charset="-122"/>
                 <a:cs typeface="Inter" pitchFamily="34" charset="-120"/>
               </a:rPr>
-              <a:t>Manager signature on add-ons</a:t>
+              <a:t>Required signatures</a:t>
             </a:r>
             <a:endParaRPr lang="en-US" sz="1800" dirty="0"/>
           </a:p>
@@ -7408,7 +7408,7 @@
                 <a:ea typeface="Inter" pitchFamily="34" charset="-122"/>
                 <a:cs typeface="Inter" pitchFamily="34" charset="-120"/>
               </a:rPr>
-              <a:t>Any added repair approved and signed by a manager before it is claimed</a:t>
+              <a:t>Manager sign-off on added repairs; customer and manager signatures on in-stock units</a:t>
             </a:r>
             <a:endParaRPr lang="en-US" sz="1500" dirty="0"/>
           </a:p>
@@ -7487,7 +7487,7 @@
                 <a:ea typeface="Inter" pitchFamily="34" charset="-122"/>
                 <a:cs typeface="Inter" pitchFamily="34" charset="-120"/>
               </a:rPr>
-              <a:t>Signatures on in-stock units</a:t>
+              <a:t>Supporting evidence</a:t>
             </a:r>
             <a:endParaRPr lang="en-US" sz="1800" dirty="0"/>
           </a:p>
@@ -7526,7 +7526,7 @@
                 <a:ea typeface="Inter" pitchFamily="34" charset="-122"/>
                 <a:cs typeface="Inter" pitchFamily="34" charset="-120"/>
               </a:rPr>
-              <a:t>Customer and manager signatures on repairs to units in stock</a:t>
+              <a:t>Photos of the failed part, test results and proof the required procedure was followed, where the manufacturer asks for it</a:t>
             </a:r>
             <a:endParaRPr lang="en-US" sz="1500" dirty="0"/>
           </a:p>

--- a/day2-deck/decks/Warranty Audits - Draft.pptx
+++ b/day2-deck/decks/Warranty Audits - Draft.pptx
@@ -2798,7 +2798,7 @@
             <a:avLst/>
           </a:prstGeom>
           <a:solidFill>
-            <a:srgbClr val="12A566"/>
+            <a:srgbClr val="2587C5"/>
           </a:solidFill>
           <a:ln/>
         </p:spPr>
@@ -2830,7 +2830,7 @@
             <a:r>
               <a:rPr lang="en-US" sz="1300" b="1" dirty="0">
                 <a:solidFill>
-                  <a:srgbClr val="0B7A4A"/>
+                  <a:srgbClr val="0B2C4A"/>
                 </a:solidFill>
                 <a:latin typeface="Inter" pitchFamily="34" charset="0"/>
                 <a:ea typeface="Inter" pitchFamily="34" charset="-122"/>
@@ -2974,7 +2974,7 @@
             <a:avLst/>
           </a:prstGeom>
           <a:solidFill>
-            <a:srgbClr val="12A566"/>
+            <a:srgbClr val="2587C5"/>
           </a:solidFill>
           <a:ln/>
         </p:spPr>
@@ -3006,7 +3006,7 @@
             <a:r>
               <a:rPr lang="en-US" sz="1300" b="1" dirty="0">
                 <a:solidFill>
-                  <a:srgbClr val="0B7A4A"/>
+                  <a:srgbClr val="0B2C4A"/>
                 </a:solidFill>
                 <a:latin typeface="Inter" pitchFamily="34" charset="0"/>
                 <a:ea typeface="Inter" pitchFamily="34" charset="-122"/>
@@ -3150,7 +3150,7 @@
             <a:avLst/>
           </a:prstGeom>
           <a:solidFill>
-            <a:srgbClr val="12A566"/>
+            <a:srgbClr val="2587C5"/>
           </a:solidFill>
           <a:ln/>
         </p:spPr>
@@ -3182,7 +3182,7 @@
             <a:r>
               <a:rPr lang="en-US" sz="1300" b="1" dirty="0">
                 <a:solidFill>
-                  <a:srgbClr val="0B7A4A"/>
+                  <a:srgbClr val="0B2C4A"/>
                 </a:solidFill>
                 <a:latin typeface="Inter" pitchFamily="34" charset="0"/>
                 <a:ea typeface="Inter" pitchFamily="34" charset="-122"/>
@@ -3326,7 +3326,7 @@
             <a:avLst/>
           </a:prstGeom>
           <a:solidFill>
-            <a:srgbClr val="12A566"/>
+            <a:srgbClr val="2587C5"/>
           </a:solidFill>
           <a:ln/>
         </p:spPr>
@@ -3358,7 +3358,7 @@
             <a:r>
               <a:rPr lang="en-US" sz="1300" b="1" dirty="0">
                 <a:solidFill>
-                  <a:srgbClr val="0B7A4A"/>
+                  <a:srgbClr val="0B2C4A"/>
                 </a:solidFill>
                 <a:latin typeface="Inter" pitchFamily="34" charset="0"/>
                 <a:ea typeface="Inter" pitchFamily="34" charset="-122"/>
@@ -3502,7 +3502,7 @@
             <a:avLst/>
           </a:prstGeom>
           <a:solidFill>
-            <a:srgbClr val="12A566"/>
+            <a:srgbClr val="2587C5"/>
           </a:solidFill>
           <a:ln/>
         </p:spPr>
@@ -3534,7 +3534,7 @@
             <a:r>
               <a:rPr lang="en-US" sz="1300" b="1" dirty="0">
                 <a:solidFill>
-                  <a:srgbClr val="0B7A4A"/>
+                  <a:srgbClr val="0B2C4A"/>
                 </a:solidFill>
                 <a:latin typeface="Inter" pitchFamily="34" charset="0"/>
                 <a:ea typeface="Inter" pitchFamily="34" charset="-122"/>
@@ -3678,7 +3678,7 @@
             <a:avLst/>
           </a:prstGeom>
           <a:solidFill>
-            <a:srgbClr val="12A566"/>
+            <a:srgbClr val="2587C5"/>
           </a:solidFill>
           <a:ln/>
         </p:spPr>
@@ -3710,7 +3710,7 @@
             <a:r>
               <a:rPr lang="en-US" sz="1300" b="1" dirty="0">
                 <a:solidFill>
-                  <a:srgbClr val="0B7A4A"/>
+                  <a:srgbClr val="0B2C4A"/>
                 </a:solidFill>
                 <a:latin typeface="Inter" pitchFamily="34" charset="0"/>
                 <a:ea typeface="Inter" pitchFamily="34" charset="-122"/>
@@ -3854,7 +3854,7 @@
             <a:avLst/>
           </a:prstGeom>
           <a:solidFill>
-            <a:srgbClr val="12A566"/>
+            <a:srgbClr val="2587C5"/>
           </a:solidFill>
           <a:ln/>
         </p:spPr>
@@ -3886,7 +3886,7 @@
             <a:r>
               <a:rPr lang="en-US" sz="1300" b="1" dirty="0">
                 <a:solidFill>
-                  <a:srgbClr val="0B7A4A"/>
+                  <a:srgbClr val="0B2C4A"/>
                 </a:solidFill>
                 <a:latin typeface="Inter" pitchFamily="34" charset="0"/>
                 <a:ea typeface="Inter" pitchFamily="34" charset="-122"/>
@@ -4030,7 +4030,7 @@
             <a:avLst/>
           </a:prstGeom>
           <a:solidFill>
-            <a:srgbClr val="12A566"/>
+            <a:srgbClr val="2587C5"/>
           </a:solidFill>
           <a:ln/>
         </p:spPr>
@@ -4062,7 +4062,7 @@
             <a:r>
               <a:rPr lang="en-US" sz="1300" b="1" dirty="0">
                 <a:solidFill>
-                  <a:srgbClr val="0B7A4A"/>
+                  <a:srgbClr val="0B2C4A"/>
                 </a:solidFill>
                 <a:latin typeface="Inter" pitchFamily="34" charset="0"/>
                 <a:ea typeface="Inter" pitchFamily="34" charset="-122"/>
@@ -4206,7 +4206,7 @@
             <a:avLst/>
           </a:prstGeom>
           <a:solidFill>
-            <a:srgbClr val="12A566"/>
+            <a:srgbClr val="2587C5"/>
           </a:solidFill>
           <a:ln/>
         </p:spPr>
@@ -4238,7 +4238,7 @@
             <a:r>
               <a:rPr lang="en-US" sz="1300" b="1" dirty="0">
                 <a:solidFill>
-                  <a:srgbClr val="0B7A4A"/>
+                  <a:srgbClr val="0B2C4A"/>
                 </a:solidFill>
                 <a:latin typeface="Inter" pitchFamily="34" charset="0"/>
                 <a:ea typeface="Inter" pitchFamily="34" charset="-122"/>
@@ -4382,7 +4382,7 @@
             <a:avLst/>
           </a:prstGeom>
           <a:solidFill>
-            <a:srgbClr val="12A566"/>
+            <a:srgbClr val="2587C5"/>
           </a:solidFill>
           <a:ln/>
         </p:spPr>
@@ -4414,7 +4414,7 @@
             <a:r>
               <a:rPr lang="en-US" sz="1300" b="1" dirty="0">
                 <a:solidFill>
-                  <a:srgbClr val="0B7A4A"/>
+                  <a:srgbClr val="0B2C4A"/>
                 </a:solidFill>
                 <a:latin typeface="Inter" pitchFamily="34" charset="0"/>
                 <a:ea typeface="Inter" pitchFamily="34" charset="-122"/>
@@ -4558,7 +4558,7 @@
             <a:avLst/>
           </a:prstGeom>
           <a:solidFill>
-            <a:srgbClr val="12A566"/>
+            <a:srgbClr val="2587C5"/>
           </a:solidFill>
           <a:ln/>
         </p:spPr>
@@ -4590,7 +4590,7 @@
             <a:r>
               <a:rPr lang="en-US" sz="1300" b="1" dirty="0">
                 <a:solidFill>
-                  <a:srgbClr val="0B7A4A"/>
+                  <a:srgbClr val="0B2C4A"/>
                 </a:solidFill>
                 <a:latin typeface="Inter" pitchFamily="34" charset="0"/>
                 <a:ea typeface="Inter" pitchFamily="34" charset="-122"/>
@@ -4734,7 +4734,7 @@
             <a:avLst/>
           </a:prstGeom>
           <a:solidFill>
-            <a:srgbClr val="12A566"/>
+            <a:srgbClr val="2587C5"/>
           </a:solidFill>
           <a:ln/>
         </p:spPr>
@@ -4766,7 +4766,7 @@
             <a:r>
               <a:rPr lang="en-US" sz="1300" b="1" dirty="0">
                 <a:solidFill>
-                  <a:srgbClr val="0B7A4A"/>
+                  <a:srgbClr val="0B2C4A"/>
                 </a:solidFill>
                 <a:latin typeface="Inter" pitchFamily="34" charset="0"/>
                 <a:ea typeface="Inter" pitchFamily="34" charset="-122"/>
@@ -4910,7 +4910,7 @@
             <a:avLst/>
           </a:prstGeom>
           <a:solidFill>
-            <a:srgbClr val="12A566"/>
+            <a:srgbClr val="2587C5"/>
           </a:solidFill>
           <a:ln/>
         </p:spPr>
@@ -4942,7 +4942,7 @@
             <a:r>
               <a:rPr lang="en-US" sz="1300" b="1" dirty="0">
                 <a:solidFill>
-                  <a:srgbClr val="0B7A4A"/>
+                  <a:srgbClr val="0B2C4A"/>
                 </a:solidFill>
                 <a:latin typeface="Inter" pitchFamily="34" charset="0"/>
                 <a:ea typeface="Inter" pitchFamily="34" charset="-122"/>
@@ -5086,7 +5086,7 @@
             <a:avLst/>
           </a:prstGeom>
           <a:solidFill>
-            <a:srgbClr val="12A566"/>
+            <a:srgbClr val="2587C5"/>
           </a:solidFill>
           <a:ln/>
         </p:spPr>
@@ -5118,7 +5118,7 @@
             <a:r>
               <a:rPr lang="en-US" sz="1300" b="1" dirty="0">
                 <a:solidFill>
-                  <a:srgbClr val="0B7A4A"/>
+                  <a:srgbClr val="0B2C4A"/>
                 </a:solidFill>
                 <a:latin typeface="Inter" pitchFamily="34" charset="0"/>
                 <a:ea typeface="Inter" pitchFamily="34" charset="-122"/>
@@ -5262,7 +5262,7 @@
             <a:avLst/>
           </a:prstGeom>
           <a:solidFill>
-            <a:srgbClr val="12A566"/>
+            <a:srgbClr val="2587C5"/>
           </a:solidFill>
           <a:ln/>
         </p:spPr>
@@ -5294,7 +5294,7 @@
             <a:r>
               <a:rPr lang="en-US" sz="1300" b="1" dirty="0">
                 <a:solidFill>
-                  <a:srgbClr val="0B7A4A"/>
+                  <a:srgbClr val="0B2C4A"/>
                 </a:solidFill>
                 <a:latin typeface="Inter" pitchFamily="34" charset="0"/>
                 <a:ea typeface="Inter" pitchFamily="34" charset="-122"/>
@@ -5438,7 +5438,7 @@
             <a:avLst/>
           </a:prstGeom>
           <a:solidFill>
-            <a:srgbClr val="12A566"/>
+            <a:srgbClr val="2587C5"/>
           </a:solidFill>
           <a:ln/>
         </p:spPr>
@@ -5470,7 +5470,7 @@
             <a:r>
               <a:rPr lang="en-US" sz="1300" b="1" dirty="0">
                 <a:solidFill>
-                  <a:srgbClr val="0B7A4A"/>
+                  <a:srgbClr val="0B2C4A"/>
                 </a:solidFill>
                 <a:latin typeface="Inter" pitchFamily="34" charset="0"/>
                 <a:ea typeface="Inter" pitchFamily="34" charset="-122"/>
@@ -5614,7 +5614,7 @@
             <a:avLst/>
           </a:prstGeom>
           <a:solidFill>
-            <a:srgbClr val="12A566"/>
+            <a:srgbClr val="2587C5"/>
           </a:solidFill>
           <a:ln/>
         </p:spPr>
@@ -5646,7 +5646,7 @@
             <a:r>
               <a:rPr lang="en-US" sz="1300" b="1" dirty="0">
                 <a:solidFill>
-                  <a:srgbClr val="0B7A4A"/>
+                  <a:srgbClr val="0B2C4A"/>
                 </a:solidFill>
                 <a:latin typeface="Inter" pitchFamily="34" charset="0"/>
                 <a:ea typeface="Inter" pitchFamily="34" charset="-122"/>
@@ -5790,7 +5790,7 @@
             <a:avLst/>
           </a:prstGeom>
           <a:solidFill>
-            <a:srgbClr val="12A566"/>
+            <a:srgbClr val="2587C5"/>
           </a:solidFill>
           <a:ln/>
         </p:spPr>
@@ -5822,7 +5822,7 @@
             <a:r>
               <a:rPr lang="en-US" sz="1300" b="1" dirty="0">
                 <a:solidFill>
-                  <a:srgbClr val="0B7A4A"/>
+                  <a:srgbClr val="0B2C4A"/>
                 </a:solidFill>
                 <a:latin typeface="Inter" pitchFamily="34" charset="0"/>
                 <a:ea typeface="Inter" pitchFamily="34" charset="-122"/>
@@ -5966,7 +5966,7 @@
             <a:avLst/>
           </a:prstGeom>
           <a:solidFill>
-            <a:srgbClr val="12A566"/>
+            <a:srgbClr val="2587C5"/>
           </a:solidFill>
           <a:ln/>
         </p:spPr>
@@ -5998,7 +5998,7 @@
             <a:r>
               <a:rPr lang="en-US" sz="1300" b="1" dirty="0">
                 <a:solidFill>
-                  <a:srgbClr val="0B7A4A"/>
+                  <a:srgbClr val="0B2C4A"/>
                 </a:solidFill>
                 <a:latin typeface="Inter" pitchFamily="34" charset="0"/>
                 <a:ea typeface="Inter" pitchFamily="34" charset="-122"/>
@@ -6103,7 +6103,7 @@
             <a:avLst/>
           </a:prstGeom>
           <a:solidFill>
-            <a:srgbClr val="E6F6EE"/>
+            <a:srgbClr val="EDF4FA"/>
           </a:solidFill>
           <a:ln/>
         </p:spPr>
@@ -6135,7 +6135,7 @@
             <a:r>
               <a:rPr lang="en-US" sz="1600" b="1" dirty="0">
                 <a:solidFill>
-                  <a:srgbClr val="0B7A4A"/>
+                  <a:srgbClr val="0B2C4A"/>
                 </a:solidFill>
                 <a:latin typeface="Inter" pitchFamily="34" charset="0"/>
                 <a:ea typeface="Inter" pitchFamily="34" charset="-122"/>

--- a/day2-deck/decks/Warranty Audits - Draft.pptx
+++ b/day2-deck/decks/Warranty Audits - Draft.pptx
@@ -129,18 +129,18 @@
               <c:strCache>
                 <c:ptCount val="1"/>
                 <c:pt idx="0">
-                  <c:v>2026</c:v>
+                  <c:v>2025</c:v>
                 </c:pt>
               </c:strCache>
             </c:strRef>
           </c:tx>
           <c:spPr>
             <a:solidFill>
-              <a:srgbClr val="2587C5"/>
+              <a:srgbClr val="9AA3AD"/>
             </a:solidFill>
             <a:ln w="38100" cap="flat">
               <a:solidFill>
-                <a:srgbClr val="2587C5"/>
+                <a:srgbClr val="9AA3AD"/>
               </a:solidFill>
               <a:prstDash val="solid"/>
               <a:round/>
@@ -149,17 +149,17 @@
           </c:spPr>
           <c:invertIfNegative val="0"/>
           <c:dLbls>
-            <c:numFmt formatCode="0.0&quot;%&quot;" sourceLinked="0"/>
+            <c:numFmt formatCode="#,##0" sourceLinked="0"/>
             <c:txPr>
               <a:bodyPr/>
               <a:lstStyle/>
               <a:p>
                 <a:pPr>
-                  <a:defRPr b="0" i="0" strike="noStrike" sz="1400" u="none">
+                  <a:defRPr b="0" i="0" strike="noStrike" sz="1200" u="none">
                     <a:solidFill>
-                      <a:srgbClr val="1A1A1A"/>
+                      <a:srgbClr val="000000"/>
                     </a:solidFill>
-                    <a:latin typeface="+mn-lt"/>
+                    <a:latin typeface="Arial"/>
                   </a:defRPr>
                 </a:pPr>
               </a:p>
@@ -174,14 +174,14 @@
           </c:dLbls>
           <c:marker>
             <c:symbol val="circle"/>
-            <c:size val="8"/>
+            <c:size val="7"/>
             <c:spPr>
               <a:solidFill>
-                <a:srgbClr val="2587C5"/>
+                <a:srgbClr val="9AA3AD"/>
               </a:solidFill>
               <a:ln w="9525" cap="flat">
                 <a:solidFill>
-                  <a:srgbClr val="2587C5"/>
+                  <a:srgbClr val="9AA3AD"/>
                 </a:solidFill>
                 <a:prstDash val="solid"/>
                 <a:round/>
@@ -242,31 +242,193 @@
                 <c:formatCode>General</c:formatCode>
                 <c:ptCount val="12"/>
                 <c:pt idx="0">
-                  <c:v>43.5</c:v>
+                  <c:v>175.2439841962175</c:v>
                 </c:pt>
                 <c:pt idx="1">
-                  <c:v>44.2</c:v>
+                  <c:v>174.70169012351778</c:v>
                 </c:pt>
                 <c:pt idx="2">
-                  <c:v>44</c:v>
+                  <c:v>172.9285775129414</c:v>
                 </c:pt>
                 <c:pt idx="3">
-                  <c:v>44.3</c:v>
+                  <c:v>175.61127356278703</c:v>
                 </c:pt>
                 <c:pt idx="4">
-                  <c:v>44.5</c:v>
+                  <c:v>181.75874394919398</c:v>
                 </c:pt>
                 <c:pt idx="5">
-                  <c:v>44.5</c:v>
+                  <c:v>185.28735446655506</c:v>
                 </c:pt>
                 <c:pt idx="6">
-                  <c:v>46</c:v>
+                  <c:v>186.84360060500507</c:v>
                 </c:pt>
                 <c:pt idx="7">
-                  <c:v>45.1</c:v>
+                  <c:v>186.03852485364902</c:v>
                 </c:pt>
                 <c:pt idx="8">
-                  <c:v>45.6</c:v>
+                  <c:v>186.63443624697075</c:v>
+                </c:pt>
+                <c:pt idx="9">
+                  <c:v>187.82340399621128</c:v>
+                </c:pt>
+                <c:pt idx="10">
+                  <c:v>188.54570456770247</c:v>
+                </c:pt>
+                <c:pt idx="11">
+                  <c:v>193.026339762648</c:v>
+                </c:pt>
+              </c:numCache>
+            </c:numRef>
+          </c:val>
+          <c:smooth val="0"/>
+        </c:ser>
+        <c:ser>
+          <c:idx val="1"/>
+          <c:order val="1"/>
+          <c:tx>
+            <c:strRef>
+              <c:f>Sheet1!$C$1</c:f>
+              <c:strCache>
+                <c:ptCount val="1"/>
+                <c:pt idx="0">
+                  <c:v>2026</c:v>
+                </c:pt>
+              </c:strCache>
+            </c:strRef>
+          </c:tx>
+          <c:spPr>
+            <a:solidFill>
+              <a:srgbClr val="2587C5"/>
+            </a:solidFill>
+            <a:ln w="38100" cap="flat">
+              <a:solidFill>
+                <a:srgbClr val="2587C5"/>
+              </a:solidFill>
+              <a:prstDash val="solid"/>
+              <a:round/>
+            </a:ln>
+            <a:effectLst/>
+          </c:spPr>
+          <c:invertIfNegative val="0"/>
+          <c:dLbls>
+            <c:numFmt formatCode="#,##0" sourceLinked="0"/>
+            <c:txPr>
+              <a:bodyPr/>
+              <a:lstStyle/>
+              <a:p>
+                <a:pPr>
+                  <a:defRPr b="0" i="0" strike="noStrike" sz="1200" u="none">
+                    <a:solidFill>
+                      <a:srgbClr val="000000"/>
+                    </a:solidFill>
+                    <a:latin typeface="Arial"/>
+                  </a:defRPr>
+                </a:pPr>
+              </a:p>
+            </c:txPr>
+            <c:showLegendKey val="0"/>
+            <c:showVal val="0"/>
+            <c:showCatName val="0"/>
+            <c:showSerName val="0"/>
+            <c:showPercent val="0"/>
+            <c:showBubbleSize val="0"/>
+            <c:showLeaderLines val="0"/>
+          </c:dLbls>
+          <c:marker>
+            <c:symbol val="circle"/>
+            <c:size val="7"/>
+            <c:spPr>
+              <a:solidFill>
+                <a:srgbClr val="2587C5"/>
+              </a:solidFill>
+              <a:ln w="9525" cap="flat">
+                <a:solidFill>
+                  <a:srgbClr val="2587C5"/>
+                </a:solidFill>
+                <a:prstDash val="solid"/>
+                <a:round/>
+              </a:ln>
+              <a:effectLst/>
+            </c:spPr>
+          </c:marker>
+          <c:cat>
+            <c:multiLvlStrRef>
+              <c:f>Sheet1!$A$2:$A$13</c:f>
+              <c:multiLvlStrCache>
+                <c:ptCount val="12"/>
+                <c:lvl>
+                  <c:pt idx="0">
+                    <c:v>Jan</c:v>
+                  </c:pt>
+                  <c:pt idx="1">
+                    <c:v>Feb</c:v>
+                  </c:pt>
+                  <c:pt idx="2">
+                    <c:v>Mar</c:v>
+                  </c:pt>
+                  <c:pt idx="3">
+                    <c:v>Apr</c:v>
+                  </c:pt>
+                  <c:pt idx="4">
+                    <c:v>May</c:v>
+                  </c:pt>
+                  <c:pt idx="5">
+                    <c:v>Jun</c:v>
+                  </c:pt>
+                  <c:pt idx="6">
+                    <c:v>Jul</c:v>
+                  </c:pt>
+                  <c:pt idx="7">
+                    <c:v>Aug</c:v>
+                  </c:pt>
+                  <c:pt idx="8">
+                    <c:v>Sep</c:v>
+                  </c:pt>
+                  <c:pt idx="9">
+                    <c:v>Oct</c:v>
+                  </c:pt>
+                  <c:pt idx="10">
+                    <c:v>Nov</c:v>
+                  </c:pt>
+                  <c:pt idx="11">
+                    <c:v>Dec</c:v>
+                  </c:pt>
+                </c:lvl>
+              </c:multiLvlStrCache>
+            </c:multiLvlStrRef>
+          </c:cat>
+          <c:val>
+            <c:numRef>
+              <c:f>Sheet1!$C$2:$C$13</c:f>
+              <c:numCache>
+                <c:formatCode>General</c:formatCode>
+                <c:ptCount val="12"/>
+                <c:pt idx="0">
+                  <c:v>196.3431055626689</c:v>
+                </c:pt>
+                <c:pt idx="1">
+                  <c:v>197.59988088885487</c:v>
+                </c:pt>
+                <c:pt idx="2">
+                  <c:v>196.73190202486097</c:v>
+                </c:pt>
+                <c:pt idx="3">
+                  <c:v>199.07347573222432</c:v>
+                </c:pt>
+                <c:pt idx="4">
+                  <c:v>194.27814921582817</c:v>
+                </c:pt>
+                <c:pt idx="5">
+                  <c:v>194.34736290224444</c:v>
+                </c:pt>
+                <c:pt idx="6">
+                  <c:v>198.70298965359143</c:v>
+                </c:pt>
+                <c:pt idx="7">
+                  <c:v>198.475216144318</c:v>
+                </c:pt>
+                <c:pt idx="8">
+                  <c:v>198.64898260681719</c:v>
                 </c:pt>
                 <c:pt idx="9">
                   <c:v/>
@@ -283,17 +445,17 @@
           <c:smooth val="0"/>
         </c:ser>
         <c:dLbls>
-          <c:numFmt formatCode="0.0&quot;%&quot;" sourceLinked="0"/>
+          <c:numFmt formatCode="#,##0" sourceLinked="0"/>
           <c:txPr>
             <a:bodyPr/>
             <a:lstStyle/>
             <a:p>
               <a:pPr>
-                <a:defRPr b="0" i="0" strike="noStrike" sz="1400" u="none">
+                <a:defRPr b="0" i="0" strike="noStrike" sz="1200" u="none">
                   <a:solidFill>
-                    <a:srgbClr val="1A1A1A"/>
+                    <a:srgbClr val="000000"/>
                   </a:solidFill>
-                  <a:latin typeface="+mn-lt"/>
+                  <a:latin typeface="Arial"/>
                 </a:defRPr>
               </a:pPr>
             </a:p>
@@ -324,7 +486,9 @@
         <c:tickLblPos val="low"/>
         <c:spPr>
           <a:ln w="12700" cap="flat">
-            <a:noFill/>
+            <a:solidFill>
+              <a:srgbClr val="888888"/>
+            </a:solidFill>
             <a:prstDash val="solid"/>
             <a:round/>
           </a:ln>
@@ -336,7 +500,7 @@
             <a:pPr>
               <a:defRPr sz="1400" b="0" i="0" u="none" strike="noStrike">
                 <a:solidFill>
-                  <a:srgbClr val="FFFFFF"/>
+                  <a:srgbClr val="1A1A1A"/>
                 </a:solidFill>
                 <a:latin typeface="+mn-lt"/>
               </a:defRPr>
@@ -345,7 +509,7 @@
           </a:p>
         </c:txPr>
         <c:crossAx val="2094734552"/>
-        <c:crosses val="min"/>
+        <c:crosses val="autoZero"/>
         <c:auto val="1"/>
         <c:lblAlgn val="ctr"/>
         <c:noMultiLvlLbl val="1"/>
@@ -354,12 +518,23 @@
         <c:axId val="2094734552"/>
         <c:scaling>
           <c:orientation val="minMax"/>
-          <c:max val="48"/>
-          <c:min val="40"/>
+          <c:max val="210"/>
+          <c:min val="160"/>
         </c:scaling>
         <c:delete val="0"/>
         <c:axPos val="l"/>
-        <c:numFmt formatCode="0&quot;%&quot;" sourceLinked="0"/>
+        <c:majorGridlines>
+          <c:spPr>
+            <a:ln w="9525" cap="flat">
+              <a:solidFill>
+                <a:srgbClr val="D9D9D9"/>
+              </a:solidFill>
+              <a:prstDash val="solid"/>
+              <a:round/>
+            </a:ln>
+          </c:spPr>
+        </c:majorGridlines>
+        <c:numFmt formatCode="&quot;$&quot;#,##0" sourceLinked="0"/>
         <c:majorTickMark val="out"/>
         <c:minorTickMark val="none"/>
         <c:tickLblPos val="nextTo"/>
@@ -377,7 +552,7 @@
             <a:pPr>
               <a:defRPr sz="1400" b="0" i="0" u="none" strike="noStrike">
                 <a:solidFill>
-                  <a:srgbClr val="FFFFFF"/>
+                  <a:srgbClr val="595959"/>
                 </a:solidFill>
                 <a:latin typeface="+mn-lt"/>
               </a:defRPr>
@@ -388,7 +563,7 @@
         <c:crossAx val="2094734554"/>
         <c:crosses val="autoZero"/>
         <c:crossBetween val="between"/>
-        <c:majorUnit val="2"/>
+        <c:majorUnit val="10"/>
       </c:valAx>
       <c:spPr>
         <a:noFill/>
@@ -398,6 +573,26 @@
         <a:effectLst/>
       </c:spPr>
     </c:plotArea>
+    <c:legend>
+      <c:legendPos val="t"/>
+      <c:overlay val="0"/>
+      <c:txPr>
+        <a:bodyPr/>
+        <a:lstStyle/>
+        <a:p>
+          <a:pPr>
+            <a:defRPr sz="1400">
+              <a:solidFill>
+                <a:srgbClr val="1A1A1A"/>
+              </a:solidFill>
+              <a:latin typeface="+mn-lt"/>
+              <a:cs typeface="+mn-lt"/>
+            </a:defRPr>
+          </a:pPr>
+          <a:endParaRPr lang="en-US"/>
+        </a:p>
+      </c:txPr>
+    </c:legend>
     <c:plotVisOnly val="1"/>
     <c:dispBlanksAs val="span"/>
   </c:chart>
@@ -433,40 +628,43 @@
               <c:strCache>
                 <c:ptCount val="1"/>
                 <c:pt idx="0">
-                  <c:v>2026</c:v>
+                  <c:v>2025</c:v>
                 </c:pt>
               </c:strCache>
             </c:strRef>
           </c:tx>
           <c:spPr>
             <a:solidFill>
-              <a:srgbClr val="2587C5"/>
+              <a:srgbClr val="9AA3AD"/>
             </a:solidFill>
-            <a:ln>
-              <a:noFill/>
+            <a:ln w="38100" cap="flat">
+              <a:solidFill>
+                <a:srgbClr val="9AA3AD"/>
+              </a:solidFill>
+              <a:prstDash val="solid"/>
+              <a:round/>
             </a:ln>
             <a:effectLst/>
           </c:spPr>
           <c:invertIfNegative val="0"/>
           <c:dLbls>
-            <c:numFmt formatCode="0.0&quot;%&quot;" sourceLinked="0"/>
+            <c:numFmt formatCode="#,##0" sourceLinked="0"/>
             <c:txPr>
               <a:bodyPr/>
               <a:lstStyle/>
               <a:p>
                 <a:pPr>
-                  <a:defRPr b="0" i="0" strike="noStrike" sz="1400" u="none">
+                  <a:defRPr b="0" i="0" strike="noStrike" sz="1200" u="none">
                     <a:solidFill>
-                      <a:srgbClr val="1A1A1A"/>
+                      <a:srgbClr val="000000"/>
                     </a:solidFill>
-                    <a:latin typeface="+mn-lt"/>
+                    <a:latin typeface="Arial"/>
                   </a:defRPr>
                 </a:pPr>
               </a:p>
             </c:txPr>
-            <c:dLblPos val="t"/>
             <c:showLegendKey val="0"/>
-            <c:showVal val="1"/>
+            <c:showVal val="0"/>
             <c:showCatName val="0"/>
             <c:showSerName val="0"/>
             <c:showPercent val="0"/>
@@ -474,15 +672,15 @@
             <c:showLeaderLines val="0"/>
           </c:dLbls>
           <c:marker>
-            <c:symbol val="none"/>
-            <c:size val="8"/>
+            <c:symbol val="circle"/>
+            <c:size val="7"/>
             <c:spPr>
               <a:solidFill>
-                <a:srgbClr val="2587C5"/>
+                <a:srgbClr val="9AA3AD"/>
               </a:solidFill>
               <a:ln w="9525" cap="flat">
                 <a:solidFill>
-                  <a:srgbClr val="2587C5"/>
+                  <a:srgbClr val="9AA3AD"/>
                 </a:solidFill>
                 <a:prstDash val="solid"/>
                 <a:round/>
@@ -543,240 +741,92 @@
                 <c:formatCode>General</c:formatCode>
                 <c:ptCount val="12"/>
                 <c:pt idx="0">
-                  <c:v>43.5</c:v>
+                  <c:v>42.278253053610044</c:v>
                 </c:pt>
                 <c:pt idx="1">
-                  <c:v>44.2</c:v>
+                  <c:v>42.41544739806332</c:v>
                 </c:pt>
                 <c:pt idx="2">
-                  <c:v>44</c:v>
+                  <c:v>42.65611347315035</c:v>
                 </c:pt>
                 <c:pt idx="3">
-                  <c:v>44.3</c:v>
+                  <c:v>42.70081646746627</c:v>
                 </c:pt>
                 <c:pt idx="4">
-                  <c:v>44.5</c:v>
+                  <c:v>41.81256614635749</c:v>
                 </c:pt>
                 <c:pt idx="5">
-                  <c:v>44.5</c:v>
+                  <c:v>41.719042884608356</c:v>
                 </c:pt>
                 <c:pt idx="6">
-                  <c:v>46</c:v>
+                  <c:v>43.27386273923569</c:v>
                 </c:pt>
                 <c:pt idx="7">
-                  <c:v>45.1</c:v>
+                  <c:v>43.053208466855786</c:v>
                 </c:pt>
                 <c:pt idx="8">
-                  <c:v>45.6</c:v>
+                  <c:v>43.188043770686036</c:v>
                 </c:pt>
                 <c:pt idx="9">
-                  <c:v/>
+                  <c:v>42.49206866316298</c:v>
                 </c:pt>
                 <c:pt idx="10">
-                  <c:v/>
+                  <c:v>42.854394657766704</c:v>
                 </c:pt>
                 <c:pt idx="11">
-                  <c:v/>
+                  <c:v>43.14464569316162</c:v>
                 </c:pt>
               </c:numCache>
             </c:numRef>
           </c:val>
           <c:smooth val="0"/>
         </c:ser>
-        <c:dLbls>
-          <c:numFmt formatCode="0.0&quot;%&quot;" sourceLinked="0"/>
-          <c:txPr>
-            <a:bodyPr/>
-            <a:lstStyle/>
-            <a:p>
-              <a:pPr>
-                <a:defRPr b="0" i="0" strike="noStrike" sz="1400" u="none">
-                  <a:solidFill>
-                    <a:srgbClr val="1A1A1A"/>
-                  </a:solidFill>
-                  <a:latin typeface="+mn-lt"/>
-                </a:defRPr>
-              </a:pPr>
-            </a:p>
-          </c:txPr>
-          <c:dLblPos val="t"/>
-          <c:showLegendKey val="0"/>
-          <c:showVal val="1"/>
-          <c:showCatName val="0"/>
-          <c:showSerName val="0"/>
-          <c:showPercent val="0"/>
-          <c:showBubbleSize val="0"/>
-          <c:showLeaderLines val="0"/>
-        </c:dLbls>
-        <c:marker val="1"/>
-        <c:axId val="2094734554"/>
-        <c:axId val="2094734552"/>
-        <c:axId val="2094734556"/>
-      </c:lineChart>
-      <c:catAx>
-        <c:axId val="2094734554"/>
-        <c:scaling>
-          <c:orientation val="minMax"/>
-        </c:scaling>
-        <c:delete val="0"/>
-        <c:axPos val="b"/>
-        <c:numFmt formatCode="General" sourceLinked="1"/>
-        <c:majorTickMark val="out"/>
-        <c:minorTickMark val="none"/>
-        <c:tickLblPos val="low"/>
-        <c:spPr>
-          <a:ln w="12700" cap="flat">
-            <a:noFill/>
-            <a:prstDash val="solid"/>
-            <a:round/>
-          </a:ln>
-        </c:spPr>
-        <c:txPr>
-          <a:bodyPr/>
-          <a:lstStyle/>
-          <a:p>
-            <a:pPr>
-              <a:defRPr sz="1400" b="0" i="0" u="none" strike="noStrike">
-                <a:solidFill>
-                  <a:srgbClr val="FFFFFF"/>
-                </a:solidFill>
-                <a:latin typeface="+mn-lt"/>
-              </a:defRPr>
-            </a:pPr>
-            <a:endParaRPr lang="en-US"/>
-          </a:p>
-        </c:txPr>
-        <c:crossAx val="2094734552"/>
-        <c:crosses val="min"/>
-        <c:auto val="1"/>
-        <c:lblAlgn val="ctr"/>
-        <c:noMultiLvlLbl val="1"/>
-      </c:catAx>
-      <c:valAx>
-        <c:axId val="2094734552"/>
-        <c:scaling>
-          <c:orientation val="minMax"/>
-          <c:max val="48"/>
-          <c:min val="40"/>
-        </c:scaling>
-        <c:delete val="0"/>
-        <c:axPos val="l"/>
-        <c:numFmt formatCode="0&quot;%&quot;" sourceLinked="0"/>
-        <c:majorTickMark val="out"/>
-        <c:minorTickMark val="none"/>
-        <c:tickLblPos val="nextTo"/>
-        <c:spPr>
-          <a:ln w="12700" cap="flat">
-            <a:noFill/>
-            <a:prstDash val="solid"/>
-            <a:round/>
-          </a:ln>
-        </c:spPr>
-        <c:txPr>
-          <a:bodyPr/>
-          <a:lstStyle/>
-          <a:p>
-            <a:pPr>
-              <a:defRPr sz="1400" b="0" i="0" u="none" strike="noStrike">
-                <a:solidFill>
-                  <a:srgbClr val="FFFFFF"/>
-                </a:solidFill>
-                <a:latin typeface="+mn-lt"/>
-              </a:defRPr>
-            </a:pPr>
-            <a:endParaRPr lang="en-US"/>
-          </a:p>
-        </c:txPr>
-        <c:crossAx val="2094734554"/>
-        <c:crosses val="autoZero"/>
-        <c:crossBetween val="between"/>
-        <c:majorUnit val="2"/>
-      </c:valAx>
-      <c:spPr>
-        <a:solidFill>
-          <a:srgbClr val="FFFFFF">
-            <a:alpha val="0"/>
-          </a:srgbClr>
-        </a:solidFill>
-        <a:ln>
-          <a:noFill/>
-        </a:ln>
-        <a:effectLst/>
-      </c:spPr>
-    </c:plotArea>
-    <c:plotVisOnly val="1"/>
-    <c:dispBlanksAs val="span"/>
-  </c:chart>
-  <c:spPr>
-    <a:solidFill>
-      <a:srgbClr val="FFFFFF">
-        <a:alpha val="0"/>
-      </a:srgbClr>
-    </a:solidFill>
-    <a:ln>
-      <a:noFill/>
-    </a:ln>
-    <a:effectLst/>
-  </c:spPr>
-  <c:externalData r:id="rId1">
-    <c:autoUpdate val="0"/>
-  </c:externalData>
-</c:chartSpace>
-</file>
-
-<file path=ppt/charts/chart3.xml><?xml version="1.0" encoding="utf-8"?>
-<c:chartSpace xmlns:c="http://schemas.openxmlformats.org/drawingml/2006/chart" xmlns:a="http://schemas.openxmlformats.org/drawingml/2006/main" xmlns:r="http://schemas.openxmlformats.org/officeDocument/2006/relationships">
-  <c:date1904 val="0"/>
-  <c:roundedCorners val="1"/>
-  <c:chart>
-    <c:autoTitleDeleted val="1"/>
-    <c:plotArea>
-      <c:layout/>
-      <c:lineChart>
-        <c:varyColors val="0"/>
         <c:ser>
-          <c:idx val="0"/>
-          <c:order val="0"/>
+          <c:idx val="1"/>
+          <c:order val="1"/>
           <c:tx>
             <c:strRef>
-              <c:f>Sheet1!$B$1</c:f>
+              <c:f>Sheet1!$C$1</c:f>
               <c:strCache>
                 <c:ptCount val="1"/>
                 <c:pt idx="0">
-                  <c:v>2025</c:v>
+                  <c:v>2026</c:v>
                 </c:pt>
               </c:strCache>
             </c:strRef>
           </c:tx>
           <c:spPr>
             <a:solidFill>
-              <a:srgbClr val="9AA3AD"/>
+              <a:srgbClr val="2587C5"/>
             </a:solidFill>
-            <a:ln>
-              <a:noFill/>
+            <a:ln w="38100" cap="flat">
+              <a:solidFill>
+                <a:srgbClr val="2587C5"/>
+              </a:solidFill>
+              <a:prstDash val="solid"/>
+              <a:round/>
             </a:ln>
             <a:effectLst/>
           </c:spPr>
           <c:invertIfNegative val="0"/>
           <c:dLbls>
-            <c:numFmt formatCode="0.0&quot;%&quot;" sourceLinked="0"/>
+            <c:numFmt formatCode="#,##0" sourceLinked="0"/>
             <c:txPr>
               <a:bodyPr/>
               <a:lstStyle/>
               <a:p>
                 <a:pPr>
-                  <a:defRPr b="0" i="0" strike="noStrike" sz="1400" u="none">
+                  <a:defRPr b="0" i="0" strike="noStrike" sz="1200" u="none">
                     <a:solidFill>
-                      <a:srgbClr val="1A1A1A"/>
+                      <a:srgbClr val="000000"/>
                     </a:solidFill>
-                    <a:latin typeface="+mn-lt"/>
+                    <a:latin typeface="Arial"/>
                   </a:defRPr>
                 </a:pPr>
               </a:p>
             </c:txPr>
-            <c:dLblPos val="b"/>
             <c:showLegendKey val="0"/>
-            <c:showVal val="1"/>
+            <c:showVal val="0"/>
             <c:showCatName val="0"/>
             <c:showSerName val="0"/>
             <c:showPercent val="0"/>
@@ -784,15 +834,15 @@
             <c:showLeaderLines val="0"/>
           </c:dLbls>
           <c:marker>
-            <c:symbol val="none"/>
-            <c:size val="8"/>
+            <c:symbol val="circle"/>
+            <c:size val="7"/>
             <c:spPr>
               <a:solidFill>
-                <a:srgbClr val="9AA3AD"/>
+                <a:srgbClr val="2587C5"/>
               </a:solidFill>
               <a:ln w="9525" cap="flat">
                 <a:solidFill>
-                  <a:srgbClr val="9AA3AD"/>
+                  <a:srgbClr val="2587C5"/>
                 </a:solidFill>
                 <a:prstDash val="solid"/>
                 <a:round/>
@@ -848,45 +898,45 @@
           </c:cat>
           <c:val>
             <c:numRef>
-              <c:f>Sheet1!$B$2:$B$13</c:f>
+              <c:f>Sheet1!$C$2:$C$13</c:f>
               <c:numCache>
                 <c:formatCode>General</c:formatCode>
                 <c:ptCount val="12"/>
                 <c:pt idx="0">
-                  <c:v>42.3</c:v>
+                  <c:v>43.488578069326266</c:v>
                 </c:pt>
                 <c:pt idx="1">
-                  <c:v>42.4</c:v>
+                  <c:v>44.23461338126831</c:v>
                 </c:pt>
                 <c:pt idx="2">
-                  <c:v>42.7</c:v>
+                  <c:v>43.95920209770964</c:v>
                 </c:pt>
                 <c:pt idx="3">
-                  <c:v>42.7</c:v>
+                  <c:v>44.2887708163885</c:v>
                 </c:pt>
                 <c:pt idx="4">
-                  <c:v>41.8</c:v>
+                  <c:v>44.54479532799166</c:v>
                 </c:pt>
                 <c:pt idx="5">
-                  <c:v>41.7</c:v>
+                  <c:v>44.549732104003056</c:v>
                 </c:pt>
                 <c:pt idx="6">
-                  <c:v>43.3</c:v>
+                  <c:v>45.97617480951779</c:v>
                 </c:pt>
                 <c:pt idx="7">
-                  <c:v>43.1</c:v>
+                  <c:v>45.06618203861053</c:v>
                 </c:pt>
                 <c:pt idx="8">
-                  <c:v>43.2</c:v>
+                  <c:v>45.636711065820116</c:v>
                 </c:pt>
                 <c:pt idx="9">
-                  <c:v>42.5</c:v>
+                  <c:v/>
                 </c:pt>
                 <c:pt idx="10">
-                  <c:v>42.9</c:v>
+                  <c:v/>
                 </c:pt>
                 <c:pt idx="11">
-                  <c:v>43.1</c:v>
+                  <c:v/>
                 </c:pt>
               </c:numCache>
             </c:numRef>
@@ -894,330 +944,17 @@
           <c:smooth val="0"/>
         </c:ser>
         <c:dLbls>
-          <c:numFmt formatCode="0.0&quot;%&quot;" sourceLinked="0"/>
+          <c:numFmt formatCode="#,##0" sourceLinked="0"/>
           <c:txPr>
             <a:bodyPr/>
             <a:lstStyle/>
             <a:p>
               <a:pPr>
-                <a:defRPr b="0" i="0" strike="noStrike" sz="1400" u="none">
+                <a:defRPr b="0" i="0" strike="noStrike" sz="1200" u="none">
                   <a:solidFill>
-                    <a:srgbClr val="1A1A1A"/>
+                    <a:srgbClr val="000000"/>
                   </a:solidFill>
-                  <a:latin typeface="+mn-lt"/>
-                </a:defRPr>
-              </a:pPr>
-            </a:p>
-          </c:txPr>
-          <c:dLblPos val="b"/>
-          <c:showLegendKey val="0"/>
-          <c:showVal val="1"/>
-          <c:showCatName val="0"/>
-          <c:showSerName val="0"/>
-          <c:showPercent val="0"/>
-          <c:showBubbleSize val="0"/>
-          <c:showLeaderLines val="0"/>
-        </c:dLbls>
-        <c:marker val="1"/>
-        <c:axId val="2094734554"/>
-        <c:axId val="2094734552"/>
-        <c:axId val="2094734556"/>
-      </c:lineChart>
-      <c:catAx>
-        <c:axId val="2094734554"/>
-        <c:scaling>
-          <c:orientation val="minMax"/>
-        </c:scaling>
-        <c:delete val="0"/>
-        <c:axPos val="b"/>
-        <c:numFmt formatCode="General" sourceLinked="1"/>
-        <c:majorTickMark val="out"/>
-        <c:minorTickMark val="none"/>
-        <c:tickLblPos val="low"/>
-        <c:spPr>
-          <a:ln w="12700" cap="flat">
-            <a:noFill/>
-            <a:prstDash val="solid"/>
-            <a:round/>
-          </a:ln>
-        </c:spPr>
-        <c:txPr>
-          <a:bodyPr/>
-          <a:lstStyle/>
-          <a:p>
-            <a:pPr>
-              <a:defRPr sz="1400" b="0" i="0" u="none" strike="noStrike">
-                <a:solidFill>
-                  <a:srgbClr val="FFFFFF"/>
-                </a:solidFill>
-                <a:latin typeface="+mn-lt"/>
-              </a:defRPr>
-            </a:pPr>
-            <a:endParaRPr lang="en-US"/>
-          </a:p>
-        </c:txPr>
-        <c:crossAx val="2094734552"/>
-        <c:crosses val="min"/>
-        <c:auto val="1"/>
-        <c:lblAlgn val="ctr"/>
-        <c:noMultiLvlLbl val="1"/>
-      </c:catAx>
-      <c:valAx>
-        <c:axId val="2094734552"/>
-        <c:scaling>
-          <c:orientation val="minMax"/>
-          <c:max val="48"/>
-          <c:min val="40"/>
-        </c:scaling>
-        <c:delete val="0"/>
-        <c:axPos val="l"/>
-        <c:numFmt formatCode="0&quot;%&quot;" sourceLinked="0"/>
-        <c:majorTickMark val="out"/>
-        <c:minorTickMark val="none"/>
-        <c:tickLblPos val="nextTo"/>
-        <c:spPr>
-          <a:ln w="12700" cap="flat">
-            <a:noFill/>
-            <a:prstDash val="solid"/>
-            <a:round/>
-          </a:ln>
-        </c:spPr>
-        <c:txPr>
-          <a:bodyPr/>
-          <a:lstStyle/>
-          <a:p>
-            <a:pPr>
-              <a:defRPr sz="1400" b="0" i="0" u="none" strike="noStrike">
-                <a:solidFill>
-                  <a:srgbClr val="FFFFFF"/>
-                </a:solidFill>
-                <a:latin typeface="+mn-lt"/>
-              </a:defRPr>
-            </a:pPr>
-            <a:endParaRPr lang="en-US"/>
-          </a:p>
-        </c:txPr>
-        <c:crossAx val="2094734554"/>
-        <c:crosses val="autoZero"/>
-        <c:crossBetween val="between"/>
-        <c:majorUnit val="2"/>
-      </c:valAx>
-      <c:spPr>
-        <a:solidFill>
-          <a:srgbClr val="FFFFFF">
-            <a:alpha val="0"/>
-          </a:srgbClr>
-        </a:solidFill>
-        <a:ln>
-          <a:noFill/>
-        </a:ln>
-        <a:effectLst/>
-      </c:spPr>
-    </c:plotArea>
-    <c:plotVisOnly val="1"/>
-    <c:dispBlanksAs val="span"/>
-  </c:chart>
-  <c:spPr>
-    <a:solidFill>
-      <a:srgbClr val="FFFFFF">
-        <a:alpha val="0"/>
-      </a:srgbClr>
-    </a:solidFill>
-    <a:ln>
-      <a:noFill/>
-    </a:ln>
-    <a:effectLst/>
-  </c:spPr>
-  <c:externalData r:id="rId1">
-    <c:autoUpdate val="0"/>
-  </c:externalData>
-</c:chartSpace>
-</file>
-
-<file path=ppt/charts/chart4.xml><?xml version="1.0" encoding="utf-8"?>
-<c:chartSpace xmlns:c="http://schemas.openxmlformats.org/drawingml/2006/chart" xmlns:a="http://schemas.openxmlformats.org/drawingml/2006/main" xmlns:r="http://schemas.openxmlformats.org/officeDocument/2006/relationships">
-  <c:date1904 val="0"/>
-  <c:roundedCorners val="1"/>
-  <c:chart>
-    <c:autoTitleDeleted val="1"/>
-    <c:plotArea>
-      <c:layout/>
-      <c:lineChart>
-        <c:varyColors val="0"/>
-        <c:ser>
-          <c:idx val="0"/>
-          <c:order val="0"/>
-          <c:tx>
-            <c:strRef>
-              <c:f>Sheet1!$B$1</c:f>
-              <c:strCache>
-                <c:ptCount val="1"/>
-                <c:pt idx="0">
-                  <c:v>2025</c:v>
-                </c:pt>
-              </c:strCache>
-            </c:strRef>
-          </c:tx>
-          <c:spPr>
-            <a:solidFill>
-              <a:srgbClr val="9AA3AD"/>
-            </a:solidFill>
-            <a:ln w="38100" cap="flat">
-              <a:solidFill>
-                <a:srgbClr val="9AA3AD"/>
-              </a:solidFill>
-              <a:prstDash val="solid"/>
-              <a:round/>
-            </a:ln>
-            <a:effectLst/>
-          </c:spPr>
-          <c:invertIfNegative val="0"/>
-          <c:dLbls>
-            <c:numFmt formatCode="0.0&quot;%&quot;" sourceLinked="0"/>
-            <c:txPr>
-              <a:bodyPr/>
-              <a:lstStyle/>
-              <a:p>
-                <a:pPr>
-                  <a:defRPr b="0" i="0" strike="noStrike" sz="1400" u="none">
-                    <a:solidFill>
-                      <a:srgbClr val="1A1A1A"/>
-                    </a:solidFill>
-                    <a:latin typeface="+mn-lt"/>
-                  </a:defRPr>
-                </a:pPr>
-              </a:p>
-            </c:txPr>
-            <c:showLegendKey val="0"/>
-            <c:showVal val="0"/>
-            <c:showCatName val="0"/>
-            <c:showSerName val="0"/>
-            <c:showPercent val="0"/>
-            <c:showBubbleSize val="0"/>
-            <c:showLeaderLines val="0"/>
-          </c:dLbls>
-          <c:marker>
-            <c:symbol val="circle"/>
-            <c:size val="8"/>
-            <c:spPr>
-              <a:solidFill>
-                <a:srgbClr val="9AA3AD"/>
-              </a:solidFill>
-              <a:ln w="9525" cap="flat">
-                <a:solidFill>
-                  <a:srgbClr val="9AA3AD"/>
-                </a:solidFill>
-                <a:prstDash val="solid"/>
-                <a:round/>
-              </a:ln>
-              <a:effectLst/>
-            </c:spPr>
-          </c:marker>
-          <c:cat>
-            <c:multiLvlStrRef>
-              <c:f>Sheet1!$A$2:$A$13</c:f>
-              <c:multiLvlStrCache>
-                <c:ptCount val="12"/>
-                <c:lvl>
-                  <c:pt idx="0">
-                    <c:v>Jan</c:v>
-                  </c:pt>
-                  <c:pt idx="1">
-                    <c:v>Feb</c:v>
-                  </c:pt>
-                  <c:pt idx="2">
-                    <c:v>Mar</c:v>
-                  </c:pt>
-                  <c:pt idx="3">
-                    <c:v>Apr</c:v>
-                  </c:pt>
-                  <c:pt idx="4">
-                    <c:v>May</c:v>
-                  </c:pt>
-                  <c:pt idx="5">
-                    <c:v>Jun</c:v>
-                  </c:pt>
-                  <c:pt idx="6">
-                    <c:v>Jul</c:v>
-                  </c:pt>
-                  <c:pt idx="7">
-                    <c:v>Aug</c:v>
-                  </c:pt>
-                  <c:pt idx="8">
-                    <c:v>Sep</c:v>
-                  </c:pt>
-                  <c:pt idx="9">
-                    <c:v>Oct</c:v>
-                  </c:pt>
-                  <c:pt idx="10">
-                    <c:v>Nov</c:v>
-                  </c:pt>
-                  <c:pt idx="11">
-                    <c:v>Dec</c:v>
-                  </c:pt>
-                </c:lvl>
-              </c:multiLvlStrCache>
-            </c:multiLvlStrRef>
-          </c:cat>
-          <c:val>
-            <c:numRef>
-              <c:f>Sheet1!$B$2:$B$13</c:f>
-              <c:numCache>
-                <c:formatCode>General</c:formatCode>
-                <c:ptCount val="12"/>
-                <c:pt idx="0">
-                  <c:v>42.3</c:v>
-                </c:pt>
-                <c:pt idx="1">
-                  <c:v>42.4</c:v>
-                </c:pt>
-                <c:pt idx="2">
-                  <c:v>42.7</c:v>
-                </c:pt>
-                <c:pt idx="3">
-                  <c:v>42.7</c:v>
-                </c:pt>
-                <c:pt idx="4">
-                  <c:v>41.8</c:v>
-                </c:pt>
-                <c:pt idx="5">
-                  <c:v>41.7</c:v>
-                </c:pt>
-                <c:pt idx="6">
-                  <c:v>43.3</c:v>
-                </c:pt>
-                <c:pt idx="7">
-                  <c:v>43.1</c:v>
-                </c:pt>
-                <c:pt idx="8">
-                  <c:v>43.2</c:v>
-                </c:pt>
-                <c:pt idx="9">
-                  <c:v>42.5</c:v>
-                </c:pt>
-                <c:pt idx="10">
-                  <c:v>42.9</c:v>
-                </c:pt>
-                <c:pt idx="11">
-                  <c:v>43.1</c:v>
-                </c:pt>
-              </c:numCache>
-            </c:numRef>
-          </c:val>
-          <c:smooth val="0"/>
-        </c:ser>
-        <c:dLbls>
-          <c:numFmt formatCode="0.0&quot;%&quot;" sourceLinked="0"/>
-          <c:txPr>
-            <a:bodyPr/>
-            <a:lstStyle/>
-            <a:p>
-              <a:pPr>
-                <a:defRPr b="0" i="0" strike="noStrike" sz="1400" u="none">
-                  <a:solidFill>
-                    <a:srgbClr val="1A1A1A"/>
-                  </a:solidFill>
-                  <a:latin typeface="+mn-lt"/>
+                  <a:latin typeface="Arial"/>
                 </a:defRPr>
               </a:pPr>
             </a:p>
@@ -1271,7 +1008,7 @@
           </a:p>
         </c:txPr>
         <c:crossAx val="2094734552"/>
-        <c:crosses val="min"/>
+        <c:crosses val="autoZero"/>
         <c:auto val="1"/>
         <c:lblAlgn val="ctr"/>
         <c:noMultiLvlLbl val="1"/>
@@ -1281,7 +1018,7 @@
         <c:scaling>
           <c:orientation val="minMax"/>
           <c:max val="48"/>
-          <c:min val="40"/>
+          <c:min val="38"/>
         </c:scaling>
         <c:delete val="0"/>
         <c:axPos val="l"/>
@@ -1328,26 +1065,38 @@
         <c:majorUnit val="2"/>
       </c:valAx>
       <c:spPr>
-        <a:solidFill>
-          <a:srgbClr val="FFFFFF">
-            <a:alpha val="0"/>
-          </a:srgbClr>
-        </a:solidFill>
+        <a:noFill/>
         <a:ln>
           <a:noFill/>
         </a:ln>
         <a:effectLst/>
       </c:spPr>
     </c:plotArea>
+    <c:legend>
+      <c:legendPos val="t"/>
+      <c:overlay val="0"/>
+      <c:txPr>
+        <a:bodyPr/>
+        <a:lstStyle/>
+        <a:p>
+          <a:pPr>
+            <a:defRPr sz="1400">
+              <a:solidFill>
+                <a:srgbClr val="1A1A1A"/>
+              </a:solidFill>
+              <a:latin typeface="+mn-lt"/>
+              <a:cs typeface="+mn-lt"/>
+            </a:defRPr>
+          </a:pPr>
+          <a:endParaRPr lang="en-US"/>
+        </a:p>
+      </c:txPr>
+    </c:legend>
     <c:plotVisOnly val="1"/>
     <c:dispBlanksAs val="span"/>
   </c:chart>
   <c:spPr>
-    <a:solidFill>
-      <a:srgbClr val="FFFFFF">
-        <a:alpha val="0"/>
-      </a:srgbClr>
-    </a:solidFill>
+    <a:noFill/>
     <a:ln>
       <a:noFill/>
     </a:ln>
@@ -1843,7 +1592,7 @@
           <a:p>
             <a:r>
               <a:rPr lang="en-US" dirty="0"/>
-              <a:t>Source: Qlik - Closed Repair Orders. Warranty pay type, parts gross / parts sale, by close month; 2025 January-December, 2026 January-September. Same-store, INEOS excluded (opened 2026). GMC Prescott body shop labor types excluded. Pulled Oct 22 2026.Example for the rate-increase story. The link to the approvals is the point we are making, not something the data proves on its own: 17 of the 19 stores with approvals got a parts markup increase (vendor YTD report), and warranty parts margin rose in every month. Mix of parts and campaigns also moves this line.</a:t>
+              <a:t>Source: Qlik - Closed Repair Orders. Warranty pay type, by close month; 2025 shown January-December, 2026 January-September. Warranty ELR = warranty labor sale / warranty hours sold; parts margin = warranty parts gross / parts sale. Same-store, INEOS excluded; GMC Prescott body shop labor types excluded.Talk track (Noah, Oct 24): the point is the direction. Rate increases are lifting both warranty ELR and warranty parts margin. The factory notices higher rates: more money in means more scrutiny, so documentation and process on every claim have to be right. Store detail for warranty ELR is no longer in the flow.</a:t>
             </a:r>
             <a:endParaRPr lang="en-US" dirty="0"/>
           </a:p>
@@ -2518,7 +2267,7 @@
         </p:nvSpPr>
         <p:spPr>
           <a:xfrm>
-            <a:off x="3273552" y="1316736"/>
+            <a:off x="3319272" y="1316736"/>
             <a:ext cx="914400" cy="329184"/>
           </a:xfrm>
           <a:prstGeom prst="rect">
@@ -2557,7 +2306,7 @@
         </p:nvSpPr>
         <p:spPr>
           <a:xfrm>
-            <a:off x="4187952" y="1316736"/>
+            <a:off x="4233672" y="1316736"/>
             <a:ext cx="841248" cy="329184"/>
           </a:xfrm>
           <a:prstGeom prst="rect">
@@ -2596,7 +2345,7 @@
         </p:nvSpPr>
         <p:spPr>
           <a:xfrm>
-            <a:off x="5029200" y="1316736"/>
+            <a:off x="5074920" y="1316736"/>
             <a:ext cx="841248" cy="329184"/>
           </a:xfrm>
           <a:prstGeom prst="rect">
@@ -2635,7 +2384,7 @@
         </p:nvSpPr>
         <p:spPr>
           <a:xfrm>
-            <a:off x="8823960" y="1316736"/>
+            <a:off x="8869680" y="1316736"/>
             <a:ext cx="914400" cy="329184"/>
           </a:xfrm>
           <a:prstGeom prst="rect">
@@ -2674,7 +2423,7 @@
         </p:nvSpPr>
         <p:spPr>
           <a:xfrm>
-            <a:off x="9738360" y="1316736"/>
+            <a:off x="9784080" y="1316736"/>
             <a:ext cx="841248" cy="329184"/>
           </a:xfrm>
           <a:prstGeom prst="rect">
@@ -2713,7 +2462,7 @@
         </p:nvSpPr>
         <p:spPr>
           <a:xfrm>
-            <a:off x="10579608" y="1316736"/>
+            <a:off x="10625328" y="1316736"/>
             <a:ext cx="841248" cy="329184"/>
           </a:xfrm>
           <a:prstGeom prst="rect">
@@ -2753,7 +2502,46 @@
         <p:spPr>
           <a:xfrm>
             <a:off x="658368" y="1700784"/>
-            <a:ext cx="1938528" cy="422453"/>
+            <a:ext cx="310896" cy="422453"/>
+          </a:xfrm>
+          <a:prstGeom prst="rect">
+            <a:avLst/>
+          </a:prstGeom>
+          <a:noFill/>
+          <a:ln/>
+        </p:spPr>
+        <p:txBody>
+          <a:bodyPr wrap="square" lIns="0" tIns="0" rIns="0" bIns="0" rtlCol="0" anchor="ctr"/>
+          <a:lstStyle/>
+          <a:p>
+            <a:pPr algn="r" indent="0" marL="0">
+              <a:buNone/>
+            </a:pPr>
+            <a:r>
+              <a:rPr lang="en-US" sz="1200" dirty="0">
+                <a:solidFill>
+                  <a:srgbClr val="9AA3AD"/>
+                </a:solidFill>
+                <a:latin typeface="Inter" pitchFamily="34" charset="0"/>
+                <a:ea typeface="Inter" pitchFamily="34" charset="-122"/>
+                <a:cs typeface="Inter" pitchFamily="34" charset="-120"/>
+              </a:rPr>
+              <a:t>1</a:t>
+            </a:r>
+            <a:endParaRPr lang="en-US" sz="1200" dirty="0"/>
+          </a:p>
+        </p:txBody>
+      </p:sp>
+      <p:sp>
+        <p:nvSpPr>
+          <p:cNvPr id="13" name="Text 11"/>
+          <p:cNvSpPr txBox="1"/>
+          <p:nvPr/>
+        </p:nvSpPr>
+        <p:spPr>
+          <a:xfrm>
+            <a:off x="1014984" y="1700784"/>
+            <a:ext cx="1783080" cy="422453"/>
           </a:xfrm>
           <a:prstGeom prst="rect">
             <a:avLst/>
@@ -2785,14 +2573,14 @@
       </p:sp>
       <p:sp>
         <p:nvSpPr>
-          <p:cNvPr id="13" name="Shape 11"/>
+          <p:cNvPr id="14" name="Shape 12"/>
           <p:cNvSpPr/>
           <p:nvPr/>
         </p:nvSpPr>
         <p:spPr>
           <a:xfrm>
-            <a:off x="2670048" y="1795836"/>
-            <a:ext cx="548640" cy="232349"/>
+            <a:off x="2871216" y="1795836"/>
+            <a:ext cx="393192" cy="232349"/>
           </a:xfrm>
           <a:prstGeom prst="rect">
             <a:avLst/>
@@ -2805,13 +2593,13 @@
       </p:sp>
       <p:sp>
         <p:nvSpPr>
-          <p:cNvPr id="14" name="Text 12"/>
-          <p:cNvSpPr txBox="1"/>
-          <p:nvPr/>
-        </p:nvSpPr>
-        <p:spPr>
-          <a:xfrm>
-            <a:off x="3273552" y="1700784"/>
+          <p:cNvPr id="15" name="Text 13"/>
+          <p:cNvSpPr txBox="1"/>
+          <p:nvPr/>
+        </p:nvSpPr>
+        <p:spPr>
+          <a:xfrm>
+            <a:off x="3319272" y="1700784"/>
             <a:ext cx="914400" cy="422453"/>
           </a:xfrm>
           <a:prstGeom prst="rect">
@@ -2844,13 +2632,13 @@
       </p:sp>
       <p:sp>
         <p:nvSpPr>
-          <p:cNvPr id="15" name="Text 13"/>
-          <p:cNvSpPr txBox="1"/>
-          <p:nvPr/>
-        </p:nvSpPr>
-        <p:spPr>
-          <a:xfrm>
-            <a:off x="4187952" y="1700784"/>
+          <p:cNvPr id="16" name="Text 14"/>
+          <p:cNvSpPr txBox="1"/>
+          <p:nvPr/>
+        </p:nvSpPr>
+        <p:spPr>
+          <a:xfrm>
+            <a:off x="4233672" y="1700784"/>
             <a:ext cx="841248" cy="422453"/>
           </a:xfrm>
           <a:prstGeom prst="rect">
@@ -2883,13 +2671,13 @@
       </p:sp>
       <p:sp>
         <p:nvSpPr>
-          <p:cNvPr id="16" name="Text 14"/>
-          <p:cNvSpPr txBox="1"/>
-          <p:nvPr/>
-        </p:nvSpPr>
-        <p:spPr>
-          <a:xfrm>
-            <a:off x="5029200" y="1700784"/>
+          <p:cNvPr id="17" name="Text 15"/>
+          <p:cNvSpPr txBox="1"/>
+          <p:nvPr/>
+        </p:nvSpPr>
+        <p:spPr>
+          <a:xfrm>
+            <a:off x="5074920" y="1700784"/>
             <a:ext cx="841248" cy="422453"/>
           </a:xfrm>
           <a:prstGeom prst="rect">
@@ -2922,14 +2710,53 @@
       </p:sp>
       <p:sp>
         <p:nvSpPr>
-          <p:cNvPr id="17" name="Text 15"/>
+          <p:cNvPr id="18" name="Text 16"/>
           <p:cNvSpPr txBox="1"/>
           <p:nvPr/>
         </p:nvSpPr>
         <p:spPr>
           <a:xfrm>
             <a:off x="658368" y="2123237"/>
-            <a:ext cx="1938528" cy="422453"/>
+            <a:ext cx="310896" cy="422453"/>
+          </a:xfrm>
+          <a:prstGeom prst="rect">
+            <a:avLst/>
+          </a:prstGeom>
+          <a:noFill/>
+          <a:ln/>
+        </p:spPr>
+        <p:txBody>
+          <a:bodyPr wrap="square" lIns="0" tIns="0" rIns="0" bIns="0" rtlCol="0" anchor="ctr"/>
+          <a:lstStyle/>
+          <a:p>
+            <a:pPr algn="r" indent="0" marL="0">
+              <a:buNone/>
+            </a:pPr>
+            <a:r>
+              <a:rPr lang="en-US" sz="1200" dirty="0">
+                <a:solidFill>
+                  <a:srgbClr val="9AA3AD"/>
+                </a:solidFill>
+                <a:latin typeface="Inter" pitchFamily="34" charset="0"/>
+                <a:ea typeface="Inter" pitchFamily="34" charset="-122"/>
+                <a:cs typeface="Inter" pitchFamily="34" charset="-120"/>
+              </a:rPr>
+              <a:t>2</a:t>
+            </a:r>
+            <a:endParaRPr lang="en-US" sz="1200" dirty="0"/>
+          </a:p>
+        </p:txBody>
+      </p:sp>
+      <p:sp>
+        <p:nvSpPr>
+          <p:cNvPr id="19" name="Text 17"/>
+          <p:cNvSpPr txBox="1"/>
+          <p:nvPr/>
+        </p:nvSpPr>
+        <p:spPr>
+          <a:xfrm>
+            <a:off x="1014984" y="2123237"/>
+            <a:ext cx="1783080" cy="422453"/>
           </a:xfrm>
           <a:prstGeom prst="rect">
             <a:avLst/>
@@ -2961,14 +2788,14 @@
       </p:sp>
       <p:sp>
         <p:nvSpPr>
-          <p:cNvPr id="18" name="Shape 16"/>
+          <p:cNvPr id="20" name="Shape 18"/>
           <p:cNvSpPr/>
           <p:nvPr/>
         </p:nvSpPr>
         <p:spPr>
           <a:xfrm>
-            <a:off x="2670048" y="2218289"/>
-            <a:ext cx="318622" cy="232349"/>
+            <a:off x="2871216" y="2218289"/>
+            <a:ext cx="228346" cy="232349"/>
           </a:xfrm>
           <a:prstGeom prst="rect">
             <a:avLst/>
@@ -2981,13 +2808,13 @@
       </p:sp>
       <p:sp>
         <p:nvSpPr>
-          <p:cNvPr id="19" name="Text 17"/>
-          <p:cNvSpPr txBox="1"/>
-          <p:nvPr/>
-        </p:nvSpPr>
-        <p:spPr>
-          <a:xfrm>
-            <a:off x="3273552" y="2123237"/>
+          <p:cNvPr id="21" name="Text 19"/>
+          <p:cNvSpPr txBox="1"/>
+          <p:nvPr/>
+        </p:nvSpPr>
+        <p:spPr>
+          <a:xfrm>
+            <a:off x="3319272" y="2123237"/>
             <a:ext cx="914400" cy="422453"/>
           </a:xfrm>
           <a:prstGeom prst="rect">
@@ -3020,13 +2847,13 @@
       </p:sp>
       <p:sp>
         <p:nvSpPr>
-          <p:cNvPr id="20" name="Text 18"/>
-          <p:cNvSpPr txBox="1"/>
-          <p:nvPr/>
-        </p:nvSpPr>
-        <p:spPr>
-          <a:xfrm>
-            <a:off x="4187952" y="2123237"/>
+          <p:cNvPr id="22" name="Text 20"/>
+          <p:cNvSpPr txBox="1"/>
+          <p:nvPr/>
+        </p:nvSpPr>
+        <p:spPr>
+          <a:xfrm>
+            <a:off x="4233672" y="2123237"/>
             <a:ext cx="841248" cy="422453"/>
           </a:xfrm>
           <a:prstGeom prst="rect">
@@ -3059,13 +2886,13 @@
       </p:sp>
       <p:sp>
         <p:nvSpPr>
-          <p:cNvPr id="21" name="Text 19"/>
-          <p:cNvSpPr txBox="1"/>
-          <p:nvPr/>
-        </p:nvSpPr>
-        <p:spPr>
-          <a:xfrm>
-            <a:off x="5029200" y="2123237"/>
+          <p:cNvPr id="23" name="Text 21"/>
+          <p:cNvSpPr txBox="1"/>
+          <p:nvPr/>
+        </p:nvSpPr>
+        <p:spPr>
+          <a:xfrm>
+            <a:off x="5074920" y="2123237"/>
             <a:ext cx="841248" cy="422453"/>
           </a:xfrm>
           <a:prstGeom prst="rect">
@@ -3098,14 +2925,53 @@
       </p:sp>
       <p:sp>
         <p:nvSpPr>
-          <p:cNvPr id="22" name="Text 20"/>
+          <p:cNvPr id="24" name="Text 22"/>
           <p:cNvSpPr txBox="1"/>
           <p:nvPr/>
         </p:nvSpPr>
         <p:spPr>
           <a:xfrm>
             <a:off x="658368" y="2545690"/>
-            <a:ext cx="1938528" cy="422453"/>
+            <a:ext cx="310896" cy="422453"/>
+          </a:xfrm>
+          <a:prstGeom prst="rect">
+            <a:avLst/>
+          </a:prstGeom>
+          <a:noFill/>
+          <a:ln/>
+        </p:spPr>
+        <p:txBody>
+          <a:bodyPr wrap="square" lIns="0" tIns="0" rIns="0" bIns="0" rtlCol="0" anchor="ctr"/>
+          <a:lstStyle/>
+          <a:p>
+            <a:pPr algn="r" indent="0" marL="0">
+              <a:buNone/>
+            </a:pPr>
+            <a:r>
+              <a:rPr lang="en-US" sz="1200" dirty="0">
+                <a:solidFill>
+                  <a:srgbClr val="9AA3AD"/>
+                </a:solidFill>
+                <a:latin typeface="Inter" pitchFamily="34" charset="0"/>
+                <a:ea typeface="Inter" pitchFamily="34" charset="-122"/>
+                <a:cs typeface="Inter" pitchFamily="34" charset="-120"/>
+              </a:rPr>
+              <a:t>3</a:t>
+            </a:r>
+            <a:endParaRPr lang="en-US" sz="1200" dirty="0"/>
+          </a:p>
+        </p:txBody>
+      </p:sp>
+      <p:sp>
+        <p:nvSpPr>
+          <p:cNvPr id="25" name="Text 23"/>
+          <p:cNvSpPr txBox="1"/>
+          <p:nvPr/>
+        </p:nvSpPr>
+        <p:spPr>
+          <a:xfrm>
+            <a:off x="1014984" y="2545690"/>
+            <a:ext cx="1783080" cy="422453"/>
           </a:xfrm>
           <a:prstGeom prst="rect">
             <a:avLst/>
@@ -3137,14 +3003,14 @@
       </p:sp>
       <p:sp>
         <p:nvSpPr>
-          <p:cNvPr id="23" name="Shape 21"/>
+          <p:cNvPr id="26" name="Shape 24"/>
           <p:cNvSpPr/>
           <p:nvPr/>
         </p:nvSpPr>
         <p:spPr>
           <a:xfrm>
-            <a:off x="2670048" y="2640741"/>
-            <a:ext cx="236506" cy="232349"/>
+            <a:off x="2871216" y="2640741"/>
+            <a:ext cx="169496" cy="232349"/>
           </a:xfrm>
           <a:prstGeom prst="rect">
             <a:avLst/>
@@ -3157,13 +3023,13 @@
       </p:sp>
       <p:sp>
         <p:nvSpPr>
-          <p:cNvPr id="24" name="Text 22"/>
-          <p:cNvSpPr txBox="1"/>
-          <p:nvPr/>
-        </p:nvSpPr>
-        <p:spPr>
-          <a:xfrm>
-            <a:off x="3273552" y="2545690"/>
+          <p:cNvPr id="27" name="Text 25"/>
+          <p:cNvSpPr txBox="1"/>
+          <p:nvPr/>
+        </p:nvSpPr>
+        <p:spPr>
+          <a:xfrm>
+            <a:off x="3319272" y="2545690"/>
             <a:ext cx="914400" cy="422453"/>
           </a:xfrm>
           <a:prstGeom prst="rect">
@@ -3196,13 +3062,13 @@
       </p:sp>
       <p:sp>
         <p:nvSpPr>
-          <p:cNvPr id="25" name="Text 23"/>
-          <p:cNvSpPr txBox="1"/>
-          <p:nvPr/>
-        </p:nvSpPr>
-        <p:spPr>
-          <a:xfrm>
-            <a:off x="4187952" y="2545690"/>
+          <p:cNvPr id="28" name="Text 26"/>
+          <p:cNvSpPr txBox="1"/>
+          <p:nvPr/>
+        </p:nvSpPr>
+        <p:spPr>
+          <a:xfrm>
+            <a:off x="4233672" y="2545690"/>
             <a:ext cx="841248" cy="422453"/>
           </a:xfrm>
           <a:prstGeom prst="rect">
@@ -3235,13 +3101,13 @@
       </p:sp>
       <p:sp>
         <p:nvSpPr>
-          <p:cNvPr id="26" name="Text 24"/>
-          <p:cNvSpPr txBox="1"/>
-          <p:nvPr/>
-        </p:nvSpPr>
-        <p:spPr>
-          <a:xfrm>
-            <a:off x="5029200" y="2545690"/>
+          <p:cNvPr id="29" name="Text 27"/>
+          <p:cNvSpPr txBox="1"/>
+          <p:nvPr/>
+        </p:nvSpPr>
+        <p:spPr>
+          <a:xfrm>
+            <a:off x="5074920" y="2545690"/>
             <a:ext cx="841248" cy="422453"/>
           </a:xfrm>
           <a:prstGeom prst="rect">
@@ -3274,14 +3140,53 @@
       </p:sp>
       <p:sp>
         <p:nvSpPr>
-          <p:cNvPr id="27" name="Text 25"/>
+          <p:cNvPr id="30" name="Text 28"/>
           <p:cNvSpPr txBox="1"/>
           <p:nvPr/>
         </p:nvSpPr>
         <p:spPr>
           <a:xfrm>
             <a:off x="658368" y="2968142"/>
-            <a:ext cx="1938528" cy="422453"/>
+            <a:ext cx="310896" cy="422453"/>
+          </a:xfrm>
+          <a:prstGeom prst="rect">
+            <a:avLst/>
+          </a:prstGeom>
+          <a:noFill/>
+          <a:ln/>
+        </p:spPr>
+        <p:txBody>
+          <a:bodyPr wrap="square" lIns="0" tIns="0" rIns="0" bIns="0" rtlCol="0" anchor="ctr"/>
+          <a:lstStyle/>
+          <a:p>
+            <a:pPr algn="r" indent="0" marL="0">
+              <a:buNone/>
+            </a:pPr>
+            <a:r>
+              <a:rPr lang="en-US" sz="1200" dirty="0">
+                <a:solidFill>
+                  <a:srgbClr val="9AA3AD"/>
+                </a:solidFill>
+                <a:latin typeface="Inter" pitchFamily="34" charset="0"/>
+                <a:ea typeface="Inter" pitchFamily="34" charset="-122"/>
+                <a:cs typeface="Inter" pitchFamily="34" charset="-120"/>
+              </a:rPr>
+              <a:t>4</a:t>
+            </a:r>
+            <a:endParaRPr lang="en-US" sz="1200" dirty="0"/>
+          </a:p>
+        </p:txBody>
+      </p:sp>
+      <p:sp>
+        <p:nvSpPr>
+          <p:cNvPr id="31" name="Text 29"/>
+          <p:cNvSpPr txBox="1"/>
+          <p:nvPr/>
+        </p:nvSpPr>
+        <p:spPr>
+          <a:xfrm>
+            <a:off x="1014984" y="2968142"/>
+            <a:ext cx="1783080" cy="422453"/>
           </a:xfrm>
           <a:prstGeom prst="rect">
             <a:avLst/>
@@ -3313,14 +3218,14 @@
       </p:sp>
       <p:sp>
         <p:nvSpPr>
-          <p:cNvPr id="28" name="Shape 26"/>
+          <p:cNvPr id="32" name="Shape 30"/>
           <p:cNvSpPr/>
           <p:nvPr/>
         </p:nvSpPr>
         <p:spPr>
           <a:xfrm>
-            <a:off x="2670048" y="3063194"/>
-            <a:ext cx="223981" cy="232349"/>
+            <a:off x="2871216" y="3063194"/>
+            <a:ext cx="160520" cy="232349"/>
           </a:xfrm>
           <a:prstGeom prst="rect">
             <a:avLst/>
@@ -3333,13 +3238,13 @@
       </p:sp>
       <p:sp>
         <p:nvSpPr>
-          <p:cNvPr id="29" name="Text 27"/>
-          <p:cNvSpPr txBox="1"/>
-          <p:nvPr/>
-        </p:nvSpPr>
-        <p:spPr>
-          <a:xfrm>
-            <a:off x="3273552" y="2968142"/>
+          <p:cNvPr id="33" name="Text 31"/>
+          <p:cNvSpPr txBox="1"/>
+          <p:nvPr/>
+        </p:nvSpPr>
+        <p:spPr>
+          <a:xfrm>
+            <a:off x="3319272" y="2968142"/>
             <a:ext cx="914400" cy="422453"/>
           </a:xfrm>
           <a:prstGeom prst="rect">
@@ -3372,13 +3277,13 @@
       </p:sp>
       <p:sp>
         <p:nvSpPr>
-          <p:cNvPr id="30" name="Text 28"/>
-          <p:cNvSpPr txBox="1"/>
-          <p:nvPr/>
-        </p:nvSpPr>
-        <p:spPr>
-          <a:xfrm>
-            <a:off x="4187952" y="2968142"/>
+          <p:cNvPr id="34" name="Text 32"/>
+          <p:cNvSpPr txBox="1"/>
+          <p:nvPr/>
+        </p:nvSpPr>
+        <p:spPr>
+          <a:xfrm>
+            <a:off x="4233672" y="2968142"/>
             <a:ext cx="841248" cy="422453"/>
           </a:xfrm>
           <a:prstGeom prst="rect">
@@ -3411,13 +3316,13 @@
       </p:sp>
       <p:sp>
         <p:nvSpPr>
-          <p:cNvPr id="31" name="Text 29"/>
-          <p:cNvSpPr txBox="1"/>
-          <p:nvPr/>
-        </p:nvSpPr>
-        <p:spPr>
-          <a:xfrm>
-            <a:off x="5029200" y="2968142"/>
+          <p:cNvPr id="35" name="Text 33"/>
+          <p:cNvSpPr txBox="1"/>
+          <p:nvPr/>
+        </p:nvSpPr>
+        <p:spPr>
+          <a:xfrm>
+            <a:off x="5074920" y="2968142"/>
             <a:ext cx="841248" cy="422453"/>
           </a:xfrm>
           <a:prstGeom prst="rect">
@@ -3450,14 +3355,53 @@
       </p:sp>
       <p:sp>
         <p:nvSpPr>
-          <p:cNvPr id="32" name="Text 30"/>
+          <p:cNvPr id="36" name="Text 34"/>
           <p:cNvSpPr txBox="1"/>
           <p:nvPr/>
         </p:nvSpPr>
         <p:spPr>
           <a:xfrm>
             <a:off x="658368" y="3390595"/>
-            <a:ext cx="1938528" cy="422453"/>
+            <a:ext cx="310896" cy="422453"/>
+          </a:xfrm>
+          <a:prstGeom prst="rect">
+            <a:avLst/>
+          </a:prstGeom>
+          <a:noFill/>
+          <a:ln/>
+        </p:spPr>
+        <p:txBody>
+          <a:bodyPr wrap="square" lIns="0" tIns="0" rIns="0" bIns="0" rtlCol="0" anchor="ctr"/>
+          <a:lstStyle/>
+          <a:p>
+            <a:pPr algn="r" indent="0" marL="0">
+              <a:buNone/>
+            </a:pPr>
+            <a:r>
+              <a:rPr lang="en-US" sz="1200" dirty="0">
+                <a:solidFill>
+                  <a:srgbClr val="9AA3AD"/>
+                </a:solidFill>
+                <a:latin typeface="Inter" pitchFamily="34" charset="0"/>
+                <a:ea typeface="Inter" pitchFamily="34" charset="-122"/>
+                <a:cs typeface="Inter" pitchFamily="34" charset="-120"/>
+              </a:rPr>
+              <a:t>5</a:t>
+            </a:r>
+            <a:endParaRPr lang="en-US" sz="1200" dirty="0"/>
+          </a:p>
+        </p:txBody>
+      </p:sp>
+      <p:sp>
+        <p:nvSpPr>
+          <p:cNvPr id="37" name="Text 35"/>
+          <p:cNvSpPr txBox="1"/>
+          <p:nvPr/>
+        </p:nvSpPr>
+        <p:spPr>
+          <a:xfrm>
+            <a:off x="1014984" y="3390595"/>
+            <a:ext cx="1783080" cy="422453"/>
           </a:xfrm>
           <a:prstGeom prst="rect">
             <a:avLst/>
@@ -3489,14 +3433,14 @@
       </p:sp>
       <p:sp>
         <p:nvSpPr>
-          <p:cNvPr id="33" name="Shape 31"/>
+          <p:cNvPr id="38" name="Shape 36"/>
           <p:cNvSpPr/>
           <p:nvPr/>
         </p:nvSpPr>
         <p:spPr>
           <a:xfrm>
-            <a:off x="2670048" y="3485647"/>
-            <a:ext cx="200812" cy="232349"/>
+            <a:off x="2871216" y="3485647"/>
+            <a:ext cx="143915" cy="232349"/>
           </a:xfrm>
           <a:prstGeom prst="rect">
             <a:avLst/>
@@ -3509,13 +3453,13 @@
       </p:sp>
       <p:sp>
         <p:nvSpPr>
-          <p:cNvPr id="34" name="Text 32"/>
-          <p:cNvSpPr txBox="1"/>
-          <p:nvPr/>
-        </p:nvSpPr>
-        <p:spPr>
-          <a:xfrm>
-            <a:off x="3273552" y="3390595"/>
+          <p:cNvPr id="39" name="Text 37"/>
+          <p:cNvSpPr txBox="1"/>
+          <p:nvPr/>
+        </p:nvSpPr>
+        <p:spPr>
+          <a:xfrm>
+            <a:off x="3319272" y="3390595"/>
             <a:ext cx="914400" cy="422453"/>
           </a:xfrm>
           <a:prstGeom prst="rect">
@@ -3548,13 +3492,13 @@
       </p:sp>
       <p:sp>
         <p:nvSpPr>
-          <p:cNvPr id="35" name="Text 33"/>
-          <p:cNvSpPr txBox="1"/>
-          <p:nvPr/>
-        </p:nvSpPr>
-        <p:spPr>
-          <a:xfrm>
-            <a:off x="4187952" y="3390595"/>
+          <p:cNvPr id="40" name="Text 38"/>
+          <p:cNvSpPr txBox="1"/>
+          <p:nvPr/>
+        </p:nvSpPr>
+        <p:spPr>
+          <a:xfrm>
+            <a:off x="4233672" y="3390595"/>
             <a:ext cx="841248" cy="422453"/>
           </a:xfrm>
           <a:prstGeom prst="rect">
@@ -3587,13 +3531,13 @@
       </p:sp>
       <p:sp>
         <p:nvSpPr>
-          <p:cNvPr id="36" name="Text 34"/>
-          <p:cNvSpPr txBox="1"/>
-          <p:nvPr/>
-        </p:nvSpPr>
-        <p:spPr>
-          <a:xfrm>
-            <a:off x="5029200" y="3390595"/>
+          <p:cNvPr id="41" name="Text 39"/>
+          <p:cNvSpPr txBox="1"/>
+          <p:nvPr/>
+        </p:nvSpPr>
+        <p:spPr>
+          <a:xfrm>
+            <a:off x="5074920" y="3390595"/>
             <a:ext cx="841248" cy="422453"/>
           </a:xfrm>
           <a:prstGeom prst="rect">
@@ -3626,14 +3570,53 @@
       </p:sp>
       <p:sp>
         <p:nvSpPr>
-          <p:cNvPr id="37" name="Text 35"/>
+          <p:cNvPr id="42" name="Text 40"/>
           <p:cNvSpPr txBox="1"/>
           <p:nvPr/>
         </p:nvSpPr>
         <p:spPr>
           <a:xfrm>
             <a:off x="658368" y="3813048"/>
-            <a:ext cx="1938528" cy="422453"/>
+            <a:ext cx="310896" cy="422453"/>
+          </a:xfrm>
+          <a:prstGeom prst="rect">
+            <a:avLst/>
+          </a:prstGeom>
+          <a:noFill/>
+          <a:ln/>
+        </p:spPr>
+        <p:txBody>
+          <a:bodyPr wrap="square" lIns="0" tIns="0" rIns="0" bIns="0" rtlCol="0" anchor="ctr"/>
+          <a:lstStyle/>
+          <a:p>
+            <a:pPr algn="r" indent="0" marL="0">
+              <a:buNone/>
+            </a:pPr>
+            <a:r>
+              <a:rPr lang="en-US" sz="1200" dirty="0">
+                <a:solidFill>
+                  <a:srgbClr val="9AA3AD"/>
+                </a:solidFill>
+                <a:latin typeface="Inter" pitchFamily="34" charset="0"/>
+                <a:ea typeface="Inter" pitchFamily="34" charset="-122"/>
+                <a:cs typeface="Inter" pitchFamily="34" charset="-120"/>
+              </a:rPr>
+              <a:t>6</a:t>
+            </a:r>
+            <a:endParaRPr lang="en-US" sz="1200" dirty="0"/>
+          </a:p>
+        </p:txBody>
+      </p:sp>
+      <p:sp>
+        <p:nvSpPr>
+          <p:cNvPr id="43" name="Text 41"/>
+          <p:cNvSpPr txBox="1"/>
+          <p:nvPr/>
+        </p:nvSpPr>
+        <p:spPr>
+          <a:xfrm>
+            <a:off x="1014984" y="3813048"/>
+            <a:ext cx="1783080" cy="422453"/>
           </a:xfrm>
           <a:prstGeom prst="rect">
             <a:avLst/>
@@ -3665,14 +3648,14 @@
       </p:sp>
       <p:sp>
         <p:nvSpPr>
-          <p:cNvPr id="38" name="Shape 36"/>
+          <p:cNvPr id="44" name="Shape 42"/>
           <p:cNvSpPr/>
           <p:nvPr/>
         </p:nvSpPr>
         <p:spPr>
           <a:xfrm>
-            <a:off x="2670048" y="3908100"/>
-            <a:ext cx="194987" cy="232349"/>
+            <a:off x="2871216" y="3908100"/>
+            <a:ext cx="139741" cy="232349"/>
           </a:xfrm>
           <a:prstGeom prst="rect">
             <a:avLst/>
@@ -3685,13 +3668,13 @@
       </p:sp>
       <p:sp>
         <p:nvSpPr>
-          <p:cNvPr id="39" name="Text 37"/>
-          <p:cNvSpPr txBox="1"/>
-          <p:nvPr/>
-        </p:nvSpPr>
-        <p:spPr>
-          <a:xfrm>
-            <a:off x="3273552" y="3813048"/>
+          <p:cNvPr id="45" name="Text 43"/>
+          <p:cNvSpPr txBox="1"/>
+          <p:nvPr/>
+        </p:nvSpPr>
+        <p:spPr>
+          <a:xfrm>
+            <a:off x="3319272" y="3813048"/>
             <a:ext cx="914400" cy="422453"/>
           </a:xfrm>
           <a:prstGeom prst="rect">
@@ -3724,13 +3707,13 @@
       </p:sp>
       <p:sp>
         <p:nvSpPr>
-          <p:cNvPr id="40" name="Text 38"/>
-          <p:cNvSpPr txBox="1"/>
-          <p:nvPr/>
-        </p:nvSpPr>
-        <p:spPr>
-          <a:xfrm>
-            <a:off x="4187952" y="3813048"/>
+          <p:cNvPr id="46" name="Text 44"/>
+          <p:cNvSpPr txBox="1"/>
+          <p:nvPr/>
+        </p:nvSpPr>
+        <p:spPr>
+          <a:xfrm>
+            <a:off x="4233672" y="3813048"/>
             <a:ext cx="841248" cy="422453"/>
           </a:xfrm>
           <a:prstGeom prst="rect">
@@ -3763,13 +3746,13 @@
       </p:sp>
       <p:sp>
         <p:nvSpPr>
-          <p:cNvPr id="41" name="Text 39"/>
-          <p:cNvSpPr txBox="1"/>
-          <p:nvPr/>
-        </p:nvSpPr>
-        <p:spPr>
-          <a:xfrm>
-            <a:off x="5029200" y="3813048"/>
+          <p:cNvPr id="47" name="Text 45"/>
+          <p:cNvSpPr txBox="1"/>
+          <p:nvPr/>
+        </p:nvSpPr>
+        <p:spPr>
+          <a:xfrm>
+            <a:off x="5074920" y="3813048"/>
             <a:ext cx="841248" cy="422453"/>
           </a:xfrm>
           <a:prstGeom prst="rect">
@@ -3802,14 +3785,53 @@
       </p:sp>
       <p:sp>
         <p:nvSpPr>
-          <p:cNvPr id="42" name="Text 40"/>
+          <p:cNvPr id="48" name="Text 46"/>
           <p:cNvSpPr txBox="1"/>
           <p:nvPr/>
         </p:nvSpPr>
         <p:spPr>
           <a:xfrm>
             <a:off x="658368" y="4235501"/>
-            <a:ext cx="1938528" cy="422453"/>
+            <a:ext cx="310896" cy="422453"/>
+          </a:xfrm>
+          <a:prstGeom prst="rect">
+            <a:avLst/>
+          </a:prstGeom>
+          <a:noFill/>
+          <a:ln/>
+        </p:spPr>
+        <p:txBody>
+          <a:bodyPr wrap="square" lIns="0" tIns="0" rIns="0" bIns="0" rtlCol="0" anchor="ctr"/>
+          <a:lstStyle/>
+          <a:p>
+            <a:pPr algn="r" indent="0" marL="0">
+              <a:buNone/>
+            </a:pPr>
+            <a:r>
+              <a:rPr lang="en-US" sz="1200" dirty="0">
+                <a:solidFill>
+                  <a:srgbClr val="9AA3AD"/>
+                </a:solidFill>
+                <a:latin typeface="Inter" pitchFamily="34" charset="0"/>
+                <a:ea typeface="Inter" pitchFamily="34" charset="-122"/>
+                <a:cs typeface="Inter" pitchFamily="34" charset="-120"/>
+              </a:rPr>
+              <a:t>7</a:t>
+            </a:r>
+            <a:endParaRPr lang="en-US" sz="1200" dirty="0"/>
+          </a:p>
+        </p:txBody>
+      </p:sp>
+      <p:sp>
+        <p:nvSpPr>
+          <p:cNvPr id="49" name="Text 47"/>
+          <p:cNvSpPr txBox="1"/>
+          <p:nvPr/>
+        </p:nvSpPr>
+        <p:spPr>
+          <a:xfrm>
+            <a:off x="1014984" y="4235501"/>
+            <a:ext cx="1783080" cy="422453"/>
           </a:xfrm>
           <a:prstGeom prst="rect">
             <a:avLst/>
@@ -3841,14 +3863,14 @@
       </p:sp>
       <p:sp>
         <p:nvSpPr>
-          <p:cNvPr id="43" name="Shape 41"/>
+          <p:cNvPr id="50" name="Shape 48"/>
           <p:cNvSpPr/>
           <p:nvPr/>
         </p:nvSpPr>
         <p:spPr>
           <a:xfrm>
-            <a:off x="2670048" y="4330553"/>
-            <a:ext cx="154953" cy="232349"/>
+            <a:off x="2871216" y="4330553"/>
+            <a:ext cx="111050" cy="232349"/>
           </a:xfrm>
           <a:prstGeom prst="rect">
             <a:avLst/>
@@ -3861,13 +3883,13 @@
       </p:sp>
       <p:sp>
         <p:nvSpPr>
-          <p:cNvPr id="44" name="Text 42"/>
-          <p:cNvSpPr txBox="1"/>
-          <p:nvPr/>
-        </p:nvSpPr>
-        <p:spPr>
-          <a:xfrm>
-            <a:off x="3273552" y="4235501"/>
+          <p:cNvPr id="51" name="Text 49"/>
+          <p:cNvSpPr txBox="1"/>
+          <p:nvPr/>
+        </p:nvSpPr>
+        <p:spPr>
+          <a:xfrm>
+            <a:off x="3319272" y="4235501"/>
             <a:ext cx="914400" cy="422453"/>
           </a:xfrm>
           <a:prstGeom prst="rect">
@@ -3900,13 +3922,13 @@
       </p:sp>
       <p:sp>
         <p:nvSpPr>
-          <p:cNvPr id="45" name="Text 43"/>
-          <p:cNvSpPr txBox="1"/>
-          <p:nvPr/>
-        </p:nvSpPr>
-        <p:spPr>
-          <a:xfrm>
-            <a:off x="4187952" y="4235501"/>
+          <p:cNvPr id="52" name="Text 50"/>
+          <p:cNvSpPr txBox="1"/>
+          <p:nvPr/>
+        </p:nvSpPr>
+        <p:spPr>
+          <a:xfrm>
+            <a:off x="4233672" y="4235501"/>
             <a:ext cx="841248" cy="422453"/>
           </a:xfrm>
           <a:prstGeom prst="rect">
@@ -3939,13 +3961,13 @@
       </p:sp>
       <p:sp>
         <p:nvSpPr>
-          <p:cNvPr id="46" name="Text 44"/>
-          <p:cNvSpPr txBox="1"/>
-          <p:nvPr/>
-        </p:nvSpPr>
-        <p:spPr>
-          <a:xfrm>
-            <a:off x="5029200" y="4235501"/>
+          <p:cNvPr id="53" name="Text 51"/>
+          <p:cNvSpPr txBox="1"/>
+          <p:nvPr/>
+        </p:nvSpPr>
+        <p:spPr>
+          <a:xfrm>
+            <a:off x="5074920" y="4235501"/>
             <a:ext cx="841248" cy="422453"/>
           </a:xfrm>
           <a:prstGeom prst="rect">
@@ -3978,14 +4000,53 @@
       </p:sp>
       <p:sp>
         <p:nvSpPr>
-          <p:cNvPr id="47" name="Text 45"/>
+          <p:cNvPr id="54" name="Text 52"/>
           <p:cNvSpPr txBox="1"/>
           <p:nvPr/>
         </p:nvSpPr>
         <p:spPr>
           <a:xfrm>
             <a:off x="658368" y="4657954"/>
-            <a:ext cx="1938528" cy="422453"/>
+            <a:ext cx="310896" cy="422453"/>
+          </a:xfrm>
+          <a:prstGeom prst="rect">
+            <a:avLst/>
+          </a:prstGeom>
+          <a:noFill/>
+          <a:ln/>
+        </p:spPr>
+        <p:txBody>
+          <a:bodyPr wrap="square" lIns="0" tIns="0" rIns="0" bIns="0" rtlCol="0" anchor="ctr"/>
+          <a:lstStyle/>
+          <a:p>
+            <a:pPr algn="r" indent="0" marL="0">
+              <a:buNone/>
+            </a:pPr>
+            <a:r>
+              <a:rPr lang="en-US" sz="1200" dirty="0">
+                <a:solidFill>
+                  <a:srgbClr val="9AA3AD"/>
+                </a:solidFill>
+                <a:latin typeface="Inter" pitchFamily="34" charset="0"/>
+                <a:ea typeface="Inter" pitchFamily="34" charset="-122"/>
+                <a:cs typeface="Inter" pitchFamily="34" charset="-120"/>
+              </a:rPr>
+              <a:t>8</a:t>
+            </a:r>
+            <a:endParaRPr lang="en-US" sz="1200" dirty="0"/>
+          </a:p>
+        </p:txBody>
+      </p:sp>
+      <p:sp>
+        <p:nvSpPr>
+          <p:cNvPr id="55" name="Text 53"/>
+          <p:cNvSpPr txBox="1"/>
+          <p:nvPr/>
+        </p:nvSpPr>
+        <p:spPr>
+          <a:xfrm>
+            <a:off x="1014984" y="4657954"/>
+            <a:ext cx="1783080" cy="422453"/>
           </a:xfrm>
           <a:prstGeom prst="rect">
             <a:avLst/>
@@ -4017,14 +4078,14 @@
       </p:sp>
       <p:sp>
         <p:nvSpPr>
-          <p:cNvPr id="48" name="Shape 46"/>
+          <p:cNvPr id="56" name="Shape 54"/>
           <p:cNvSpPr/>
           <p:nvPr/>
         </p:nvSpPr>
         <p:spPr>
           <a:xfrm>
-            <a:off x="2670048" y="4753005"/>
-            <a:ext cx="143889" cy="232349"/>
+            <a:off x="2871216" y="4753005"/>
+            <a:ext cx="103120" cy="232349"/>
           </a:xfrm>
           <a:prstGeom prst="rect">
             <a:avLst/>
@@ -4037,13 +4098,13 @@
       </p:sp>
       <p:sp>
         <p:nvSpPr>
-          <p:cNvPr id="49" name="Text 47"/>
-          <p:cNvSpPr txBox="1"/>
-          <p:nvPr/>
-        </p:nvSpPr>
-        <p:spPr>
-          <a:xfrm>
-            <a:off x="3273552" y="4657954"/>
+          <p:cNvPr id="57" name="Text 55"/>
+          <p:cNvSpPr txBox="1"/>
+          <p:nvPr/>
+        </p:nvSpPr>
+        <p:spPr>
+          <a:xfrm>
+            <a:off x="3319272" y="4657954"/>
             <a:ext cx="914400" cy="422453"/>
           </a:xfrm>
           <a:prstGeom prst="rect">
@@ -4076,13 +4137,13 @@
       </p:sp>
       <p:sp>
         <p:nvSpPr>
-          <p:cNvPr id="50" name="Text 48"/>
-          <p:cNvSpPr txBox="1"/>
-          <p:nvPr/>
-        </p:nvSpPr>
-        <p:spPr>
-          <a:xfrm>
-            <a:off x="4187952" y="4657954"/>
+          <p:cNvPr id="58" name="Text 56"/>
+          <p:cNvSpPr txBox="1"/>
+          <p:nvPr/>
+        </p:nvSpPr>
+        <p:spPr>
+          <a:xfrm>
+            <a:off x="4233672" y="4657954"/>
             <a:ext cx="841248" cy="422453"/>
           </a:xfrm>
           <a:prstGeom prst="rect">
@@ -4115,13 +4176,13 @@
       </p:sp>
       <p:sp>
         <p:nvSpPr>
-          <p:cNvPr id="51" name="Text 49"/>
-          <p:cNvSpPr txBox="1"/>
-          <p:nvPr/>
-        </p:nvSpPr>
-        <p:spPr>
-          <a:xfrm>
-            <a:off x="5029200" y="4657954"/>
+          <p:cNvPr id="59" name="Text 57"/>
+          <p:cNvSpPr txBox="1"/>
+          <p:nvPr/>
+        </p:nvSpPr>
+        <p:spPr>
+          <a:xfrm>
+            <a:off x="5074920" y="4657954"/>
             <a:ext cx="841248" cy="422453"/>
           </a:xfrm>
           <a:prstGeom prst="rect">
@@ -4154,14 +4215,53 @@
       </p:sp>
       <p:sp>
         <p:nvSpPr>
-          <p:cNvPr id="52" name="Text 50"/>
+          <p:cNvPr id="60" name="Text 58"/>
           <p:cNvSpPr txBox="1"/>
           <p:nvPr/>
         </p:nvSpPr>
         <p:spPr>
           <a:xfrm>
             <a:off x="658368" y="5080406"/>
-            <a:ext cx="1938528" cy="422453"/>
+            <a:ext cx="310896" cy="422453"/>
+          </a:xfrm>
+          <a:prstGeom prst="rect">
+            <a:avLst/>
+          </a:prstGeom>
+          <a:noFill/>
+          <a:ln/>
+        </p:spPr>
+        <p:txBody>
+          <a:bodyPr wrap="square" lIns="0" tIns="0" rIns="0" bIns="0" rtlCol="0" anchor="ctr"/>
+          <a:lstStyle/>
+          <a:p>
+            <a:pPr algn="r" indent="0" marL="0">
+              <a:buNone/>
+            </a:pPr>
+            <a:r>
+              <a:rPr lang="en-US" sz="1200" dirty="0">
+                <a:solidFill>
+                  <a:srgbClr val="9AA3AD"/>
+                </a:solidFill>
+                <a:latin typeface="Inter" pitchFamily="34" charset="0"/>
+                <a:ea typeface="Inter" pitchFamily="34" charset="-122"/>
+                <a:cs typeface="Inter" pitchFamily="34" charset="-120"/>
+              </a:rPr>
+              <a:t>9</a:t>
+            </a:r>
+            <a:endParaRPr lang="en-US" sz="1200" dirty="0"/>
+          </a:p>
+        </p:txBody>
+      </p:sp>
+      <p:sp>
+        <p:nvSpPr>
+          <p:cNvPr id="61" name="Text 59"/>
+          <p:cNvSpPr txBox="1"/>
+          <p:nvPr/>
+        </p:nvSpPr>
+        <p:spPr>
+          <a:xfrm>
+            <a:off x="1014984" y="5080406"/>
+            <a:ext cx="1783080" cy="422453"/>
           </a:xfrm>
           <a:prstGeom prst="rect">
             <a:avLst/>
@@ -4193,14 +4293,14 @@
       </p:sp>
       <p:sp>
         <p:nvSpPr>
-          <p:cNvPr id="53" name="Shape 51"/>
+          <p:cNvPr id="62" name="Shape 60"/>
           <p:cNvSpPr/>
           <p:nvPr/>
         </p:nvSpPr>
         <p:spPr>
           <a:xfrm>
-            <a:off x="2670048" y="5175458"/>
-            <a:ext cx="100447" cy="232349"/>
+            <a:off x="2871216" y="5175458"/>
+            <a:ext cx="71987" cy="232349"/>
           </a:xfrm>
           <a:prstGeom prst="rect">
             <a:avLst/>
@@ -4213,13 +4313,13 @@
       </p:sp>
       <p:sp>
         <p:nvSpPr>
-          <p:cNvPr id="54" name="Text 52"/>
-          <p:cNvSpPr txBox="1"/>
-          <p:nvPr/>
-        </p:nvSpPr>
-        <p:spPr>
-          <a:xfrm>
-            <a:off x="3273552" y="5080406"/>
+          <p:cNvPr id="63" name="Text 61"/>
+          <p:cNvSpPr txBox="1"/>
+          <p:nvPr/>
+        </p:nvSpPr>
+        <p:spPr>
+          <a:xfrm>
+            <a:off x="3319272" y="5080406"/>
             <a:ext cx="914400" cy="422453"/>
           </a:xfrm>
           <a:prstGeom prst="rect">
@@ -4252,13 +4352,13 @@
       </p:sp>
       <p:sp>
         <p:nvSpPr>
-          <p:cNvPr id="55" name="Text 53"/>
-          <p:cNvSpPr txBox="1"/>
-          <p:nvPr/>
-        </p:nvSpPr>
-        <p:spPr>
-          <a:xfrm>
-            <a:off x="4187952" y="5080406"/>
+          <p:cNvPr id="64" name="Text 62"/>
+          <p:cNvSpPr txBox="1"/>
+          <p:nvPr/>
+        </p:nvSpPr>
+        <p:spPr>
+          <a:xfrm>
+            <a:off x="4233672" y="5080406"/>
             <a:ext cx="841248" cy="422453"/>
           </a:xfrm>
           <a:prstGeom prst="rect">
@@ -4291,13 +4391,13 @@
       </p:sp>
       <p:sp>
         <p:nvSpPr>
-          <p:cNvPr id="56" name="Text 54"/>
-          <p:cNvSpPr txBox="1"/>
-          <p:nvPr/>
-        </p:nvSpPr>
-        <p:spPr>
-          <a:xfrm>
-            <a:off x="5029200" y="5080406"/>
+          <p:cNvPr id="65" name="Text 63"/>
+          <p:cNvSpPr txBox="1"/>
+          <p:nvPr/>
+        </p:nvSpPr>
+        <p:spPr>
+          <a:xfrm>
+            <a:off x="5074920" y="5080406"/>
             <a:ext cx="841248" cy="422453"/>
           </a:xfrm>
           <a:prstGeom prst="rect">
@@ -4330,14 +4430,53 @@
       </p:sp>
       <p:sp>
         <p:nvSpPr>
-          <p:cNvPr id="57" name="Text 55"/>
+          <p:cNvPr id="66" name="Text 64"/>
           <p:cNvSpPr txBox="1"/>
           <p:nvPr/>
         </p:nvSpPr>
         <p:spPr>
           <a:xfrm>
             <a:off x="658368" y="5502859"/>
-            <a:ext cx="1938528" cy="422453"/>
+            <a:ext cx="310896" cy="422453"/>
+          </a:xfrm>
+          <a:prstGeom prst="rect">
+            <a:avLst/>
+          </a:prstGeom>
+          <a:noFill/>
+          <a:ln/>
+        </p:spPr>
+        <p:txBody>
+          <a:bodyPr wrap="square" lIns="0" tIns="0" rIns="0" bIns="0" rtlCol="0" anchor="ctr"/>
+          <a:lstStyle/>
+          <a:p>
+            <a:pPr algn="r" indent="0" marL="0">
+              <a:buNone/>
+            </a:pPr>
+            <a:r>
+              <a:rPr lang="en-US" sz="1200" dirty="0">
+                <a:solidFill>
+                  <a:srgbClr val="9AA3AD"/>
+                </a:solidFill>
+                <a:latin typeface="Inter" pitchFamily="34" charset="0"/>
+                <a:ea typeface="Inter" pitchFamily="34" charset="-122"/>
+                <a:cs typeface="Inter" pitchFamily="34" charset="-120"/>
+              </a:rPr>
+              <a:t>10</a:t>
+            </a:r>
+            <a:endParaRPr lang="en-US" sz="1200" dirty="0"/>
+          </a:p>
+        </p:txBody>
+      </p:sp>
+      <p:sp>
+        <p:nvSpPr>
+          <p:cNvPr id="67" name="Text 65"/>
+          <p:cNvSpPr txBox="1"/>
+          <p:nvPr/>
+        </p:nvSpPr>
+        <p:spPr>
+          <a:xfrm>
+            <a:off x="1014984" y="5502859"/>
+            <a:ext cx="1783080" cy="422453"/>
           </a:xfrm>
           <a:prstGeom prst="rect">
             <a:avLst/>
@@ -4369,14 +4508,14 @@
       </p:sp>
       <p:sp>
         <p:nvSpPr>
-          <p:cNvPr id="58" name="Shape 56"/>
+          <p:cNvPr id="68" name="Shape 66"/>
           <p:cNvSpPr/>
           <p:nvPr/>
         </p:nvSpPr>
         <p:spPr>
           <a:xfrm>
-            <a:off x="2670048" y="5597911"/>
-            <a:ext cx="91924" cy="232349"/>
+            <a:off x="2871216" y="5597911"/>
+            <a:ext cx="65879" cy="232349"/>
           </a:xfrm>
           <a:prstGeom prst="rect">
             <a:avLst/>
@@ -4389,13 +4528,13 @@
       </p:sp>
       <p:sp>
         <p:nvSpPr>
-          <p:cNvPr id="59" name="Text 57"/>
-          <p:cNvSpPr txBox="1"/>
-          <p:nvPr/>
-        </p:nvSpPr>
-        <p:spPr>
-          <a:xfrm>
-            <a:off x="3273552" y="5502859"/>
+          <p:cNvPr id="69" name="Text 67"/>
+          <p:cNvSpPr txBox="1"/>
+          <p:nvPr/>
+        </p:nvSpPr>
+        <p:spPr>
+          <a:xfrm>
+            <a:off x="3319272" y="5502859"/>
             <a:ext cx="914400" cy="422453"/>
           </a:xfrm>
           <a:prstGeom prst="rect">
@@ -4428,13 +4567,13 @@
       </p:sp>
       <p:sp>
         <p:nvSpPr>
-          <p:cNvPr id="60" name="Text 58"/>
-          <p:cNvSpPr txBox="1"/>
-          <p:nvPr/>
-        </p:nvSpPr>
-        <p:spPr>
-          <a:xfrm>
-            <a:off x="4187952" y="5502859"/>
+          <p:cNvPr id="70" name="Text 68"/>
+          <p:cNvSpPr txBox="1"/>
+          <p:nvPr/>
+        </p:nvSpPr>
+        <p:spPr>
+          <a:xfrm>
+            <a:off x="4233672" y="5502859"/>
             <a:ext cx="841248" cy="422453"/>
           </a:xfrm>
           <a:prstGeom prst="rect">
@@ -4467,13 +4606,13 @@
       </p:sp>
       <p:sp>
         <p:nvSpPr>
-          <p:cNvPr id="61" name="Text 59"/>
-          <p:cNvSpPr txBox="1"/>
-          <p:nvPr/>
-        </p:nvSpPr>
-        <p:spPr>
-          <a:xfrm>
-            <a:off x="5029200" y="5502859"/>
+          <p:cNvPr id="71" name="Text 69"/>
+          <p:cNvSpPr txBox="1"/>
+          <p:nvPr/>
+        </p:nvSpPr>
+        <p:spPr>
+          <a:xfrm>
+            <a:off x="5074920" y="5502859"/>
             <a:ext cx="841248" cy="422453"/>
           </a:xfrm>
           <a:prstGeom prst="rect">
@@ -4506,14 +4645,53 @@
       </p:sp>
       <p:sp>
         <p:nvSpPr>
-          <p:cNvPr id="62" name="Text 60"/>
+          <p:cNvPr id="72" name="Text 70"/>
           <p:cNvSpPr txBox="1"/>
           <p:nvPr/>
         </p:nvSpPr>
         <p:spPr>
           <a:xfrm>
             <a:off x="6208776" y="1700784"/>
-            <a:ext cx="1938528" cy="422453"/>
+            <a:ext cx="310896" cy="422453"/>
+          </a:xfrm>
+          <a:prstGeom prst="rect">
+            <a:avLst/>
+          </a:prstGeom>
+          <a:noFill/>
+          <a:ln/>
+        </p:spPr>
+        <p:txBody>
+          <a:bodyPr wrap="square" lIns="0" tIns="0" rIns="0" bIns="0" rtlCol="0" anchor="ctr"/>
+          <a:lstStyle/>
+          <a:p>
+            <a:pPr algn="r" indent="0" marL="0">
+              <a:buNone/>
+            </a:pPr>
+            <a:r>
+              <a:rPr lang="en-US" sz="1200" dirty="0">
+                <a:solidFill>
+                  <a:srgbClr val="9AA3AD"/>
+                </a:solidFill>
+                <a:latin typeface="Inter" pitchFamily="34" charset="0"/>
+                <a:ea typeface="Inter" pitchFamily="34" charset="-122"/>
+                <a:cs typeface="Inter" pitchFamily="34" charset="-120"/>
+              </a:rPr>
+              <a:t>11</a:t>
+            </a:r>
+            <a:endParaRPr lang="en-US" sz="1200" dirty="0"/>
+          </a:p>
+        </p:txBody>
+      </p:sp>
+      <p:sp>
+        <p:nvSpPr>
+          <p:cNvPr id="73" name="Text 71"/>
+          <p:cNvSpPr txBox="1"/>
+          <p:nvPr/>
+        </p:nvSpPr>
+        <p:spPr>
+          <a:xfrm>
+            <a:off x="6565392" y="1700784"/>
+            <a:ext cx="1783080" cy="422453"/>
           </a:xfrm>
           <a:prstGeom prst="rect">
             <a:avLst/>
@@ -4545,14 +4723,14 @@
       </p:sp>
       <p:sp>
         <p:nvSpPr>
-          <p:cNvPr id="63" name="Shape 61"/>
+          <p:cNvPr id="74" name="Shape 72"/>
           <p:cNvSpPr/>
           <p:nvPr/>
         </p:nvSpPr>
         <p:spPr>
           <a:xfrm>
-            <a:off x="8220456" y="1795836"/>
-            <a:ext cx="66189" cy="232349"/>
+            <a:off x="8421624" y="1795836"/>
+            <a:ext cx="47436" cy="232349"/>
           </a:xfrm>
           <a:prstGeom prst="rect">
             <a:avLst/>
@@ -4565,13 +4743,13 @@
       </p:sp>
       <p:sp>
         <p:nvSpPr>
-          <p:cNvPr id="64" name="Text 62"/>
-          <p:cNvSpPr txBox="1"/>
-          <p:nvPr/>
-        </p:nvSpPr>
-        <p:spPr>
-          <a:xfrm>
-            <a:off x="8823960" y="1700784"/>
+          <p:cNvPr id="75" name="Text 73"/>
+          <p:cNvSpPr txBox="1"/>
+          <p:nvPr/>
+        </p:nvSpPr>
+        <p:spPr>
+          <a:xfrm>
+            <a:off x="8869680" y="1700784"/>
             <a:ext cx="914400" cy="422453"/>
           </a:xfrm>
           <a:prstGeom prst="rect">
@@ -4604,13 +4782,13 @@
       </p:sp>
       <p:sp>
         <p:nvSpPr>
-          <p:cNvPr id="65" name="Text 63"/>
-          <p:cNvSpPr txBox="1"/>
-          <p:nvPr/>
-        </p:nvSpPr>
-        <p:spPr>
-          <a:xfrm>
-            <a:off x="9738360" y="1700784"/>
+          <p:cNvPr id="76" name="Text 74"/>
+          <p:cNvSpPr txBox="1"/>
+          <p:nvPr/>
+        </p:nvSpPr>
+        <p:spPr>
+          <a:xfrm>
+            <a:off x="9784080" y="1700784"/>
             <a:ext cx="841248" cy="422453"/>
           </a:xfrm>
           <a:prstGeom prst="rect">
@@ -4643,13 +4821,13 @@
       </p:sp>
       <p:sp>
         <p:nvSpPr>
-          <p:cNvPr id="66" name="Text 64"/>
-          <p:cNvSpPr txBox="1"/>
-          <p:nvPr/>
-        </p:nvSpPr>
-        <p:spPr>
-          <a:xfrm>
-            <a:off x="10579608" y="1700784"/>
+          <p:cNvPr id="77" name="Text 75"/>
+          <p:cNvSpPr txBox="1"/>
+          <p:nvPr/>
+        </p:nvSpPr>
+        <p:spPr>
+          <a:xfrm>
+            <a:off x="10625328" y="1700784"/>
             <a:ext cx="841248" cy="422453"/>
           </a:xfrm>
           <a:prstGeom prst="rect">
@@ -4682,14 +4860,53 @@
       </p:sp>
       <p:sp>
         <p:nvSpPr>
-          <p:cNvPr id="67" name="Text 65"/>
+          <p:cNvPr id="78" name="Text 76"/>
           <p:cNvSpPr txBox="1"/>
           <p:nvPr/>
         </p:nvSpPr>
         <p:spPr>
           <a:xfrm>
             <a:off x="6208776" y="2123237"/>
-            <a:ext cx="1938528" cy="422453"/>
+            <a:ext cx="310896" cy="422453"/>
+          </a:xfrm>
+          <a:prstGeom prst="rect">
+            <a:avLst/>
+          </a:prstGeom>
+          <a:noFill/>
+          <a:ln/>
+        </p:spPr>
+        <p:txBody>
+          <a:bodyPr wrap="square" lIns="0" tIns="0" rIns="0" bIns="0" rtlCol="0" anchor="ctr"/>
+          <a:lstStyle/>
+          <a:p>
+            <a:pPr algn="r" indent="0" marL="0">
+              <a:buNone/>
+            </a:pPr>
+            <a:r>
+              <a:rPr lang="en-US" sz="1200" dirty="0">
+                <a:solidFill>
+                  <a:srgbClr val="9AA3AD"/>
+                </a:solidFill>
+                <a:latin typeface="Inter" pitchFamily="34" charset="0"/>
+                <a:ea typeface="Inter" pitchFamily="34" charset="-122"/>
+                <a:cs typeface="Inter" pitchFamily="34" charset="-120"/>
+              </a:rPr>
+              <a:t>12</a:t>
+            </a:r>
+            <a:endParaRPr lang="en-US" sz="1200" dirty="0"/>
+          </a:p>
+        </p:txBody>
+      </p:sp>
+      <p:sp>
+        <p:nvSpPr>
+          <p:cNvPr id="79" name="Text 77"/>
+          <p:cNvSpPr txBox="1"/>
+          <p:nvPr/>
+        </p:nvSpPr>
+        <p:spPr>
+          <a:xfrm>
+            <a:off x="6565392" y="2123237"/>
+            <a:ext cx="1783080" cy="422453"/>
           </a:xfrm>
           <a:prstGeom prst="rect">
             <a:avLst/>
@@ -4721,14 +4938,14 @@
       </p:sp>
       <p:sp>
         <p:nvSpPr>
-          <p:cNvPr id="68" name="Shape 66"/>
+          <p:cNvPr id="80" name="Shape 78"/>
           <p:cNvSpPr/>
           <p:nvPr/>
         </p:nvSpPr>
         <p:spPr>
           <a:xfrm>
-            <a:off x="8220456" y="2218289"/>
-            <a:ext cx="65059" cy="232349"/>
+            <a:off x="8421624" y="2218289"/>
+            <a:ext cx="46626" cy="232349"/>
           </a:xfrm>
           <a:prstGeom prst="rect">
             <a:avLst/>
@@ -4741,13 +4958,13 @@
       </p:sp>
       <p:sp>
         <p:nvSpPr>
-          <p:cNvPr id="69" name="Text 67"/>
-          <p:cNvSpPr txBox="1"/>
-          <p:nvPr/>
-        </p:nvSpPr>
-        <p:spPr>
-          <a:xfrm>
-            <a:off x="8823960" y="2123237"/>
+          <p:cNvPr id="81" name="Text 79"/>
+          <p:cNvSpPr txBox="1"/>
+          <p:nvPr/>
+        </p:nvSpPr>
+        <p:spPr>
+          <a:xfrm>
+            <a:off x="8869680" y="2123237"/>
             <a:ext cx="914400" cy="422453"/>
           </a:xfrm>
           <a:prstGeom prst="rect">
@@ -4780,13 +4997,13 @@
       </p:sp>
       <p:sp>
         <p:nvSpPr>
-          <p:cNvPr id="70" name="Text 68"/>
-          <p:cNvSpPr txBox="1"/>
-          <p:nvPr/>
-        </p:nvSpPr>
-        <p:spPr>
-          <a:xfrm>
-            <a:off x="9738360" y="2123237"/>
+          <p:cNvPr id="82" name="Text 80"/>
+          <p:cNvSpPr txBox="1"/>
+          <p:nvPr/>
+        </p:nvSpPr>
+        <p:spPr>
+          <a:xfrm>
+            <a:off x="9784080" y="2123237"/>
             <a:ext cx="841248" cy="422453"/>
           </a:xfrm>
           <a:prstGeom prst="rect">
@@ -4819,13 +5036,13 @@
       </p:sp>
       <p:sp>
         <p:nvSpPr>
-          <p:cNvPr id="71" name="Text 69"/>
-          <p:cNvSpPr txBox="1"/>
-          <p:nvPr/>
-        </p:nvSpPr>
-        <p:spPr>
-          <a:xfrm>
-            <a:off x="10579608" y="2123237"/>
+          <p:cNvPr id="83" name="Text 81"/>
+          <p:cNvSpPr txBox="1"/>
+          <p:nvPr/>
+        </p:nvSpPr>
+        <p:spPr>
+          <a:xfrm>
+            <a:off x="10625328" y="2123237"/>
             <a:ext cx="841248" cy="422453"/>
           </a:xfrm>
           <a:prstGeom prst="rect">
@@ -4858,14 +5075,53 @@
       </p:sp>
       <p:sp>
         <p:nvSpPr>
-          <p:cNvPr id="72" name="Text 70"/>
+          <p:cNvPr id="84" name="Text 82"/>
           <p:cNvSpPr txBox="1"/>
           <p:nvPr/>
         </p:nvSpPr>
         <p:spPr>
           <a:xfrm>
             <a:off x="6208776" y="2545690"/>
-            <a:ext cx="1938528" cy="422453"/>
+            <a:ext cx="310896" cy="422453"/>
+          </a:xfrm>
+          <a:prstGeom prst="rect">
+            <a:avLst/>
+          </a:prstGeom>
+          <a:noFill/>
+          <a:ln/>
+        </p:spPr>
+        <p:txBody>
+          <a:bodyPr wrap="square" lIns="0" tIns="0" rIns="0" bIns="0" rtlCol="0" anchor="ctr"/>
+          <a:lstStyle/>
+          <a:p>
+            <a:pPr algn="r" indent="0" marL="0">
+              <a:buNone/>
+            </a:pPr>
+            <a:r>
+              <a:rPr lang="en-US" sz="1200" dirty="0">
+                <a:solidFill>
+                  <a:srgbClr val="9AA3AD"/>
+                </a:solidFill>
+                <a:latin typeface="Inter" pitchFamily="34" charset="0"/>
+                <a:ea typeface="Inter" pitchFamily="34" charset="-122"/>
+                <a:cs typeface="Inter" pitchFamily="34" charset="-120"/>
+              </a:rPr>
+              <a:t>13</a:t>
+            </a:r>
+            <a:endParaRPr lang="en-US" sz="1200" dirty="0"/>
+          </a:p>
+        </p:txBody>
+      </p:sp>
+      <p:sp>
+        <p:nvSpPr>
+          <p:cNvPr id="85" name="Text 83"/>
+          <p:cNvSpPr txBox="1"/>
+          <p:nvPr/>
+        </p:nvSpPr>
+        <p:spPr>
+          <a:xfrm>
+            <a:off x="6565392" y="2545690"/>
+            <a:ext cx="1783080" cy="422453"/>
           </a:xfrm>
           <a:prstGeom prst="rect">
             <a:avLst/>
@@ -4897,14 +5153,14 @@
       </p:sp>
       <p:sp>
         <p:nvSpPr>
-          <p:cNvPr id="73" name="Shape 71"/>
+          <p:cNvPr id="86" name="Shape 84"/>
           <p:cNvSpPr/>
           <p:nvPr/>
         </p:nvSpPr>
         <p:spPr>
           <a:xfrm>
-            <a:off x="8220456" y="2640741"/>
-            <a:ext cx="64094" cy="232349"/>
+            <a:off x="8421624" y="2640741"/>
+            <a:ext cx="45934" cy="232349"/>
           </a:xfrm>
           <a:prstGeom prst="rect">
             <a:avLst/>
@@ -4917,13 +5173,13 @@
       </p:sp>
       <p:sp>
         <p:nvSpPr>
-          <p:cNvPr id="74" name="Text 72"/>
-          <p:cNvSpPr txBox="1"/>
-          <p:nvPr/>
-        </p:nvSpPr>
-        <p:spPr>
-          <a:xfrm>
-            <a:off x="8823960" y="2545690"/>
+          <p:cNvPr id="87" name="Text 85"/>
+          <p:cNvSpPr txBox="1"/>
+          <p:nvPr/>
+        </p:nvSpPr>
+        <p:spPr>
+          <a:xfrm>
+            <a:off x="8869680" y="2545690"/>
             <a:ext cx="914400" cy="422453"/>
           </a:xfrm>
           <a:prstGeom prst="rect">
@@ -4956,13 +5212,13 @@
       </p:sp>
       <p:sp>
         <p:nvSpPr>
-          <p:cNvPr id="75" name="Text 73"/>
-          <p:cNvSpPr txBox="1"/>
-          <p:nvPr/>
-        </p:nvSpPr>
-        <p:spPr>
-          <a:xfrm>
-            <a:off x="9738360" y="2545690"/>
+          <p:cNvPr id="88" name="Text 86"/>
+          <p:cNvSpPr txBox="1"/>
+          <p:nvPr/>
+        </p:nvSpPr>
+        <p:spPr>
+          <a:xfrm>
+            <a:off x="9784080" y="2545690"/>
             <a:ext cx="841248" cy="422453"/>
           </a:xfrm>
           <a:prstGeom prst="rect">
@@ -4995,13 +5251,13 @@
       </p:sp>
       <p:sp>
         <p:nvSpPr>
-          <p:cNvPr id="76" name="Text 74"/>
-          <p:cNvSpPr txBox="1"/>
-          <p:nvPr/>
-        </p:nvSpPr>
-        <p:spPr>
-          <a:xfrm>
-            <a:off x="10579608" y="2545690"/>
+          <p:cNvPr id="89" name="Text 87"/>
+          <p:cNvSpPr txBox="1"/>
+          <p:nvPr/>
+        </p:nvSpPr>
+        <p:spPr>
+          <a:xfrm>
+            <a:off x="10625328" y="2545690"/>
             <a:ext cx="841248" cy="422453"/>
           </a:xfrm>
           <a:prstGeom prst="rect">
@@ -5034,14 +5290,53 @@
       </p:sp>
       <p:sp>
         <p:nvSpPr>
-          <p:cNvPr id="77" name="Text 75"/>
+          <p:cNvPr id="90" name="Text 88"/>
           <p:cNvSpPr txBox="1"/>
           <p:nvPr/>
         </p:nvSpPr>
         <p:spPr>
           <a:xfrm>
             <a:off x="6208776" y="2968142"/>
-            <a:ext cx="1938528" cy="422453"/>
+            <a:ext cx="310896" cy="422453"/>
+          </a:xfrm>
+          <a:prstGeom prst="rect">
+            <a:avLst/>
+          </a:prstGeom>
+          <a:noFill/>
+          <a:ln/>
+        </p:spPr>
+        <p:txBody>
+          <a:bodyPr wrap="square" lIns="0" tIns="0" rIns="0" bIns="0" rtlCol="0" anchor="ctr"/>
+          <a:lstStyle/>
+          <a:p>
+            <a:pPr algn="r" indent="0" marL="0">
+              <a:buNone/>
+            </a:pPr>
+            <a:r>
+              <a:rPr lang="en-US" sz="1200" dirty="0">
+                <a:solidFill>
+                  <a:srgbClr val="9AA3AD"/>
+                </a:solidFill>
+                <a:latin typeface="Inter" pitchFamily="34" charset="0"/>
+                <a:ea typeface="Inter" pitchFamily="34" charset="-122"/>
+                <a:cs typeface="Inter" pitchFamily="34" charset="-120"/>
+              </a:rPr>
+              <a:t>14</a:t>
+            </a:r>
+            <a:endParaRPr lang="en-US" sz="1200" dirty="0"/>
+          </a:p>
+        </p:txBody>
+      </p:sp>
+      <p:sp>
+        <p:nvSpPr>
+          <p:cNvPr id="91" name="Text 89"/>
+          <p:cNvSpPr txBox="1"/>
+          <p:nvPr/>
+        </p:nvSpPr>
+        <p:spPr>
+          <a:xfrm>
+            <a:off x="6565392" y="2968142"/>
+            <a:ext cx="1783080" cy="422453"/>
           </a:xfrm>
           <a:prstGeom prst="rect">
             <a:avLst/>
@@ -5073,14 +5368,14 @@
       </p:sp>
       <p:sp>
         <p:nvSpPr>
-          <p:cNvPr id="78" name="Shape 76"/>
+          <p:cNvPr id="92" name="Shape 90"/>
           <p:cNvSpPr/>
           <p:nvPr/>
         </p:nvSpPr>
         <p:spPr>
           <a:xfrm>
-            <a:off x="8220456" y="3063194"/>
-            <a:ext cx="62344" cy="232349"/>
+            <a:off x="8421624" y="3063194"/>
+            <a:ext cx="44680" cy="232349"/>
           </a:xfrm>
           <a:prstGeom prst="rect">
             <a:avLst/>
@@ -5093,13 +5388,13 @@
       </p:sp>
       <p:sp>
         <p:nvSpPr>
-          <p:cNvPr id="79" name="Text 77"/>
-          <p:cNvSpPr txBox="1"/>
-          <p:nvPr/>
-        </p:nvSpPr>
-        <p:spPr>
-          <a:xfrm>
-            <a:off x="8823960" y="2968142"/>
+          <p:cNvPr id="93" name="Text 91"/>
+          <p:cNvSpPr txBox="1"/>
+          <p:nvPr/>
+        </p:nvSpPr>
+        <p:spPr>
+          <a:xfrm>
+            <a:off x="8869680" y="2968142"/>
             <a:ext cx="914400" cy="422453"/>
           </a:xfrm>
           <a:prstGeom prst="rect">
@@ -5132,13 +5427,13 @@
       </p:sp>
       <p:sp>
         <p:nvSpPr>
-          <p:cNvPr id="80" name="Text 78"/>
-          <p:cNvSpPr txBox="1"/>
-          <p:nvPr/>
-        </p:nvSpPr>
-        <p:spPr>
-          <a:xfrm>
-            <a:off x="9738360" y="2968142"/>
+          <p:cNvPr id="94" name="Text 92"/>
+          <p:cNvSpPr txBox="1"/>
+          <p:nvPr/>
+        </p:nvSpPr>
+        <p:spPr>
+          <a:xfrm>
+            <a:off x="9784080" y="2968142"/>
             <a:ext cx="841248" cy="422453"/>
           </a:xfrm>
           <a:prstGeom prst="rect">
@@ -5171,13 +5466,13 @@
       </p:sp>
       <p:sp>
         <p:nvSpPr>
-          <p:cNvPr id="81" name="Text 79"/>
-          <p:cNvSpPr txBox="1"/>
-          <p:nvPr/>
-        </p:nvSpPr>
-        <p:spPr>
-          <a:xfrm>
-            <a:off x="10579608" y="2968142"/>
+          <p:cNvPr id="95" name="Text 93"/>
+          <p:cNvSpPr txBox="1"/>
+          <p:nvPr/>
+        </p:nvSpPr>
+        <p:spPr>
+          <a:xfrm>
+            <a:off x="10625328" y="2968142"/>
             <a:ext cx="841248" cy="422453"/>
           </a:xfrm>
           <a:prstGeom prst="rect">
@@ -5210,14 +5505,53 @@
       </p:sp>
       <p:sp>
         <p:nvSpPr>
-          <p:cNvPr id="82" name="Text 80"/>
+          <p:cNvPr id="96" name="Text 94"/>
           <p:cNvSpPr txBox="1"/>
           <p:nvPr/>
         </p:nvSpPr>
         <p:spPr>
           <a:xfrm>
             <a:off x="6208776" y="3390595"/>
-            <a:ext cx="1938528" cy="422453"/>
+            <a:ext cx="310896" cy="422453"/>
+          </a:xfrm>
+          <a:prstGeom prst="rect">
+            <a:avLst/>
+          </a:prstGeom>
+          <a:noFill/>
+          <a:ln/>
+        </p:spPr>
+        <p:txBody>
+          <a:bodyPr wrap="square" lIns="0" tIns="0" rIns="0" bIns="0" rtlCol="0" anchor="ctr"/>
+          <a:lstStyle/>
+          <a:p>
+            <a:pPr algn="r" indent="0" marL="0">
+              <a:buNone/>
+            </a:pPr>
+            <a:r>
+              <a:rPr lang="en-US" sz="1200" dirty="0">
+                <a:solidFill>
+                  <a:srgbClr val="9AA3AD"/>
+                </a:solidFill>
+                <a:latin typeface="Inter" pitchFamily="34" charset="0"/>
+                <a:ea typeface="Inter" pitchFamily="34" charset="-122"/>
+                <a:cs typeface="Inter" pitchFamily="34" charset="-120"/>
+              </a:rPr>
+              <a:t>15</a:t>
+            </a:r>
+            <a:endParaRPr lang="en-US" sz="1200" dirty="0"/>
+          </a:p>
+        </p:txBody>
+      </p:sp>
+      <p:sp>
+        <p:nvSpPr>
+          <p:cNvPr id="97" name="Text 95"/>
+          <p:cNvSpPr txBox="1"/>
+          <p:nvPr/>
+        </p:nvSpPr>
+        <p:spPr>
+          <a:xfrm>
+            <a:off x="6565392" y="3390595"/>
+            <a:ext cx="1783080" cy="422453"/>
           </a:xfrm>
           <a:prstGeom prst="rect">
             <a:avLst/>
@@ -5249,14 +5583,14 @@
       </p:sp>
       <p:sp>
         <p:nvSpPr>
-          <p:cNvPr id="83" name="Shape 81"/>
+          <p:cNvPr id="98" name="Shape 96"/>
           <p:cNvSpPr/>
           <p:nvPr/>
         </p:nvSpPr>
         <p:spPr>
           <a:xfrm>
-            <a:off x="8220456" y="3485647"/>
-            <a:ext cx="51536" cy="232349"/>
+            <a:off x="8421624" y="3485647"/>
+            <a:ext cx="36934" cy="232349"/>
           </a:xfrm>
           <a:prstGeom prst="rect">
             <a:avLst/>
@@ -5269,13 +5603,13 @@
       </p:sp>
       <p:sp>
         <p:nvSpPr>
-          <p:cNvPr id="84" name="Text 82"/>
-          <p:cNvSpPr txBox="1"/>
-          <p:nvPr/>
-        </p:nvSpPr>
-        <p:spPr>
-          <a:xfrm>
-            <a:off x="8823960" y="3390595"/>
+          <p:cNvPr id="99" name="Text 97"/>
+          <p:cNvSpPr txBox="1"/>
+          <p:nvPr/>
+        </p:nvSpPr>
+        <p:spPr>
+          <a:xfrm>
+            <a:off x="8869680" y="3390595"/>
             <a:ext cx="914400" cy="422453"/>
           </a:xfrm>
           <a:prstGeom prst="rect">
@@ -5308,13 +5642,13 @@
       </p:sp>
       <p:sp>
         <p:nvSpPr>
-          <p:cNvPr id="85" name="Text 83"/>
-          <p:cNvSpPr txBox="1"/>
-          <p:nvPr/>
-        </p:nvSpPr>
-        <p:spPr>
-          <a:xfrm>
-            <a:off x="9738360" y="3390595"/>
+          <p:cNvPr id="100" name="Text 98"/>
+          <p:cNvSpPr txBox="1"/>
+          <p:nvPr/>
+        </p:nvSpPr>
+        <p:spPr>
+          <a:xfrm>
+            <a:off x="9784080" y="3390595"/>
             <a:ext cx="841248" cy="422453"/>
           </a:xfrm>
           <a:prstGeom prst="rect">
@@ -5347,13 +5681,13 @@
       </p:sp>
       <p:sp>
         <p:nvSpPr>
-          <p:cNvPr id="86" name="Text 84"/>
-          <p:cNvSpPr txBox="1"/>
-          <p:nvPr/>
-        </p:nvSpPr>
-        <p:spPr>
-          <a:xfrm>
-            <a:off x="10579608" y="3390595"/>
+          <p:cNvPr id="101" name="Text 99"/>
+          <p:cNvSpPr txBox="1"/>
+          <p:nvPr/>
+        </p:nvSpPr>
+        <p:spPr>
+          <a:xfrm>
+            <a:off x="10625328" y="3390595"/>
             <a:ext cx="841248" cy="422453"/>
           </a:xfrm>
           <a:prstGeom prst="rect">
@@ -5386,14 +5720,53 @@
       </p:sp>
       <p:sp>
         <p:nvSpPr>
-          <p:cNvPr id="87" name="Text 85"/>
+          <p:cNvPr id="102" name="Text 100"/>
           <p:cNvSpPr txBox="1"/>
           <p:nvPr/>
         </p:nvSpPr>
         <p:spPr>
           <a:xfrm>
             <a:off x="6208776" y="3813048"/>
-            <a:ext cx="1938528" cy="422453"/>
+            <a:ext cx="310896" cy="422453"/>
+          </a:xfrm>
+          <a:prstGeom prst="rect">
+            <a:avLst/>
+          </a:prstGeom>
+          <a:noFill/>
+          <a:ln/>
+        </p:spPr>
+        <p:txBody>
+          <a:bodyPr wrap="square" lIns="0" tIns="0" rIns="0" bIns="0" rtlCol="0" anchor="ctr"/>
+          <a:lstStyle/>
+          <a:p>
+            <a:pPr algn="r" indent="0" marL="0">
+              <a:buNone/>
+            </a:pPr>
+            <a:r>
+              <a:rPr lang="en-US" sz="1200" dirty="0">
+                <a:solidFill>
+                  <a:srgbClr val="9AA3AD"/>
+                </a:solidFill>
+                <a:latin typeface="Inter" pitchFamily="34" charset="0"/>
+                <a:ea typeface="Inter" pitchFamily="34" charset="-122"/>
+                <a:cs typeface="Inter" pitchFamily="34" charset="-120"/>
+              </a:rPr>
+              <a:t>16</a:t>
+            </a:r>
+            <a:endParaRPr lang="en-US" sz="1200" dirty="0"/>
+          </a:p>
+        </p:txBody>
+      </p:sp>
+      <p:sp>
+        <p:nvSpPr>
+          <p:cNvPr id="103" name="Text 101"/>
+          <p:cNvSpPr txBox="1"/>
+          <p:nvPr/>
+        </p:nvSpPr>
+        <p:spPr>
+          <a:xfrm>
+            <a:off x="6565392" y="3813048"/>
+            <a:ext cx="1783080" cy="422453"/>
           </a:xfrm>
           <a:prstGeom prst="rect">
             <a:avLst/>
@@ -5425,14 +5798,14 @@
       </p:sp>
       <p:sp>
         <p:nvSpPr>
-          <p:cNvPr id="88" name="Shape 86"/>
+          <p:cNvPr id="104" name="Shape 102"/>
           <p:cNvSpPr/>
           <p:nvPr/>
         </p:nvSpPr>
         <p:spPr>
           <a:xfrm>
-            <a:off x="8220456" y="3908100"/>
-            <a:ext cx="42311" cy="232349"/>
+            <a:off x="8421624" y="3908100"/>
+            <a:ext cx="30323" cy="232349"/>
           </a:xfrm>
           <a:prstGeom prst="rect">
             <a:avLst/>
@@ -5445,13 +5818,13 @@
       </p:sp>
       <p:sp>
         <p:nvSpPr>
-          <p:cNvPr id="89" name="Text 87"/>
-          <p:cNvSpPr txBox="1"/>
-          <p:nvPr/>
-        </p:nvSpPr>
-        <p:spPr>
-          <a:xfrm>
-            <a:off x="8823960" y="3813048"/>
+          <p:cNvPr id="105" name="Text 103"/>
+          <p:cNvSpPr txBox="1"/>
+          <p:nvPr/>
+        </p:nvSpPr>
+        <p:spPr>
+          <a:xfrm>
+            <a:off x="8869680" y="3813048"/>
             <a:ext cx="914400" cy="422453"/>
           </a:xfrm>
           <a:prstGeom prst="rect">
@@ -5484,13 +5857,13 @@
       </p:sp>
       <p:sp>
         <p:nvSpPr>
-          <p:cNvPr id="90" name="Text 88"/>
-          <p:cNvSpPr txBox="1"/>
-          <p:nvPr/>
-        </p:nvSpPr>
-        <p:spPr>
-          <a:xfrm>
-            <a:off x="9738360" y="3813048"/>
+          <p:cNvPr id="106" name="Text 104"/>
+          <p:cNvSpPr txBox="1"/>
+          <p:nvPr/>
+        </p:nvSpPr>
+        <p:spPr>
+          <a:xfrm>
+            <a:off x="9784080" y="3813048"/>
             <a:ext cx="841248" cy="422453"/>
           </a:xfrm>
           <a:prstGeom prst="rect">
@@ -5523,13 +5896,13 @@
       </p:sp>
       <p:sp>
         <p:nvSpPr>
-          <p:cNvPr id="91" name="Text 89"/>
-          <p:cNvSpPr txBox="1"/>
-          <p:nvPr/>
-        </p:nvSpPr>
-        <p:spPr>
-          <a:xfrm>
-            <a:off x="10579608" y="3813048"/>
+          <p:cNvPr id="107" name="Text 105"/>
+          <p:cNvSpPr txBox="1"/>
+          <p:nvPr/>
+        </p:nvSpPr>
+        <p:spPr>
+          <a:xfrm>
+            <a:off x="10625328" y="3813048"/>
             <a:ext cx="841248" cy="422453"/>
           </a:xfrm>
           <a:prstGeom prst="rect">
@@ -5562,14 +5935,53 @@
       </p:sp>
       <p:sp>
         <p:nvSpPr>
-          <p:cNvPr id="92" name="Text 90"/>
+          <p:cNvPr id="108" name="Text 106"/>
           <p:cNvSpPr txBox="1"/>
           <p:nvPr/>
         </p:nvSpPr>
         <p:spPr>
           <a:xfrm>
             <a:off x="6208776" y="4235501"/>
-            <a:ext cx="1938528" cy="422453"/>
+            <a:ext cx="310896" cy="422453"/>
+          </a:xfrm>
+          <a:prstGeom prst="rect">
+            <a:avLst/>
+          </a:prstGeom>
+          <a:noFill/>
+          <a:ln/>
+        </p:spPr>
+        <p:txBody>
+          <a:bodyPr wrap="square" lIns="0" tIns="0" rIns="0" bIns="0" rtlCol="0" anchor="ctr"/>
+          <a:lstStyle/>
+          <a:p>
+            <a:pPr algn="r" indent="0" marL="0">
+              <a:buNone/>
+            </a:pPr>
+            <a:r>
+              <a:rPr lang="en-US" sz="1200" dirty="0">
+                <a:solidFill>
+                  <a:srgbClr val="9AA3AD"/>
+                </a:solidFill>
+                <a:latin typeface="Inter" pitchFamily="34" charset="0"/>
+                <a:ea typeface="Inter" pitchFamily="34" charset="-122"/>
+                <a:cs typeface="Inter" pitchFamily="34" charset="-120"/>
+              </a:rPr>
+              <a:t>17</a:t>
+            </a:r>
+            <a:endParaRPr lang="en-US" sz="1200" dirty="0"/>
+          </a:p>
+        </p:txBody>
+      </p:sp>
+      <p:sp>
+        <p:nvSpPr>
+          <p:cNvPr id="109" name="Text 107"/>
+          <p:cNvSpPr txBox="1"/>
+          <p:nvPr/>
+        </p:nvSpPr>
+        <p:spPr>
+          <a:xfrm>
+            <a:off x="6565392" y="4235501"/>
+            <a:ext cx="1783080" cy="422453"/>
           </a:xfrm>
           <a:prstGeom prst="rect">
             <a:avLst/>
@@ -5601,14 +6013,14 @@
       </p:sp>
       <p:sp>
         <p:nvSpPr>
-          <p:cNvPr id="93" name="Shape 91"/>
+          <p:cNvPr id="110" name="Shape 108"/>
           <p:cNvSpPr/>
           <p:nvPr/>
         </p:nvSpPr>
         <p:spPr>
           <a:xfrm>
-            <a:off x="8220456" y="4330553"/>
-            <a:ext cx="24274" cy="232349"/>
+            <a:off x="8421624" y="4330553"/>
+            <a:ext cx="18288" cy="232349"/>
           </a:xfrm>
           <a:prstGeom prst="rect">
             <a:avLst/>
@@ -5621,13 +6033,13 @@
       </p:sp>
       <p:sp>
         <p:nvSpPr>
-          <p:cNvPr id="94" name="Text 92"/>
-          <p:cNvSpPr txBox="1"/>
-          <p:nvPr/>
-        </p:nvSpPr>
-        <p:spPr>
-          <a:xfrm>
-            <a:off x="8823960" y="4235501"/>
+          <p:cNvPr id="111" name="Text 109"/>
+          <p:cNvSpPr txBox="1"/>
+          <p:nvPr/>
+        </p:nvSpPr>
+        <p:spPr>
+          <a:xfrm>
+            <a:off x="8869680" y="4235501"/>
             <a:ext cx="914400" cy="422453"/>
           </a:xfrm>
           <a:prstGeom prst="rect">
@@ -5660,13 +6072,13 @@
       </p:sp>
       <p:sp>
         <p:nvSpPr>
-          <p:cNvPr id="95" name="Text 93"/>
-          <p:cNvSpPr txBox="1"/>
-          <p:nvPr/>
-        </p:nvSpPr>
-        <p:spPr>
-          <a:xfrm>
-            <a:off x="9738360" y="4235501"/>
+          <p:cNvPr id="112" name="Text 110"/>
+          <p:cNvSpPr txBox="1"/>
+          <p:nvPr/>
+        </p:nvSpPr>
+        <p:spPr>
+          <a:xfrm>
+            <a:off x="9784080" y="4235501"/>
             <a:ext cx="841248" cy="422453"/>
           </a:xfrm>
           <a:prstGeom prst="rect">
@@ -5699,13 +6111,13 @@
       </p:sp>
       <p:sp>
         <p:nvSpPr>
-          <p:cNvPr id="96" name="Text 94"/>
-          <p:cNvSpPr txBox="1"/>
-          <p:nvPr/>
-        </p:nvSpPr>
-        <p:spPr>
-          <a:xfrm>
-            <a:off x="10579608" y="4235501"/>
+          <p:cNvPr id="113" name="Text 111"/>
+          <p:cNvSpPr txBox="1"/>
+          <p:nvPr/>
+        </p:nvSpPr>
+        <p:spPr>
+          <a:xfrm>
+            <a:off x="10625328" y="4235501"/>
             <a:ext cx="841248" cy="422453"/>
           </a:xfrm>
           <a:prstGeom prst="rect">
@@ -5738,14 +6150,53 @@
       </p:sp>
       <p:sp>
         <p:nvSpPr>
-          <p:cNvPr id="97" name="Text 95"/>
+          <p:cNvPr id="114" name="Text 112"/>
           <p:cNvSpPr txBox="1"/>
           <p:nvPr/>
         </p:nvSpPr>
         <p:spPr>
           <a:xfrm>
             <a:off x="6208776" y="4657954"/>
-            <a:ext cx="1938528" cy="422453"/>
+            <a:ext cx="310896" cy="422453"/>
+          </a:xfrm>
+          <a:prstGeom prst="rect">
+            <a:avLst/>
+          </a:prstGeom>
+          <a:noFill/>
+          <a:ln/>
+        </p:spPr>
+        <p:txBody>
+          <a:bodyPr wrap="square" lIns="0" tIns="0" rIns="0" bIns="0" rtlCol="0" anchor="ctr"/>
+          <a:lstStyle/>
+          <a:p>
+            <a:pPr algn="r" indent="0" marL="0">
+              <a:buNone/>
+            </a:pPr>
+            <a:r>
+              <a:rPr lang="en-US" sz="1200" dirty="0">
+                <a:solidFill>
+                  <a:srgbClr val="9AA3AD"/>
+                </a:solidFill>
+                <a:latin typeface="Inter" pitchFamily="34" charset="0"/>
+                <a:ea typeface="Inter" pitchFamily="34" charset="-122"/>
+                <a:cs typeface="Inter" pitchFamily="34" charset="-120"/>
+              </a:rPr>
+              <a:t>18</a:t>
+            </a:r>
+            <a:endParaRPr lang="en-US" sz="1200" dirty="0"/>
+          </a:p>
+        </p:txBody>
+      </p:sp>
+      <p:sp>
+        <p:nvSpPr>
+          <p:cNvPr id="115" name="Text 113"/>
+          <p:cNvSpPr txBox="1"/>
+          <p:nvPr/>
+        </p:nvSpPr>
+        <p:spPr>
+          <a:xfrm>
+            <a:off x="6565392" y="4657954"/>
+            <a:ext cx="1783080" cy="422453"/>
           </a:xfrm>
           <a:prstGeom prst="rect">
             <a:avLst/>
@@ -5777,13 +6228,13 @@
       </p:sp>
       <p:sp>
         <p:nvSpPr>
-          <p:cNvPr id="98" name="Shape 96"/>
+          <p:cNvPr id="116" name="Shape 114"/>
           <p:cNvSpPr/>
           <p:nvPr/>
         </p:nvSpPr>
         <p:spPr>
           <a:xfrm>
-            <a:off x="8220456" y="4753005"/>
+            <a:off x="8421624" y="4753005"/>
             <a:ext cx="18288" cy="232349"/>
           </a:xfrm>
           <a:prstGeom prst="rect">
@@ -5797,13 +6248,13 @@
       </p:sp>
       <p:sp>
         <p:nvSpPr>
-          <p:cNvPr id="99" name="Text 97"/>
-          <p:cNvSpPr txBox="1"/>
-          <p:nvPr/>
-        </p:nvSpPr>
-        <p:spPr>
-          <a:xfrm>
-            <a:off x="8823960" y="4657954"/>
+          <p:cNvPr id="117" name="Text 115"/>
+          <p:cNvSpPr txBox="1"/>
+          <p:nvPr/>
+        </p:nvSpPr>
+        <p:spPr>
+          <a:xfrm>
+            <a:off x="8869680" y="4657954"/>
             <a:ext cx="914400" cy="422453"/>
           </a:xfrm>
           <a:prstGeom prst="rect">
@@ -5836,13 +6287,13 @@
       </p:sp>
       <p:sp>
         <p:nvSpPr>
-          <p:cNvPr id="100" name="Text 98"/>
-          <p:cNvSpPr txBox="1"/>
-          <p:nvPr/>
-        </p:nvSpPr>
-        <p:spPr>
-          <a:xfrm>
-            <a:off x="9738360" y="4657954"/>
+          <p:cNvPr id="118" name="Text 116"/>
+          <p:cNvSpPr txBox="1"/>
+          <p:nvPr/>
+        </p:nvSpPr>
+        <p:spPr>
+          <a:xfrm>
+            <a:off x="9784080" y="4657954"/>
             <a:ext cx="841248" cy="422453"/>
           </a:xfrm>
           <a:prstGeom prst="rect">
@@ -5875,13 +6326,13 @@
       </p:sp>
       <p:sp>
         <p:nvSpPr>
-          <p:cNvPr id="101" name="Text 99"/>
-          <p:cNvSpPr txBox="1"/>
-          <p:nvPr/>
-        </p:nvSpPr>
-        <p:spPr>
-          <a:xfrm>
-            <a:off x="10579608" y="4657954"/>
+          <p:cNvPr id="119" name="Text 117"/>
+          <p:cNvSpPr txBox="1"/>
+          <p:nvPr/>
+        </p:nvSpPr>
+        <p:spPr>
+          <a:xfrm>
+            <a:off x="10625328" y="4657954"/>
             <a:ext cx="841248" cy="422453"/>
           </a:xfrm>
           <a:prstGeom prst="rect">
@@ -5914,14 +6365,53 @@
       </p:sp>
       <p:sp>
         <p:nvSpPr>
-          <p:cNvPr id="102" name="Text 100"/>
+          <p:cNvPr id="120" name="Text 118"/>
           <p:cNvSpPr txBox="1"/>
           <p:nvPr/>
         </p:nvSpPr>
         <p:spPr>
           <a:xfrm>
             <a:off x="6208776" y="5080406"/>
-            <a:ext cx="1938528" cy="422453"/>
+            <a:ext cx="310896" cy="422453"/>
+          </a:xfrm>
+          <a:prstGeom prst="rect">
+            <a:avLst/>
+          </a:prstGeom>
+          <a:noFill/>
+          <a:ln/>
+        </p:spPr>
+        <p:txBody>
+          <a:bodyPr wrap="square" lIns="0" tIns="0" rIns="0" bIns="0" rtlCol="0" anchor="ctr"/>
+          <a:lstStyle/>
+          <a:p>
+            <a:pPr algn="r" indent="0" marL="0">
+              <a:buNone/>
+            </a:pPr>
+            <a:r>
+              <a:rPr lang="en-US" sz="1200" dirty="0">
+                <a:solidFill>
+                  <a:srgbClr val="9AA3AD"/>
+                </a:solidFill>
+                <a:latin typeface="Inter" pitchFamily="34" charset="0"/>
+                <a:ea typeface="Inter" pitchFamily="34" charset="-122"/>
+                <a:cs typeface="Inter" pitchFamily="34" charset="-120"/>
+              </a:rPr>
+              <a:t>19</a:t>
+            </a:r>
+            <a:endParaRPr lang="en-US" sz="1200" dirty="0"/>
+          </a:p>
+        </p:txBody>
+      </p:sp>
+      <p:sp>
+        <p:nvSpPr>
+          <p:cNvPr id="121" name="Text 119"/>
+          <p:cNvSpPr txBox="1"/>
+          <p:nvPr/>
+        </p:nvSpPr>
+        <p:spPr>
+          <a:xfrm>
+            <a:off x="6565392" y="5080406"/>
+            <a:ext cx="1783080" cy="422453"/>
           </a:xfrm>
           <a:prstGeom prst="rect">
             <a:avLst/>
@@ -5953,13 +6443,13 @@
       </p:sp>
       <p:sp>
         <p:nvSpPr>
-          <p:cNvPr id="103" name="Shape 101"/>
+          <p:cNvPr id="122" name="Shape 120"/>
           <p:cNvSpPr/>
           <p:nvPr/>
         </p:nvSpPr>
         <p:spPr>
           <a:xfrm>
-            <a:off x="8220456" y="5175458"/>
+            <a:off x="8421624" y="5175458"/>
             <a:ext cx="18288" cy="232349"/>
           </a:xfrm>
           <a:prstGeom prst="rect">
@@ -5973,13 +6463,13 @@
       </p:sp>
       <p:sp>
         <p:nvSpPr>
-          <p:cNvPr id="104" name="Text 102"/>
-          <p:cNvSpPr txBox="1"/>
-          <p:nvPr/>
-        </p:nvSpPr>
-        <p:spPr>
-          <a:xfrm>
-            <a:off x="8823960" y="5080406"/>
+          <p:cNvPr id="123" name="Text 121"/>
+          <p:cNvSpPr txBox="1"/>
+          <p:nvPr/>
+        </p:nvSpPr>
+        <p:spPr>
+          <a:xfrm>
+            <a:off x="8869680" y="5080406"/>
             <a:ext cx="914400" cy="422453"/>
           </a:xfrm>
           <a:prstGeom prst="rect">
@@ -6012,13 +6502,13 @@
       </p:sp>
       <p:sp>
         <p:nvSpPr>
-          <p:cNvPr id="105" name="Text 103"/>
-          <p:cNvSpPr txBox="1"/>
-          <p:nvPr/>
-        </p:nvSpPr>
-        <p:spPr>
-          <a:xfrm>
-            <a:off x="9738360" y="5080406"/>
+          <p:cNvPr id="124" name="Text 122"/>
+          <p:cNvSpPr txBox="1"/>
+          <p:nvPr/>
+        </p:nvSpPr>
+        <p:spPr>
+          <a:xfrm>
+            <a:off x="9784080" y="5080406"/>
             <a:ext cx="841248" cy="422453"/>
           </a:xfrm>
           <a:prstGeom prst="rect">
@@ -6051,13 +6541,13 @@
       </p:sp>
       <p:sp>
         <p:nvSpPr>
-          <p:cNvPr id="106" name="Text 104"/>
-          <p:cNvSpPr txBox="1"/>
-          <p:nvPr/>
-        </p:nvSpPr>
-        <p:spPr>
-          <a:xfrm>
-            <a:off x="10579608" y="5080406"/>
+          <p:cNvPr id="125" name="Text 123"/>
+          <p:cNvSpPr txBox="1"/>
+          <p:nvPr/>
+        </p:nvSpPr>
+        <p:spPr>
+          <a:xfrm>
+            <a:off x="10625328" y="5080406"/>
             <a:ext cx="841248" cy="422453"/>
           </a:xfrm>
           <a:prstGeom prst="rect">
@@ -6090,7 +6580,27 @@
       </p:sp>
       <p:sp>
         <p:nvSpPr>
-          <p:cNvPr id="107" name="Shape 105"/>
+          <p:cNvPr id="126" name="Shape 124"/>
+          <p:cNvSpPr/>
+          <p:nvPr/>
+        </p:nvSpPr>
+        <p:spPr>
+          <a:xfrm>
+            <a:off x="6085332" y="1700784"/>
+            <a:ext cx="10973" cy="4224528"/>
+          </a:xfrm>
+          <a:prstGeom prst="rect">
+            <a:avLst/>
+          </a:prstGeom>
+          <a:solidFill>
+            <a:srgbClr val="D9D9D9"/>
+          </a:solidFill>
+          <a:ln/>
+        </p:spPr>
+      </p:sp>
+      <p:sp>
+        <p:nvSpPr>
+          <p:cNvPr id="127" name="Shape 125"/>
           <p:cNvSpPr/>
           <p:nvPr/>
         </p:nvSpPr>
@@ -6110,7 +6620,7 @@
       </p:sp>
       <p:sp>
         <p:nvSpPr>
-          <p:cNvPr id="108" name="Text 106"/>
+          <p:cNvPr id="128" name="Text 126"/>
           <p:cNvSpPr txBox="1"/>
           <p:nvPr/>
         </p:nvSpPr>
@@ -6271,7 +6781,7 @@
                 <a:ea typeface="Inter" pitchFamily="34" charset="-122"/>
                 <a:cs typeface="Inter" pitchFamily="34" charset="-120"/>
               </a:rPr>
-              <a:t>Warranty Parts Gross Profit %</a:t>
+              <a:t>Warranty Rates Are Rising</a:t>
             </a:r>
             <a:endParaRPr lang="en-US" sz="2800" dirty="0"/>
           </a:p>
@@ -6286,7 +6796,7 @@
         <p:spPr>
           <a:xfrm>
             <a:off x="457200" y="1207008"/>
-            <a:ext cx="11274552" cy="1005840"/>
+            <a:ext cx="5586984" cy="4782312"/>
           </a:xfrm>
           <a:prstGeom prst="rect">
             <a:avLst/>
@@ -6305,8 +6815,8 @@
         </p:nvSpPr>
         <p:spPr>
           <a:xfrm>
-            <a:off x="685800" y="1335024"/>
-            <a:ext cx="2651760" cy="237744"/>
+            <a:off x="658368" y="1335024"/>
+            <a:ext cx="5184648" cy="292608"/>
           </a:xfrm>
           <a:prstGeom prst="rect">
             <a:avLst/>
@@ -6322,7 +6832,46 @@
               <a:buNone/>
             </a:pPr>
             <a:r>
-              <a:rPr lang="en-US" sz="1400" spc="90" kern="0" dirty="0">
+              <a:rPr lang="en-US" sz="1400" b="1" spc="100" kern="0" dirty="0">
+                <a:solidFill>
+                  <a:srgbClr val="0B2C4A"/>
+                </a:solidFill>
+                <a:latin typeface="Inter" pitchFamily="34" charset="0"/>
+                <a:ea typeface="Inter" pitchFamily="34" charset="-122"/>
+                <a:cs typeface="Inter" pitchFamily="34" charset="-120"/>
+              </a:rPr>
+              <a:t>WARRANTY ELR</a:t>
+            </a:r>
+            <a:endParaRPr lang="en-US" sz="1400" dirty="0"/>
+          </a:p>
+        </p:txBody>
+      </p:sp>
+      <p:sp>
+        <p:nvSpPr>
+          <p:cNvPr id="7" name="Text 5"/>
+          <p:cNvSpPr txBox="1"/>
+          <p:nvPr/>
+        </p:nvSpPr>
+        <p:spPr>
+          <a:xfrm>
+            <a:off x="658368" y="1664208"/>
+            <a:ext cx="5184648" cy="457200"/>
+          </a:xfrm>
+          <a:prstGeom prst="rect">
+            <a:avLst/>
+          </a:prstGeom>
+          <a:noFill/>
+          <a:ln/>
+        </p:spPr>
+        <p:txBody>
+          <a:bodyPr wrap="square" lIns="0" tIns="0" rIns="0" bIns="0" rtlCol="0" anchor="ctr"/>
+          <a:lstStyle/>
+          <a:p>
+            <a:pPr indent="0" marL="0">
+              <a:buNone/>
+            </a:pPr>
+            <a:r>
+              <a:rPr lang="en-US" sz="1600" dirty="0">
                 <a:solidFill>
                   <a:srgbClr val="595959"/>
                 </a:solidFill>
@@ -6330,373 +6879,102 @@
                 <a:ea typeface="Inter" pitchFamily="34" charset="-122"/>
                 <a:cs typeface="Inter" pitchFamily="34" charset="-120"/>
               </a:rPr>
-              <a:t>2025 YTD</a:t>
+              <a:t>2025  </a:t>
+            </a:r>
+            <a:pPr indent="0" marL="0">
+              <a:buNone/>
+            </a:pPr>
+            <a:r>
+              <a:rPr lang="en-US" sz="2400" b="1" dirty="0">
+                <a:solidFill>
+                  <a:srgbClr val="595959"/>
+                </a:solidFill>
+                <a:latin typeface="Inter" pitchFamily="34" charset="0"/>
+                <a:ea typeface="Inter" pitchFamily="34" charset="-122"/>
+                <a:cs typeface="Inter" pitchFamily="34" charset="-120"/>
+              </a:rPr>
+              <a:t>$180     </a:t>
+            </a:r>
+            <a:pPr indent="0" marL="0">
+              <a:buNone/>
+            </a:pPr>
+            <a:r>
+              <a:rPr lang="en-US" sz="1600" dirty="0">
+                <a:solidFill>
+                  <a:srgbClr val="595959"/>
+                </a:solidFill>
+                <a:latin typeface="Inter" pitchFamily="34" charset="0"/>
+                <a:ea typeface="Inter" pitchFamily="34" charset="-122"/>
+                <a:cs typeface="Inter" pitchFamily="34" charset="-120"/>
+              </a:rPr>
+              <a:t>2026  </a:t>
+            </a:r>
+            <a:pPr indent="0" marL="0">
+              <a:buNone/>
+            </a:pPr>
+            <a:r>
+              <a:rPr lang="en-US" sz="2400" b="1" dirty="0">
+                <a:solidFill>
+                  <a:srgbClr val="0B7A4A"/>
+                </a:solidFill>
+                <a:latin typeface="Inter" pitchFamily="34" charset="0"/>
+                <a:ea typeface="Inter" pitchFamily="34" charset="-122"/>
+                <a:cs typeface="Inter" pitchFamily="34" charset="-120"/>
+              </a:rPr>
+              <a:t>$197</a:t>
+            </a:r>
+            <a:endParaRPr lang="en-US" sz="1600" dirty="0"/>
+          </a:p>
+        </p:txBody>
+      </p:sp>
+      <p:sp>
+        <p:nvSpPr>
+          <p:cNvPr id="8" name="Text 6"/>
+          <p:cNvSpPr txBox="1"/>
+          <p:nvPr/>
+        </p:nvSpPr>
+        <p:spPr>
+          <a:xfrm>
+            <a:off x="658368" y="2121408"/>
+            <a:ext cx="5184648" cy="274320"/>
+          </a:xfrm>
+          <a:prstGeom prst="rect">
+            <a:avLst/>
+          </a:prstGeom>
+          <a:noFill/>
+          <a:ln/>
+        </p:spPr>
+        <p:txBody>
+          <a:bodyPr wrap="square" lIns="0" tIns="0" rIns="0" bIns="0" rtlCol="0" anchor="ctr"/>
+          <a:lstStyle/>
+          <a:p>
+            <a:pPr indent="0" marL="0">
+              <a:buNone/>
+            </a:pPr>
+            <a:r>
+              <a:rPr lang="en-US" sz="1400" dirty="0">
+                <a:solidFill>
+                  <a:srgbClr val="595959"/>
+                </a:solidFill>
+                <a:latin typeface="Inter" pitchFamily="34" charset="0"/>
+                <a:ea typeface="Inter" pitchFamily="34" charset="-122"/>
+                <a:cs typeface="Inter" pitchFamily="34" charset="-120"/>
+              </a:rPr>
+              <a:t>Jan–Sep year to date · ahead of 2025 in all nine months</a:t>
             </a:r>
             <a:endParaRPr lang="en-US" sz="1400" dirty="0"/>
           </a:p>
         </p:txBody>
-      </p:sp>
-      <p:sp>
-        <p:nvSpPr>
-          <p:cNvPr id="7" name="Text 5"/>
-          <p:cNvSpPr txBox="1"/>
-          <p:nvPr/>
-        </p:nvSpPr>
-        <p:spPr>
-          <a:xfrm>
-            <a:off x="685800" y="1554480"/>
-            <a:ext cx="2697480" cy="548640"/>
-          </a:xfrm>
-          <a:prstGeom prst="rect">
-            <a:avLst/>
-          </a:prstGeom>
-          <a:noFill/>
-          <a:ln/>
-        </p:spPr>
-        <p:txBody>
-          <a:bodyPr wrap="square" lIns="0" tIns="0" rIns="0" bIns="0" rtlCol="0" anchor="ctr"/>
-          <a:lstStyle/>
-          <a:p>
-            <a:pPr indent="0" marL="0">
-              <a:buNone/>
-            </a:pPr>
-            <a:r>
-              <a:rPr lang="en-US" sz="3000" b="1" dirty="0">
-                <a:solidFill>
-                  <a:srgbClr val="1A1A1A"/>
-                </a:solidFill>
-                <a:latin typeface="Inter" pitchFamily="34" charset="0"/>
-                <a:ea typeface="Inter" pitchFamily="34" charset="-122"/>
-                <a:cs typeface="Inter" pitchFamily="34" charset="-120"/>
-              </a:rPr>
-              <a:t>42.6%</a:t>
-            </a:r>
-            <a:endParaRPr lang="en-US" sz="3000" dirty="0"/>
-          </a:p>
-        </p:txBody>
-      </p:sp>
-      <p:sp>
-        <p:nvSpPr>
-          <p:cNvPr id="8" name="Text 6"/>
-          <p:cNvSpPr txBox="1"/>
-          <p:nvPr/>
-        </p:nvSpPr>
-        <p:spPr>
-          <a:xfrm>
-            <a:off x="3474720" y="1335024"/>
-            <a:ext cx="2651760" cy="237744"/>
-          </a:xfrm>
-          <a:prstGeom prst="rect">
-            <a:avLst/>
-          </a:prstGeom>
-          <a:noFill/>
-          <a:ln/>
-        </p:spPr>
-        <p:txBody>
-          <a:bodyPr wrap="square" lIns="0" tIns="0" rIns="0" bIns="0" rtlCol="0" anchor="ctr"/>
-          <a:lstStyle/>
-          <a:p>
-            <a:pPr indent="0" marL="0">
-              <a:buNone/>
-            </a:pPr>
-            <a:r>
-              <a:rPr lang="en-US" sz="1400" spc="90" kern="0" dirty="0">
-                <a:solidFill>
-                  <a:srgbClr val="595959"/>
-                </a:solidFill>
-                <a:latin typeface="Inter" pitchFamily="34" charset="0"/>
-                <a:ea typeface="Inter" pitchFamily="34" charset="-122"/>
-                <a:cs typeface="Inter" pitchFamily="34" charset="-120"/>
-              </a:rPr>
-              <a:t>2026 YTD</a:t>
-            </a:r>
-            <a:endParaRPr lang="en-US" sz="1400" dirty="0"/>
-          </a:p>
-        </p:txBody>
-      </p:sp>
-      <p:sp>
-        <p:nvSpPr>
-          <p:cNvPr id="9" name="Text 7"/>
-          <p:cNvSpPr txBox="1"/>
-          <p:nvPr/>
-        </p:nvSpPr>
-        <p:spPr>
-          <a:xfrm>
-            <a:off x="3474720" y="1554480"/>
-            <a:ext cx="2697480" cy="548640"/>
-          </a:xfrm>
-          <a:prstGeom prst="rect">
-            <a:avLst/>
-          </a:prstGeom>
-          <a:noFill/>
-          <a:ln/>
-        </p:spPr>
-        <p:txBody>
-          <a:bodyPr wrap="square" lIns="0" tIns="0" rIns="0" bIns="0" rtlCol="0" anchor="ctr"/>
-          <a:lstStyle/>
-          <a:p>
-            <a:pPr indent="0" marL="0">
-              <a:buNone/>
-            </a:pPr>
-            <a:r>
-              <a:rPr lang="en-US" sz="3000" b="1" dirty="0">
-                <a:solidFill>
-                  <a:srgbClr val="1A1A1A"/>
-                </a:solidFill>
-                <a:latin typeface="Inter" pitchFamily="34" charset="0"/>
-                <a:ea typeface="Inter" pitchFamily="34" charset="-122"/>
-                <a:cs typeface="Inter" pitchFamily="34" charset="-120"/>
-              </a:rPr>
-              <a:t>44.7%</a:t>
-            </a:r>
-            <a:endParaRPr lang="en-US" sz="3000" dirty="0"/>
-          </a:p>
-        </p:txBody>
-      </p:sp>
-      <p:sp>
-        <p:nvSpPr>
-          <p:cNvPr id="10" name="Text 8"/>
-          <p:cNvSpPr txBox="1"/>
-          <p:nvPr/>
-        </p:nvSpPr>
-        <p:spPr>
-          <a:xfrm>
-            <a:off x="6263640" y="1335024"/>
-            <a:ext cx="2651760" cy="237744"/>
-          </a:xfrm>
-          <a:prstGeom prst="rect">
-            <a:avLst/>
-          </a:prstGeom>
-          <a:noFill/>
-          <a:ln/>
-        </p:spPr>
-        <p:txBody>
-          <a:bodyPr wrap="square" lIns="0" tIns="0" rIns="0" bIns="0" rtlCol="0" anchor="ctr"/>
-          <a:lstStyle/>
-          <a:p>
-            <a:pPr indent="0" marL="0">
-              <a:buNone/>
-            </a:pPr>
-            <a:r>
-              <a:rPr lang="en-US" sz="1400" spc="90" kern="0" dirty="0">
-                <a:solidFill>
-                  <a:srgbClr val="595959"/>
-                </a:solidFill>
-                <a:latin typeface="Inter" pitchFamily="34" charset="0"/>
-                <a:ea typeface="Inter" pitchFamily="34" charset="-122"/>
-                <a:cs typeface="Inter" pitchFamily="34" charset="-120"/>
-              </a:rPr>
-              <a:t>VARIANCE</a:t>
-            </a:r>
-            <a:endParaRPr lang="en-US" sz="1400" dirty="0"/>
-          </a:p>
-        </p:txBody>
-      </p:sp>
-      <p:sp>
-        <p:nvSpPr>
-          <p:cNvPr id="11" name="Text 9"/>
-          <p:cNvSpPr txBox="1"/>
-          <p:nvPr/>
-        </p:nvSpPr>
-        <p:spPr>
-          <a:xfrm>
-            <a:off x="6263640" y="1554480"/>
-            <a:ext cx="2697480" cy="548640"/>
-          </a:xfrm>
-          <a:prstGeom prst="rect">
-            <a:avLst/>
-          </a:prstGeom>
-          <a:noFill/>
-          <a:ln/>
-        </p:spPr>
-        <p:txBody>
-          <a:bodyPr wrap="square" lIns="0" tIns="0" rIns="0" bIns="0" rtlCol="0" anchor="ctr"/>
-          <a:lstStyle/>
-          <a:p>
-            <a:pPr indent="0" marL="0">
-              <a:buNone/>
-            </a:pPr>
-            <a:r>
-              <a:rPr lang="en-US" sz="3000" b="1" dirty="0">
-                <a:solidFill>
-                  <a:srgbClr val="0B7A4A"/>
-                </a:solidFill>
-                <a:latin typeface="Inter" pitchFamily="34" charset="0"/>
-                <a:ea typeface="Inter" pitchFamily="34" charset="-122"/>
-                <a:cs typeface="Inter" pitchFamily="34" charset="-120"/>
-              </a:rPr>
-              <a:t>+2.1 pts</a:t>
-            </a:r>
-            <a:endParaRPr lang="en-US" sz="3000" dirty="0"/>
-          </a:p>
-        </p:txBody>
-      </p:sp>
-      <p:sp>
-        <p:nvSpPr>
-          <p:cNvPr id="12" name="Text 10"/>
-          <p:cNvSpPr txBox="1"/>
-          <p:nvPr/>
-        </p:nvSpPr>
-        <p:spPr>
-          <a:xfrm>
-            <a:off x="9052560" y="1335024"/>
-            <a:ext cx="2651760" cy="237744"/>
-          </a:xfrm>
-          <a:prstGeom prst="rect">
-            <a:avLst/>
-          </a:prstGeom>
-          <a:noFill/>
-          <a:ln/>
-        </p:spPr>
-        <p:txBody>
-          <a:bodyPr wrap="square" lIns="0" tIns="0" rIns="0" bIns="0" rtlCol="0" anchor="ctr"/>
-          <a:lstStyle/>
-          <a:p>
-            <a:pPr indent="0" marL="0">
-              <a:buNone/>
-            </a:pPr>
-            <a:r>
-              <a:rPr lang="en-US" sz="1400" spc="90" kern="0" dirty="0">
-                <a:solidFill>
-                  <a:srgbClr val="595959"/>
-                </a:solidFill>
-                <a:latin typeface="Inter" pitchFamily="34" charset="0"/>
-                <a:ea typeface="Inter" pitchFamily="34" charset="-122"/>
-                <a:cs typeface="Inter" pitchFamily="34" charset="-120"/>
-              </a:rPr>
-              <a:t>VAR %</a:t>
-            </a:r>
-            <a:endParaRPr lang="en-US" sz="1400" dirty="0"/>
-          </a:p>
-        </p:txBody>
-      </p:sp>
-      <p:sp>
-        <p:nvSpPr>
-          <p:cNvPr id="13" name="Text 11"/>
-          <p:cNvSpPr txBox="1"/>
-          <p:nvPr/>
-        </p:nvSpPr>
-        <p:spPr>
-          <a:xfrm>
-            <a:off x="9052560" y="1554480"/>
-            <a:ext cx="2697480" cy="548640"/>
-          </a:xfrm>
-          <a:prstGeom prst="rect">
-            <a:avLst/>
-          </a:prstGeom>
-          <a:noFill/>
-          <a:ln/>
-        </p:spPr>
-        <p:txBody>
-          <a:bodyPr wrap="square" lIns="0" tIns="0" rIns="0" bIns="0" rtlCol="0" anchor="ctr"/>
-          <a:lstStyle/>
-          <a:p>
-            <a:pPr indent="0" marL="0">
-              <a:buNone/>
-            </a:pPr>
-            <a:r>
-              <a:rPr lang="en-US" sz="3000" b="1" dirty="0">
-                <a:solidFill>
-                  <a:srgbClr val="0B7A4A"/>
-                </a:solidFill>
-                <a:latin typeface="Inter" pitchFamily="34" charset="0"/>
-                <a:ea typeface="Inter" pitchFamily="34" charset="-122"/>
-                <a:cs typeface="Inter" pitchFamily="34" charset="-120"/>
-              </a:rPr>
-              <a:t>+5.0%</a:t>
-            </a:r>
-            <a:endParaRPr lang="en-US" sz="3000" dirty="0"/>
-          </a:p>
-        </p:txBody>
-      </p:sp>
-      <p:sp>
-        <p:nvSpPr>
-          <p:cNvPr id="14" name="Shape 12"/>
-          <p:cNvSpPr/>
-          <p:nvPr/>
-        </p:nvSpPr>
-        <p:spPr>
-          <a:xfrm>
-            <a:off x="457200" y="2322576"/>
-            <a:ext cx="11274552" cy="3666744"/>
-          </a:xfrm>
-          <a:prstGeom prst="rect">
-            <a:avLst/>
-          </a:prstGeom>
-          <a:solidFill>
-            <a:srgbClr val="FFFFFF"/>
-          </a:solidFill>
-          <a:ln/>
-        </p:spPr>
-      </p:sp>
-      <p:sp>
-        <p:nvSpPr>
-          <p:cNvPr id="15" name="Text 13"/>
-          <p:cNvSpPr txBox="1"/>
-          <p:nvPr/>
-        </p:nvSpPr>
-        <p:spPr>
-          <a:xfrm>
-            <a:off x="685800" y="2459736"/>
-            <a:ext cx="10817352" cy="292608"/>
-          </a:xfrm>
-          <a:prstGeom prst="rect">
-            <a:avLst/>
-          </a:prstGeom>
-          <a:noFill/>
-          <a:ln/>
-        </p:spPr>
-        <p:txBody>
-          <a:bodyPr wrap="square" lIns="0" tIns="0" rIns="0" bIns="0" rtlCol="0" anchor="ctr"/>
-          <a:lstStyle/>
-          <a:p>
-            <a:pPr indent="0" marL="0">
-              <a:buNone/>
-            </a:pPr>
-            <a:r>
-              <a:rPr lang="en-US" sz="1500" dirty="0">
-                <a:solidFill>
-                  <a:srgbClr val="1A1A1A"/>
-                </a:solidFill>
-                <a:latin typeface="Inter" pitchFamily="34" charset="0"/>
-                <a:ea typeface="Inter" pitchFamily="34" charset="-122"/>
-                <a:cs typeface="Inter" pitchFamily="34" charset="-120"/>
-              </a:rPr>
-              <a:t>Warranty parts gross profit % by month, 2025 against 2026</a:t>
-            </a:r>
-            <a:endParaRPr lang="en-US" sz="1500" dirty="0"/>
-          </a:p>
-        </p:txBody>
-      </p:sp>
-      <p:sp>
-        <p:nvSpPr>
-          <p:cNvPr id="16" name="Shape 14"/>
-          <p:cNvSpPr/>
-          <p:nvPr/>
-        </p:nvSpPr>
-        <p:spPr>
-          <a:xfrm>
-            <a:off x="685800" y="2807208"/>
-            <a:ext cx="10817352" cy="10973"/>
-          </a:xfrm>
-          <a:prstGeom prst="rect">
-            <a:avLst/>
-          </a:prstGeom>
-          <a:solidFill>
-            <a:srgbClr val="1A1A1A"/>
-          </a:solidFill>
-          <a:ln/>
-        </p:spPr>
       </p:sp>
       <p:graphicFrame>
         <p:nvGraphicFramePr>
-          <p:cNvPr id="17" name="Chart 0" descr=""/>
+          <p:cNvPr id="9" name="Chart 0" descr=""/>
           <p:cNvGraphicFramePr/>
           <p:nvPr/>
         </p:nvGraphicFramePr>
         <p:xfrm>
-          <a:off x="621792" y="3218688"/>
-          <a:ext cx="10945368" cy="2679192"/>
+          <a:off x="548640" y="2441448"/>
+          <a:ext cx="5404104" cy="3456432"/>
         </p:xfrm>
         <a:graphic xmlns:a="http://schemas.openxmlformats.org/drawingml/2006/main">
           <a:graphicData uri="http://schemas.openxmlformats.org/drawingml/2006/chart">
@@ -6704,15 +6982,194 @@
           </a:graphicData>
         </a:graphic>
       </p:graphicFrame>
+      <p:sp>
+        <p:nvSpPr>
+          <p:cNvPr id="10" name="Shape 7"/>
+          <p:cNvSpPr/>
+          <p:nvPr/>
+        </p:nvSpPr>
+        <p:spPr>
+          <a:xfrm>
+            <a:off x="6144768" y="1207008"/>
+            <a:ext cx="5586984" cy="4782312"/>
+          </a:xfrm>
+          <a:prstGeom prst="rect">
+            <a:avLst/>
+          </a:prstGeom>
+          <a:solidFill>
+            <a:srgbClr val="FFFFFF"/>
+          </a:solidFill>
+          <a:ln/>
+        </p:spPr>
+      </p:sp>
+      <p:sp>
+        <p:nvSpPr>
+          <p:cNvPr id="11" name="Text 8"/>
+          <p:cNvSpPr txBox="1"/>
+          <p:nvPr/>
+        </p:nvSpPr>
+        <p:spPr>
+          <a:xfrm>
+            <a:off x="6345936" y="1335024"/>
+            <a:ext cx="5184648" cy="292608"/>
+          </a:xfrm>
+          <a:prstGeom prst="rect">
+            <a:avLst/>
+          </a:prstGeom>
+          <a:noFill/>
+          <a:ln/>
+        </p:spPr>
+        <p:txBody>
+          <a:bodyPr wrap="square" lIns="0" tIns="0" rIns="0" bIns="0" rtlCol="0" anchor="ctr"/>
+          <a:lstStyle/>
+          <a:p>
+            <a:pPr indent="0" marL="0">
+              <a:buNone/>
+            </a:pPr>
+            <a:r>
+              <a:rPr lang="en-US" sz="1400" b="1" spc="100" kern="0" dirty="0">
+                <a:solidFill>
+                  <a:srgbClr val="0B2C4A"/>
+                </a:solidFill>
+                <a:latin typeface="Inter" pitchFamily="34" charset="0"/>
+                <a:ea typeface="Inter" pitchFamily="34" charset="-122"/>
+                <a:cs typeface="Inter" pitchFamily="34" charset="-120"/>
+              </a:rPr>
+              <a:t>WARRANTY PARTS GROSS PROFIT %</a:t>
+            </a:r>
+            <a:endParaRPr lang="en-US" sz="1400" dirty="0"/>
+          </a:p>
+        </p:txBody>
+      </p:sp>
+      <p:sp>
+        <p:nvSpPr>
+          <p:cNvPr id="12" name="Text 9"/>
+          <p:cNvSpPr txBox="1"/>
+          <p:nvPr/>
+        </p:nvSpPr>
+        <p:spPr>
+          <a:xfrm>
+            <a:off x="6345936" y="1664208"/>
+            <a:ext cx="5184648" cy="457200"/>
+          </a:xfrm>
+          <a:prstGeom prst="rect">
+            <a:avLst/>
+          </a:prstGeom>
+          <a:noFill/>
+          <a:ln/>
+        </p:spPr>
+        <p:txBody>
+          <a:bodyPr wrap="square" lIns="0" tIns="0" rIns="0" bIns="0" rtlCol="0" anchor="ctr"/>
+          <a:lstStyle/>
+          <a:p>
+            <a:pPr indent="0" marL="0">
+              <a:buNone/>
+            </a:pPr>
+            <a:r>
+              <a:rPr lang="en-US" sz="1600" dirty="0">
+                <a:solidFill>
+                  <a:srgbClr val="595959"/>
+                </a:solidFill>
+                <a:latin typeface="Inter" pitchFamily="34" charset="0"/>
+                <a:ea typeface="Inter" pitchFamily="34" charset="-122"/>
+                <a:cs typeface="Inter" pitchFamily="34" charset="-120"/>
+              </a:rPr>
+              <a:t>2025  </a:t>
+            </a:r>
+            <a:pPr indent="0" marL="0">
+              <a:buNone/>
+            </a:pPr>
+            <a:r>
+              <a:rPr lang="en-US" sz="2400" b="1" dirty="0">
+                <a:solidFill>
+                  <a:srgbClr val="595959"/>
+                </a:solidFill>
+                <a:latin typeface="Inter" pitchFamily="34" charset="0"/>
+                <a:ea typeface="Inter" pitchFamily="34" charset="-122"/>
+                <a:cs typeface="Inter" pitchFamily="34" charset="-120"/>
+              </a:rPr>
+              <a:t>42.6%     </a:t>
+            </a:r>
+            <a:pPr indent="0" marL="0">
+              <a:buNone/>
+            </a:pPr>
+            <a:r>
+              <a:rPr lang="en-US" sz="1600" dirty="0">
+                <a:solidFill>
+                  <a:srgbClr val="595959"/>
+                </a:solidFill>
+                <a:latin typeface="Inter" pitchFamily="34" charset="0"/>
+                <a:ea typeface="Inter" pitchFamily="34" charset="-122"/>
+                <a:cs typeface="Inter" pitchFamily="34" charset="-120"/>
+              </a:rPr>
+              <a:t>2026  </a:t>
+            </a:r>
+            <a:pPr indent="0" marL="0">
+              <a:buNone/>
+            </a:pPr>
+            <a:r>
+              <a:rPr lang="en-US" sz="2400" b="1" dirty="0">
+                <a:solidFill>
+                  <a:srgbClr val="0B7A4A"/>
+                </a:solidFill>
+                <a:latin typeface="Inter" pitchFamily="34" charset="0"/>
+                <a:ea typeface="Inter" pitchFamily="34" charset="-122"/>
+                <a:cs typeface="Inter" pitchFamily="34" charset="-120"/>
+              </a:rPr>
+              <a:t>44.7%</a:t>
+            </a:r>
+            <a:endParaRPr lang="en-US" sz="1600" dirty="0"/>
+          </a:p>
+        </p:txBody>
+      </p:sp>
+      <p:sp>
+        <p:nvSpPr>
+          <p:cNvPr id="13" name="Text 10"/>
+          <p:cNvSpPr txBox="1"/>
+          <p:nvPr/>
+        </p:nvSpPr>
+        <p:spPr>
+          <a:xfrm>
+            <a:off x="6345936" y="2121408"/>
+            <a:ext cx="5184648" cy="274320"/>
+          </a:xfrm>
+          <a:prstGeom prst="rect">
+            <a:avLst/>
+          </a:prstGeom>
+          <a:noFill/>
+          <a:ln/>
+        </p:spPr>
+        <p:txBody>
+          <a:bodyPr wrap="square" lIns="0" tIns="0" rIns="0" bIns="0" rtlCol="0" anchor="ctr"/>
+          <a:lstStyle/>
+          <a:p>
+            <a:pPr indent="0" marL="0">
+              <a:buNone/>
+            </a:pPr>
+            <a:r>
+              <a:rPr lang="en-US" sz="1400" dirty="0">
+                <a:solidFill>
+                  <a:srgbClr val="595959"/>
+                </a:solidFill>
+                <a:latin typeface="Inter" pitchFamily="34" charset="0"/>
+                <a:ea typeface="Inter" pitchFamily="34" charset="-122"/>
+                <a:cs typeface="Inter" pitchFamily="34" charset="-120"/>
+              </a:rPr>
+              <a:t>Jan–Sep year to date · ahead of 2025 in all nine months</a:t>
+            </a:r>
+            <a:endParaRPr lang="en-US" sz="1400" dirty="0"/>
+          </a:p>
+        </p:txBody>
+      </p:sp>
       <p:graphicFrame>
         <p:nvGraphicFramePr>
-          <p:cNvPr id="18" name="Chart 1" descr=""/>
+          <p:cNvPr id="14" name="Chart 1" descr=""/>
           <p:cNvGraphicFramePr/>
           <p:nvPr/>
         </p:nvGraphicFramePr>
         <p:xfrm>
-          <a:off x="621792" y="3218688"/>
-          <a:ext cx="10945368" cy="2679192"/>
+          <a:off x="6236208" y="2441448"/>
+          <a:ext cx="5404104" cy="3456432"/>
         </p:xfrm>
         <a:graphic xmlns:a="http://schemas.openxmlformats.org/drawingml/2006/main">
           <a:graphicData uri="http://schemas.openxmlformats.org/drawingml/2006/chart">
@@ -6720,88 +7177,36 @@
           </a:graphicData>
         </a:graphic>
       </p:graphicFrame>
-      <p:graphicFrame>
-        <p:nvGraphicFramePr>
-          <p:cNvPr id="19" name="Chart 2" descr=""/>
-          <p:cNvGraphicFramePr/>
-          <p:nvPr/>
-        </p:nvGraphicFramePr>
-        <p:xfrm>
-          <a:off x="621792" y="3218688"/>
-          <a:ext cx="10945368" cy="2679192"/>
-        </p:xfrm>
-        <a:graphic xmlns:a="http://schemas.openxmlformats.org/drawingml/2006/main">
-          <a:graphicData uri="http://schemas.openxmlformats.org/drawingml/2006/chart">
-            <c:chart xmlns:c="http://schemas.openxmlformats.org/drawingml/2006/chart" r:id="rId3"/>
-          </a:graphicData>
-        </a:graphic>
-      </p:graphicFrame>
-      <p:graphicFrame>
-        <p:nvGraphicFramePr>
-          <p:cNvPr id="20" name="Chart 3" descr=""/>
-          <p:cNvGraphicFramePr/>
-          <p:nvPr/>
-        </p:nvGraphicFramePr>
-        <p:xfrm>
-          <a:off x="621792" y="3218688"/>
-          <a:ext cx="10945368" cy="2679192"/>
-        </p:xfrm>
-        <a:graphic xmlns:a="http://schemas.openxmlformats.org/drawingml/2006/main">
-          <a:graphicData uri="http://schemas.openxmlformats.org/drawingml/2006/chart">
-            <c:chart xmlns:c="http://schemas.openxmlformats.org/drawingml/2006/chart" r:id="rId4"/>
-          </a:graphicData>
-        </a:graphic>
-      </p:graphicFrame>
-      <p:sp>
-        <p:nvSpPr>
-          <p:cNvPr id="21" name="Shape 15"/>
+      <p:sp>
+        <p:nvSpPr>
+          <p:cNvPr id="15" name="Shape 11"/>
           <p:cNvSpPr/>
           <p:nvPr/>
         </p:nvSpPr>
         <p:spPr>
           <a:xfrm>
-            <a:off x="4951476" y="3049524"/>
-            <a:ext cx="310896" cy="45720"/>
+            <a:off x="457200" y="6126480"/>
+            <a:ext cx="11274552" cy="615696"/>
           </a:xfrm>
           <a:prstGeom prst="rect">
             <a:avLst/>
           </a:prstGeom>
           <a:solidFill>
-            <a:srgbClr val="9AA3AD"/>
+            <a:srgbClr val="EDF4FA"/>
           </a:solidFill>
           <a:ln/>
         </p:spPr>
       </p:sp>
       <p:sp>
         <p:nvSpPr>
-          <p:cNvPr id="22" name="Shape 16"/>
-          <p:cNvSpPr/>
-          <p:nvPr/>
-        </p:nvSpPr>
-        <p:spPr>
-          <a:xfrm>
-            <a:off x="5052060" y="3017520"/>
-            <a:ext cx="109728" cy="109728"/>
-          </a:xfrm>
-          <a:prstGeom prst="ellipse">
-            <a:avLst/>
-          </a:prstGeom>
-          <a:solidFill>
-            <a:srgbClr val="9AA3AD"/>
-          </a:solidFill>
-          <a:ln/>
-        </p:spPr>
-      </p:sp>
-      <p:sp>
-        <p:nvSpPr>
-          <p:cNvPr id="23" name="Text 17"/>
-          <p:cNvSpPr txBox="1"/>
-          <p:nvPr/>
-        </p:nvSpPr>
-        <p:spPr>
-          <a:xfrm>
-            <a:off x="5335524" y="2926080"/>
-            <a:ext cx="777240" cy="292608"/>
+          <p:cNvPr id="16" name="Text 12"/>
+          <p:cNvSpPr txBox="1"/>
+          <p:nvPr/>
+        </p:nvSpPr>
+        <p:spPr>
+          <a:xfrm>
+            <a:off x="658368" y="6144768"/>
+            <a:ext cx="10927080" cy="579120"/>
           </a:xfrm>
           <a:prstGeom prst="rect">
             <a:avLst/>
@@ -6817,155 +7222,17 @@
               <a:buNone/>
             </a:pPr>
             <a:r>
-              <a:rPr lang="en-US" sz="1400" dirty="0">
-                <a:solidFill>
-                  <a:srgbClr val="1A1A1A"/>
-                </a:solidFill>
-                <a:latin typeface="Inter" pitchFamily="34" charset="0"/>
-                <a:ea typeface="Inter" pitchFamily="34" charset="-122"/>
-                <a:cs typeface="Inter" pitchFamily="34" charset="-120"/>
-              </a:rPr>
-              <a:t>2025</a:t>
-            </a:r>
-            <a:endParaRPr lang="en-US" sz="1400" dirty="0"/>
-          </a:p>
-        </p:txBody>
-      </p:sp>
-      <p:sp>
-        <p:nvSpPr>
-          <p:cNvPr id="24" name="Shape 18"/>
-          <p:cNvSpPr/>
-          <p:nvPr/>
-        </p:nvSpPr>
-        <p:spPr>
-          <a:xfrm>
-            <a:off x="6185916" y="3049524"/>
-            <a:ext cx="310896" cy="45720"/>
-          </a:xfrm>
-          <a:prstGeom prst="rect">
-            <a:avLst/>
-          </a:prstGeom>
-          <a:solidFill>
-            <a:srgbClr val="2587C5"/>
-          </a:solidFill>
-          <a:ln/>
-        </p:spPr>
-      </p:sp>
-      <p:sp>
-        <p:nvSpPr>
-          <p:cNvPr id="25" name="Shape 19"/>
-          <p:cNvSpPr/>
-          <p:nvPr/>
-        </p:nvSpPr>
-        <p:spPr>
-          <a:xfrm>
-            <a:off x="6286500" y="3017520"/>
-            <a:ext cx="109728" cy="109728"/>
-          </a:xfrm>
-          <a:prstGeom prst="ellipse">
-            <a:avLst/>
-          </a:prstGeom>
-          <a:solidFill>
-            <a:srgbClr val="2587C5"/>
-          </a:solidFill>
-          <a:ln/>
-        </p:spPr>
-      </p:sp>
-      <p:sp>
-        <p:nvSpPr>
-          <p:cNvPr id="26" name="Text 20"/>
-          <p:cNvSpPr txBox="1"/>
-          <p:nvPr/>
-        </p:nvSpPr>
-        <p:spPr>
-          <a:xfrm>
-            <a:off x="6569964" y="2926080"/>
-            <a:ext cx="777240" cy="292608"/>
-          </a:xfrm>
-          <a:prstGeom prst="rect">
-            <a:avLst/>
-          </a:prstGeom>
-          <a:noFill/>
-          <a:ln/>
-        </p:spPr>
-        <p:txBody>
-          <a:bodyPr wrap="square" lIns="0" tIns="0" rIns="0" bIns="0" rtlCol="0" anchor="ctr"/>
-          <a:lstStyle/>
-          <a:p>
-            <a:pPr indent="0" marL="0">
-              <a:buNone/>
-            </a:pPr>
-            <a:r>
-              <a:rPr lang="en-US" sz="1400" dirty="0">
-                <a:solidFill>
-                  <a:srgbClr val="1A1A1A"/>
-                </a:solidFill>
-                <a:latin typeface="Inter" pitchFamily="34" charset="0"/>
-                <a:ea typeface="Inter" pitchFamily="34" charset="-122"/>
-                <a:cs typeface="Inter" pitchFamily="34" charset="-120"/>
-              </a:rPr>
-              <a:t>2026</a:t>
-            </a:r>
-            <a:endParaRPr lang="en-US" sz="1400" dirty="0"/>
-          </a:p>
-        </p:txBody>
-      </p:sp>
-      <p:sp>
-        <p:nvSpPr>
-          <p:cNvPr id="27" name="Shape 21"/>
-          <p:cNvSpPr/>
-          <p:nvPr/>
-        </p:nvSpPr>
-        <p:spPr>
-          <a:xfrm>
-            <a:off x="457200" y="6126480"/>
-            <a:ext cx="11274552" cy="356616"/>
-          </a:xfrm>
-          <a:prstGeom prst="rect">
-            <a:avLst/>
-          </a:prstGeom>
-          <a:solidFill>
-            <a:srgbClr val="E6F6EE"/>
-          </a:solidFill>
-          <a:ln/>
-        </p:spPr>
-      </p:sp>
-      <p:sp>
-        <p:nvSpPr>
-          <p:cNvPr id="28" name="Text 22"/>
-          <p:cNvSpPr txBox="1"/>
-          <p:nvPr/>
-        </p:nvSpPr>
-        <p:spPr>
-          <a:xfrm>
-            <a:off x="658368" y="6144768"/>
-            <a:ext cx="10927080" cy="320040"/>
-          </a:xfrm>
-          <a:prstGeom prst="rect">
-            <a:avLst/>
-          </a:prstGeom>
-          <a:noFill/>
-          <a:ln/>
-        </p:spPr>
-        <p:txBody>
-          <a:bodyPr wrap="square" lIns="0" tIns="0" rIns="0" bIns="0" rtlCol="0" anchor="ctr"/>
-          <a:lstStyle/>
-          <a:p>
-            <a:pPr indent="0" marL="0">
-              <a:buNone/>
-            </a:pPr>
-            <a:r>
-              <a:rPr lang="en-US" sz="1500" b="1" dirty="0">
-                <a:solidFill>
-                  <a:srgbClr val="0B7A4A"/>
-                </a:solidFill>
-                <a:latin typeface="Inter" pitchFamily="34" charset="0"/>
-                <a:ea typeface="Inter" pitchFamily="34" charset="-122"/>
-                <a:cs typeface="Inter" pitchFamily="34" charset="-120"/>
-              </a:rPr>
-              <a:t>Up 2.1 pts to 44.7%, ahead of 2025 in all nine months: approved parts markup increases show up as margin.</a:t>
-            </a:r>
-            <a:endParaRPr lang="en-US" sz="1500" dirty="0"/>
+              <a:rPr lang="en-US" sz="1600" b="1" dirty="0">
+                <a:solidFill>
+                  <a:srgbClr val="0B2C4A"/>
+                </a:solidFill>
+                <a:latin typeface="Inter" pitchFamily="34" charset="0"/>
+                <a:ea typeface="Inter" pitchFamily="34" charset="-122"/>
+                <a:cs typeface="Inter" pitchFamily="34" charset="-120"/>
+              </a:rPr>
+              <a:t>Warranty ELR is up $17 to $197 and warranty parts margin up 2.1 pts to 44.7%. Higher rates draw more audits: every claim's documentation has to hold up.</a:t>
+            </a:r>
+            <a:endParaRPr lang="en-US" sz="1600" dirty="0"/>
           </a:p>
         </p:txBody>
       </p:sp>

--- a/day2-deck/decks/Warranty Audits - Draft.pptx
+++ b/day2-deck/decks/Warranty Audits - Draft.pptx
@@ -4385,7 +4385,7 @@
                 <a:ea typeface="Inter" pitchFamily="34" charset="-122"/>
                 <a:cs typeface="Inter" pitchFamily="34" charset="-120"/>
               </a:rPr>
-              <a:t>$3,788,200 in gross profit added by rate increases approved at 19 stores this year. Warranty ELR is up $17 and parts margin 2.1 pts: higher rates draw more audits, so every claim has to hold up.</a:t>
+              <a:t>$3,788,200 added by rate increases at 19 stores this year. Protect it: higher rates draw more audits, so document every claim to hold up.</a:t>
             </a:r>
             <a:endParaRPr lang="en-US" sz="1600" dirty="0"/>
           </a:p>

--- a/day2-deck/decks/Warranty Audits - Draft.pptx
+++ b/day2-deck/decks/Warranty Audits - Draft.pptx
@@ -4341,7 +4341,7 @@
         <p:spPr>
           <a:xfrm>
             <a:off x="457200" y="6126480"/>
-            <a:ext cx="11274552" cy="615696"/>
+            <a:ext cx="11274552" cy="371856"/>
           </a:xfrm>
           <a:prstGeom prst="rect">
             <a:avLst/>
@@ -4361,7 +4361,7 @@
         <p:spPr>
           <a:xfrm>
             <a:off x="658368" y="6144768"/>
-            <a:ext cx="10927080" cy="579120"/>
+            <a:ext cx="10927080" cy="335280"/>
           </a:xfrm>
           <a:prstGeom prst="rect">
             <a:avLst/>
@@ -4385,7 +4385,7 @@
                 <a:ea typeface="Inter" pitchFamily="34" charset="-122"/>
                 <a:cs typeface="Inter" pitchFamily="34" charset="-120"/>
               </a:rPr>
-              <a:t>$3,788,200 added by rate increases at 19 stores this year. Protect it: higher rates draw more audits, so document every claim to hold up.</a:t>
+              <a:t>Protect that money: higher rates draw more audits, so document every claim to hold up.</a:t>
             </a:r>
             <a:endParaRPr lang="en-US" sz="1600" dirty="0"/>
           </a:p>
